--- a/docs/plots/carbo/jx_carbo_linsubhr_egfrdisc_throm2.pptx
+++ b/docs/plots/carbo/jx_carbo_linsubhr_egfrdisc_throm2.pptx
@@ -3003,467 +3003,470 @@
           <p:spPr>
             <a:xfrm>
               <a:off x="1172049" y="2073503"/>
-              <a:ext cx="7090630" cy="3388449"/>
+              <a:ext cx="7090630" cy="3386481"/>
             </a:xfrm>
             <a:custGeom>
               <a:avLst/>
               <a:pathLst>
-                <a:path w="7090630" h="3388449">
+                <a:path w="7090630" h="3386481">
                   <a:moveTo>
-                    <a:pt x="3446908" y="0"/>
+                    <a:pt x="3432938" y="0"/>
                   </a:moveTo>
                   <a:lnTo>
-                    <a:pt x="3509503" y="209730"/>
-                  </a:lnTo>
-                  <a:lnTo>
-                    <a:pt x="3581126" y="433318"/>
-                  </a:lnTo>
-                  <a:lnTo>
-                    <a:pt x="3652748" y="641637"/>
-                  </a:lnTo>
-                  <a:lnTo>
-                    <a:pt x="3724371" y="835729"/>
-                  </a:lnTo>
-                  <a:lnTo>
-                    <a:pt x="3795993" y="1016566"/>
-                  </a:lnTo>
-                  <a:lnTo>
-                    <a:pt x="3867616" y="1185054"/>
-                  </a:lnTo>
-                  <a:lnTo>
-                    <a:pt x="3939238" y="1342036"/>
-                  </a:lnTo>
-                  <a:lnTo>
-                    <a:pt x="4010861" y="1488297"/>
-                  </a:lnTo>
-                  <a:lnTo>
-                    <a:pt x="4082483" y="1624569"/>
-                  </a:lnTo>
-                  <a:lnTo>
-                    <a:pt x="4154106" y="1751535"/>
-                  </a:lnTo>
-                  <a:lnTo>
-                    <a:pt x="4225729" y="1869831"/>
-                  </a:lnTo>
-                  <a:lnTo>
-                    <a:pt x="4297351" y="1980048"/>
-                  </a:lnTo>
-                  <a:lnTo>
-                    <a:pt x="4368974" y="2082738"/>
-                  </a:lnTo>
-                  <a:lnTo>
-                    <a:pt x="4440596" y="2178415"/>
-                  </a:lnTo>
-                  <a:lnTo>
-                    <a:pt x="4512219" y="2267558"/>
-                  </a:lnTo>
-                  <a:lnTo>
-                    <a:pt x="4583841" y="2350614"/>
-                  </a:lnTo>
-                  <a:lnTo>
-                    <a:pt x="4655464" y="2427997"/>
-                  </a:lnTo>
-                  <a:lnTo>
-                    <a:pt x="4727086" y="2500096"/>
-                  </a:lnTo>
-                  <a:lnTo>
-                    <a:pt x="4798709" y="2567271"/>
-                  </a:lnTo>
-                  <a:lnTo>
-                    <a:pt x="4870331" y="2629859"/>
-                  </a:lnTo>
-                  <a:lnTo>
-                    <a:pt x="4941954" y="2653297"/>
-                  </a:lnTo>
-                  <a:lnTo>
-                    <a:pt x="5013576" y="2651622"/>
-                  </a:lnTo>
-                  <a:lnTo>
-                    <a:pt x="5085199" y="2649944"/>
-                  </a:lnTo>
-                  <a:lnTo>
-                    <a:pt x="5156821" y="2648263"/>
-                  </a:lnTo>
-                  <a:lnTo>
-                    <a:pt x="5228444" y="2646578"/>
-                  </a:lnTo>
-                  <a:lnTo>
-                    <a:pt x="5300066" y="2644890"/>
-                  </a:lnTo>
-                  <a:lnTo>
-                    <a:pt x="5371689" y="2643199"/>
-                  </a:lnTo>
-                  <a:lnTo>
-                    <a:pt x="5443311" y="2641504"/>
-                  </a:lnTo>
-                  <a:lnTo>
-                    <a:pt x="5514934" y="2639806"/>
-                  </a:lnTo>
-                  <a:lnTo>
-                    <a:pt x="5586557" y="2638104"/>
-                  </a:lnTo>
-                  <a:lnTo>
-                    <a:pt x="5658179" y="2636399"/>
-                  </a:lnTo>
-                  <a:lnTo>
-                    <a:pt x="5729802" y="2634690"/>
-                  </a:lnTo>
-                  <a:lnTo>
-                    <a:pt x="5801424" y="2632978"/>
-                  </a:lnTo>
-                  <a:lnTo>
-                    <a:pt x="5873047" y="2631262"/>
-                  </a:lnTo>
-                  <a:lnTo>
-                    <a:pt x="5944669" y="2629544"/>
-                  </a:lnTo>
-                  <a:lnTo>
-                    <a:pt x="6016292" y="2627821"/>
-                  </a:lnTo>
-                  <a:lnTo>
-                    <a:pt x="6087914" y="2626095"/>
-                  </a:lnTo>
-                  <a:lnTo>
-                    <a:pt x="6159537" y="2624366"/>
-                  </a:lnTo>
-                  <a:lnTo>
-                    <a:pt x="6231159" y="2622633"/>
-                  </a:lnTo>
-                  <a:lnTo>
-                    <a:pt x="6302782" y="2620896"/>
-                  </a:lnTo>
-                  <a:lnTo>
-                    <a:pt x="6374404" y="2619157"/>
-                  </a:lnTo>
-                  <a:lnTo>
-                    <a:pt x="6446027" y="2617413"/>
-                  </a:lnTo>
-                  <a:lnTo>
-                    <a:pt x="6517649" y="2615666"/>
-                  </a:lnTo>
-                  <a:lnTo>
-                    <a:pt x="6589272" y="2613916"/>
-                  </a:lnTo>
-                  <a:lnTo>
-                    <a:pt x="6660894" y="2612162"/>
-                  </a:lnTo>
-                  <a:lnTo>
-                    <a:pt x="6732517" y="2610404"/>
-                  </a:lnTo>
-                  <a:lnTo>
-                    <a:pt x="6804139" y="2608643"/>
-                  </a:lnTo>
-                  <a:lnTo>
-                    <a:pt x="6875762" y="2606879"/>
-                  </a:lnTo>
-                  <a:lnTo>
-                    <a:pt x="6947385" y="2605111"/>
-                  </a:lnTo>
-                  <a:lnTo>
-                    <a:pt x="7019007" y="2603339"/>
-                  </a:lnTo>
-                  <a:lnTo>
-                    <a:pt x="7090630" y="2601564"/>
-                  </a:lnTo>
-                  <a:lnTo>
-                    <a:pt x="7090630" y="3388449"/>
-                  </a:lnTo>
-                  <a:lnTo>
-                    <a:pt x="7019007" y="3381464"/>
-                  </a:lnTo>
-                  <a:lnTo>
-                    <a:pt x="6947385" y="3373967"/>
-                  </a:lnTo>
-                  <a:lnTo>
-                    <a:pt x="6875762" y="3365921"/>
-                  </a:lnTo>
-                  <a:lnTo>
-                    <a:pt x="6804139" y="3357284"/>
-                  </a:lnTo>
-                  <a:lnTo>
-                    <a:pt x="6732517" y="3348015"/>
-                  </a:lnTo>
-                  <a:lnTo>
-                    <a:pt x="6660894" y="3338066"/>
-                  </a:lnTo>
-                  <a:lnTo>
-                    <a:pt x="6589272" y="3327388"/>
-                  </a:lnTo>
-                  <a:lnTo>
-                    <a:pt x="6517649" y="3315928"/>
-                  </a:lnTo>
-                  <a:lnTo>
-                    <a:pt x="6446027" y="3303627"/>
-                  </a:lnTo>
-                  <a:lnTo>
-                    <a:pt x="6374404" y="3290425"/>
-                  </a:lnTo>
-                  <a:lnTo>
-                    <a:pt x="6302782" y="3276255"/>
-                  </a:lnTo>
-                  <a:lnTo>
-                    <a:pt x="6231159" y="3261046"/>
-                  </a:lnTo>
-                  <a:lnTo>
-                    <a:pt x="6159537" y="3244723"/>
-                  </a:lnTo>
-                  <a:lnTo>
-                    <a:pt x="6087914" y="3227203"/>
-                  </a:lnTo>
-                  <a:lnTo>
-                    <a:pt x="6016292" y="3208399"/>
-                  </a:lnTo>
-                  <a:lnTo>
-                    <a:pt x="5944669" y="3188217"/>
-                  </a:lnTo>
-                  <a:lnTo>
-                    <a:pt x="5873047" y="3166556"/>
-                  </a:lnTo>
-                  <a:lnTo>
-                    <a:pt x="5801424" y="3143306"/>
-                  </a:lnTo>
-                  <a:lnTo>
-                    <a:pt x="5729802" y="3118353"/>
-                  </a:lnTo>
-                  <a:lnTo>
-                    <a:pt x="5658179" y="3091571"/>
-                  </a:lnTo>
-                  <a:lnTo>
-                    <a:pt x="5586557" y="3062825"/>
-                  </a:lnTo>
-                  <a:lnTo>
-                    <a:pt x="5514934" y="3031973"/>
-                  </a:lnTo>
-                  <a:lnTo>
-                    <a:pt x="5443311" y="2998859"/>
-                  </a:lnTo>
-                  <a:lnTo>
-                    <a:pt x="5371689" y="2963318"/>
-                  </a:lnTo>
-                  <a:lnTo>
-                    <a:pt x="5300066" y="2925173"/>
-                  </a:lnTo>
-                  <a:lnTo>
-                    <a:pt x="5228444" y="2884231"/>
-                  </a:lnTo>
-                  <a:lnTo>
-                    <a:pt x="5156821" y="2840288"/>
-                  </a:lnTo>
-                  <a:lnTo>
-                    <a:pt x="5085199" y="2793124"/>
-                  </a:lnTo>
-                  <a:lnTo>
-                    <a:pt x="5013576" y="2742503"/>
-                  </a:lnTo>
-                  <a:lnTo>
-                    <a:pt x="4941954" y="2688172"/>
-                  </a:lnTo>
-                  <a:lnTo>
-                    <a:pt x="4870331" y="2654968"/>
-                  </a:lnTo>
-                  <a:lnTo>
-                    <a:pt x="4798709" y="2656636"/>
-                  </a:lnTo>
-                  <a:lnTo>
-                    <a:pt x="4727086" y="2658300"/>
-                  </a:lnTo>
-                  <a:lnTo>
-                    <a:pt x="4655464" y="2659961"/>
-                  </a:lnTo>
-                  <a:lnTo>
-                    <a:pt x="4583841" y="2661619"/>
-                  </a:lnTo>
-                  <a:lnTo>
-                    <a:pt x="4512219" y="2663274"/>
-                  </a:lnTo>
-                  <a:lnTo>
-                    <a:pt x="4440596" y="2664925"/>
-                  </a:lnTo>
-                  <a:lnTo>
-                    <a:pt x="4368974" y="2666573"/>
-                  </a:lnTo>
-                  <a:lnTo>
-                    <a:pt x="4297351" y="2668217"/>
-                  </a:lnTo>
-                  <a:lnTo>
-                    <a:pt x="4225729" y="2669858"/>
-                  </a:lnTo>
-                  <a:lnTo>
-                    <a:pt x="4154106" y="2671496"/>
-                  </a:lnTo>
-                  <a:lnTo>
-                    <a:pt x="4082483" y="2673131"/>
-                  </a:lnTo>
-                  <a:lnTo>
-                    <a:pt x="4010861" y="2674762"/>
-                  </a:lnTo>
-                  <a:lnTo>
-                    <a:pt x="3939238" y="2676390"/>
-                  </a:lnTo>
-                  <a:lnTo>
-                    <a:pt x="3867616" y="2678014"/>
-                  </a:lnTo>
-                  <a:lnTo>
-                    <a:pt x="3795993" y="2679636"/>
-                  </a:lnTo>
-                  <a:lnTo>
-                    <a:pt x="3724371" y="2681254"/>
-                  </a:lnTo>
-                  <a:lnTo>
-                    <a:pt x="3652748" y="2682869"/>
-                  </a:lnTo>
-                  <a:lnTo>
-                    <a:pt x="3581126" y="2684481"/>
-                  </a:lnTo>
-                  <a:lnTo>
-                    <a:pt x="3509503" y="2686089"/>
-                  </a:lnTo>
-                  <a:lnTo>
-                    <a:pt x="3437881" y="2687694"/>
-                  </a:lnTo>
-                  <a:lnTo>
-                    <a:pt x="3366258" y="2689296"/>
-                  </a:lnTo>
-                  <a:lnTo>
-                    <a:pt x="3294636" y="2690895"/>
-                  </a:lnTo>
-                  <a:lnTo>
-                    <a:pt x="3223013" y="2692490"/>
-                  </a:lnTo>
-                  <a:lnTo>
-                    <a:pt x="3151391" y="2694083"/>
-                  </a:lnTo>
-                  <a:lnTo>
-                    <a:pt x="3079768" y="2695672"/>
-                  </a:lnTo>
-                  <a:lnTo>
-                    <a:pt x="3008146" y="2697258"/>
-                  </a:lnTo>
-                  <a:lnTo>
-                    <a:pt x="2936523" y="2698840"/>
-                  </a:lnTo>
-                  <a:lnTo>
-                    <a:pt x="2864901" y="2700420"/>
-                  </a:lnTo>
-                  <a:lnTo>
-                    <a:pt x="2793278" y="2701996"/>
-                  </a:lnTo>
-                  <a:lnTo>
-                    <a:pt x="2721655" y="2703570"/>
-                  </a:lnTo>
-                  <a:lnTo>
-                    <a:pt x="2650033" y="2705140"/>
-                  </a:lnTo>
-                  <a:lnTo>
-                    <a:pt x="2578410" y="2706706"/>
-                  </a:lnTo>
-                  <a:lnTo>
-                    <a:pt x="2506788" y="2708270"/>
-                  </a:lnTo>
-                  <a:lnTo>
-                    <a:pt x="2435165" y="2709831"/>
-                  </a:lnTo>
-                  <a:lnTo>
-                    <a:pt x="2363543" y="2711388"/>
-                  </a:lnTo>
-                  <a:lnTo>
-                    <a:pt x="2291920" y="2712942"/>
-                  </a:lnTo>
-                  <a:lnTo>
-                    <a:pt x="2220298" y="2714493"/>
-                  </a:lnTo>
-                  <a:lnTo>
-                    <a:pt x="2148675" y="2716041"/>
-                  </a:lnTo>
-                  <a:lnTo>
-                    <a:pt x="2077053" y="2717586"/>
-                  </a:lnTo>
-                  <a:lnTo>
-                    <a:pt x="2005430" y="2719128"/>
-                  </a:lnTo>
-                  <a:lnTo>
-                    <a:pt x="1933808" y="2720667"/>
-                  </a:lnTo>
-                  <a:lnTo>
-                    <a:pt x="1862185" y="2722203"/>
-                  </a:lnTo>
-                  <a:lnTo>
-                    <a:pt x="1790563" y="2723735"/>
-                  </a:lnTo>
-                  <a:lnTo>
-                    <a:pt x="1718940" y="2725264"/>
-                  </a:lnTo>
-                  <a:lnTo>
-                    <a:pt x="1647318" y="2726791"/>
-                  </a:lnTo>
-                  <a:lnTo>
-                    <a:pt x="1575695" y="2728314"/>
-                  </a:lnTo>
-                  <a:lnTo>
-                    <a:pt x="1504073" y="2729834"/>
-                  </a:lnTo>
-                  <a:lnTo>
-                    <a:pt x="1432450" y="2731351"/>
-                  </a:lnTo>
-                  <a:lnTo>
-                    <a:pt x="1360827" y="2732866"/>
-                  </a:lnTo>
-                  <a:lnTo>
-                    <a:pt x="1289205" y="2734377"/>
-                  </a:lnTo>
-                  <a:lnTo>
-                    <a:pt x="1217582" y="2735885"/>
-                  </a:lnTo>
-                  <a:lnTo>
-                    <a:pt x="1145960" y="2737390"/>
-                  </a:lnTo>
-                  <a:lnTo>
-                    <a:pt x="1074337" y="2738892"/>
-                  </a:lnTo>
-                  <a:lnTo>
-                    <a:pt x="1002715" y="2740390"/>
-                  </a:lnTo>
-                  <a:lnTo>
-                    <a:pt x="931092" y="2741886"/>
-                  </a:lnTo>
-                  <a:lnTo>
-                    <a:pt x="859470" y="2743379"/>
-                  </a:lnTo>
-                  <a:lnTo>
-                    <a:pt x="787847" y="2744869"/>
-                  </a:lnTo>
-                  <a:lnTo>
-                    <a:pt x="716225" y="2746356"/>
-                  </a:lnTo>
-                  <a:lnTo>
-                    <a:pt x="644602" y="2747840"/>
-                  </a:lnTo>
-                  <a:lnTo>
-                    <a:pt x="572980" y="2749321"/>
-                  </a:lnTo>
-                  <a:lnTo>
-                    <a:pt x="501357" y="2750799"/>
-                  </a:lnTo>
-                  <a:lnTo>
-                    <a:pt x="429735" y="2752274"/>
-                  </a:lnTo>
-                  <a:lnTo>
-                    <a:pt x="358112" y="2753746"/>
-                  </a:lnTo>
-                  <a:lnTo>
-                    <a:pt x="286490" y="2755215"/>
-                  </a:lnTo>
-                  <a:lnTo>
-                    <a:pt x="214867" y="2756681"/>
-                  </a:lnTo>
-                  <a:lnTo>
-                    <a:pt x="143245" y="2758144"/>
-                  </a:lnTo>
-                  <a:lnTo>
-                    <a:pt x="71622" y="2759604"/>
-                  </a:lnTo>
-                  <a:lnTo>
-                    <a:pt x="0" y="2761061"/>
+                    <a:pt x="3437881" y="17362"/>
+                  </a:lnTo>
+                  <a:lnTo>
+                    <a:pt x="3509503" y="251928"/>
+                  </a:lnTo>
+                  <a:lnTo>
+                    <a:pt x="3581126" y="470621"/>
+                  </a:lnTo>
+                  <a:lnTo>
+                    <a:pt x="3652748" y="674515"/>
+                  </a:lnTo>
+                  <a:lnTo>
+                    <a:pt x="3724371" y="864612"/>
+                  </a:lnTo>
+                  <a:lnTo>
+                    <a:pt x="3795993" y="1041846"/>
+                  </a:lnTo>
+                  <a:lnTo>
+                    <a:pt x="3867616" y="1207086"/>
+                  </a:lnTo>
+                  <a:lnTo>
+                    <a:pt x="3939238" y="1361145"/>
+                  </a:lnTo>
+                  <a:lnTo>
+                    <a:pt x="4010861" y="1504779"/>
+                  </a:lnTo>
+                  <a:lnTo>
+                    <a:pt x="4082483" y="1638693"/>
+                  </a:lnTo>
+                  <a:lnTo>
+                    <a:pt x="4154106" y="1763545"/>
+                  </a:lnTo>
+                  <a:lnTo>
+                    <a:pt x="4225729" y="1879949"/>
+                  </a:lnTo>
+                  <a:lnTo>
+                    <a:pt x="4297351" y="1988476"/>
+                  </a:lnTo>
+                  <a:lnTo>
+                    <a:pt x="4368974" y="2089659"/>
+                  </a:lnTo>
+                  <a:lnTo>
+                    <a:pt x="4440596" y="2183995"/>
+                  </a:lnTo>
+                  <a:lnTo>
+                    <a:pt x="4512219" y="2271948"/>
+                  </a:lnTo>
+                  <a:lnTo>
+                    <a:pt x="4583841" y="2353949"/>
+                  </a:lnTo>
+                  <a:lnTo>
+                    <a:pt x="4655464" y="2430401"/>
+                  </a:lnTo>
+                  <a:lnTo>
+                    <a:pt x="4727086" y="2501679"/>
+                  </a:lnTo>
+                  <a:lnTo>
+                    <a:pt x="4798709" y="2568135"/>
+                  </a:lnTo>
+                  <a:lnTo>
+                    <a:pt x="4870331" y="2630093"/>
+                  </a:lnTo>
+                  <a:lnTo>
+                    <a:pt x="4941954" y="2650096"/>
+                  </a:lnTo>
+                  <a:lnTo>
+                    <a:pt x="5013576" y="2642947"/>
+                  </a:lnTo>
+                  <a:lnTo>
+                    <a:pt x="5085199" y="2635737"/>
+                  </a:lnTo>
+                  <a:lnTo>
+                    <a:pt x="5156821" y="2628465"/>
+                  </a:lnTo>
+                  <a:lnTo>
+                    <a:pt x="5228444" y="2621131"/>
+                  </a:lnTo>
+                  <a:lnTo>
+                    <a:pt x="5300066" y="2613735"/>
+                  </a:lnTo>
+                  <a:lnTo>
+                    <a:pt x="5371689" y="2606274"/>
+                  </a:lnTo>
+                  <a:lnTo>
+                    <a:pt x="5443311" y="2598750"/>
+                  </a:lnTo>
+                  <a:lnTo>
+                    <a:pt x="5514934" y="2591161"/>
+                  </a:lnTo>
+                  <a:lnTo>
+                    <a:pt x="5586557" y="2583507"/>
+                  </a:lnTo>
+                  <a:lnTo>
+                    <a:pt x="5658179" y="2575787"/>
+                  </a:lnTo>
+                  <a:lnTo>
+                    <a:pt x="5729802" y="2568002"/>
+                  </a:lnTo>
+                  <a:lnTo>
+                    <a:pt x="5801424" y="2560149"/>
+                  </a:lnTo>
+                  <a:lnTo>
+                    <a:pt x="5873047" y="2552229"/>
+                  </a:lnTo>
+                  <a:lnTo>
+                    <a:pt x="5944669" y="2544242"/>
+                  </a:lnTo>
+                  <a:lnTo>
+                    <a:pt x="6016292" y="2536185"/>
+                  </a:lnTo>
+                  <a:lnTo>
+                    <a:pt x="6087914" y="2528060"/>
+                  </a:lnTo>
+                  <a:lnTo>
+                    <a:pt x="6159537" y="2519865"/>
+                  </a:lnTo>
+                  <a:lnTo>
+                    <a:pt x="6231159" y="2511600"/>
+                  </a:lnTo>
+                  <a:lnTo>
+                    <a:pt x="6302782" y="2503263"/>
+                  </a:lnTo>
+                  <a:lnTo>
+                    <a:pt x="6374404" y="2494856"/>
+                  </a:lnTo>
+                  <a:lnTo>
+                    <a:pt x="6446027" y="2486376"/>
+                  </a:lnTo>
+                  <a:lnTo>
+                    <a:pt x="6517649" y="2477823"/>
+                  </a:lnTo>
+                  <a:lnTo>
+                    <a:pt x="6589272" y="2469198"/>
+                  </a:lnTo>
+                  <a:lnTo>
+                    <a:pt x="6660894" y="2460498"/>
+                  </a:lnTo>
+                  <a:lnTo>
+                    <a:pt x="6732517" y="2451724"/>
+                  </a:lnTo>
+                  <a:lnTo>
+                    <a:pt x="6804139" y="2442874"/>
+                  </a:lnTo>
+                  <a:lnTo>
+                    <a:pt x="6875762" y="2433948"/>
+                  </a:lnTo>
+                  <a:lnTo>
+                    <a:pt x="6947385" y="2424946"/>
+                  </a:lnTo>
+                  <a:lnTo>
+                    <a:pt x="7019007" y="2415867"/>
+                  </a:lnTo>
+                  <a:lnTo>
+                    <a:pt x="7090630" y="2406710"/>
+                  </a:lnTo>
+                  <a:lnTo>
+                    <a:pt x="7090630" y="3386481"/>
+                  </a:lnTo>
+                  <a:lnTo>
+                    <a:pt x="7019007" y="3379421"/>
+                  </a:lnTo>
+                  <a:lnTo>
+                    <a:pt x="6947385" y="3371849"/>
+                  </a:lnTo>
+                  <a:lnTo>
+                    <a:pt x="6875762" y="3363728"/>
+                  </a:lnTo>
+                  <a:lnTo>
+                    <a:pt x="6804139" y="3355017"/>
+                  </a:lnTo>
+                  <a:lnTo>
+                    <a:pt x="6732517" y="3345674"/>
+                  </a:lnTo>
+                  <a:lnTo>
+                    <a:pt x="6660894" y="3335652"/>
+                  </a:lnTo>
+                  <a:lnTo>
+                    <a:pt x="6589272" y="3324904"/>
+                  </a:lnTo>
+                  <a:lnTo>
+                    <a:pt x="6517649" y="3313375"/>
+                  </a:lnTo>
+                  <a:lnTo>
+                    <a:pt x="6446027" y="3301009"/>
+                  </a:lnTo>
+                  <a:lnTo>
+                    <a:pt x="6374404" y="3287746"/>
+                  </a:lnTo>
+                  <a:lnTo>
+                    <a:pt x="6302782" y="3273520"/>
+                  </a:lnTo>
+                  <a:lnTo>
+                    <a:pt x="6231159" y="3258262"/>
+                  </a:lnTo>
+                  <a:lnTo>
+                    <a:pt x="6159537" y="3241896"/>
+                  </a:lnTo>
+                  <a:lnTo>
+                    <a:pt x="6087914" y="3224343"/>
+                  </a:lnTo>
+                  <a:lnTo>
+                    <a:pt x="6016292" y="3205515"/>
+                  </a:lnTo>
+                  <a:lnTo>
+                    <a:pt x="5944669" y="3185321"/>
+                  </a:lnTo>
+                  <a:lnTo>
+                    <a:pt x="5873047" y="3163662"/>
+                  </a:lnTo>
+                  <a:lnTo>
+                    <a:pt x="5801424" y="3140430"/>
+                  </a:lnTo>
+                  <a:lnTo>
+                    <a:pt x="5729802" y="3115512"/>
+                  </a:lnTo>
+                  <a:lnTo>
+                    <a:pt x="5658179" y="3088785"/>
+                  </a:lnTo>
+                  <a:lnTo>
+                    <a:pt x="5586557" y="3060119"/>
+                  </a:lnTo>
+                  <a:lnTo>
+                    <a:pt x="5514934" y="3029372"/>
+                  </a:lnTo>
+                  <a:lnTo>
+                    <a:pt x="5443311" y="2996394"/>
+                  </a:lnTo>
+                  <a:lnTo>
+                    <a:pt x="5371689" y="2961021"/>
+                  </a:lnTo>
+                  <a:lnTo>
+                    <a:pt x="5300066" y="2923082"/>
+                  </a:lnTo>
+                  <a:lnTo>
+                    <a:pt x="5228444" y="2882389"/>
+                  </a:lnTo>
+                  <a:lnTo>
+                    <a:pt x="5156821" y="2838742"/>
+                  </a:lnTo>
+                  <a:lnTo>
+                    <a:pt x="5085199" y="2791928"/>
+                  </a:lnTo>
+                  <a:lnTo>
+                    <a:pt x="5013576" y="2741715"/>
+                  </a:lnTo>
+                  <a:lnTo>
+                    <a:pt x="4941954" y="2687859"/>
+                  </a:lnTo>
+                  <a:lnTo>
+                    <a:pt x="4870331" y="2657183"/>
+                  </a:lnTo>
+                  <a:lnTo>
+                    <a:pt x="4798709" y="2664211"/>
+                  </a:lnTo>
+                  <a:lnTo>
+                    <a:pt x="4727086" y="2671179"/>
+                  </a:lnTo>
+                  <a:lnTo>
+                    <a:pt x="4655464" y="2678087"/>
+                  </a:lnTo>
+                  <a:lnTo>
+                    <a:pt x="4583841" y="2684937"/>
+                  </a:lnTo>
+                  <a:lnTo>
+                    <a:pt x="4512219" y="2691729"/>
+                  </a:lnTo>
+                  <a:lnTo>
+                    <a:pt x="4440596" y="2698462"/>
+                  </a:lnTo>
+                  <a:lnTo>
+                    <a:pt x="4368974" y="2705139"/>
+                  </a:lnTo>
+                  <a:lnTo>
+                    <a:pt x="4297351" y="2711759"/>
+                  </a:lnTo>
+                  <a:lnTo>
+                    <a:pt x="4225729" y="2718322"/>
+                  </a:lnTo>
+                  <a:lnTo>
+                    <a:pt x="4154106" y="2724830"/>
+                  </a:lnTo>
+                  <a:lnTo>
+                    <a:pt x="4082483" y="2731282"/>
+                  </a:lnTo>
+                  <a:lnTo>
+                    <a:pt x="4010861" y="2737680"/>
+                  </a:lnTo>
+                  <a:lnTo>
+                    <a:pt x="3939238" y="2744023"/>
+                  </a:lnTo>
+                  <a:lnTo>
+                    <a:pt x="3867616" y="2750312"/>
+                  </a:lnTo>
+                  <a:lnTo>
+                    <a:pt x="3795993" y="2756548"/>
+                  </a:lnTo>
+                  <a:lnTo>
+                    <a:pt x="3724371" y="2762731"/>
+                  </a:lnTo>
+                  <a:lnTo>
+                    <a:pt x="3652748" y="2768861"/>
+                  </a:lnTo>
+                  <a:lnTo>
+                    <a:pt x="3581126" y="2774939"/>
+                  </a:lnTo>
+                  <a:lnTo>
+                    <a:pt x="3509503" y="2780965"/>
+                  </a:lnTo>
+                  <a:lnTo>
+                    <a:pt x="3437881" y="2786940"/>
+                  </a:lnTo>
+                  <a:lnTo>
+                    <a:pt x="3366258" y="2792865"/>
+                  </a:lnTo>
+                  <a:lnTo>
+                    <a:pt x="3294636" y="2798739"/>
+                  </a:lnTo>
+                  <a:lnTo>
+                    <a:pt x="3223013" y="2804563"/>
+                  </a:lnTo>
+                  <a:lnTo>
+                    <a:pt x="3151391" y="2810337"/>
+                  </a:lnTo>
+                  <a:lnTo>
+                    <a:pt x="3079768" y="2816063"/>
+                  </a:lnTo>
+                  <a:lnTo>
+                    <a:pt x="3008146" y="2821739"/>
+                  </a:lnTo>
+                  <a:lnTo>
+                    <a:pt x="2936523" y="2827368"/>
+                  </a:lnTo>
+                  <a:lnTo>
+                    <a:pt x="2864901" y="2832948"/>
+                  </a:lnTo>
+                  <a:lnTo>
+                    <a:pt x="2793278" y="2838482"/>
+                  </a:lnTo>
+                  <a:lnTo>
+                    <a:pt x="2721655" y="2843968"/>
+                  </a:lnTo>
+                  <a:lnTo>
+                    <a:pt x="2650033" y="2849407"/>
+                  </a:lnTo>
+                  <a:lnTo>
+                    <a:pt x="2578410" y="2854800"/>
+                  </a:lnTo>
+                  <a:lnTo>
+                    <a:pt x="2506788" y="2860148"/>
+                  </a:lnTo>
+                  <a:lnTo>
+                    <a:pt x="2435165" y="2865450"/>
+                  </a:lnTo>
+                  <a:lnTo>
+                    <a:pt x="2363543" y="2870707"/>
+                  </a:lnTo>
+                  <a:lnTo>
+                    <a:pt x="2291920" y="2875919"/>
+                  </a:lnTo>
+                  <a:lnTo>
+                    <a:pt x="2220298" y="2881086"/>
+                  </a:lnTo>
+                  <a:lnTo>
+                    <a:pt x="2148675" y="2886210"/>
+                  </a:lnTo>
+                  <a:lnTo>
+                    <a:pt x="2077053" y="2891291"/>
+                  </a:lnTo>
+                  <a:lnTo>
+                    <a:pt x="2005430" y="2896328"/>
+                  </a:lnTo>
+                  <a:lnTo>
+                    <a:pt x="1933808" y="2901322"/>
+                  </a:lnTo>
+                  <a:lnTo>
+                    <a:pt x="1862185" y="2906274"/>
+                  </a:lnTo>
+                  <a:lnTo>
+                    <a:pt x="1790563" y="2911184"/>
+                  </a:lnTo>
+                  <a:lnTo>
+                    <a:pt x="1718940" y="2916052"/>
+                  </a:lnTo>
+                  <a:lnTo>
+                    <a:pt x="1647318" y="2920878"/>
+                  </a:lnTo>
+                  <a:lnTo>
+                    <a:pt x="1575695" y="2925664"/>
+                  </a:lnTo>
+                  <a:lnTo>
+                    <a:pt x="1504073" y="2930409"/>
+                  </a:lnTo>
+                  <a:lnTo>
+                    <a:pt x="1432450" y="2935113"/>
+                  </a:lnTo>
+                  <a:lnTo>
+                    <a:pt x="1360827" y="2939778"/>
+                  </a:lnTo>
+                  <a:lnTo>
+                    <a:pt x="1289205" y="2944403"/>
+                  </a:lnTo>
+                  <a:lnTo>
+                    <a:pt x="1217582" y="2948988"/>
+                  </a:lnTo>
+                  <a:lnTo>
+                    <a:pt x="1145960" y="2953535"/>
+                  </a:lnTo>
+                  <a:lnTo>
+                    <a:pt x="1074337" y="2958043"/>
+                  </a:lnTo>
+                  <a:lnTo>
+                    <a:pt x="1002715" y="2962512"/>
+                  </a:lnTo>
+                  <a:lnTo>
+                    <a:pt x="931092" y="2966944"/>
+                  </a:lnTo>
+                  <a:lnTo>
+                    <a:pt x="859470" y="2971338"/>
+                  </a:lnTo>
+                  <a:lnTo>
+                    <a:pt x="787847" y="2975694"/>
+                  </a:lnTo>
+                  <a:lnTo>
+                    <a:pt x="716225" y="2980014"/>
+                  </a:lnTo>
+                  <a:lnTo>
+                    <a:pt x="644602" y="2984297"/>
+                  </a:lnTo>
+                  <a:lnTo>
+                    <a:pt x="572980" y="2988543"/>
+                  </a:lnTo>
+                  <a:lnTo>
+                    <a:pt x="501357" y="2992753"/>
+                  </a:lnTo>
+                  <a:lnTo>
+                    <a:pt x="429735" y="2996928"/>
+                  </a:lnTo>
+                  <a:lnTo>
+                    <a:pt x="358112" y="3001067"/>
+                  </a:lnTo>
+                  <a:lnTo>
+                    <a:pt x="286490" y="3005171"/>
+                  </a:lnTo>
+                  <a:lnTo>
+                    <a:pt x="214867" y="3009239"/>
+                  </a:lnTo>
+                  <a:lnTo>
+                    <a:pt x="143245" y="3013274"/>
+                  </a:lnTo>
+                  <a:lnTo>
+                    <a:pt x="71622" y="3017274"/>
+                  </a:lnTo>
+                  <a:lnTo>
+                    <a:pt x="0" y="3021240"/>
                   </a:lnTo>
                   <a:lnTo>
                     <a:pt x="0" y="0"/>
@@ -3492,168 +3495,171 @@
           </p:nvSpPr>
           <p:spPr>
             <a:xfrm>
-              <a:off x="4618957" y="2073503"/>
-              <a:ext cx="3643721" cy="2653297"/>
+              <a:off x="4604987" y="2073503"/>
+              <a:ext cx="3657691" cy="2650096"/>
             </a:xfrm>
             <a:custGeom>
               <a:avLst/>
               <a:pathLst>
-                <a:path w="3643721" h="2653297">
+                <a:path w="3657691" h="2650096">
                   <a:moveTo>
                     <a:pt x="0" y="0"/>
                   </a:moveTo>
                   <a:lnTo>
-                    <a:pt x="62595" y="209730"/>
-                  </a:lnTo>
-                  <a:lnTo>
-                    <a:pt x="134217" y="433318"/>
-                  </a:lnTo>
-                  <a:lnTo>
-                    <a:pt x="205840" y="641637"/>
-                  </a:lnTo>
-                  <a:lnTo>
-                    <a:pt x="277462" y="835729"/>
-                  </a:lnTo>
-                  <a:lnTo>
-                    <a:pt x="349085" y="1016566"/>
-                  </a:lnTo>
-                  <a:lnTo>
-                    <a:pt x="420708" y="1185054"/>
-                  </a:lnTo>
-                  <a:lnTo>
-                    <a:pt x="492330" y="1342036"/>
-                  </a:lnTo>
-                  <a:lnTo>
-                    <a:pt x="563953" y="1488297"/>
-                  </a:lnTo>
-                  <a:lnTo>
-                    <a:pt x="635575" y="1624569"/>
-                  </a:lnTo>
-                  <a:lnTo>
-                    <a:pt x="707198" y="1751535"/>
-                  </a:lnTo>
-                  <a:lnTo>
-                    <a:pt x="778820" y="1869831"/>
-                  </a:lnTo>
-                  <a:lnTo>
-                    <a:pt x="850443" y="1980048"/>
-                  </a:lnTo>
-                  <a:lnTo>
-                    <a:pt x="922065" y="2082738"/>
-                  </a:lnTo>
-                  <a:lnTo>
-                    <a:pt x="993688" y="2178415"/>
-                  </a:lnTo>
-                  <a:lnTo>
-                    <a:pt x="1065310" y="2267558"/>
-                  </a:lnTo>
-                  <a:lnTo>
-                    <a:pt x="1136933" y="2350614"/>
-                  </a:lnTo>
-                  <a:lnTo>
-                    <a:pt x="1208555" y="2427997"/>
-                  </a:lnTo>
-                  <a:lnTo>
-                    <a:pt x="1280178" y="2500096"/>
-                  </a:lnTo>
-                  <a:lnTo>
-                    <a:pt x="1351800" y="2567271"/>
-                  </a:lnTo>
-                  <a:lnTo>
-                    <a:pt x="1423423" y="2629859"/>
-                  </a:lnTo>
-                  <a:lnTo>
-                    <a:pt x="1495045" y="2653297"/>
-                  </a:lnTo>
-                  <a:lnTo>
-                    <a:pt x="1566668" y="2651622"/>
-                  </a:lnTo>
-                  <a:lnTo>
-                    <a:pt x="1638290" y="2649944"/>
-                  </a:lnTo>
-                  <a:lnTo>
-                    <a:pt x="1709913" y="2648263"/>
-                  </a:lnTo>
-                  <a:lnTo>
-                    <a:pt x="1781536" y="2646578"/>
-                  </a:lnTo>
-                  <a:lnTo>
-                    <a:pt x="1853158" y="2644890"/>
-                  </a:lnTo>
-                  <a:lnTo>
-                    <a:pt x="1924781" y="2643199"/>
-                  </a:lnTo>
-                  <a:lnTo>
-                    <a:pt x="1996403" y="2641504"/>
-                  </a:lnTo>
-                  <a:lnTo>
-                    <a:pt x="2068026" y="2639806"/>
-                  </a:lnTo>
-                  <a:lnTo>
-                    <a:pt x="2139648" y="2638104"/>
-                  </a:lnTo>
-                  <a:lnTo>
-                    <a:pt x="2211271" y="2636399"/>
-                  </a:lnTo>
-                  <a:lnTo>
-                    <a:pt x="2282893" y="2634690"/>
-                  </a:lnTo>
-                  <a:lnTo>
-                    <a:pt x="2354516" y="2632978"/>
-                  </a:lnTo>
-                  <a:lnTo>
-                    <a:pt x="2426138" y="2631262"/>
-                  </a:lnTo>
-                  <a:lnTo>
-                    <a:pt x="2497761" y="2629544"/>
-                  </a:lnTo>
-                  <a:lnTo>
-                    <a:pt x="2569383" y="2627821"/>
-                  </a:lnTo>
-                  <a:lnTo>
-                    <a:pt x="2641006" y="2626095"/>
-                  </a:lnTo>
-                  <a:lnTo>
-                    <a:pt x="2712628" y="2624366"/>
-                  </a:lnTo>
-                  <a:lnTo>
-                    <a:pt x="2784251" y="2622633"/>
-                  </a:lnTo>
-                  <a:lnTo>
-                    <a:pt x="2855873" y="2620896"/>
-                  </a:lnTo>
-                  <a:lnTo>
-                    <a:pt x="2927496" y="2619157"/>
-                  </a:lnTo>
-                  <a:lnTo>
-                    <a:pt x="2999118" y="2617413"/>
-                  </a:lnTo>
-                  <a:lnTo>
-                    <a:pt x="3070741" y="2615666"/>
-                  </a:lnTo>
-                  <a:lnTo>
-                    <a:pt x="3142364" y="2613916"/>
-                  </a:lnTo>
-                  <a:lnTo>
-                    <a:pt x="3213986" y="2612162"/>
-                  </a:lnTo>
-                  <a:lnTo>
-                    <a:pt x="3285609" y="2610404"/>
-                  </a:lnTo>
-                  <a:lnTo>
-                    <a:pt x="3357231" y="2608643"/>
-                  </a:lnTo>
-                  <a:lnTo>
-                    <a:pt x="3428854" y="2606879"/>
-                  </a:lnTo>
-                  <a:lnTo>
-                    <a:pt x="3500476" y="2605111"/>
-                  </a:lnTo>
-                  <a:lnTo>
-                    <a:pt x="3572099" y="2603339"/>
-                  </a:lnTo>
-                  <a:lnTo>
-                    <a:pt x="3643721" y="2601564"/>
+                    <a:pt x="4942" y="17362"/>
+                  </a:lnTo>
+                  <a:lnTo>
+                    <a:pt x="76565" y="251928"/>
+                  </a:lnTo>
+                  <a:lnTo>
+                    <a:pt x="148187" y="470621"/>
+                  </a:lnTo>
+                  <a:lnTo>
+                    <a:pt x="219810" y="674515"/>
+                  </a:lnTo>
+                  <a:lnTo>
+                    <a:pt x="291432" y="864612"/>
+                  </a:lnTo>
+                  <a:lnTo>
+                    <a:pt x="363055" y="1041846"/>
+                  </a:lnTo>
+                  <a:lnTo>
+                    <a:pt x="434677" y="1207086"/>
+                  </a:lnTo>
+                  <a:lnTo>
+                    <a:pt x="506300" y="1361145"/>
+                  </a:lnTo>
+                  <a:lnTo>
+                    <a:pt x="577922" y="1504779"/>
+                  </a:lnTo>
+                  <a:lnTo>
+                    <a:pt x="649545" y="1638693"/>
+                  </a:lnTo>
+                  <a:lnTo>
+                    <a:pt x="721167" y="1763545"/>
+                  </a:lnTo>
+                  <a:lnTo>
+                    <a:pt x="792790" y="1879949"/>
+                  </a:lnTo>
+                  <a:lnTo>
+                    <a:pt x="864412" y="1988476"/>
+                  </a:lnTo>
+                  <a:lnTo>
+                    <a:pt x="936035" y="2089659"/>
+                  </a:lnTo>
+                  <a:lnTo>
+                    <a:pt x="1007658" y="2183995"/>
+                  </a:lnTo>
+                  <a:lnTo>
+                    <a:pt x="1079280" y="2271948"/>
+                  </a:lnTo>
+                  <a:lnTo>
+                    <a:pt x="1150903" y="2353949"/>
+                  </a:lnTo>
+                  <a:lnTo>
+                    <a:pt x="1222525" y="2430401"/>
+                  </a:lnTo>
+                  <a:lnTo>
+                    <a:pt x="1294148" y="2501679"/>
+                  </a:lnTo>
+                  <a:lnTo>
+                    <a:pt x="1365770" y="2568135"/>
+                  </a:lnTo>
+                  <a:lnTo>
+                    <a:pt x="1437393" y="2630093"/>
+                  </a:lnTo>
+                  <a:lnTo>
+                    <a:pt x="1509015" y="2650096"/>
+                  </a:lnTo>
+                  <a:lnTo>
+                    <a:pt x="1580638" y="2642947"/>
+                  </a:lnTo>
+                  <a:lnTo>
+                    <a:pt x="1652260" y="2635737"/>
+                  </a:lnTo>
+                  <a:lnTo>
+                    <a:pt x="1723883" y="2628465"/>
+                  </a:lnTo>
+                  <a:lnTo>
+                    <a:pt x="1795505" y="2621131"/>
+                  </a:lnTo>
+                  <a:lnTo>
+                    <a:pt x="1867128" y="2613735"/>
+                  </a:lnTo>
+                  <a:lnTo>
+                    <a:pt x="1938750" y="2606274"/>
+                  </a:lnTo>
+                  <a:lnTo>
+                    <a:pt x="2010373" y="2598750"/>
+                  </a:lnTo>
+                  <a:lnTo>
+                    <a:pt x="2081995" y="2591161"/>
+                  </a:lnTo>
+                  <a:lnTo>
+                    <a:pt x="2153618" y="2583507"/>
+                  </a:lnTo>
+                  <a:lnTo>
+                    <a:pt x="2225240" y="2575787"/>
+                  </a:lnTo>
+                  <a:lnTo>
+                    <a:pt x="2296863" y="2568002"/>
+                  </a:lnTo>
+                  <a:lnTo>
+                    <a:pt x="2368486" y="2560149"/>
+                  </a:lnTo>
+                  <a:lnTo>
+                    <a:pt x="2440108" y="2552229"/>
+                  </a:lnTo>
+                  <a:lnTo>
+                    <a:pt x="2511731" y="2544242"/>
+                  </a:lnTo>
+                  <a:lnTo>
+                    <a:pt x="2583353" y="2536185"/>
+                  </a:lnTo>
+                  <a:lnTo>
+                    <a:pt x="2654976" y="2528060"/>
+                  </a:lnTo>
+                  <a:lnTo>
+                    <a:pt x="2726598" y="2519865"/>
+                  </a:lnTo>
+                  <a:lnTo>
+                    <a:pt x="2798221" y="2511600"/>
+                  </a:lnTo>
+                  <a:lnTo>
+                    <a:pt x="2869843" y="2503263"/>
+                  </a:lnTo>
+                  <a:lnTo>
+                    <a:pt x="2941466" y="2494856"/>
+                  </a:lnTo>
+                  <a:lnTo>
+                    <a:pt x="3013088" y="2486376"/>
+                  </a:lnTo>
+                  <a:lnTo>
+                    <a:pt x="3084711" y="2477823"/>
+                  </a:lnTo>
+                  <a:lnTo>
+                    <a:pt x="3156333" y="2469198"/>
+                  </a:lnTo>
+                  <a:lnTo>
+                    <a:pt x="3227956" y="2460498"/>
+                  </a:lnTo>
+                  <a:lnTo>
+                    <a:pt x="3299578" y="2451724"/>
+                  </a:lnTo>
+                  <a:lnTo>
+                    <a:pt x="3371201" y="2442874"/>
+                  </a:lnTo>
+                  <a:lnTo>
+                    <a:pt x="3442823" y="2433948"/>
+                  </a:lnTo>
+                  <a:lnTo>
+                    <a:pt x="3514446" y="2424946"/>
+                  </a:lnTo>
+                  <a:lnTo>
+                    <a:pt x="3586068" y="2415867"/>
+                  </a:lnTo>
+                  <a:lnTo>
+                    <a:pt x="3657691" y="2406710"/>
                   </a:lnTo>
                 </a:path>
               </a:pathLst>
@@ -3673,312 +3679,312 @@
           </p:nvSpPr>
           <p:spPr>
             <a:xfrm>
-              <a:off x="1172049" y="4728471"/>
-              <a:ext cx="7090630" cy="733481"/>
+              <a:off x="1172049" y="4730686"/>
+              <a:ext cx="7090630" cy="729297"/>
             </a:xfrm>
             <a:custGeom>
               <a:avLst/>
               <a:pathLst>
-                <a:path w="7090630" h="733481">
+                <a:path w="7090630" h="729297">
                   <a:moveTo>
-                    <a:pt x="7090630" y="733481"/>
+                    <a:pt x="7090630" y="729297"/>
                   </a:moveTo>
                   <a:lnTo>
-                    <a:pt x="7019007" y="726496"/>
-                  </a:lnTo>
-                  <a:lnTo>
-                    <a:pt x="6947385" y="718999"/>
-                  </a:lnTo>
-                  <a:lnTo>
-                    <a:pt x="6875762" y="710952"/>
-                  </a:lnTo>
-                  <a:lnTo>
-                    <a:pt x="6804139" y="702316"/>
-                  </a:lnTo>
-                  <a:lnTo>
-                    <a:pt x="6732517" y="693046"/>
-                  </a:lnTo>
-                  <a:lnTo>
-                    <a:pt x="6660894" y="683098"/>
-                  </a:lnTo>
-                  <a:lnTo>
-                    <a:pt x="6589272" y="672420"/>
-                  </a:lnTo>
-                  <a:lnTo>
-                    <a:pt x="6517649" y="660959"/>
-                  </a:lnTo>
-                  <a:lnTo>
-                    <a:pt x="6446027" y="648658"/>
-                  </a:lnTo>
-                  <a:lnTo>
-                    <a:pt x="6374404" y="635456"/>
-                  </a:lnTo>
-                  <a:lnTo>
-                    <a:pt x="6302782" y="621286"/>
-                  </a:lnTo>
-                  <a:lnTo>
-                    <a:pt x="6231159" y="606078"/>
-                  </a:lnTo>
-                  <a:lnTo>
-                    <a:pt x="6159537" y="589754"/>
-                  </a:lnTo>
-                  <a:lnTo>
-                    <a:pt x="6087914" y="572235"/>
-                  </a:lnTo>
-                  <a:lnTo>
-                    <a:pt x="6016292" y="553431"/>
-                  </a:lnTo>
-                  <a:lnTo>
-                    <a:pt x="5944669" y="533249"/>
-                  </a:lnTo>
-                  <a:lnTo>
-                    <a:pt x="5873047" y="511587"/>
-                  </a:lnTo>
-                  <a:lnTo>
-                    <a:pt x="5801424" y="488338"/>
-                  </a:lnTo>
-                  <a:lnTo>
-                    <a:pt x="5729802" y="463385"/>
-                  </a:lnTo>
-                  <a:lnTo>
-                    <a:pt x="5658179" y="436602"/>
-                  </a:lnTo>
-                  <a:lnTo>
-                    <a:pt x="5586557" y="407857"/>
-                  </a:lnTo>
-                  <a:lnTo>
-                    <a:pt x="5514934" y="377004"/>
-                  </a:lnTo>
-                  <a:lnTo>
-                    <a:pt x="5443311" y="343891"/>
-                  </a:lnTo>
-                  <a:lnTo>
-                    <a:pt x="5371689" y="308350"/>
-                  </a:lnTo>
-                  <a:lnTo>
-                    <a:pt x="5300066" y="270204"/>
-                  </a:lnTo>
-                  <a:lnTo>
-                    <a:pt x="5228444" y="229262"/>
-                  </a:lnTo>
-                  <a:lnTo>
-                    <a:pt x="5156821" y="185319"/>
-                  </a:lnTo>
-                  <a:lnTo>
-                    <a:pt x="5085199" y="138155"/>
-                  </a:lnTo>
-                  <a:lnTo>
-                    <a:pt x="5013576" y="87535"/>
-                  </a:lnTo>
-                  <a:lnTo>
-                    <a:pt x="4941954" y="33204"/>
+                    <a:pt x="7019007" y="722237"/>
+                  </a:lnTo>
+                  <a:lnTo>
+                    <a:pt x="6947385" y="714665"/>
+                  </a:lnTo>
+                  <a:lnTo>
+                    <a:pt x="6875762" y="706544"/>
+                  </a:lnTo>
+                  <a:lnTo>
+                    <a:pt x="6804139" y="697833"/>
+                  </a:lnTo>
+                  <a:lnTo>
+                    <a:pt x="6732517" y="688490"/>
+                  </a:lnTo>
+                  <a:lnTo>
+                    <a:pt x="6660894" y="678468"/>
+                  </a:lnTo>
+                  <a:lnTo>
+                    <a:pt x="6589272" y="667720"/>
+                  </a:lnTo>
+                  <a:lnTo>
+                    <a:pt x="6517649" y="656191"/>
+                  </a:lnTo>
+                  <a:lnTo>
+                    <a:pt x="6446027" y="643825"/>
+                  </a:lnTo>
+                  <a:lnTo>
+                    <a:pt x="6374404" y="630562"/>
+                  </a:lnTo>
+                  <a:lnTo>
+                    <a:pt x="6302782" y="616336"/>
+                  </a:lnTo>
+                  <a:lnTo>
+                    <a:pt x="6231159" y="601078"/>
+                  </a:lnTo>
+                  <a:lnTo>
+                    <a:pt x="6159537" y="584713"/>
+                  </a:lnTo>
+                  <a:lnTo>
+                    <a:pt x="6087914" y="567159"/>
+                  </a:lnTo>
+                  <a:lnTo>
+                    <a:pt x="6016292" y="548332"/>
+                  </a:lnTo>
+                  <a:lnTo>
+                    <a:pt x="5944669" y="528137"/>
+                  </a:lnTo>
+                  <a:lnTo>
+                    <a:pt x="5873047" y="506478"/>
+                  </a:lnTo>
+                  <a:lnTo>
+                    <a:pt x="5801424" y="483246"/>
+                  </a:lnTo>
+                  <a:lnTo>
+                    <a:pt x="5729802" y="458328"/>
+                  </a:lnTo>
+                  <a:lnTo>
+                    <a:pt x="5658179" y="431601"/>
+                  </a:lnTo>
+                  <a:lnTo>
+                    <a:pt x="5586557" y="402935"/>
+                  </a:lnTo>
+                  <a:lnTo>
+                    <a:pt x="5514934" y="372188"/>
+                  </a:lnTo>
+                  <a:lnTo>
+                    <a:pt x="5443311" y="339210"/>
+                  </a:lnTo>
+                  <a:lnTo>
+                    <a:pt x="5371689" y="303837"/>
+                  </a:lnTo>
+                  <a:lnTo>
+                    <a:pt x="5300066" y="265898"/>
+                  </a:lnTo>
+                  <a:lnTo>
+                    <a:pt x="5228444" y="225205"/>
+                  </a:lnTo>
+                  <a:lnTo>
+                    <a:pt x="5156821" y="181558"/>
+                  </a:lnTo>
+                  <a:lnTo>
+                    <a:pt x="5085199" y="134744"/>
+                  </a:lnTo>
+                  <a:lnTo>
+                    <a:pt x="5013576" y="84531"/>
+                  </a:lnTo>
+                  <a:lnTo>
+                    <a:pt x="4941954" y="30675"/>
                   </a:lnTo>
                   <a:lnTo>
                     <a:pt x="4870331" y="0"/>
                   </a:lnTo>
                   <a:lnTo>
-                    <a:pt x="4798709" y="1667"/>
-                  </a:lnTo>
-                  <a:lnTo>
-                    <a:pt x="4727086" y="3332"/>
-                  </a:lnTo>
-                  <a:lnTo>
-                    <a:pt x="4655464" y="4993"/>
-                  </a:lnTo>
-                  <a:lnTo>
-                    <a:pt x="4583841" y="6651"/>
-                  </a:lnTo>
-                  <a:lnTo>
-                    <a:pt x="4512219" y="8305"/>
-                  </a:lnTo>
-                  <a:lnTo>
-                    <a:pt x="4440596" y="9956"/>
-                  </a:lnTo>
-                  <a:lnTo>
-                    <a:pt x="4368974" y="11604"/>
-                  </a:lnTo>
-                  <a:lnTo>
-                    <a:pt x="4297351" y="13248"/>
-                  </a:lnTo>
-                  <a:lnTo>
-                    <a:pt x="4225729" y="14890"/>
-                  </a:lnTo>
-                  <a:lnTo>
-                    <a:pt x="4154106" y="16527"/>
-                  </a:lnTo>
-                  <a:lnTo>
-                    <a:pt x="4082483" y="18162"/>
-                  </a:lnTo>
-                  <a:lnTo>
-                    <a:pt x="4010861" y="19793"/>
-                  </a:lnTo>
-                  <a:lnTo>
-                    <a:pt x="3939238" y="21421"/>
-                  </a:lnTo>
-                  <a:lnTo>
-                    <a:pt x="3867616" y="23046"/>
-                  </a:lnTo>
-                  <a:lnTo>
-                    <a:pt x="3795993" y="24667"/>
-                  </a:lnTo>
-                  <a:lnTo>
-                    <a:pt x="3724371" y="26286"/>
-                  </a:lnTo>
-                  <a:lnTo>
-                    <a:pt x="3652748" y="27900"/>
-                  </a:lnTo>
-                  <a:lnTo>
-                    <a:pt x="3581126" y="29512"/>
-                  </a:lnTo>
-                  <a:lnTo>
-                    <a:pt x="3509503" y="31121"/>
-                  </a:lnTo>
-                  <a:lnTo>
-                    <a:pt x="3437881" y="32726"/>
-                  </a:lnTo>
-                  <a:lnTo>
-                    <a:pt x="3366258" y="34328"/>
-                  </a:lnTo>
-                  <a:lnTo>
-                    <a:pt x="3294636" y="35926"/>
-                  </a:lnTo>
-                  <a:lnTo>
-                    <a:pt x="3223013" y="37522"/>
-                  </a:lnTo>
-                  <a:lnTo>
-                    <a:pt x="3151391" y="39114"/>
-                  </a:lnTo>
-                  <a:lnTo>
-                    <a:pt x="3079768" y="40703"/>
-                  </a:lnTo>
-                  <a:lnTo>
-                    <a:pt x="3008146" y="42289"/>
-                  </a:lnTo>
-                  <a:lnTo>
-                    <a:pt x="2936523" y="43872"/>
-                  </a:lnTo>
-                  <a:lnTo>
-                    <a:pt x="2864901" y="45451"/>
-                  </a:lnTo>
-                  <a:lnTo>
-                    <a:pt x="2793278" y="47028"/>
-                  </a:lnTo>
-                  <a:lnTo>
-                    <a:pt x="2721655" y="48601"/>
-                  </a:lnTo>
-                  <a:lnTo>
-                    <a:pt x="2650033" y="50171"/>
-                  </a:lnTo>
-                  <a:lnTo>
-                    <a:pt x="2578410" y="51738"/>
-                  </a:lnTo>
-                  <a:lnTo>
-                    <a:pt x="2506788" y="53302"/>
-                  </a:lnTo>
-                  <a:lnTo>
-                    <a:pt x="2435165" y="54862"/>
-                  </a:lnTo>
-                  <a:lnTo>
-                    <a:pt x="2363543" y="56419"/>
-                  </a:lnTo>
-                  <a:lnTo>
-                    <a:pt x="2291920" y="57974"/>
-                  </a:lnTo>
-                  <a:lnTo>
-                    <a:pt x="2220298" y="59525"/>
-                  </a:lnTo>
-                  <a:lnTo>
-                    <a:pt x="2148675" y="61073"/>
-                  </a:lnTo>
-                  <a:lnTo>
-                    <a:pt x="2077053" y="62618"/>
-                  </a:lnTo>
-                  <a:lnTo>
-                    <a:pt x="2005430" y="64160"/>
-                  </a:lnTo>
-                  <a:lnTo>
-                    <a:pt x="1933808" y="65698"/>
-                  </a:lnTo>
-                  <a:lnTo>
-                    <a:pt x="1862185" y="67234"/>
-                  </a:lnTo>
-                  <a:lnTo>
-                    <a:pt x="1790563" y="68766"/>
-                  </a:lnTo>
-                  <a:lnTo>
-                    <a:pt x="1718940" y="70296"/>
-                  </a:lnTo>
-                  <a:lnTo>
-                    <a:pt x="1647318" y="71822"/>
-                  </a:lnTo>
-                  <a:lnTo>
-                    <a:pt x="1575695" y="73345"/>
-                  </a:lnTo>
-                  <a:lnTo>
-                    <a:pt x="1504073" y="74866"/>
-                  </a:lnTo>
-                  <a:lnTo>
-                    <a:pt x="1432450" y="76383"/>
-                  </a:lnTo>
-                  <a:lnTo>
-                    <a:pt x="1360827" y="77897"/>
-                  </a:lnTo>
-                  <a:lnTo>
-                    <a:pt x="1289205" y="79408"/>
-                  </a:lnTo>
-                  <a:lnTo>
-                    <a:pt x="1217582" y="80916"/>
-                  </a:lnTo>
-                  <a:lnTo>
-                    <a:pt x="1145960" y="82421"/>
-                  </a:lnTo>
-                  <a:lnTo>
-                    <a:pt x="1074337" y="83923"/>
-                  </a:lnTo>
-                  <a:lnTo>
-                    <a:pt x="1002715" y="85422"/>
-                  </a:lnTo>
-                  <a:lnTo>
-                    <a:pt x="931092" y="86918"/>
-                  </a:lnTo>
-                  <a:lnTo>
-                    <a:pt x="859470" y="88411"/>
-                  </a:lnTo>
-                  <a:lnTo>
-                    <a:pt x="787847" y="89901"/>
-                  </a:lnTo>
-                  <a:lnTo>
-                    <a:pt x="716225" y="91387"/>
-                  </a:lnTo>
-                  <a:lnTo>
-                    <a:pt x="644602" y="92871"/>
-                  </a:lnTo>
-                  <a:lnTo>
-                    <a:pt x="572980" y="94352"/>
-                  </a:lnTo>
-                  <a:lnTo>
-                    <a:pt x="501357" y="95830"/>
-                  </a:lnTo>
-                  <a:lnTo>
-                    <a:pt x="429735" y="97305"/>
-                  </a:lnTo>
-                  <a:lnTo>
-                    <a:pt x="358112" y="98777"/>
-                  </a:lnTo>
-                  <a:lnTo>
-                    <a:pt x="286490" y="100246"/>
-                  </a:lnTo>
-                  <a:lnTo>
-                    <a:pt x="214867" y="101712"/>
-                  </a:lnTo>
-                  <a:lnTo>
-                    <a:pt x="143245" y="103175"/>
-                  </a:lnTo>
-                  <a:lnTo>
-                    <a:pt x="71622" y="104636"/>
-                  </a:lnTo>
-                  <a:lnTo>
-                    <a:pt x="0" y="106093"/>
+                    <a:pt x="4798709" y="7027"/>
+                  </a:lnTo>
+                  <a:lnTo>
+                    <a:pt x="4727086" y="13995"/>
+                  </a:lnTo>
+                  <a:lnTo>
+                    <a:pt x="4655464" y="20903"/>
+                  </a:lnTo>
+                  <a:lnTo>
+                    <a:pt x="4583841" y="27753"/>
+                  </a:lnTo>
+                  <a:lnTo>
+                    <a:pt x="4512219" y="34545"/>
+                  </a:lnTo>
+                  <a:lnTo>
+                    <a:pt x="4440596" y="41279"/>
+                  </a:lnTo>
+                  <a:lnTo>
+                    <a:pt x="4368974" y="47955"/>
+                  </a:lnTo>
+                  <a:lnTo>
+                    <a:pt x="4297351" y="54575"/>
+                  </a:lnTo>
+                  <a:lnTo>
+                    <a:pt x="4225729" y="61138"/>
+                  </a:lnTo>
+                  <a:lnTo>
+                    <a:pt x="4154106" y="67646"/>
+                  </a:lnTo>
+                  <a:lnTo>
+                    <a:pt x="4082483" y="74099"/>
+                  </a:lnTo>
+                  <a:lnTo>
+                    <a:pt x="4010861" y="80496"/>
+                  </a:lnTo>
+                  <a:lnTo>
+                    <a:pt x="3939238" y="86839"/>
+                  </a:lnTo>
+                  <a:lnTo>
+                    <a:pt x="3867616" y="93128"/>
+                  </a:lnTo>
+                  <a:lnTo>
+                    <a:pt x="3795993" y="99364"/>
+                  </a:lnTo>
+                  <a:lnTo>
+                    <a:pt x="3724371" y="105547"/>
+                  </a:lnTo>
+                  <a:lnTo>
+                    <a:pt x="3652748" y="111677"/>
+                  </a:lnTo>
+                  <a:lnTo>
+                    <a:pt x="3581126" y="117755"/>
+                  </a:lnTo>
+                  <a:lnTo>
+                    <a:pt x="3509503" y="123781"/>
+                  </a:lnTo>
+                  <a:lnTo>
+                    <a:pt x="3437881" y="129757"/>
+                  </a:lnTo>
+                  <a:lnTo>
+                    <a:pt x="3366258" y="135681"/>
+                  </a:lnTo>
+                  <a:lnTo>
+                    <a:pt x="3294636" y="141555"/>
+                  </a:lnTo>
+                  <a:lnTo>
+                    <a:pt x="3223013" y="147379"/>
+                  </a:lnTo>
+                  <a:lnTo>
+                    <a:pt x="3151391" y="153153"/>
+                  </a:lnTo>
+                  <a:lnTo>
+                    <a:pt x="3079768" y="158879"/>
+                  </a:lnTo>
+                  <a:lnTo>
+                    <a:pt x="3008146" y="164555"/>
+                  </a:lnTo>
+                  <a:lnTo>
+                    <a:pt x="2936523" y="170184"/>
+                  </a:lnTo>
+                  <a:lnTo>
+                    <a:pt x="2864901" y="175765"/>
+                  </a:lnTo>
+                  <a:lnTo>
+                    <a:pt x="2793278" y="181298"/>
+                  </a:lnTo>
+                  <a:lnTo>
+                    <a:pt x="2721655" y="186784"/>
+                  </a:lnTo>
+                  <a:lnTo>
+                    <a:pt x="2650033" y="192223"/>
+                  </a:lnTo>
+                  <a:lnTo>
+                    <a:pt x="2578410" y="197616"/>
+                  </a:lnTo>
+                  <a:lnTo>
+                    <a:pt x="2506788" y="202964"/>
+                  </a:lnTo>
+                  <a:lnTo>
+                    <a:pt x="2435165" y="208266"/>
+                  </a:lnTo>
+                  <a:lnTo>
+                    <a:pt x="2363543" y="213523"/>
+                  </a:lnTo>
+                  <a:lnTo>
+                    <a:pt x="2291920" y="218735"/>
+                  </a:lnTo>
+                  <a:lnTo>
+                    <a:pt x="2220298" y="223903"/>
+                  </a:lnTo>
+                  <a:lnTo>
+                    <a:pt x="2148675" y="229026"/>
+                  </a:lnTo>
+                  <a:lnTo>
+                    <a:pt x="2077053" y="234107"/>
+                  </a:lnTo>
+                  <a:lnTo>
+                    <a:pt x="2005430" y="239144"/>
+                  </a:lnTo>
+                  <a:lnTo>
+                    <a:pt x="1933808" y="244138"/>
+                  </a:lnTo>
+                  <a:lnTo>
+                    <a:pt x="1862185" y="249090"/>
+                  </a:lnTo>
+                  <a:lnTo>
+                    <a:pt x="1790563" y="254000"/>
+                  </a:lnTo>
+                  <a:lnTo>
+                    <a:pt x="1718940" y="258868"/>
+                  </a:lnTo>
+                  <a:lnTo>
+                    <a:pt x="1647318" y="263694"/>
+                  </a:lnTo>
+                  <a:lnTo>
+                    <a:pt x="1575695" y="268480"/>
+                  </a:lnTo>
+                  <a:lnTo>
+                    <a:pt x="1504073" y="273225"/>
+                  </a:lnTo>
+                  <a:lnTo>
+                    <a:pt x="1432450" y="277929"/>
+                  </a:lnTo>
+                  <a:lnTo>
+                    <a:pt x="1360827" y="282594"/>
+                  </a:lnTo>
+                  <a:lnTo>
+                    <a:pt x="1289205" y="287219"/>
+                  </a:lnTo>
+                  <a:lnTo>
+                    <a:pt x="1217582" y="291804"/>
+                  </a:lnTo>
+                  <a:lnTo>
+                    <a:pt x="1145960" y="296351"/>
+                  </a:lnTo>
+                  <a:lnTo>
+                    <a:pt x="1074337" y="300859"/>
+                  </a:lnTo>
+                  <a:lnTo>
+                    <a:pt x="1002715" y="305328"/>
+                  </a:lnTo>
+                  <a:lnTo>
+                    <a:pt x="931092" y="309760"/>
+                  </a:lnTo>
+                  <a:lnTo>
+                    <a:pt x="859470" y="314154"/>
+                  </a:lnTo>
+                  <a:lnTo>
+                    <a:pt x="787847" y="318510"/>
+                  </a:lnTo>
+                  <a:lnTo>
+                    <a:pt x="716225" y="322830"/>
+                  </a:lnTo>
+                  <a:lnTo>
+                    <a:pt x="644602" y="327113"/>
+                  </a:lnTo>
+                  <a:lnTo>
+                    <a:pt x="572980" y="331359"/>
+                  </a:lnTo>
+                  <a:lnTo>
+                    <a:pt x="501357" y="335569"/>
+                  </a:lnTo>
+                  <a:lnTo>
+                    <a:pt x="429735" y="339744"/>
+                  </a:lnTo>
+                  <a:lnTo>
+                    <a:pt x="358112" y="343883"/>
+                  </a:lnTo>
+                  <a:lnTo>
+                    <a:pt x="286490" y="347987"/>
+                  </a:lnTo>
+                  <a:lnTo>
+                    <a:pt x="214867" y="352056"/>
+                  </a:lnTo>
+                  <a:lnTo>
+                    <a:pt x="143245" y="356090"/>
+                  </a:lnTo>
+                  <a:lnTo>
+                    <a:pt x="71622" y="360090"/>
+                  </a:lnTo>
+                  <a:lnTo>
+                    <a:pt x="0" y="364056"/>
                   </a:lnTo>
                 </a:path>
               </a:pathLst>
@@ -3998,234 +4004,249 @@
           </p:nvSpPr>
           <p:spPr>
             <a:xfrm>
-              <a:off x="3080695" y="2073503"/>
-              <a:ext cx="5181983" cy="3193799"/>
+              <a:off x="2730939" y="2073503"/>
+              <a:ext cx="5531740" cy="3160082"/>
             </a:xfrm>
             <a:custGeom>
               <a:avLst/>
               <a:pathLst>
-                <a:path w="5181983" h="3193799">
+                <a:path w="5531740" h="3160082">
                   <a:moveTo>
                     <a:pt x="0" y="0"/>
                   </a:moveTo>
                   <a:lnTo>
-                    <a:pt x="25162" y="42265"/>
-                  </a:lnTo>
-                  <a:lnTo>
-                    <a:pt x="96784" y="158507"/>
-                  </a:lnTo>
-                  <a:lnTo>
-                    <a:pt x="168407" y="270824"/>
-                  </a:lnTo>
-                  <a:lnTo>
-                    <a:pt x="240029" y="379346"/>
-                  </a:lnTo>
-                  <a:lnTo>
-                    <a:pt x="311652" y="484203"/>
-                  </a:lnTo>
-                  <a:lnTo>
-                    <a:pt x="383274" y="585519"/>
-                  </a:lnTo>
-                  <a:lnTo>
-                    <a:pt x="454897" y="683412"/>
-                  </a:lnTo>
-                  <a:lnTo>
-                    <a:pt x="526519" y="777998"/>
-                  </a:lnTo>
-                  <a:lnTo>
-                    <a:pt x="598142" y="869390"/>
-                  </a:lnTo>
-                  <a:lnTo>
-                    <a:pt x="669764" y="957695"/>
-                  </a:lnTo>
-                  <a:lnTo>
-                    <a:pt x="741387" y="1043017"/>
-                  </a:lnTo>
-                  <a:lnTo>
-                    <a:pt x="813009" y="1125457"/>
-                  </a:lnTo>
-                  <a:lnTo>
-                    <a:pt x="884632" y="1205113"/>
-                  </a:lnTo>
-                  <a:lnTo>
-                    <a:pt x="956254" y="1282078"/>
-                  </a:lnTo>
-                  <a:lnTo>
-                    <a:pt x="1027877" y="1356444"/>
-                  </a:lnTo>
-                  <a:lnTo>
-                    <a:pt x="1099499" y="1428297"/>
-                  </a:lnTo>
-                  <a:lnTo>
-                    <a:pt x="1171122" y="1497724"/>
-                  </a:lnTo>
-                  <a:lnTo>
-                    <a:pt x="1242745" y="1564806"/>
-                  </a:lnTo>
-                  <a:lnTo>
-                    <a:pt x="1314367" y="1629622"/>
-                  </a:lnTo>
-                  <a:lnTo>
-                    <a:pt x="1385990" y="1692248"/>
-                  </a:lnTo>
-                  <a:lnTo>
-                    <a:pt x="1457612" y="1752759"/>
-                  </a:lnTo>
-                  <a:lnTo>
-                    <a:pt x="1529235" y="1811227"/>
-                  </a:lnTo>
-                  <a:lnTo>
-                    <a:pt x="1600857" y="1867719"/>
-                  </a:lnTo>
-                  <a:lnTo>
-                    <a:pt x="1672480" y="1922304"/>
-                  </a:lnTo>
-                  <a:lnTo>
-                    <a:pt x="1744102" y="1975044"/>
-                  </a:lnTo>
-                  <a:lnTo>
-                    <a:pt x="1815725" y="2026004"/>
-                  </a:lnTo>
-                  <a:lnTo>
-                    <a:pt x="1887347" y="2075242"/>
-                  </a:lnTo>
-                  <a:lnTo>
-                    <a:pt x="1958970" y="2122817"/>
-                  </a:lnTo>
-                  <a:lnTo>
-                    <a:pt x="2030592" y="2168785"/>
-                  </a:lnTo>
-                  <a:lnTo>
-                    <a:pt x="2102215" y="2213200"/>
-                  </a:lnTo>
-                  <a:lnTo>
-                    <a:pt x="2173837" y="2256115"/>
-                  </a:lnTo>
-                  <a:lnTo>
-                    <a:pt x="2245460" y="2297581"/>
-                  </a:lnTo>
-                  <a:lnTo>
-                    <a:pt x="2317082" y="2337646"/>
-                  </a:lnTo>
-                  <a:lnTo>
-                    <a:pt x="2388705" y="2376357"/>
-                  </a:lnTo>
-                  <a:lnTo>
-                    <a:pt x="2460327" y="2413762"/>
-                  </a:lnTo>
-                  <a:lnTo>
-                    <a:pt x="2531950" y="2449902"/>
-                  </a:lnTo>
-                  <a:lnTo>
-                    <a:pt x="2603573" y="2484822"/>
-                  </a:lnTo>
-                  <a:lnTo>
-                    <a:pt x="2675195" y="2518563"/>
-                  </a:lnTo>
-                  <a:lnTo>
-                    <a:pt x="2746818" y="2551164"/>
-                  </a:lnTo>
-                  <a:lnTo>
-                    <a:pt x="2818440" y="2582664"/>
-                  </a:lnTo>
-                  <a:lnTo>
-                    <a:pt x="2890063" y="2613099"/>
-                  </a:lnTo>
-                  <a:lnTo>
-                    <a:pt x="2961685" y="2642507"/>
-                  </a:lnTo>
-                  <a:lnTo>
-                    <a:pt x="3033308" y="2670922"/>
-                  </a:lnTo>
-                  <a:lnTo>
-                    <a:pt x="3104930" y="2698376"/>
-                  </a:lnTo>
-                  <a:lnTo>
-                    <a:pt x="3176553" y="2724904"/>
-                  </a:lnTo>
-                  <a:lnTo>
-                    <a:pt x="3248175" y="2750535"/>
-                  </a:lnTo>
-                  <a:lnTo>
-                    <a:pt x="3319798" y="2775301"/>
-                  </a:lnTo>
-                  <a:lnTo>
-                    <a:pt x="3391420" y="2799230"/>
-                  </a:lnTo>
-                  <a:lnTo>
-                    <a:pt x="3463043" y="2822351"/>
-                  </a:lnTo>
-                  <a:lnTo>
-                    <a:pt x="3534665" y="2844690"/>
-                  </a:lnTo>
-                  <a:lnTo>
-                    <a:pt x="3606288" y="2866276"/>
-                  </a:lnTo>
-                  <a:lnTo>
-                    <a:pt x="3677910" y="2887132"/>
-                  </a:lnTo>
-                  <a:lnTo>
-                    <a:pt x="3749533" y="2907284"/>
-                  </a:lnTo>
-                  <a:lnTo>
-                    <a:pt x="3821155" y="2926755"/>
-                  </a:lnTo>
-                  <a:lnTo>
-                    <a:pt x="3892778" y="2945568"/>
-                  </a:lnTo>
-                  <a:lnTo>
-                    <a:pt x="3964401" y="2963746"/>
-                  </a:lnTo>
-                  <a:lnTo>
-                    <a:pt x="4036023" y="2981310"/>
-                  </a:lnTo>
-                  <a:lnTo>
-                    <a:pt x="4107646" y="2998281"/>
-                  </a:lnTo>
-                  <a:lnTo>
-                    <a:pt x="4179268" y="3014679"/>
-                  </a:lnTo>
-                  <a:lnTo>
-                    <a:pt x="4250891" y="3030522"/>
-                  </a:lnTo>
-                  <a:lnTo>
-                    <a:pt x="4322513" y="3045831"/>
-                  </a:lnTo>
-                  <a:lnTo>
-                    <a:pt x="4394136" y="3060622"/>
-                  </a:lnTo>
-                  <a:lnTo>
-                    <a:pt x="4465758" y="3074914"/>
-                  </a:lnTo>
-                  <a:lnTo>
-                    <a:pt x="4537381" y="3088723"/>
-                  </a:lnTo>
-                  <a:lnTo>
-                    <a:pt x="4609003" y="3102066"/>
-                  </a:lnTo>
-                  <a:lnTo>
-                    <a:pt x="4680626" y="3114958"/>
-                  </a:lnTo>
-                  <a:lnTo>
-                    <a:pt x="4752248" y="3127414"/>
-                  </a:lnTo>
-                  <a:lnTo>
-                    <a:pt x="4823871" y="3139450"/>
-                  </a:lnTo>
-                  <a:lnTo>
-                    <a:pt x="4895493" y="3151079"/>
-                  </a:lnTo>
-                  <a:lnTo>
-                    <a:pt x="4967116" y="3162316"/>
-                  </a:lnTo>
-                  <a:lnTo>
-                    <a:pt x="5038738" y="3173173"/>
-                  </a:lnTo>
-                  <a:lnTo>
-                    <a:pt x="5110361" y="3183663"/>
-                  </a:lnTo>
-                  <a:lnTo>
-                    <a:pt x="5181983" y="3193799"/>
+                    <a:pt x="16805" y="25352"/>
+                  </a:lnTo>
+                  <a:lnTo>
+                    <a:pt x="88428" y="130128"/>
+                  </a:lnTo>
+                  <a:lnTo>
+                    <a:pt x="160050" y="231729"/>
+                  </a:lnTo>
+                  <a:lnTo>
+                    <a:pt x="231673" y="330252"/>
+                  </a:lnTo>
+                  <a:lnTo>
+                    <a:pt x="303295" y="425790"/>
+                  </a:lnTo>
+                  <a:lnTo>
+                    <a:pt x="374918" y="518433"/>
+                  </a:lnTo>
+                  <a:lnTo>
+                    <a:pt x="446540" y="608270"/>
+                  </a:lnTo>
+                  <a:lnTo>
+                    <a:pt x="518163" y="695385"/>
+                  </a:lnTo>
+                  <a:lnTo>
+                    <a:pt x="589786" y="779861"/>
+                  </a:lnTo>
+                  <a:lnTo>
+                    <a:pt x="661408" y="861778"/>
+                  </a:lnTo>
+                  <a:lnTo>
+                    <a:pt x="733031" y="941213"/>
+                  </a:lnTo>
+                  <a:lnTo>
+                    <a:pt x="804653" y="1018241"/>
+                  </a:lnTo>
+                  <a:lnTo>
+                    <a:pt x="876276" y="1092936"/>
+                  </a:lnTo>
+                  <a:lnTo>
+                    <a:pt x="947898" y="1165368"/>
+                  </a:lnTo>
+                  <a:lnTo>
+                    <a:pt x="1019521" y="1235605"/>
+                  </a:lnTo>
+                  <a:lnTo>
+                    <a:pt x="1091143" y="1303715"/>
+                  </a:lnTo>
+                  <a:lnTo>
+                    <a:pt x="1162766" y="1369761"/>
+                  </a:lnTo>
+                  <a:lnTo>
+                    <a:pt x="1234388" y="1433806"/>
+                  </a:lnTo>
+                  <a:lnTo>
+                    <a:pt x="1306011" y="1495911"/>
+                  </a:lnTo>
+                  <a:lnTo>
+                    <a:pt x="1377633" y="1556134"/>
+                  </a:lnTo>
+                  <a:lnTo>
+                    <a:pt x="1449256" y="1614533"/>
+                  </a:lnTo>
+                  <a:lnTo>
+                    <a:pt x="1520878" y="1671162"/>
+                  </a:lnTo>
+                  <a:lnTo>
+                    <a:pt x="1592501" y="1726076"/>
+                  </a:lnTo>
+                  <a:lnTo>
+                    <a:pt x="1664123" y="1779326"/>
+                  </a:lnTo>
+                  <a:lnTo>
+                    <a:pt x="1735746" y="1830963"/>
+                  </a:lnTo>
+                  <a:lnTo>
+                    <a:pt x="1807368" y="1881036"/>
+                  </a:lnTo>
+                  <a:lnTo>
+                    <a:pt x="1878991" y="1929592"/>
+                  </a:lnTo>
+                  <a:lnTo>
+                    <a:pt x="1950614" y="1976676"/>
+                  </a:lnTo>
+                  <a:lnTo>
+                    <a:pt x="2022236" y="2022334"/>
+                  </a:lnTo>
+                  <a:lnTo>
+                    <a:pt x="2093859" y="2066609"/>
+                  </a:lnTo>
+                  <a:lnTo>
+                    <a:pt x="2165481" y="2109542"/>
+                  </a:lnTo>
+                  <a:lnTo>
+                    <a:pt x="2237104" y="2151175"/>
+                  </a:lnTo>
+                  <a:lnTo>
+                    <a:pt x="2308726" y="2191547"/>
+                  </a:lnTo>
+                  <a:lnTo>
+                    <a:pt x="2380349" y="2230695"/>
+                  </a:lnTo>
+                  <a:lnTo>
+                    <a:pt x="2451971" y="2268657"/>
+                  </a:lnTo>
+                  <a:lnTo>
+                    <a:pt x="2523594" y="2305470"/>
+                  </a:lnTo>
+                  <a:lnTo>
+                    <a:pt x="2595216" y="2341167"/>
+                  </a:lnTo>
+                  <a:lnTo>
+                    <a:pt x="2666839" y="2375782"/>
+                  </a:lnTo>
+                  <a:lnTo>
+                    <a:pt x="2738461" y="2409349"/>
+                  </a:lnTo>
+                  <a:lnTo>
+                    <a:pt x="2810084" y="2441899"/>
+                  </a:lnTo>
+                  <a:lnTo>
+                    <a:pt x="2881706" y="2473462"/>
+                  </a:lnTo>
+                  <a:lnTo>
+                    <a:pt x="2953329" y="2504070"/>
+                  </a:lnTo>
+                  <a:lnTo>
+                    <a:pt x="3024951" y="2533750"/>
+                  </a:lnTo>
+                  <a:lnTo>
+                    <a:pt x="3096574" y="2562531"/>
+                  </a:lnTo>
+                  <a:lnTo>
+                    <a:pt x="3168196" y="2590440"/>
+                  </a:lnTo>
+                  <a:lnTo>
+                    <a:pt x="3239819" y="2617504"/>
+                  </a:lnTo>
+                  <a:lnTo>
+                    <a:pt x="3311442" y="2643747"/>
+                  </a:lnTo>
+                  <a:lnTo>
+                    <a:pt x="3383064" y="2669196"/>
+                  </a:lnTo>
+                  <a:lnTo>
+                    <a:pt x="3454687" y="2693873"/>
+                  </a:lnTo>
+                  <a:lnTo>
+                    <a:pt x="3526309" y="2717803"/>
+                  </a:lnTo>
+                  <a:lnTo>
+                    <a:pt x="3597932" y="2741008"/>
+                  </a:lnTo>
+                  <a:lnTo>
+                    <a:pt x="3669554" y="2763510"/>
+                  </a:lnTo>
+                  <a:lnTo>
+                    <a:pt x="3741177" y="2785330"/>
+                  </a:lnTo>
+                  <a:lnTo>
+                    <a:pt x="3812799" y="2806490"/>
+                  </a:lnTo>
+                  <a:lnTo>
+                    <a:pt x="3884422" y="2827008"/>
+                  </a:lnTo>
+                  <a:lnTo>
+                    <a:pt x="3956044" y="2846904"/>
+                  </a:lnTo>
+                  <a:lnTo>
+                    <a:pt x="4027667" y="2866198"/>
+                  </a:lnTo>
+                  <a:lnTo>
+                    <a:pt x="4099289" y="2884907"/>
+                  </a:lnTo>
+                  <a:lnTo>
+                    <a:pt x="4170912" y="2903050"/>
+                  </a:lnTo>
+                  <a:lnTo>
+                    <a:pt x="4242534" y="2920642"/>
+                  </a:lnTo>
+                  <a:lnTo>
+                    <a:pt x="4314157" y="2937702"/>
+                  </a:lnTo>
+                  <a:lnTo>
+                    <a:pt x="4385779" y="2954245"/>
+                  </a:lnTo>
+                  <a:lnTo>
+                    <a:pt x="4457402" y="2970287"/>
+                  </a:lnTo>
+                  <a:lnTo>
+                    <a:pt x="4529024" y="2985842"/>
+                  </a:lnTo>
+                  <a:lnTo>
+                    <a:pt x="4600647" y="3000927"/>
+                  </a:lnTo>
+                  <a:lnTo>
+                    <a:pt x="4672270" y="3015554"/>
+                  </a:lnTo>
+                  <a:lnTo>
+                    <a:pt x="4743892" y="3029739"/>
+                  </a:lnTo>
+                  <a:lnTo>
+                    <a:pt x="4815515" y="3043493"/>
+                  </a:lnTo>
+                  <a:lnTo>
+                    <a:pt x="4887137" y="3056831"/>
+                  </a:lnTo>
+                  <a:lnTo>
+                    <a:pt x="4958760" y="3069765"/>
+                  </a:lnTo>
+                  <a:lnTo>
+                    <a:pt x="5030382" y="3082307"/>
+                  </a:lnTo>
+                  <a:lnTo>
+                    <a:pt x="5102005" y="3094469"/>
+                  </a:lnTo>
+                  <a:lnTo>
+                    <a:pt x="5173627" y="3106262"/>
+                  </a:lnTo>
+                  <a:lnTo>
+                    <a:pt x="5245250" y="3117699"/>
+                  </a:lnTo>
+                  <a:lnTo>
+                    <a:pt x="5316872" y="3128788"/>
+                  </a:lnTo>
+                  <a:lnTo>
+                    <a:pt x="5388495" y="3139542"/>
+                  </a:lnTo>
+                  <a:lnTo>
+                    <a:pt x="5460117" y="3149970"/>
+                  </a:lnTo>
+                  <a:lnTo>
+                    <a:pt x="5531740" y="3160082"/>
                   </a:lnTo>
                 </a:path>
               </a:pathLst>
@@ -4965,7 +4986,7 @@
                   <a:latin typeface="Helvetica"/>
                   <a:cs typeface="Helvetica"/>
                 </a:rPr>
-                <a:t>subHR per 1 mL/min: 0.96 (0.91-1.00)  |  per IQR (Δ = 18.2): 0.45 (0.19-1.05)  |  IQR: [-11.5, 6.7]</a:t>
+                <a:t>subHR per 1 mL/min: 0.96 (0.91-1.01)  |  per IQR (Δ = 18.2): 0.49 (0.19-1.22)  |  IQR: [-11.5, 6.7]</a:t>
               </a:r>
             </a:p>
           </p:txBody>

--- a/docs/plots/carbo/jx_carbo_linsubhr_egfrdisc_throm2.pptx
+++ b/docs/plots/carbo/jx_carbo_linsubhr_egfrdisc_throm2.pptx
@@ -3003,470 +3003,476 @@
           <p:spPr>
             <a:xfrm>
               <a:off x="1172049" y="2073503"/>
-              <a:ext cx="7090630" cy="3386481"/>
+              <a:ext cx="7090630" cy="3364405"/>
             </a:xfrm>
             <a:custGeom>
               <a:avLst/>
               <a:pathLst>
-                <a:path w="7090630" h="3386481">
+                <a:path w="7090630" h="3364405">
                   <a:moveTo>
-                    <a:pt x="3432938" y="0"/>
+                    <a:pt x="3278413" y="0"/>
                   </a:moveTo>
                   <a:lnTo>
-                    <a:pt x="3437881" y="17362"/>
-                  </a:lnTo>
-                  <a:lnTo>
-                    <a:pt x="3509503" y="251928"/>
-                  </a:lnTo>
-                  <a:lnTo>
-                    <a:pt x="3581126" y="470621"/>
-                  </a:lnTo>
-                  <a:lnTo>
-                    <a:pt x="3652748" y="674515"/>
-                  </a:lnTo>
-                  <a:lnTo>
-                    <a:pt x="3724371" y="864612"/>
-                  </a:lnTo>
-                  <a:lnTo>
-                    <a:pt x="3795993" y="1041846"/>
-                  </a:lnTo>
-                  <a:lnTo>
-                    <a:pt x="3867616" y="1207086"/>
-                  </a:lnTo>
-                  <a:lnTo>
-                    <a:pt x="3939238" y="1361145"/>
-                  </a:lnTo>
-                  <a:lnTo>
-                    <a:pt x="4010861" y="1504779"/>
-                  </a:lnTo>
-                  <a:lnTo>
-                    <a:pt x="4082483" y="1638693"/>
-                  </a:lnTo>
-                  <a:lnTo>
-                    <a:pt x="4154106" y="1763545"/>
-                  </a:lnTo>
-                  <a:lnTo>
-                    <a:pt x="4225729" y="1879949"/>
-                  </a:lnTo>
-                  <a:lnTo>
-                    <a:pt x="4297351" y="1988476"/>
-                  </a:lnTo>
-                  <a:lnTo>
-                    <a:pt x="4368974" y="2089659"/>
-                  </a:lnTo>
-                  <a:lnTo>
-                    <a:pt x="4440596" y="2183995"/>
-                  </a:lnTo>
-                  <a:lnTo>
-                    <a:pt x="4512219" y="2271948"/>
-                  </a:lnTo>
-                  <a:lnTo>
-                    <a:pt x="4583841" y="2353949"/>
-                  </a:lnTo>
-                  <a:lnTo>
-                    <a:pt x="4655464" y="2430401"/>
-                  </a:lnTo>
-                  <a:lnTo>
-                    <a:pt x="4727086" y="2501679"/>
-                  </a:lnTo>
-                  <a:lnTo>
-                    <a:pt x="4798709" y="2568135"/>
-                  </a:lnTo>
-                  <a:lnTo>
-                    <a:pt x="4870331" y="2630093"/>
-                  </a:lnTo>
-                  <a:lnTo>
-                    <a:pt x="4941954" y="2650096"/>
-                  </a:lnTo>
-                  <a:lnTo>
-                    <a:pt x="5013576" y="2642947"/>
-                  </a:lnTo>
-                  <a:lnTo>
-                    <a:pt x="5085199" y="2635737"/>
-                  </a:lnTo>
-                  <a:lnTo>
-                    <a:pt x="5156821" y="2628465"/>
-                  </a:lnTo>
-                  <a:lnTo>
-                    <a:pt x="5228444" y="2621131"/>
-                  </a:lnTo>
-                  <a:lnTo>
-                    <a:pt x="5300066" y="2613735"/>
-                  </a:lnTo>
-                  <a:lnTo>
-                    <a:pt x="5371689" y="2606274"/>
-                  </a:lnTo>
-                  <a:lnTo>
-                    <a:pt x="5443311" y="2598750"/>
-                  </a:lnTo>
-                  <a:lnTo>
-                    <a:pt x="5514934" y="2591161"/>
-                  </a:lnTo>
-                  <a:lnTo>
-                    <a:pt x="5586557" y="2583507"/>
-                  </a:lnTo>
-                  <a:lnTo>
-                    <a:pt x="5658179" y="2575787"/>
-                  </a:lnTo>
-                  <a:lnTo>
-                    <a:pt x="5729802" y="2568002"/>
-                  </a:lnTo>
-                  <a:lnTo>
-                    <a:pt x="5801424" y="2560149"/>
-                  </a:lnTo>
-                  <a:lnTo>
-                    <a:pt x="5873047" y="2552229"/>
-                  </a:lnTo>
-                  <a:lnTo>
-                    <a:pt x="5944669" y="2544242"/>
-                  </a:lnTo>
-                  <a:lnTo>
-                    <a:pt x="6016292" y="2536185"/>
-                  </a:lnTo>
-                  <a:lnTo>
-                    <a:pt x="6087914" y="2528060"/>
-                  </a:lnTo>
-                  <a:lnTo>
-                    <a:pt x="6159537" y="2519865"/>
-                  </a:lnTo>
-                  <a:lnTo>
-                    <a:pt x="6231159" y="2511600"/>
-                  </a:lnTo>
-                  <a:lnTo>
-                    <a:pt x="6302782" y="2503263"/>
-                  </a:lnTo>
-                  <a:lnTo>
-                    <a:pt x="6374404" y="2494856"/>
-                  </a:lnTo>
-                  <a:lnTo>
-                    <a:pt x="6446027" y="2486376"/>
-                  </a:lnTo>
-                  <a:lnTo>
-                    <a:pt x="6517649" y="2477823"/>
-                  </a:lnTo>
-                  <a:lnTo>
-                    <a:pt x="6589272" y="2469198"/>
-                  </a:lnTo>
-                  <a:lnTo>
-                    <a:pt x="6660894" y="2460498"/>
-                  </a:lnTo>
-                  <a:lnTo>
-                    <a:pt x="6732517" y="2451724"/>
-                  </a:lnTo>
-                  <a:lnTo>
-                    <a:pt x="6804139" y="2442874"/>
-                  </a:lnTo>
-                  <a:lnTo>
-                    <a:pt x="6875762" y="2433948"/>
-                  </a:lnTo>
-                  <a:lnTo>
-                    <a:pt x="6947385" y="2424946"/>
-                  </a:lnTo>
-                  <a:lnTo>
-                    <a:pt x="7019007" y="2415867"/>
-                  </a:lnTo>
-                  <a:lnTo>
-                    <a:pt x="7090630" y="2406710"/>
-                  </a:lnTo>
-                  <a:lnTo>
-                    <a:pt x="7090630" y="3386481"/>
-                  </a:lnTo>
-                  <a:lnTo>
-                    <a:pt x="7019007" y="3379421"/>
-                  </a:lnTo>
-                  <a:lnTo>
-                    <a:pt x="6947385" y="3371849"/>
-                  </a:lnTo>
-                  <a:lnTo>
-                    <a:pt x="6875762" y="3363728"/>
-                  </a:lnTo>
-                  <a:lnTo>
-                    <a:pt x="6804139" y="3355017"/>
-                  </a:lnTo>
-                  <a:lnTo>
-                    <a:pt x="6732517" y="3345674"/>
-                  </a:lnTo>
-                  <a:lnTo>
-                    <a:pt x="6660894" y="3335652"/>
-                  </a:lnTo>
-                  <a:lnTo>
-                    <a:pt x="6589272" y="3324904"/>
-                  </a:lnTo>
-                  <a:lnTo>
-                    <a:pt x="6517649" y="3313375"/>
-                  </a:lnTo>
-                  <a:lnTo>
-                    <a:pt x="6446027" y="3301009"/>
-                  </a:lnTo>
-                  <a:lnTo>
-                    <a:pt x="6374404" y="3287746"/>
-                  </a:lnTo>
-                  <a:lnTo>
-                    <a:pt x="6302782" y="3273520"/>
-                  </a:lnTo>
-                  <a:lnTo>
-                    <a:pt x="6231159" y="3258262"/>
-                  </a:lnTo>
-                  <a:lnTo>
-                    <a:pt x="6159537" y="3241896"/>
-                  </a:lnTo>
-                  <a:lnTo>
-                    <a:pt x="6087914" y="3224343"/>
-                  </a:lnTo>
-                  <a:lnTo>
-                    <a:pt x="6016292" y="3205515"/>
-                  </a:lnTo>
-                  <a:lnTo>
-                    <a:pt x="5944669" y="3185321"/>
-                  </a:lnTo>
-                  <a:lnTo>
-                    <a:pt x="5873047" y="3163662"/>
-                  </a:lnTo>
-                  <a:lnTo>
-                    <a:pt x="5801424" y="3140430"/>
-                  </a:lnTo>
-                  <a:lnTo>
-                    <a:pt x="5729802" y="3115512"/>
-                  </a:lnTo>
-                  <a:lnTo>
-                    <a:pt x="5658179" y="3088785"/>
-                  </a:lnTo>
-                  <a:lnTo>
-                    <a:pt x="5586557" y="3060119"/>
-                  </a:lnTo>
-                  <a:lnTo>
-                    <a:pt x="5514934" y="3029372"/>
-                  </a:lnTo>
-                  <a:lnTo>
-                    <a:pt x="5443311" y="2996394"/>
-                  </a:lnTo>
-                  <a:lnTo>
-                    <a:pt x="5371689" y="2961021"/>
-                  </a:lnTo>
-                  <a:lnTo>
-                    <a:pt x="5300066" y="2923082"/>
-                  </a:lnTo>
-                  <a:lnTo>
-                    <a:pt x="5228444" y="2882389"/>
-                  </a:lnTo>
-                  <a:lnTo>
-                    <a:pt x="5156821" y="2838742"/>
-                  </a:lnTo>
-                  <a:lnTo>
-                    <a:pt x="5085199" y="2791928"/>
-                  </a:lnTo>
-                  <a:lnTo>
-                    <a:pt x="5013576" y="2741715"/>
-                  </a:lnTo>
-                  <a:lnTo>
-                    <a:pt x="4941954" y="2687859"/>
-                  </a:lnTo>
-                  <a:lnTo>
-                    <a:pt x="4870331" y="2657183"/>
-                  </a:lnTo>
-                  <a:lnTo>
-                    <a:pt x="4798709" y="2664211"/>
-                  </a:lnTo>
-                  <a:lnTo>
-                    <a:pt x="4727086" y="2671179"/>
-                  </a:lnTo>
-                  <a:lnTo>
-                    <a:pt x="4655464" y="2678087"/>
-                  </a:lnTo>
-                  <a:lnTo>
-                    <a:pt x="4583841" y="2684937"/>
-                  </a:lnTo>
-                  <a:lnTo>
-                    <a:pt x="4512219" y="2691729"/>
-                  </a:lnTo>
-                  <a:lnTo>
-                    <a:pt x="4440596" y="2698462"/>
-                  </a:lnTo>
-                  <a:lnTo>
-                    <a:pt x="4368974" y="2705139"/>
-                  </a:lnTo>
-                  <a:lnTo>
-                    <a:pt x="4297351" y="2711759"/>
-                  </a:lnTo>
-                  <a:lnTo>
-                    <a:pt x="4225729" y="2718322"/>
-                  </a:lnTo>
-                  <a:lnTo>
-                    <a:pt x="4154106" y="2724830"/>
-                  </a:lnTo>
-                  <a:lnTo>
-                    <a:pt x="4082483" y="2731282"/>
-                  </a:lnTo>
-                  <a:lnTo>
-                    <a:pt x="4010861" y="2737680"/>
-                  </a:lnTo>
-                  <a:lnTo>
-                    <a:pt x="3939238" y="2744023"/>
-                  </a:lnTo>
-                  <a:lnTo>
-                    <a:pt x="3867616" y="2750312"/>
-                  </a:lnTo>
-                  <a:lnTo>
-                    <a:pt x="3795993" y="2756548"/>
-                  </a:lnTo>
-                  <a:lnTo>
-                    <a:pt x="3724371" y="2762731"/>
-                  </a:lnTo>
-                  <a:lnTo>
-                    <a:pt x="3652748" y="2768861"/>
-                  </a:lnTo>
-                  <a:lnTo>
-                    <a:pt x="3581126" y="2774939"/>
-                  </a:lnTo>
-                  <a:lnTo>
-                    <a:pt x="3509503" y="2780965"/>
-                  </a:lnTo>
-                  <a:lnTo>
-                    <a:pt x="3437881" y="2786940"/>
-                  </a:lnTo>
-                  <a:lnTo>
-                    <a:pt x="3366258" y="2792865"/>
-                  </a:lnTo>
-                  <a:lnTo>
-                    <a:pt x="3294636" y="2798739"/>
-                  </a:lnTo>
-                  <a:lnTo>
-                    <a:pt x="3223013" y="2804563"/>
-                  </a:lnTo>
-                  <a:lnTo>
-                    <a:pt x="3151391" y="2810337"/>
-                  </a:lnTo>
-                  <a:lnTo>
-                    <a:pt x="3079768" y="2816063"/>
-                  </a:lnTo>
-                  <a:lnTo>
-                    <a:pt x="3008146" y="2821739"/>
-                  </a:lnTo>
-                  <a:lnTo>
-                    <a:pt x="2936523" y="2827368"/>
-                  </a:lnTo>
-                  <a:lnTo>
-                    <a:pt x="2864901" y="2832948"/>
-                  </a:lnTo>
-                  <a:lnTo>
-                    <a:pt x="2793278" y="2838482"/>
-                  </a:lnTo>
-                  <a:lnTo>
-                    <a:pt x="2721655" y="2843968"/>
-                  </a:lnTo>
-                  <a:lnTo>
-                    <a:pt x="2650033" y="2849407"/>
-                  </a:lnTo>
-                  <a:lnTo>
-                    <a:pt x="2578410" y="2854800"/>
-                  </a:lnTo>
-                  <a:lnTo>
-                    <a:pt x="2506788" y="2860148"/>
-                  </a:lnTo>
-                  <a:lnTo>
-                    <a:pt x="2435165" y="2865450"/>
-                  </a:lnTo>
-                  <a:lnTo>
-                    <a:pt x="2363543" y="2870707"/>
-                  </a:lnTo>
-                  <a:lnTo>
-                    <a:pt x="2291920" y="2875919"/>
-                  </a:lnTo>
-                  <a:lnTo>
-                    <a:pt x="2220298" y="2881086"/>
-                  </a:lnTo>
-                  <a:lnTo>
-                    <a:pt x="2148675" y="2886210"/>
-                  </a:lnTo>
-                  <a:lnTo>
-                    <a:pt x="2077053" y="2891291"/>
-                  </a:lnTo>
-                  <a:lnTo>
-                    <a:pt x="2005430" y="2896328"/>
-                  </a:lnTo>
-                  <a:lnTo>
-                    <a:pt x="1933808" y="2901322"/>
-                  </a:lnTo>
-                  <a:lnTo>
-                    <a:pt x="1862185" y="2906274"/>
-                  </a:lnTo>
-                  <a:lnTo>
-                    <a:pt x="1790563" y="2911184"/>
-                  </a:lnTo>
-                  <a:lnTo>
-                    <a:pt x="1718940" y="2916052"/>
-                  </a:lnTo>
-                  <a:lnTo>
-                    <a:pt x="1647318" y="2920878"/>
-                  </a:lnTo>
-                  <a:lnTo>
-                    <a:pt x="1575695" y="2925664"/>
-                  </a:lnTo>
-                  <a:lnTo>
-                    <a:pt x="1504073" y="2930409"/>
-                  </a:lnTo>
-                  <a:lnTo>
-                    <a:pt x="1432450" y="2935113"/>
-                  </a:lnTo>
-                  <a:lnTo>
-                    <a:pt x="1360827" y="2939778"/>
-                  </a:lnTo>
-                  <a:lnTo>
-                    <a:pt x="1289205" y="2944403"/>
-                  </a:lnTo>
-                  <a:lnTo>
-                    <a:pt x="1217582" y="2948988"/>
-                  </a:lnTo>
-                  <a:lnTo>
-                    <a:pt x="1145960" y="2953535"/>
-                  </a:lnTo>
-                  <a:lnTo>
-                    <a:pt x="1074337" y="2958043"/>
-                  </a:lnTo>
-                  <a:lnTo>
-                    <a:pt x="1002715" y="2962512"/>
-                  </a:lnTo>
-                  <a:lnTo>
-                    <a:pt x="931092" y="2966944"/>
-                  </a:lnTo>
-                  <a:lnTo>
-                    <a:pt x="859470" y="2971338"/>
-                  </a:lnTo>
-                  <a:lnTo>
-                    <a:pt x="787847" y="2975694"/>
-                  </a:lnTo>
-                  <a:lnTo>
-                    <a:pt x="716225" y="2980014"/>
-                  </a:lnTo>
-                  <a:lnTo>
-                    <a:pt x="644602" y="2984297"/>
-                  </a:lnTo>
-                  <a:lnTo>
-                    <a:pt x="572980" y="2988543"/>
-                  </a:lnTo>
-                  <a:lnTo>
-                    <a:pt x="501357" y="2992753"/>
-                  </a:lnTo>
-                  <a:lnTo>
-                    <a:pt x="429735" y="2996928"/>
-                  </a:lnTo>
-                  <a:lnTo>
-                    <a:pt x="358112" y="3001067"/>
-                  </a:lnTo>
-                  <a:lnTo>
-                    <a:pt x="286490" y="3005171"/>
-                  </a:lnTo>
-                  <a:lnTo>
-                    <a:pt x="214867" y="3009239"/>
-                  </a:lnTo>
-                  <a:lnTo>
-                    <a:pt x="143245" y="3013274"/>
-                  </a:lnTo>
-                  <a:lnTo>
-                    <a:pt x="71622" y="3017274"/>
-                  </a:lnTo>
-                  <a:lnTo>
-                    <a:pt x="0" y="3021240"/>
+                    <a:pt x="3294636" y="50876"/>
+                  </a:lnTo>
+                  <a:lnTo>
+                    <a:pt x="3366258" y="261701"/>
+                  </a:lnTo>
+                  <a:lnTo>
+                    <a:pt x="3437881" y="459579"/>
+                  </a:lnTo>
+                  <a:lnTo>
+                    <a:pt x="3509503" y="645304"/>
+                  </a:lnTo>
+                  <a:lnTo>
+                    <a:pt x="3581126" y="819623"/>
+                  </a:lnTo>
+                  <a:lnTo>
+                    <a:pt x="3652748" y="983237"/>
+                  </a:lnTo>
+                  <a:lnTo>
+                    <a:pt x="3724371" y="1136802"/>
+                  </a:lnTo>
+                  <a:lnTo>
+                    <a:pt x="3795993" y="1280937"/>
+                  </a:lnTo>
+                  <a:lnTo>
+                    <a:pt x="3867616" y="1416220"/>
+                  </a:lnTo>
+                  <a:lnTo>
+                    <a:pt x="3939238" y="1543194"/>
+                  </a:lnTo>
+                  <a:lnTo>
+                    <a:pt x="4010861" y="1662370"/>
+                  </a:lnTo>
+                  <a:lnTo>
+                    <a:pt x="4082483" y="1774228"/>
+                  </a:lnTo>
+                  <a:lnTo>
+                    <a:pt x="4154106" y="1879216"/>
+                  </a:lnTo>
+                  <a:lnTo>
+                    <a:pt x="4225729" y="1977756"/>
+                  </a:lnTo>
+                  <a:lnTo>
+                    <a:pt x="4297351" y="2070244"/>
+                  </a:lnTo>
+                  <a:lnTo>
+                    <a:pt x="4368974" y="2157053"/>
+                  </a:lnTo>
+                  <a:lnTo>
+                    <a:pt x="4440596" y="2238530"/>
+                  </a:lnTo>
+                  <a:lnTo>
+                    <a:pt x="4512219" y="2315003"/>
+                  </a:lnTo>
+                  <a:lnTo>
+                    <a:pt x="4583841" y="2386780"/>
+                  </a:lnTo>
+                  <a:lnTo>
+                    <a:pt x="4655464" y="2454149"/>
+                  </a:lnTo>
+                  <a:lnTo>
+                    <a:pt x="4727086" y="2517380"/>
+                  </a:lnTo>
+                  <a:lnTo>
+                    <a:pt x="4798709" y="2576728"/>
+                  </a:lnTo>
+                  <a:lnTo>
+                    <a:pt x="4870331" y="2632432"/>
+                  </a:lnTo>
+                  <a:lnTo>
+                    <a:pt x="4941954" y="2651376"/>
+                  </a:lnTo>
+                  <a:lnTo>
+                    <a:pt x="5013576" y="2646423"/>
+                  </a:lnTo>
+                  <a:lnTo>
+                    <a:pt x="5085199" y="2641440"/>
+                  </a:lnTo>
+                  <a:lnTo>
+                    <a:pt x="5156821" y="2636428"/>
+                  </a:lnTo>
+                  <a:lnTo>
+                    <a:pt x="5228444" y="2631386"/>
+                  </a:lnTo>
+                  <a:lnTo>
+                    <a:pt x="5300066" y="2626314"/>
+                  </a:lnTo>
+                  <a:lnTo>
+                    <a:pt x="5371689" y="2621212"/>
+                  </a:lnTo>
+                  <a:lnTo>
+                    <a:pt x="5443311" y="2616080"/>
+                  </a:lnTo>
+                  <a:lnTo>
+                    <a:pt x="5514934" y="2610917"/>
+                  </a:lnTo>
+                  <a:lnTo>
+                    <a:pt x="5586557" y="2605723"/>
+                  </a:lnTo>
+                  <a:lnTo>
+                    <a:pt x="5658179" y="2600498"/>
+                  </a:lnTo>
+                  <a:lnTo>
+                    <a:pt x="5729802" y="2595243"/>
+                  </a:lnTo>
+                  <a:lnTo>
+                    <a:pt x="5801424" y="2589956"/>
+                  </a:lnTo>
+                  <a:lnTo>
+                    <a:pt x="5873047" y="2584637"/>
+                  </a:lnTo>
+                  <a:lnTo>
+                    <a:pt x="5944669" y="2579287"/>
+                  </a:lnTo>
+                  <a:lnTo>
+                    <a:pt x="6016292" y="2573905"/>
+                  </a:lnTo>
+                  <a:lnTo>
+                    <a:pt x="6087914" y="2568491"/>
+                  </a:lnTo>
+                  <a:lnTo>
+                    <a:pt x="6159537" y="2563045"/>
+                  </a:lnTo>
+                  <a:lnTo>
+                    <a:pt x="6231159" y="2557566"/>
+                  </a:lnTo>
+                  <a:lnTo>
+                    <a:pt x="6302782" y="2552055"/>
+                  </a:lnTo>
+                  <a:lnTo>
+                    <a:pt x="6374404" y="2546511"/>
+                  </a:lnTo>
+                  <a:lnTo>
+                    <a:pt x="6446027" y="2540934"/>
+                  </a:lnTo>
+                  <a:lnTo>
+                    <a:pt x="6517649" y="2535324"/>
+                  </a:lnTo>
+                  <a:lnTo>
+                    <a:pt x="6589272" y="2529681"/>
+                  </a:lnTo>
+                  <a:lnTo>
+                    <a:pt x="6660894" y="2524003"/>
+                  </a:lnTo>
+                  <a:lnTo>
+                    <a:pt x="6732517" y="2518293"/>
+                  </a:lnTo>
+                  <a:lnTo>
+                    <a:pt x="6804139" y="2512548"/>
+                  </a:lnTo>
+                  <a:lnTo>
+                    <a:pt x="6875762" y="2506769"/>
+                  </a:lnTo>
+                  <a:lnTo>
+                    <a:pt x="6947385" y="2500955"/>
+                  </a:lnTo>
+                  <a:lnTo>
+                    <a:pt x="7019007" y="2495107"/>
+                  </a:lnTo>
+                  <a:lnTo>
+                    <a:pt x="7090630" y="2489224"/>
+                  </a:lnTo>
+                  <a:lnTo>
+                    <a:pt x="7090630" y="3364405"/>
+                  </a:lnTo>
+                  <a:lnTo>
+                    <a:pt x="7019007" y="3356596"/>
+                  </a:lnTo>
+                  <a:lnTo>
+                    <a:pt x="6947385" y="3348277"/>
+                  </a:lnTo>
+                  <a:lnTo>
+                    <a:pt x="6875762" y="3339413"/>
+                  </a:lnTo>
+                  <a:lnTo>
+                    <a:pt x="6804139" y="3329968"/>
+                  </a:lnTo>
+                  <a:lnTo>
+                    <a:pt x="6732517" y="3319906"/>
+                  </a:lnTo>
+                  <a:lnTo>
+                    <a:pt x="6660894" y="3309186"/>
+                  </a:lnTo>
+                  <a:lnTo>
+                    <a:pt x="6589272" y="3297764"/>
+                  </a:lnTo>
+                  <a:lnTo>
+                    <a:pt x="6517649" y="3285595"/>
+                  </a:lnTo>
+                  <a:lnTo>
+                    <a:pt x="6446027" y="3272630"/>
+                  </a:lnTo>
+                  <a:lnTo>
+                    <a:pt x="6374404" y="3258816"/>
+                  </a:lnTo>
+                  <a:lnTo>
+                    <a:pt x="6302782" y="3244098"/>
+                  </a:lnTo>
+                  <a:lnTo>
+                    <a:pt x="6231159" y="3228417"/>
+                  </a:lnTo>
+                  <a:lnTo>
+                    <a:pt x="6159537" y="3211711"/>
+                  </a:lnTo>
+                  <a:lnTo>
+                    <a:pt x="6087914" y="3193911"/>
+                  </a:lnTo>
+                  <a:lnTo>
+                    <a:pt x="6016292" y="3174946"/>
+                  </a:lnTo>
+                  <a:lnTo>
+                    <a:pt x="5944669" y="3154741"/>
+                  </a:lnTo>
+                  <a:lnTo>
+                    <a:pt x="5873047" y="3133213"/>
+                  </a:lnTo>
+                  <a:lnTo>
+                    <a:pt x="5801424" y="3110277"/>
+                  </a:lnTo>
+                  <a:lnTo>
+                    <a:pt x="5729802" y="3085840"/>
+                  </a:lnTo>
+                  <a:lnTo>
+                    <a:pt x="5658179" y="3059804"/>
+                  </a:lnTo>
+                  <a:lnTo>
+                    <a:pt x="5586557" y="3032065"/>
+                  </a:lnTo>
+                  <a:lnTo>
+                    <a:pt x="5514934" y="3002510"/>
+                  </a:lnTo>
+                  <a:lnTo>
+                    <a:pt x="5443311" y="2971022"/>
+                  </a:lnTo>
+                  <a:lnTo>
+                    <a:pt x="5371689" y="2937473"/>
+                  </a:lnTo>
+                  <a:lnTo>
+                    <a:pt x="5300066" y="2901730"/>
+                  </a:lnTo>
+                  <a:lnTo>
+                    <a:pt x="5228444" y="2863647"/>
+                  </a:lnTo>
+                  <a:lnTo>
+                    <a:pt x="5156821" y="2823073"/>
+                  </a:lnTo>
+                  <a:lnTo>
+                    <a:pt x="5085199" y="2779843"/>
+                  </a:lnTo>
+                  <a:lnTo>
+                    <a:pt x="5013576" y="2733785"/>
+                  </a:lnTo>
+                  <a:lnTo>
+                    <a:pt x="4941954" y="2684714"/>
+                  </a:lnTo>
+                  <a:lnTo>
+                    <a:pt x="4870331" y="2656299"/>
+                  </a:lnTo>
+                  <a:lnTo>
+                    <a:pt x="4798709" y="2661194"/>
+                  </a:lnTo>
+                  <a:lnTo>
+                    <a:pt x="4727086" y="2666060"/>
+                  </a:lnTo>
+                  <a:lnTo>
+                    <a:pt x="4655464" y="2670896"/>
+                  </a:lnTo>
+                  <a:lnTo>
+                    <a:pt x="4583841" y="2675705"/>
+                  </a:lnTo>
+                  <a:lnTo>
+                    <a:pt x="4512219" y="2680484"/>
+                  </a:lnTo>
+                  <a:lnTo>
+                    <a:pt x="4440596" y="2685236"/>
+                  </a:lnTo>
+                  <a:lnTo>
+                    <a:pt x="4368974" y="2689959"/>
+                  </a:lnTo>
+                  <a:lnTo>
+                    <a:pt x="4297351" y="2694655"/>
+                  </a:lnTo>
+                  <a:lnTo>
+                    <a:pt x="4225729" y="2699322"/>
+                  </a:lnTo>
+                  <a:lnTo>
+                    <a:pt x="4154106" y="2703962"/>
+                  </a:lnTo>
+                  <a:lnTo>
+                    <a:pt x="4082483" y="2708575"/>
+                  </a:lnTo>
+                  <a:lnTo>
+                    <a:pt x="4010861" y="2713160"/>
+                  </a:lnTo>
+                  <a:lnTo>
+                    <a:pt x="3939238" y="2717719"/>
+                  </a:lnTo>
+                  <a:lnTo>
+                    <a:pt x="3867616" y="2722250"/>
+                  </a:lnTo>
+                  <a:lnTo>
+                    <a:pt x="3795993" y="2726754"/>
+                  </a:lnTo>
+                  <a:lnTo>
+                    <a:pt x="3724371" y="2731232"/>
+                  </a:lnTo>
+                  <a:lnTo>
+                    <a:pt x="3652748" y="2735683"/>
+                  </a:lnTo>
+                  <a:lnTo>
+                    <a:pt x="3581126" y="2740108"/>
+                  </a:lnTo>
+                  <a:lnTo>
+                    <a:pt x="3509503" y="2744507"/>
+                  </a:lnTo>
+                  <a:lnTo>
+                    <a:pt x="3437881" y="2748880"/>
+                  </a:lnTo>
+                  <a:lnTo>
+                    <a:pt x="3366258" y="2753227"/>
+                  </a:lnTo>
+                  <a:lnTo>
+                    <a:pt x="3294636" y="2757548"/>
+                  </a:lnTo>
+                  <a:lnTo>
+                    <a:pt x="3223013" y="2761844"/>
+                  </a:lnTo>
+                  <a:lnTo>
+                    <a:pt x="3151391" y="2766114"/>
+                  </a:lnTo>
+                  <a:lnTo>
+                    <a:pt x="3079768" y="2770359"/>
+                  </a:lnTo>
+                  <a:lnTo>
+                    <a:pt x="3008146" y="2774579"/>
+                  </a:lnTo>
+                  <a:lnTo>
+                    <a:pt x="2936523" y="2778774"/>
+                  </a:lnTo>
+                  <a:lnTo>
+                    <a:pt x="2864901" y="2782944"/>
+                  </a:lnTo>
+                  <a:lnTo>
+                    <a:pt x="2793278" y="2787089"/>
+                  </a:lnTo>
+                  <a:lnTo>
+                    <a:pt x="2721655" y="2791210"/>
+                  </a:lnTo>
+                  <a:lnTo>
+                    <a:pt x="2650033" y="2795307"/>
+                  </a:lnTo>
+                  <a:lnTo>
+                    <a:pt x="2578410" y="2799379"/>
+                  </a:lnTo>
+                  <a:lnTo>
+                    <a:pt x="2506788" y="2803427"/>
+                  </a:lnTo>
+                  <a:lnTo>
+                    <a:pt x="2435165" y="2807451"/>
+                  </a:lnTo>
+                  <a:lnTo>
+                    <a:pt x="2363543" y="2811452"/>
+                  </a:lnTo>
+                  <a:lnTo>
+                    <a:pt x="2291920" y="2815429"/>
+                  </a:lnTo>
+                  <a:lnTo>
+                    <a:pt x="2220298" y="2819382"/>
+                  </a:lnTo>
+                  <a:lnTo>
+                    <a:pt x="2148675" y="2823312"/>
+                  </a:lnTo>
+                  <a:lnTo>
+                    <a:pt x="2077053" y="2827218"/>
+                  </a:lnTo>
+                  <a:lnTo>
+                    <a:pt x="2005430" y="2831102"/>
+                  </a:lnTo>
+                  <a:lnTo>
+                    <a:pt x="1933808" y="2834962"/>
+                  </a:lnTo>
+                  <a:lnTo>
+                    <a:pt x="1862185" y="2838800"/>
+                  </a:lnTo>
+                  <a:lnTo>
+                    <a:pt x="1790563" y="2842615"/>
+                  </a:lnTo>
+                  <a:lnTo>
+                    <a:pt x="1718940" y="2846408"/>
+                  </a:lnTo>
+                  <a:lnTo>
+                    <a:pt x="1647318" y="2850178"/>
+                  </a:lnTo>
+                  <a:lnTo>
+                    <a:pt x="1575695" y="2853925"/>
+                  </a:lnTo>
+                  <a:lnTo>
+                    <a:pt x="1504073" y="2857651"/>
+                  </a:lnTo>
+                  <a:lnTo>
+                    <a:pt x="1432450" y="2861354"/>
+                  </a:lnTo>
+                  <a:lnTo>
+                    <a:pt x="1360827" y="2865036"/>
+                  </a:lnTo>
+                  <a:lnTo>
+                    <a:pt x="1289205" y="2868696"/>
+                  </a:lnTo>
+                  <a:lnTo>
+                    <a:pt x="1217582" y="2872334"/>
+                  </a:lnTo>
+                  <a:lnTo>
+                    <a:pt x="1145960" y="2875951"/>
+                  </a:lnTo>
+                  <a:lnTo>
+                    <a:pt x="1074337" y="2879546"/>
+                  </a:lnTo>
+                  <a:lnTo>
+                    <a:pt x="1002715" y="2883120"/>
+                  </a:lnTo>
+                  <a:lnTo>
+                    <a:pt x="931092" y="2886673"/>
+                  </a:lnTo>
+                  <a:lnTo>
+                    <a:pt x="859470" y="2890205"/>
+                  </a:lnTo>
+                  <a:lnTo>
+                    <a:pt x="787847" y="2893716"/>
+                  </a:lnTo>
+                  <a:lnTo>
+                    <a:pt x="716225" y="2897206"/>
+                  </a:lnTo>
+                  <a:lnTo>
+                    <a:pt x="644602" y="2900675"/>
+                  </a:lnTo>
+                  <a:lnTo>
+                    <a:pt x="572980" y="2904124"/>
+                  </a:lnTo>
+                  <a:lnTo>
+                    <a:pt x="501357" y="2907553"/>
+                  </a:lnTo>
+                  <a:lnTo>
+                    <a:pt x="429735" y="2910961"/>
+                  </a:lnTo>
+                  <a:lnTo>
+                    <a:pt x="358112" y="2914349"/>
+                  </a:lnTo>
+                  <a:lnTo>
+                    <a:pt x="286490" y="2917718"/>
+                  </a:lnTo>
+                  <a:lnTo>
+                    <a:pt x="214867" y="2921066"/>
+                  </a:lnTo>
+                  <a:lnTo>
+                    <a:pt x="143245" y="2924394"/>
+                  </a:lnTo>
+                  <a:lnTo>
+                    <a:pt x="71622" y="2927703"/>
+                  </a:lnTo>
+                  <a:lnTo>
+                    <a:pt x="0" y="2930992"/>
                   </a:lnTo>
                   <a:lnTo>
                     <a:pt x="0" y="0"/>
@@ -3495,171 +3501,177 @@
           </p:nvSpPr>
           <p:spPr>
             <a:xfrm>
-              <a:off x="4604987" y="2073503"/>
-              <a:ext cx="3657691" cy="2650096"/>
+              <a:off x="4450463" y="2073503"/>
+              <a:ext cx="3812216" cy="2651376"/>
             </a:xfrm>
             <a:custGeom>
               <a:avLst/>
               <a:pathLst>
-                <a:path w="3657691" h="2650096">
+                <a:path w="3812216" h="2651376">
                   <a:moveTo>
                     <a:pt x="0" y="0"/>
                   </a:moveTo>
                   <a:lnTo>
-                    <a:pt x="4942" y="17362"/>
-                  </a:lnTo>
-                  <a:lnTo>
-                    <a:pt x="76565" y="251928"/>
-                  </a:lnTo>
-                  <a:lnTo>
-                    <a:pt x="148187" y="470621"/>
-                  </a:lnTo>
-                  <a:lnTo>
-                    <a:pt x="219810" y="674515"/>
-                  </a:lnTo>
-                  <a:lnTo>
-                    <a:pt x="291432" y="864612"/>
-                  </a:lnTo>
-                  <a:lnTo>
-                    <a:pt x="363055" y="1041846"/>
-                  </a:lnTo>
-                  <a:lnTo>
-                    <a:pt x="434677" y="1207086"/>
-                  </a:lnTo>
-                  <a:lnTo>
-                    <a:pt x="506300" y="1361145"/>
-                  </a:lnTo>
-                  <a:lnTo>
-                    <a:pt x="577922" y="1504779"/>
-                  </a:lnTo>
-                  <a:lnTo>
-                    <a:pt x="649545" y="1638693"/>
-                  </a:lnTo>
-                  <a:lnTo>
-                    <a:pt x="721167" y="1763545"/>
-                  </a:lnTo>
-                  <a:lnTo>
-                    <a:pt x="792790" y="1879949"/>
-                  </a:lnTo>
-                  <a:lnTo>
-                    <a:pt x="864412" y="1988476"/>
-                  </a:lnTo>
-                  <a:lnTo>
-                    <a:pt x="936035" y="2089659"/>
-                  </a:lnTo>
-                  <a:lnTo>
-                    <a:pt x="1007658" y="2183995"/>
-                  </a:lnTo>
-                  <a:lnTo>
-                    <a:pt x="1079280" y="2271948"/>
-                  </a:lnTo>
-                  <a:lnTo>
-                    <a:pt x="1150903" y="2353949"/>
-                  </a:lnTo>
-                  <a:lnTo>
-                    <a:pt x="1222525" y="2430401"/>
-                  </a:lnTo>
-                  <a:lnTo>
-                    <a:pt x="1294148" y="2501679"/>
-                  </a:lnTo>
-                  <a:lnTo>
-                    <a:pt x="1365770" y="2568135"/>
-                  </a:lnTo>
-                  <a:lnTo>
-                    <a:pt x="1437393" y="2630093"/>
-                  </a:lnTo>
-                  <a:lnTo>
-                    <a:pt x="1509015" y="2650096"/>
-                  </a:lnTo>
-                  <a:lnTo>
-                    <a:pt x="1580638" y="2642947"/>
-                  </a:lnTo>
-                  <a:lnTo>
-                    <a:pt x="1652260" y="2635737"/>
-                  </a:lnTo>
-                  <a:lnTo>
-                    <a:pt x="1723883" y="2628465"/>
-                  </a:lnTo>
-                  <a:lnTo>
-                    <a:pt x="1795505" y="2621131"/>
-                  </a:lnTo>
-                  <a:lnTo>
-                    <a:pt x="1867128" y="2613735"/>
-                  </a:lnTo>
-                  <a:lnTo>
-                    <a:pt x="1938750" y="2606274"/>
-                  </a:lnTo>
-                  <a:lnTo>
-                    <a:pt x="2010373" y="2598750"/>
-                  </a:lnTo>
-                  <a:lnTo>
-                    <a:pt x="2081995" y="2591161"/>
-                  </a:lnTo>
-                  <a:lnTo>
-                    <a:pt x="2153618" y="2583507"/>
-                  </a:lnTo>
-                  <a:lnTo>
-                    <a:pt x="2225240" y="2575787"/>
-                  </a:lnTo>
-                  <a:lnTo>
-                    <a:pt x="2296863" y="2568002"/>
-                  </a:lnTo>
-                  <a:lnTo>
-                    <a:pt x="2368486" y="2560149"/>
-                  </a:lnTo>
-                  <a:lnTo>
-                    <a:pt x="2440108" y="2552229"/>
-                  </a:lnTo>
-                  <a:lnTo>
-                    <a:pt x="2511731" y="2544242"/>
-                  </a:lnTo>
-                  <a:lnTo>
-                    <a:pt x="2583353" y="2536185"/>
-                  </a:lnTo>
-                  <a:lnTo>
-                    <a:pt x="2654976" y="2528060"/>
-                  </a:lnTo>
-                  <a:lnTo>
-                    <a:pt x="2726598" y="2519865"/>
-                  </a:lnTo>
-                  <a:lnTo>
-                    <a:pt x="2798221" y="2511600"/>
-                  </a:lnTo>
-                  <a:lnTo>
-                    <a:pt x="2869843" y="2503263"/>
-                  </a:lnTo>
-                  <a:lnTo>
-                    <a:pt x="2941466" y="2494856"/>
-                  </a:lnTo>
-                  <a:lnTo>
-                    <a:pt x="3013088" y="2486376"/>
-                  </a:lnTo>
-                  <a:lnTo>
-                    <a:pt x="3084711" y="2477823"/>
-                  </a:lnTo>
-                  <a:lnTo>
-                    <a:pt x="3156333" y="2469198"/>
-                  </a:lnTo>
-                  <a:lnTo>
-                    <a:pt x="3227956" y="2460498"/>
-                  </a:lnTo>
-                  <a:lnTo>
-                    <a:pt x="3299578" y="2451724"/>
-                  </a:lnTo>
-                  <a:lnTo>
-                    <a:pt x="3371201" y="2442874"/>
-                  </a:lnTo>
-                  <a:lnTo>
-                    <a:pt x="3442823" y="2433948"/>
-                  </a:lnTo>
-                  <a:lnTo>
-                    <a:pt x="3514446" y="2424946"/>
-                  </a:lnTo>
-                  <a:lnTo>
-                    <a:pt x="3586068" y="2415867"/>
-                  </a:lnTo>
-                  <a:lnTo>
-                    <a:pt x="3657691" y="2406710"/>
+                    <a:pt x="16222" y="50876"/>
+                  </a:lnTo>
+                  <a:lnTo>
+                    <a:pt x="87845" y="261701"/>
+                  </a:lnTo>
+                  <a:lnTo>
+                    <a:pt x="159467" y="459579"/>
+                  </a:lnTo>
+                  <a:lnTo>
+                    <a:pt x="231090" y="645304"/>
+                  </a:lnTo>
+                  <a:lnTo>
+                    <a:pt x="302712" y="819623"/>
+                  </a:lnTo>
+                  <a:lnTo>
+                    <a:pt x="374335" y="983237"/>
+                  </a:lnTo>
+                  <a:lnTo>
+                    <a:pt x="445957" y="1136802"/>
+                  </a:lnTo>
+                  <a:lnTo>
+                    <a:pt x="517580" y="1280937"/>
+                  </a:lnTo>
+                  <a:lnTo>
+                    <a:pt x="589202" y="1416220"/>
+                  </a:lnTo>
+                  <a:lnTo>
+                    <a:pt x="660825" y="1543194"/>
+                  </a:lnTo>
+                  <a:lnTo>
+                    <a:pt x="732447" y="1662370"/>
+                  </a:lnTo>
+                  <a:lnTo>
+                    <a:pt x="804070" y="1774228"/>
+                  </a:lnTo>
+                  <a:lnTo>
+                    <a:pt x="875692" y="1879216"/>
+                  </a:lnTo>
+                  <a:lnTo>
+                    <a:pt x="947315" y="1977756"/>
+                  </a:lnTo>
+                  <a:lnTo>
+                    <a:pt x="1018937" y="2070244"/>
+                  </a:lnTo>
+                  <a:lnTo>
+                    <a:pt x="1090560" y="2157053"/>
+                  </a:lnTo>
+                  <a:lnTo>
+                    <a:pt x="1162182" y="2238530"/>
+                  </a:lnTo>
+                  <a:lnTo>
+                    <a:pt x="1233805" y="2315003"/>
+                  </a:lnTo>
+                  <a:lnTo>
+                    <a:pt x="1305428" y="2386780"/>
+                  </a:lnTo>
+                  <a:lnTo>
+                    <a:pt x="1377050" y="2454149"/>
+                  </a:lnTo>
+                  <a:lnTo>
+                    <a:pt x="1448673" y="2517380"/>
+                  </a:lnTo>
+                  <a:lnTo>
+                    <a:pt x="1520295" y="2576728"/>
+                  </a:lnTo>
+                  <a:lnTo>
+                    <a:pt x="1591918" y="2632432"/>
+                  </a:lnTo>
+                  <a:lnTo>
+                    <a:pt x="1663540" y="2651376"/>
+                  </a:lnTo>
+                  <a:lnTo>
+                    <a:pt x="1735163" y="2646423"/>
+                  </a:lnTo>
+                  <a:lnTo>
+                    <a:pt x="1806785" y="2641440"/>
+                  </a:lnTo>
+                  <a:lnTo>
+                    <a:pt x="1878408" y="2636428"/>
+                  </a:lnTo>
+                  <a:lnTo>
+                    <a:pt x="1950030" y="2631386"/>
+                  </a:lnTo>
+                  <a:lnTo>
+                    <a:pt x="2021653" y="2626314"/>
+                  </a:lnTo>
+                  <a:lnTo>
+                    <a:pt x="2093275" y="2621212"/>
+                  </a:lnTo>
+                  <a:lnTo>
+                    <a:pt x="2164898" y="2616080"/>
+                  </a:lnTo>
+                  <a:lnTo>
+                    <a:pt x="2236520" y="2610917"/>
+                  </a:lnTo>
+                  <a:lnTo>
+                    <a:pt x="2308143" y="2605723"/>
+                  </a:lnTo>
+                  <a:lnTo>
+                    <a:pt x="2379765" y="2600498"/>
+                  </a:lnTo>
+                  <a:lnTo>
+                    <a:pt x="2451388" y="2595243"/>
+                  </a:lnTo>
+                  <a:lnTo>
+                    <a:pt x="2523010" y="2589956"/>
+                  </a:lnTo>
+                  <a:lnTo>
+                    <a:pt x="2594633" y="2584637"/>
+                  </a:lnTo>
+                  <a:lnTo>
+                    <a:pt x="2666256" y="2579287"/>
+                  </a:lnTo>
+                  <a:lnTo>
+                    <a:pt x="2737878" y="2573905"/>
+                  </a:lnTo>
+                  <a:lnTo>
+                    <a:pt x="2809501" y="2568491"/>
+                  </a:lnTo>
+                  <a:lnTo>
+                    <a:pt x="2881123" y="2563045"/>
+                  </a:lnTo>
+                  <a:lnTo>
+                    <a:pt x="2952746" y="2557566"/>
+                  </a:lnTo>
+                  <a:lnTo>
+                    <a:pt x="3024368" y="2552055"/>
+                  </a:lnTo>
+                  <a:lnTo>
+                    <a:pt x="3095991" y="2546511"/>
+                  </a:lnTo>
+                  <a:lnTo>
+                    <a:pt x="3167613" y="2540934"/>
+                  </a:lnTo>
+                  <a:lnTo>
+                    <a:pt x="3239236" y="2535324"/>
+                  </a:lnTo>
+                  <a:lnTo>
+                    <a:pt x="3310858" y="2529681"/>
+                  </a:lnTo>
+                  <a:lnTo>
+                    <a:pt x="3382481" y="2524003"/>
+                  </a:lnTo>
+                  <a:lnTo>
+                    <a:pt x="3454103" y="2518293"/>
+                  </a:lnTo>
+                  <a:lnTo>
+                    <a:pt x="3525726" y="2512548"/>
+                  </a:lnTo>
+                  <a:lnTo>
+                    <a:pt x="3597348" y="2506769"/>
+                  </a:lnTo>
+                  <a:lnTo>
+                    <a:pt x="3668971" y="2500955"/>
+                  </a:lnTo>
+                  <a:lnTo>
+                    <a:pt x="3740593" y="2495107"/>
+                  </a:lnTo>
+                  <a:lnTo>
+                    <a:pt x="3812216" y="2489224"/>
                   </a:lnTo>
                 </a:path>
               </a:pathLst>
@@ -3679,312 +3691,312 @@
           </p:nvSpPr>
           <p:spPr>
             <a:xfrm>
-              <a:off x="1172049" y="4730686"/>
-              <a:ext cx="7090630" cy="729297"/>
+              <a:off x="1172049" y="4729802"/>
+              <a:ext cx="7090630" cy="708105"/>
             </a:xfrm>
             <a:custGeom>
               <a:avLst/>
               <a:pathLst>
-                <a:path w="7090630" h="729297">
+                <a:path w="7090630" h="708105">
                   <a:moveTo>
-                    <a:pt x="7090630" y="729297"/>
+                    <a:pt x="7090630" y="708105"/>
                   </a:moveTo>
                   <a:lnTo>
-                    <a:pt x="7019007" y="722237"/>
-                  </a:lnTo>
-                  <a:lnTo>
-                    <a:pt x="6947385" y="714665"/>
-                  </a:lnTo>
-                  <a:lnTo>
-                    <a:pt x="6875762" y="706544"/>
-                  </a:lnTo>
-                  <a:lnTo>
-                    <a:pt x="6804139" y="697833"/>
-                  </a:lnTo>
-                  <a:lnTo>
-                    <a:pt x="6732517" y="688490"/>
-                  </a:lnTo>
-                  <a:lnTo>
-                    <a:pt x="6660894" y="678468"/>
-                  </a:lnTo>
-                  <a:lnTo>
-                    <a:pt x="6589272" y="667720"/>
-                  </a:lnTo>
-                  <a:lnTo>
-                    <a:pt x="6517649" y="656191"/>
-                  </a:lnTo>
-                  <a:lnTo>
-                    <a:pt x="6446027" y="643825"/>
-                  </a:lnTo>
-                  <a:lnTo>
-                    <a:pt x="6374404" y="630562"/>
-                  </a:lnTo>
-                  <a:lnTo>
-                    <a:pt x="6302782" y="616336"/>
-                  </a:lnTo>
-                  <a:lnTo>
-                    <a:pt x="6231159" y="601078"/>
-                  </a:lnTo>
-                  <a:lnTo>
-                    <a:pt x="6159537" y="584713"/>
-                  </a:lnTo>
-                  <a:lnTo>
-                    <a:pt x="6087914" y="567159"/>
-                  </a:lnTo>
-                  <a:lnTo>
-                    <a:pt x="6016292" y="548332"/>
-                  </a:lnTo>
-                  <a:lnTo>
-                    <a:pt x="5944669" y="528137"/>
-                  </a:lnTo>
-                  <a:lnTo>
-                    <a:pt x="5873047" y="506478"/>
-                  </a:lnTo>
-                  <a:lnTo>
-                    <a:pt x="5801424" y="483246"/>
-                  </a:lnTo>
-                  <a:lnTo>
-                    <a:pt x="5729802" y="458328"/>
-                  </a:lnTo>
-                  <a:lnTo>
-                    <a:pt x="5658179" y="431601"/>
-                  </a:lnTo>
-                  <a:lnTo>
-                    <a:pt x="5586557" y="402935"/>
-                  </a:lnTo>
-                  <a:lnTo>
-                    <a:pt x="5514934" y="372188"/>
-                  </a:lnTo>
-                  <a:lnTo>
-                    <a:pt x="5443311" y="339210"/>
-                  </a:lnTo>
-                  <a:lnTo>
-                    <a:pt x="5371689" y="303837"/>
-                  </a:lnTo>
-                  <a:lnTo>
-                    <a:pt x="5300066" y="265898"/>
-                  </a:lnTo>
-                  <a:lnTo>
-                    <a:pt x="5228444" y="225205"/>
-                  </a:lnTo>
-                  <a:lnTo>
-                    <a:pt x="5156821" y="181558"/>
-                  </a:lnTo>
-                  <a:lnTo>
-                    <a:pt x="5085199" y="134744"/>
-                  </a:lnTo>
-                  <a:lnTo>
-                    <a:pt x="5013576" y="84531"/>
-                  </a:lnTo>
-                  <a:lnTo>
-                    <a:pt x="4941954" y="30675"/>
+                    <a:pt x="7019007" y="700296"/>
+                  </a:lnTo>
+                  <a:lnTo>
+                    <a:pt x="6947385" y="691977"/>
+                  </a:lnTo>
+                  <a:lnTo>
+                    <a:pt x="6875762" y="683113"/>
+                  </a:lnTo>
+                  <a:lnTo>
+                    <a:pt x="6804139" y="673669"/>
+                  </a:lnTo>
+                  <a:lnTo>
+                    <a:pt x="6732517" y="663607"/>
+                  </a:lnTo>
+                  <a:lnTo>
+                    <a:pt x="6660894" y="652886"/>
+                  </a:lnTo>
+                  <a:lnTo>
+                    <a:pt x="6589272" y="641464"/>
+                  </a:lnTo>
+                  <a:lnTo>
+                    <a:pt x="6517649" y="629295"/>
+                  </a:lnTo>
+                  <a:lnTo>
+                    <a:pt x="6446027" y="616330"/>
+                  </a:lnTo>
+                  <a:lnTo>
+                    <a:pt x="6374404" y="602516"/>
+                  </a:lnTo>
+                  <a:lnTo>
+                    <a:pt x="6302782" y="587798"/>
+                  </a:lnTo>
+                  <a:lnTo>
+                    <a:pt x="6231159" y="572117"/>
+                  </a:lnTo>
+                  <a:lnTo>
+                    <a:pt x="6159537" y="555411"/>
+                  </a:lnTo>
+                  <a:lnTo>
+                    <a:pt x="6087914" y="537611"/>
+                  </a:lnTo>
+                  <a:lnTo>
+                    <a:pt x="6016292" y="518646"/>
+                  </a:lnTo>
+                  <a:lnTo>
+                    <a:pt x="5944669" y="498441"/>
+                  </a:lnTo>
+                  <a:lnTo>
+                    <a:pt x="5873047" y="476913"/>
+                  </a:lnTo>
+                  <a:lnTo>
+                    <a:pt x="5801424" y="453977"/>
+                  </a:lnTo>
+                  <a:lnTo>
+                    <a:pt x="5729802" y="429540"/>
+                  </a:lnTo>
+                  <a:lnTo>
+                    <a:pt x="5658179" y="403504"/>
+                  </a:lnTo>
+                  <a:lnTo>
+                    <a:pt x="5586557" y="375765"/>
+                  </a:lnTo>
+                  <a:lnTo>
+                    <a:pt x="5514934" y="346210"/>
+                  </a:lnTo>
+                  <a:lnTo>
+                    <a:pt x="5443311" y="314722"/>
+                  </a:lnTo>
+                  <a:lnTo>
+                    <a:pt x="5371689" y="281174"/>
+                  </a:lnTo>
+                  <a:lnTo>
+                    <a:pt x="5300066" y="245430"/>
+                  </a:lnTo>
+                  <a:lnTo>
+                    <a:pt x="5228444" y="207347"/>
+                  </a:lnTo>
+                  <a:lnTo>
+                    <a:pt x="5156821" y="166773"/>
+                  </a:lnTo>
+                  <a:lnTo>
+                    <a:pt x="5085199" y="123543"/>
+                  </a:lnTo>
+                  <a:lnTo>
+                    <a:pt x="5013576" y="77486"/>
+                  </a:lnTo>
+                  <a:lnTo>
+                    <a:pt x="4941954" y="28414"/>
                   </a:lnTo>
                   <a:lnTo>
                     <a:pt x="4870331" y="0"/>
                   </a:lnTo>
                   <a:lnTo>
-                    <a:pt x="4798709" y="7027"/>
-                  </a:lnTo>
-                  <a:lnTo>
-                    <a:pt x="4727086" y="13995"/>
-                  </a:lnTo>
-                  <a:lnTo>
-                    <a:pt x="4655464" y="20903"/>
-                  </a:lnTo>
-                  <a:lnTo>
-                    <a:pt x="4583841" y="27753"/>
-                  </a:lnTo>
-                  <a:lnTo>
-                    <a:pt x="4512219" y="34545"/>
-                  </a:lnTo>
-                  <a:lnTo>
-                    <a:pt x="4440596" y="41279"/>
-                  </a:lnTo>
-                  <a:lnTo>
-                    <a:pt x="4368974" y="47955"/>
-                  </a:lnTo>
-                  <a:lnTo>
-                    <a:pt x="4297351" y="54575"/>
-                  </a:lnTo>
-                  <a:lnTo>
-                    <a:pt x="4225729" y="61138"/>
-                  </a:lnTo>
-                  <a:lnTo>
-                    <a:pt x="4154106" y="67646"/>
-                  </a:lnTo>
-                  <a:lnTo>
-                    <a:pt x="4082483" y="74099"/>
-                  </a:lnTo>
-                  <a:lnTo>
-                    <a:pt x="4010861" y="80496"/>
-                  </a:lnTo>
-                  <a:lnTo>
-                    <a:pt x="3939238" y="86839"/>
-                  </a:lnTo>
-                  <a:lnTo>
-                    <a:pt x="3867616" y="93128"/>
-                  </a:lnTo>
-                  <a:lnTo>
-                    <a:pt x="3795993" y="99364"/>
-                  </a:lnTo>
-                  <a:lnTo>
-                    <a:pt x="3724371" y="105547"/>
-                  </a:lnTo>
-                  <a:lnTo>
-                    <a:pt x="3652748" y="111677"/>
-                  </a:lnTo>
-                  <a:lnTo>
-                    <a:pt x="3581126" y="117755"/>
-                  </a:lnTo>
-                  <a:lnTo>
-                    <a:pt x="3509503" y="123781"/>
-                  </a:lnTo>
-                  <a:lnTo>
-                    <a:pt x="3437881" y="129757"/>
-                  </a:lnTo>
-                  <a:lnTo>
-                    <a:pt x="3366258" y="135681"/>
-                  </a:lnTo>
-                  <a:lnTo>
-                    <a:pt x="3294636" y="141555"/>
-                  </a:lnTo>
-                  <a:lnTo>
-                    <a:pt x="3223013" y="147379"/>
-                  </a:lnTo>
-                  <a:lnTo>
-                    <a:pt x="3151391" y="153153"/>
-                  </a:lnTo>
-                  <a:lnTo>
-                    <a:pt x="3079768" y="158879"/>
-                  </a:lnTo>
-                  <a:lnTo>
-                    <a:pt x="3008146" y="164555"/>
-                  </a:lnTo>
-                  <a:lnTo>
-                    <a:pt x="2936523" y="170184"/>
-                  </a:lnTo>
-                  <a:lnTo>
-                    <a:pt x="2864901" y="175765"/>
-                  </a:lnTo>
-                  <a:lnTo>
-                    <a:pt x="2793278" y="181298"/>
-                  </a:lnTo>
-                  <a:lnTo>
-                    <a:pt x="2721655" y="186784"/>
-                  </a:lnTo>
-                  <a:lnTo>
-                    <a:pt x="2650033" y="192223"/>
-                  </a:lnTo>
-                  <a:lnTo>
-                    <a:pt x="2578410" y="197616"/>
-                  </a:lnTo>
-                  <a:lnTo>
-                    <a:pt x="2506788" y="202964"/>
-                  </a:lnTo>
-                  <a:lnTo>
-                    <a:pt x="2435165" y="208266"/>
-                  </a:lnTo>
-                  <a:lnTo>
-                    <a:pt x="2363543" y="213523"/>
-                  </a:lnTo>
-                  <a:lnTo>
-                    <a:pt x="2291920" y="218735"/>
-                  </a:lnTo>
-                  <a:lnTo>
-                    <a:pt x="2220298" y="223903"/>
-                  </a:lnTo>
-                  <a:lnTo>
-                    <a:pt x="2148675" y="229026"/>
-                  </a:lnTo>
-                  <a:lnTo>
-                    <a:pt x="2077053" y="234107"/>
-                  </a:lnTo>
-                  <a:lnTo>
-                    <a:pt x="2005430" y="239144"/>
-                  </a:lnTo>
-                  <a:lnTo>
-                    <a:pt x="1933808" y="244138"/>
-                  </a:lnTo>
-                  <a:lnTo>
-                    <a:pt x="1862185" y="249090"/>
-                  </a:lnTo>
-                  <a:lnTo>
-                    <a:pt x="1790563" y="254000"/>
-                  </a:lnTo>
-                  <a:lnTo>
-                    <a:pt x="1718940" y="258868"/>
-                  </a:lnTo>
-                  <a:lnTo>
-                    <a:pt x="1647318" y="263694"/>
-                  </a:lnTo>
-                  <a:lnTo>
-                    <a:pt x="1575695" y="268480"/>
-                  </a:lnTo>
-                  <a:lnTo>
-                    <a:pt x="1504073" y="273225"/>
-                  </a:lnTo>
-                  <a:lnTo>
-                    <a:pt x="1432450" y="277929"/>
-                  </a:lnTo>
-                  <a:lnTo>
-                    <a:pt x="1360827" y="282594"/>
-                  </a:lnTo>
-                  <a:lnTo>
-                    <a:pt x="1289205" y="287219"/>
-                  </a:lnTo>
-                  <a:lnTo>
-                    <a:pt x="1217582" y="291804"/>
-                  </a:lnTo>
-                  <a:lnTo>
-                    <a:pt x="1145960" y="296351"/>
-                  </a:lnTo>
-                  <a:lnTo>
-                    <a:pt x="1074337" y="300859"/>
-                  </a:lnTo>
-                  <a:lnTo>
-                    <a:pt x="1002715" y="305328"/>
-                  </a:lnTo>
-                  <a:lnTo>
-                    <a:pt x="931092" y="309760"/>
-                  </a:lnTo>
-                  <a:lnTo>
-                    <a:pt x="859470" y="314154"/>
-                  </a:lnTo>
-                  <a:lnTo>
-                    <a:pt x="787847" y="318510"/>
-                  </a:lnTo>
-                  <a:lnTo>
-                    <a:pt x="716225" y="322830"/>
-                  </a:lnTo>
-                  <a:lnTo>
-                    <a:pt x="644602" y="327113"/>
-                  </a:lnTo>
-                  <a:lnTo>
-                    <a:pt x="572980" y="331359"/>
-                  </a:lnTo>
-                  <a:lnTo>
-                    <a:pt x="501357" y="335569"/>
-                  </a:lnTo>
-                  <a:lnTo>
-                    <a:pt x="429735" y="339744"/>
-                  </a:lnTo>
-                  <a:lnTo>
-                    <a:pt x="358112" y="343883"/>
-                  </a:lnTo>
-                  <a:lnTo>
-                    <a:pt x="286490" y="347987"/>
-                  </a:lnTo>
-                  <a:lnTo>
-                    <a:pt x="214867" y="352056"/>
-                  </a:lnTo>
-                  <a:lnTo>
-                    <a:pt x="143245" y="356090"/>
-                  </a:lnTo>
-                  <a:lnTo>
-                    <a:pt x="71622" y="360090"/>
-                  </a:lnTo>
-                  <a:lnTo>
-                    <a:pt x="0" y="364056"/>
+                    <a:pt x="4798709" y="4894"/>
+                  </a:lnTo>
+                  <a:lnTo>
+                    <a:pt x="4727086" y="9760"/>
+                  </a:lnTo>
+                  <a:lnTo>
+                    <a:pt x="4655464" y="14596"/>
+                  </a:lnTo>
+                  <a:lnTo>
+                    <a:pt x="4583841" y="19405"/>
+                  </a:lnTo>
+                  <a:lnTo>
+                    <a:pt x="4512219" y="24184"/>
+                  </a:lnTo>
+                  <a:lnTo>
+                    <a:pt x="4440596" y="28936"/>
+                  </a:lnTo>
+                  <a:lnTo>
+                    <a:pt x="4368974" y="33659"/>
+                  </a:lnTo>
+                  <a:lnTo>
+                    <a:pt x="4297351" y="38355"/>
+                  </a:lnTo>
+                  <a:lnTo>
+                    <a:pt x="4225729" y="43022"/>
+                  </a:lnTo>
+                  <a:lnTo>
+                    <a:pt x="4154106" y="47663"/>
+                  </a:lnTo>
+                  <a:lnTo>
+                    <a:pt x="4082483" y="52275"/>
+                  </a:lnTo>
+                  <a:lnTo>
+                    <a:pt x="4010861" y="56860"/>
+                  </a:lnTo>
+                  <a:lnTo>
+                    <a:pt x="3939238" y="61419"/>
+                  </a:lnTo>
+                  <a:lnTo>
+                    <a:pt x="3867616" y="65950"/>
+                  </a:lnTo>
+                  <a:lnTo>
+                    <a:pt x="3795993" y="70454"/>
+                  </a:lnTo>
+                  <a:lnTo>
+                    <a:pt x="3724371" y="74932"/>
+                  </a:lnTo>
+                  <a:lnTo>
+                    <a:pt x="3652748" y="79384"/>
+                  </a:lnTo>
+                  <a:lnTo>
+                    <a:pt x="3581126" y="83808"/>
+                  </a:lnTo>
+                  <a:lnTo>
+                    <a:pt x="3509503" y="88207"/>
+                  </a:lnTo>
+                  <a:lnTo>
+                    <a:pt x="3437881" y="92580"/>
+                  </a:lnTo>
+                  <a:lnTo>
+                    <a:pt x="3366258" y="96927"/>
+                  </a:lnTo>
+                  <a:lnTo>
+                    <a:pt x="3294636" y="101248"/>
+                  </a:lnTo>
+                  <a:lnTo>
+                    <a:pt x="3223013" y="105544"/>
+                  </a:lnTo>
+                  <a:lnTo>
+                    <a:pt x="3151391" y="109814"/>
+                  </a:lnTo>
+                  <a:lnTo>
+                    <a:pt x="3079768" y="114059"/>
+                  </a:lnTo>
+                  <a:lnTo>
+                    <a:pt x="3008146" y="118279"/>
+                  </a:lnTo>
+                  <a:lnTo>
+                    <a:pt x="2936523" y="122474"/>
+                  </a:lnTo>
+                  <a:lnTo>
+                    <a:pt x="2864901" y="126644"/>
+                  </a:lnTo>
+                  <a:lnTo>
+                    <a:pt x="2793278" y="130789"/>
+                  </a:lnTo>
+                  <a:lnTo>
+                    <a:pt x="2721655" y="134910"/>
+                  </a:lnTo>
+                  <a:lnTo>
+                    <a:pt x="2650033" y="139007"/>
+                  </a:lnTo>
+                  <a:lnTo>
+                    <a:pt x="2578410" y="143079"/>
+                  </a:lnTo>
+                  <a:lnTo>
+                    <a:pt x="2506788" y="147127"/>
+                  </a:lnTo>
+                  <a:lnTo>
+                    <a:pt x="2435165" y="151152"/>
+                  </a:lnTo>
+                  <a:lnTo>
+                    <a:pt x="2363543" y="155152"/>
+                  </a:lnTo>
+                  <a:lnTo>
+                    <a:pt x="2291920" y="159129"/>
+                  </a:lnTo>
+                  <a:lnTo>
+                    <a:pt x="2220298" y="163082"/>
+                  </a:lnTo>
+                  <a:lnTo>
+                    <a:pt x="2148675" y="167012"/>
+                  </a:lnTo>
+                  <a:lnTo>
+                    <a:pt x="2077053" y="170919"/>
+                  </a:lnTo>
+                  <a:lnTo>
+                    <a:pt x="2005430" y="174802"/>
+                  </a:lnTo>
+                  <a:lnTo>
+                    <a:pt x="1933808" y="178663"/>
+                  </a:lnTo>
+                  <a:lnTo>
+                    <a:pt x="1862185" y="182500"/>
+                  </a:lnTo>
+                  <a:lnTo>
+                    <a:pt x="1790563" y="186315"/>
+                  </a:lnTo>
+                  <a:lnTo>
+                    <a:pt x="1718940" y="190108"/>
+                  </a:lnTo>
+                  <a:lnTo>
+                    <a:pt x="1647318" y="193878"/>
+                  </a:lnTo>
+                  <a:lnTo>
+                    <a:pt x="1575695" y="197626"/>
+                  </a:lnTo>
+                  <a:lnTo>
+                    <a:pt x="1504073" y="201351"/>
+                  </a:lnTo>
+                  <a:lnTo>
+                    <a:pt x="1432450" y="205055"/>
+                  </a:lnTo>
+                  <a:lnTo>
+                    <a:pt x="1360827" y="208736"/>
+                  </a:lnTo>
+                  <a:lnTo>
+                    <a:pt x="1289205" y="212396"/>
+                  </a:lnTo>
+                  <a:lnTo>
+                    <a:pt x="1217582" y="216034"/>
+                  </a:lnTo>
+                  <a:lnTo>
+                    <a:pt x="1145960" y="219651"/>
+                  </a:lnTo>
+                  <a:lnTo>
+                    <a:pt x="1074337" y="223246"/>
+                  </a:lnTo>
+                  <a:lnTo>
+                    <a:pt x="1002715" y="226820"/>
+                  </a:lnTo>
+                  <a:lnTo>
+                    <a:pt x="931092" y="230373"/>
+                  </a:lnTo>
+                  <a:lnTo>
+                    <a:pt x="859470" y="233905"/>
+                  </a:lnTo>
+                  <a:lnTo>
+                    <a:pt x="787847" y="237416"/>
+                  </a:lnTo>
+                  <a:lnTo>
+                    <a:pt x="716225" y="240906"/>
+                  </a:lnTo>
+                  <a:lnTo>
+                    <a:pt x="644602" y="244376"/>
+                  </a:lnTo>
+                  <a:lnTo>
+                    <a:pt x="572980" y="247825"/>
+                  </a:lnTo>
+                  <a:lnTo>
+                    <a:pt x="501357" y="251253"/>
+                  </a:lnTo>
+                  <a:lnTo>
+                    <a:pt x="429735" y="254661"/>
+                  </a:lnTo>
+                  <a:lnTo>
+                    <a:pt x="358112" y="258050"/>
+                  </a:lnTo>
+                  <a:lnTo>
+                    <a:pt x="286490" y="261418"/>
+                  </a:lnTo>
+                  <a:lnTo>
+                    <a:pt x="214867" y="264766"/>
+                  </a:lnTo>
+                  <a:lnTo>
+                    <a:pt x="143245" y="268094"/>
+                  </a:lnTo>
+                  <a:lnTo>
+                    <a:pt x="71622" y="271403"/>
+                  </a:lnTo>
+                  <a:lnTo>
+                    <a:pt x="0" y="274692"/>
                   </a:lnTo>
                 </a:path>
               </a:pathLst>
@@ -4004,249 +4016,258 @@
           </p:nvSpPr>
           <p:spPr>
             <a:xfrm>
-              <a:off x="2730939" y="2073503"/>
-              <a:ext cx="5531740" cy="3160082"/>
+              <a:off x="2493652" y="2073503"/>
+              <a:ext cx="5769026" cy="3139236"/>
             </a:xfrm>
             <a:custGeom>
               <a:avLst/>
               <a:pathLst>
-                <a:path w="5531740" h="3160082">
+                <a:path w="5769026" h="3139236">
                   <a:moveTo>
                     <a:pt x="0" y="0"/>
                   </a:moveTo>
                   <a:lnTo>
-                    <a:pt x="16805" y="25352"/>
-                  </a:lnTo>
-                  <a:lnTo>
-                    <a:pt x="88428" y="130128"/>
-                  </a:lnTo>
-                  <a:lnTo>
-                    <a:pt x="160050" y="231729"/>
-                  </a:lnTo>
-                  <a:lnTo>
-                    <a:pt x="231673" y="330252"/>
-                  </a:lnTo>
-                  <a:lnTo>
-                    <a:pt x="303295" y="425790"/>
-                  </a:lnTo>
-                  <a:lnTo>
-                    <a:pt x="374918" y="518433"/>
-                  </a:lnTo>
-                  <a:lnTo>
-                    <a:pt x="446540" y="608270"/>
-                  </a:lnTo>
-                  <a:lnTo>
-                    <a:pt x="518163" y="695385"/>
-                  </a:lnTo>
-                  <a:lnTo>
-                    <a:pt x="589786" y="779861"/>
-                  </a:lnTo>
-                  <a:lnTo>
-                    <a:pt x="661408" y="861778"/>
-                  </a:lnTo>
-                  <a:lnTo>
-                    <a:pt x="733031" y="941213"/>
-                  </a:lnTo>
-                  <a:lnTo>
-                    <a:pt x="804653" y="1018241"/>
-                  </a:lnTo>
-                  <a:lnTo>
-                    <a:pt x="876276" y="1092936"/>
-                  </a:lnTo>
-                  <a:lnTo>
-                    <a:pt x="947898" y="1165368"/>
-                  </a:lnTo>
-                  <a:lnTo>
-                    <a:pt x="1019521" y="1235605"/>
-                  </a:lnTo>
-                  <a:lnTo>
-                    <a:pt x="1091143" y="1303715"/>
-                  </a:lnTo>
-                  <a:lnTo>
-                    <a:pt x="1162766" y="1369761"/>
-                  </a:lnTo>
-                  <a:lnTo>
-                    <a:pt x="1234388" y="1433806"/>
-                  </a:lnTo>
-                  <a:lnTo>
-                    <a:pt x="1306011" y="1495911"/>
-                  </a:lnTo>
-                  <a:lnTo>
-                    <a:pt x="1377633" y="1556134"/>
-                  </a:lnTo>
-                  <a:lnTo>
-                    <a:pt x="1449256" y="1614533"/>
-                  </a:lnTo>
-                  <a:lnTo>
-                    <a:pt x="1520878" y="1671162"/>
-                  </a:lnTo>
-                  <a:lnTo>
-                    <a:pt x="1592501" y="1726076"/>
-                  </a:lnTo>
-                  <a:lnTo>
-                    <a:pt x="1664123" y="1779326"/>
-                  </a:lnTo>
-                  <a:lnTo>
-                    <a:pt x="1735746" y="1830963"/>
-                  </a:lnTo>
-                  <a:lnTo>
-                    <a:pt x="1807368" y="1881036"/>
-                  </a:lnTo>
-                  <a:lnTo>
-                    <a:pt x="1878991" y="1929592"/>
-                  </a:lnTo>
-                  <a:lnTo>
-                    <a:pt x="1950614" y="1976676"/>
-                  </a:lnTo>
-                  <a:lnTo>
-                    <a:pt x="2022236" y="2022334"/>
-                  </a:lnTo>
-                  <a:lnTo>
-                    <a:pt x="2093859" y="2066609"/>
-                  </a:lnTo>
-                  <a:lnTo>
-                    <a:pt x="2165481" y="2109542"/>
-                  </a:lnTo>
-                  <a:lnTo>
-                    <a:pt x="2237104" y="2151175"/>
-                  </a:lnTo>
-                  <a:lnTo>
-                    <a:pt x="2308726" y="2191547"/>
-                  </a:lnTo>
-                  <a:lnTo>
-                    <a:pt x="2380349" y="2230695"/>
-                  </a:lnTo>
-                  <a:lnTo>
-                    <a:pt x="2451971" y="2268657"/>
-                  </a:lnTo>
-                  <a:lnTo>
-                    <a:pt x="2523594" y="2305470"/>
-                  </a:lnTo>
-                  <a:lnTo>
-                    <a:pt x="2595216" y="2341167"/>
-                  </a:lnTo>
-                  <a:lnTo>
-                    <a:pt x="2666839" y="2375782"/>
-                  </a:lnTo>
-                  <a:lnTo>
-                    <a:pt x="2738461" y="2409349"/>
-                  </a:lnTo>
-                  <a:lnTo>
-                    <a:pt x="2810084" y="2441899"/>
-                  </a:lnTo>
-                  <a:lnTo>
-                    <a:pt x="2881706" y="2473462"/>
-                  </a:lnTo>
-                  <a:lnTo>
-                    <a:pt x="2953329" y="2504070"/>
-                  </a:lnTo>
-                  <a:lnTo>
-                    <a:pt x="3024951" y="2533750"/>
-                  </a:lnTo>
-                  <a:lnTo>
-                    <a:pt x="3096574" y="2562531"/>
-                  </a:lnTo>
-                  <a:lnTo>
-                    <a:pt x="3168196" y="2590440"/>
-                  </a:lnTo>
-                  <a:lnTo>
-                    <a:pt x="3239819" y="2617504"/>
-                  </a:lnTo>
-                  <a:lnTo>
-                    <a:pt x="3311442" y="2643747"/>
-                  </a:lnTo>
-                  <a:lnTo>
-                    <a:pt x="3383064" y="2669196"/>
-                  </a:lnTo>
-                  <a:lnTo>
-                    <a:pt x="3454687" y="2693873"/>
-                  </a:lnTo>
-                  <a:lnTo>
-                    <a:pt x="3526309" y="2717803"/>
-                  </a:lnTo>
-                  <a:lnTo>
-                    <a:pt x="3597932" y="2741008"/>
-                  </a:lnTo>
-                  <a:lnTo>
-                    <a:pt x="3669554" y="2763510"/>
-                  </a:lnTo>
-                  <a:lnTo>
-                    <a:pt x="3741177" y="2785330"/>
-                  </a:lnTo>
-                  <a:lnTo>
-                    <a:pt x="3812799" y="2806490"/>
-                  </a:lnTo>
-                  <a:lnTo>
-                    <a:pt x="3884422" y="2827008"/>
-                  </a:lnTo>
-                  <a:lnTo>
-                    <a:pt x="3956044" y="2846904"/>
-                  </a:lnTo>
-                  <a:lnTo>
-                    <a:pt x="4027667" y="2866198"/>
-                  </a:lnTo>
-                  <a:lnTo>
-                    <a:pt x="4099289" y="2884907"/>
-                  </a:lnTo>
-                  <a:lnTo>
-                    <a:pt x="4170912" y="2903050"/>
-                  </a:lnTo>
-                  <a:lnTo>
-                    <a:pt x="4242534" y="2920642"/>
-                  </a:lnTo>
-                  <a:lnTo>
-                    <a:pt x="4314157" y="2937702"/>
-                  </a:lnTo>
-                  <a:lnTo>
-                    <a:pt x="4385779" y="2954245"/>
-                  </a:lnTo>
-                  <a:lnTo>
-                    <a:pt x="4457402" y="2970287"/>
-                  </a:lnTo>
-                  <a:lnTo>
-                    <a:pt x="4529024" y="2985842"/>
-                  </a:lnTo>
-                  <a:lnTo>
-                    <a:pt x="4600647" y="3000927"/>
-                  </a:lnTo>
-                  <a:lnTo>
-                    <a:pt x="4672270" y="3015554"/>
-                  </a:lnTo>
-                  <a:lnTo>
-                    <a:pt x="4743892" y="3029739"/>
-                  </a:lnTo>
-                  <a:lnTo>
-                    <a:pt x="4815515" y="3043493"/>
-                  </a:lnTo>
-                  <a:lnTo>
-                    <a:pt x="4887137" y="3056831"/>
-                  </a:lnTo>
-                  <a:lnTo>
-                    <a:pt x="4958760" y="3069765"/>
-                  </a:lnTo>
-                  <a:lnTo>
-                    <a:pt x="5030382" y="3082307"/>
-                  </a:lnTo>
-                  <a:lnTo>
-                    <a:pt x="5102005" y="3094469"/>
-                  </a:lnTo>
-                  <a:lnTo>
-                    <a:pt x="5173627" y="3106262"/>
-                  </a:lnTo>
-                  <a:lnTo>
-                    <a:pt x="5245250" y="3117699"/>
-                  </a:lnTo>
-                  <a:lnTo>
-                    <a:pt x="5316872" y="3128788"/>
-                  </a:lnTo>
-                  <a:lnTo>
-                    <a:pt x="5388495" y="3139542"/>
-                  </a:lnTo>
-                  <a:lnTo>
-                    <a:pt x="5460117" y="3149970"/>
-                  </a:lnTo>
-                  <a:lnTo>
-                    <a:pt x="5531740" y="3160082"/>
+                    <a:pt x="39224" y="54723"/>
+                  </a:lnTo>
+                  <a:lnTo>
+                    <a:pt x="110847" y="151817"/>
+                  </a:lnTo>
+                  <a:lnTo>
+                    <a:pt x="182469" y="246161"/>
+                  </a:lnTo>
+                  <a:lnTo>
+                    <a:pt x="254092" y="337834"/>
+                  </a:lnTo>
+                  <a:lnTo>
+                    <a:pt x="325714" y="426911"/>
+                  </a:lnTo>
+                  <a:lnTo>
+                    <a:pt x="397337" y="513466"/>
+                  </a:lnTo>
+                  <a:lnTo>
+                    <a:pt x="468959" y="597570"/>
+                  </a:lnTo>
+                  <a:lnTo>
+                    <a:pt x="540582" y="679293"/>
+                  </a:lnTo>
+                  <a:lnTo>
+                    <a:pt x="612204" y="758701"/>
+                  </a:lnTo>
+                  <a:lnTo>
+                    <a:pt x="683827" y="835862"/>
+                  </a:lnTo>
+                  <a:lnTo>
+                    <a:pt x="755449" y="910837"/>
+                  </a:lnTo>
+                  <a:lnTo>
+                    <a:pt x="827072" y="983690"/>
+                  </a:lnTo>
+                  <a:lnTo>
+                    <a:pt x="898695" y="1054479"/>
+                  </a:lnTo>
+                  <a:lnTo>
+                    <a:pt x="970317" y="1123264"/>
+                  </a:lnTo>
+                  <a:lnTo>
+                    <a:pt x="1041940" y="1190102"/>
+                  </a:lnTo>
+                  <a:lnTo>
+                    <a:pt x="1113562" y="1255047"/>
+                  </a:lnTo>
+                  <a:lnTo>
+                    <a:pt x="1185185" y="1318153"/>
+                  </a:lnTo>
+                  <a:lnTo>
+                    <a:pt x="1256807" y="1379472"/>
+                  </a:lnTo>
+                  <a:lnTo>
+                    <a:pt x="1328430" y="1439055"/>
+                  </a:lnTo>
+                  <a:lnTo>
+                    <a:pt x="1400052" y="1496951"/>
+                  </a:lnTo>
+                  <a:lnTo>
+                    <a:pt x="1471675" y="1553208"/>
+                  </a:lnTo>
+                  <a:lnTo>
+                    <a:pt x="1543297" y="1607871"/>
+                  </a:lnTo>
+                  <a:lnTo>
+                    <a:pt x="1614920" y="1660987"/>
+                  </a:lnTo>
+                  <a:lnTo>
+                    <a:pt x="1686542" y="1712599"/>
+                  </a:lnTo>
+                  <a:lnTo>
+                    <a:pt x="1758165" y="1762749"/>
+                  </a:lnTo>
+                  <a:lnTo>
+                    <a:pt x="1829787" y="1811480"/>
+                  </a:lnTo>
+                  <a:lnTo>
+                    <a:pt x="1901410" y="1858830"/>
+                  </a:lnTo>
+                  <a:lnTo>
+                    <a:pt x="1973032" y="1904840"/>
+                  </a:lnTo>
+                  <a:lnTo>
+                    <a:pt x="2044655" y="1949547"/>
+                  </a:lnTo>
+                  <a:lnTo>
+                    <a:pt x="2116277" y="1992988"/>
+                  </a:lnTo>
+                  <a:lnTo>
+                    <a:pt x="2187900" y="2035200"/>
+                  </a:lnTo>
+                  <a:lnTo>
+                    <a:pt x="2259523" y="2076215"/>
+                  </a:lnTo>
+                  <a:lnTo>
+                    <a:pt x="2331145" y="2116070"/>
+                  </a:lnTo>
+                  <a:lnTo>
+                    <a:pt x="2402768" y="2154796"/>
+                  </a:lnTo>
+                  <a:lnTo>
+                    <a:pt x="2474390" y="2192426"/>
+                  </a:lnTo>
+                  <a:lnTo>
+                    <a:pt x="2546013" y="2228990"/>
+                  </a:lnTo>
+                  <a:lnTo>
+                    <a:pt x="2617635" y="2264518"/>
+                  </a:lnTo>
+                  <a:lnTo>
+                    <a:pt x="2689258" y="2299041"/>
+                  </a:lnTo>
+                  <a:lnTo>
+                    <a:pt x="2760880" y="2332586"/>
+                  </a:lnTo>
+                  <a:lnTo>
+                    <a:pt x="2832503" y="2365182"/>
+                  </a:lnTo>
+                  <a:lnTo>
+                    <a:pt x="2904125" y="2396854"/>
+                  </a:lnTo>
+                  <a:lnTo>
+                    <a:pt x="2975748" y="2427630"/>
+                  </a:lnTo>
+                  <a:lnTo>
+                    <a:pt x="3047370" y="2457534"/>
+                  </a:lnTo>
+                  <a:lnTo>
+                    <a:pt x="3118993" y="2486591"/>
+                  </a:lnTo>
+                  <a:lnTo>
+                    <a:pt x="3190615" y="2514826"/>
+                  </a:lnTo>
+                  <a:lnTo>
+                    <a:pt x="3262238" y="2542261"/>
+                  </a:lnTo>
+                  <a:lnTo>
+                    <a:pt x="3333860" y="2568919"/>
+                  </a:lnTo>
+                  <a:lnTo>
+                    <a:pt x="3405483" y="2594823"/>
+                  </a:lnTo>
+                  <a:lnTo>
+                    <a:pt x="3477105" y="2619993"/>
+                  </a:lnTo>
+                  <a:lnTo>
+                    <a:pt x="3548728" y="2644450"/>
+                  </a:lnTo>
+                  <a:lnTo>
+                    <a:pt x="3620351" y="2668215"/>
+                  </a:lnTo>
+                  <a:lnTo>
+                    <a:pt x="3691973" y="2691307"/>
+                  </a:lnTo>
+                  <a:lnTo>
+                    <a:pt x="3763596" y="2713745"/>
+                  </a:lnTo>
+                  <a:lnTo>
+                    <a:pt x="3835218" y="2735548"/>
+                  </a:lnTo>
+                  <a:lnTo>
+                    <a:pt x="3906841" y="2756733"/>
+                  </a:lnTo>
+                  <a:lnTo>
+                    <a:pt x="3978463" y="2777319"/>
+                  </a:lnTo>
+                  <a:lnTo>
+                    <a:pt x="4050086" y="2797321"/>
+                  </a:lnTo>
+                  <a:lnTo>
+                    <a:pt x="4121708" y="2816758"/>
+                  </a:lnTo>
+                  <a:lnTo>
+                    <a:pt x="4193331" y="2835644"/>
+                  </a:lnTo>
+                  <a:lnTo>
+                    <a:pt x="4264953" y="2853995"/>
+                  </a:lnTo>
+                  <a:lnTo>
+                    <a:pt x="4336576" y="2871826"/>
+                  </a:lnTo>
+                  <a:lnTo>
+                    <a:pt x="4408198" y="2889153"/>
+                  </a:lnTo>
+                  <a:lnTo>
+                    <a:pt x="4479821" y="2905989"/>
+                  </a:lnTo>
+                  <a:lnTo>
+                    <a:pt x="4551443" y="2922348"/>
+                  </a:lnTo>
+                  <a:lnTo>
+                    <a:pt x="4623066" y="2938245"/>
+                  </a:lnTo>
+                  <a:lnTo>
+                    <a:pt x="4694688" y="2953691"/>
+                  </a:lnTo>
+                  <a:lnTo>
+                    <a:pt x="4766311" y="2968699"/>
+                  </a:lnTo>
+                  <a:lnTo>
+                    <a:pt x="4837933" y="2983283"/>
+                  </a:lnTo>
+                  <a:lnTo>
+                    <a:pt x="4909556" y="2997454"/>
+                  </a:lnTo>
+                  <a:lnTo>
+                    <a:pt x="4981178" y="3011223"/>
+                  </a:lnTo>
+                  <a:lnTo>
+                    <a:pt x="5052801" y="3024603"/>
+                  </a:lnTo>
+                  <a:lnTo>
+                    <a:pt x="5124424" y="3037603"/>
+                  </a:lnTo>
+                  <a:lnTo>
+                    <a:pt x="5196046" y="3050236"/>
+                  </a:lnTo>
+                  <a:lnTo>
+                    <a:pt x="5267669" y="3062511"/>
+                  </a:lnTo>
+                  <a:lnTo>
+                    <a:pt x="5339291" y="3074438"/>
+                  </a:lnTo>
+                  <a:lnTo>
+                    <a:pt x="5410914" y="3086028"/>
+                  </a:lnTo>
+                  <a:lnTo>
+                    <a:pt x="5482536" y="3097289"/>
+                  </a:lnTo>
+                  <a:lnTo>
+                    <a:pt x="5554159" y="3108232"/>
+                  </a:lnTo>
+                  <a:lnTo>
+                    <a:pt x="5625781" y="3118865"/>
+                  </a:lnTo>
+                  <a:lnTo>
+                    <a:pt x="5697404" y="3129197"/>
+                  </a:lnTo>
+                  <a:lnTo>
+                    <a:pt x="5769026" y="3139236"/>
                   </a:lnTo>
                 </a:path>
               </a:pathLst>
@@ -4986,7 +5007,7 @@
                   <a:latin typeface="Helvetica"/>
                   <a:cs typeface="Helvetica"/>
                 </a:rPr>
-                <a:t>subHR per 1 mL/min: 0.96 (0.91-1.01)  |  per IQR (Δ = 18.2): 0.49 (0.19-1.22)  |  IQR: [-11.5, 6.7]</a:t>
+                <a:t>subHR per 1 mL/min: 0.96 (0.92-1.01)  |  per IQR (Δ = 18.2): 0.51 (0.23-1.15)  |  IQR: [-11.5, 6.7]</a:t>
               </a:r>
             </a:p>
           </p:txBody>

--- a/docs/plots/carbo/jx_carbo_linsubhr_egfrdisc_throm2.pptx
+++ b/docs/plots/carbo/jx_carbo_linsubhr_egfrdisc_throm2.pptx
@@ -3003,476 +3003,470 @@
           <p:spPr>
             <a:xfrm>
               <a:off x="1172049" y="2073503"/>
-              <a:ext cx="7090630" cy="3364405"/>
+              <a:ext cx="7090630" cy="3386481"/>
             </a:xfrm>
             <a:custGeom>
               <a:avLst/>
               <a:pathLst>
-                <a:path w="7090630" h="3364405">
+                <a:path w="7090630" h="3386481">
                   <a:moveTo>
-                    <a:pt x="3278413" y="0"/>
+                    <a:pt x="3432938" y="0"/>
                   </a:moveTo>
                   <a:lnTo>
-                    <a:pt x="3294636" y="50876"/>
-                  </a:lnTo>
-                  <a:lnTo>
-                    <a:pt x="3366258" y="261701"/>
-                  </a:lnTo>
-                  <a:lnTo>
-                    <a:pt x="3437881" y="459579"/>
-                  </a:lnTo>
-                  <a:lnTo>
-                    <a:pt x="3509503" y="645304"/>
-                  </a:lnTo>
-                  <a:lnTo>
-                    <a:pt x="3581126" y="819623"/>
-                  </a:lnTo>
-                  <a:lnTo>
-                    <a:pt x="3652748" y="983237"/>
-                  </a:lnTo>
-                  <a:lnTo>
-                    <a:pt x="3724371" y="1136802"/>
-                  </a:lnTo>
-                  <a:lnTo>
-                    <a:pt x="3795993" y="1280937"/>
-                  </a:lnTo>
-                  <a:lnTo>
-                    <a:pt x="3867616" y="1416220"/>
-                  </a:lnTo>
-                  <a:lnTo>
-                    <a:pt x="3939238" y="1543194"/>
-                  </a:lnTo>
-                  <a:lnTo>
-                    <a:pt x="4010861" y="1662370"/>
-                  </a:lnTo>
-                  <a:lnTo>
-                    <a:pt x="4082483" y="1774228"/>
-                  </a:lnTo>
-                  <a:lnTo>
-                    <a:pt x="4154106" y="1879216"/>
-                  </a:lnTo>
-                  <a:lnTo>
-                    <a:pt x="4225729" y="1977756"/>
-                  </a:lnTo>
-                  <a:lnTo>
-                    <a:pt x="4297351" y="2070244"/>
-                  </a:lnTo>
-                  <a:lnTo>
-                    <a:pt x="4368974" y="2157053"/>
-                  </a:lnTo>
-                  <a:lnTo>
-                    <a:pt x="4440596" y="2238530"/>
-                  </a:lnTo>
-                  <a:lnTo>
-                    <a:pt x="4512219" y="2315003"/>
-                  </a:lnTo>
-                  <a:lnTo>
-                    <a:pt x="4583841" y="2386780"/>
-                  </a:lnTo>
-                  <a:lnTo>
-                    <a:pt x="4655464" y="2454149"/>
-                  </a:lnTo>
-                  <a:lnTo>
-                    <a:pt x="4727086" y="2517380"/>
-                  </a:lnTo>
-                  <a:lnTo>
-                    <a:pt x="4798709" y="2576728"/>
-                  </a:lnTo>
-                  <a:lnTo>
-                    <a:pt x="4870331" y="2632432"/>
-                  </a:lnTo>
-                  <a:lnTo>
-                    <a:pt x="4941954" y="2651376"/>
-                  </a:lnTo>
-                  <a:lnTo>
-                    <a:pt x="5013576" y="2646423"/>
-                  </a:lnTo>
-                  <a:lnTo>
-                    <a:pt x="5085199" y="2641440"/>
-                  </a:lnTo>
-                  <a:lnTo>
-                    <a:pt x="5156821" y="2636428"/>
-                  </a:lnTo>
-                  <a:lnTo>
-                    <a:pt x="5228444" y="2631386"/>
-                  </a:lnTo>
-                  <a:lnTo>
-                    <a:pt x="5300066" y="2626314"/>
-                  </a:lnTo>
-                  <a:lnTo>
-                    <a:pt x="5371689" y="2621212"/>
-                  </a:lnTo>
-                  <a:lnTo>
-                    <a:pt x="5443311" y="2616080"/>
-                  </a:lnTo>
-                  <a:lnTo>
-                    <a:pt x="5514934" y="2610917"/>
-                  </a:lnTo>
-                  <a:lnTo>
-                    <a:pt x="5586557" y="2605723"/>
-                  </a:lnTo>
-                  <a:lnTo>
-                    <a:pt x="5658179" y="2600498"/>
-                  </a:lnTo>
-                  <a:lnTo>
-                    <a:pt x="5729802" y="2595243"/>
-                  </a:lnTo>
-                  <a:lnTo>
-                    <a:pt x="5801424" y="2589956"/>
-                  </a:lnTo>
-                  <a:lnTo>
-                    <a:pt x="5873047" y="2584637"/>
-                  </a:lnTo>
-                  <a:lnTo>
-                    <a:pt x="5944669" y="2579287"/>
-                  </a:lnTo>
-                  <a:lnTo>
-                    <a:pt x="6016292" y="2573905"/>
-                  </a:lnTo>
-                  <a:lnTo>
-                    <a:pt x="6087914" y="2568491"/>
-                  </a:lnTo>
-                  <a:lnTo>
-                    <a:pt x="6159537" y="2563045"/>
-                  </a:lnTo>
-                  <a:lnTo>
-                    <a:pt x="6231159" y="2557566"/>
-                  </a:lnTo>
-                  <a:lnTo>
-                    <a:pt x="6302782" y="2552055"/>
-                  </a:lnTo>
-                  <a:lnTo>
-                    <a:pt x="6374404" y="2546511"/>
-                  </a:lnTo>
-                  <a:lnTo>
-                    <a:pt x="6446027" y="2540934"/>
-                  </a:lnTo>
-                  <a:lnTo>
-                    <a:pt x="6517649" y="2535324"/>
-                  </a:lnTo>
-                  <a:lnTo>
-                    <a:pt x="6589272" y="2529681"/>
-                  </a:lnTo>
-                  <a:lnTo>
-                    <a:pt x="6660894" y="2524003"/>
-                  </a:lnTo>
-                  <a:lnTo>
-                    <a:pt x="6732517" y="2518293"/>
-                  </a:lnTo>
-                  <a:lnTo>
-                    <a:pt x="6804139" y="2512548"/>
-                  </a:lnTo>
-                  <a:lnTo>
-                    <a:pt x="6875762" y="2506769"/>
-                  </a:lnTo>
-                  <a:lnTo>
-                    <a:pt x="6947385" y="2500955"/>
-                  </a:lnTo>
-                  <a:lnTo>
-                    <a:pt x="7019007" y="2495107"/>
-                  </a:lnTo>
-                  <a:lnTo>
-                    <a:pt x="7090630" y="2489224"/>
-                  </a:lnTo>
-                  <a:lnTo>
-                    <a:pt x="7090630" y="3364405"/>
-                  </a:lnTo>
-                  <a:lnTo>
-                    <a:pt x="7019007" y="3356596"/>
-                  </a:lnTo>
-                  <a:lnTo>
-                    <a:pt x="6947385" y="3348277"/>
-                  </a:lnTo>
-                  <a:lnTo>
-                    <a:pt x="6875762" y="3339413"/>
-                  </a:lnTo>
-                  <a:lnTo>
-                    <a:pt x="6804139" y="3329968"/>
-                  </a:lnTo>
-                  <a:lnTo>
-                    <a:pt x="6732517" y="3319906"/>
-                  </a:lnTo>
-                  <a:lnTo>
-                    <a:pt x="6660894" y="3309186"/>
-                  </a:lnTo>
-                  <a:lnTo>
-                    <a:pt x="6589272" y="3297764"/>
-                  </a:lnTo>
-                  <a:lnTo>
-                    <a:pt x="6517649" y="3285595"/>
-                  </a:lnTo>
-                  <a:lnTo>
-                    <a:pt x="6446027" y="3272630"/>
-                  </a:lnTo>
-                  <a:lnTo>
-                    <a:pt x="6374404" y="3258816"/>
-                  </a:lnTo>
-                  <a:lnTo>
-                    <a:pt x="6302782" y="3244098"/>
-                  </a:lnTo>
-                  <a:lnTo>
-                    <a:pt x="6231159" y="3228417"/>
-                  </a:lnTo>
-                  <a:lnTo>
-                    <a:pt x="6159537" y="3211711"/>
-                  </a:lnTo>
-                  <a:lnTo>
-                    <a:pt x="6087914" y="3193911"/>
-                  </a:lnTo>
-                  <a:lnTo>
-                    <a:pt x="6016292" y="3174946"/>
-                  </a:lnTo>
-                  <a:lnTo>
-                    <a:pt x="5944669" y="3154741"/>
-                  </a:lnTo>
-                  <a:lnTo>
-                    <a:pt x="5873047" y="3133213"/>
-                  </a:lnTo>
-                  <a:lnTo>
-                    <a:pt x="5801424" y="3110277"/>
-                  </a:lnTo>
-                  <a:lnTo>
-                    <a:pt x="5729802" y="3085840"/>
-                  </a:lnTo>
-                  <a:lnTo>
-                    <a:pt x="5658179" y="3059804"/>
-                  </a:lnTo>
-                  <a:lnTo>
-                    <a:pt x="5586557" y="3032065"/>
-                  </a:lnTo>
-                  <a:lnTo>
-                    <a:pt x="5514934" y="3002510"/>
-                  </a:lnTo>
-                  <a:lnTo>
-                    <a:pt x="5443311" y="2971022"/>
-                  </a:lnTo>
-                  <a:lnTo>
-                    <a:pt x="5371689" y="2937473"/>
-                  </a:lnTo>
-                  <a:lnTo>
-                    <a:pt x="5300066" y="2901730"/>
-                  </a:lnTo>
-                  <a:lnTo>
-                    <a:pt x="5228444" y="2863647"/>
-                  </a:lnTo>
-                  <a:lnTo>
-                    <a:pt x="5156821" y="2823073"/>
-                  </a:lnTo>
-                  <a:lnTo>
-                    <a:pt x="5085199" y="2779843"/>
-                  </a:lnTo>
-                  <a:lnTo>
-                    <a:pt x="5013576" y="2733785"/>
-                  </a:lnTo>
-                  <a:lnTo>
-                    <a:pt x="4941954" y="2684714"/>
-                  </a:lnTo>
-                  <a:lnTo>
-                    <a:pt x="4870331" y="2656299"/>
-                  </a:lnTo>
-                  <a:lnTo>
-                    <a:pt x="4798709" y="2661194"/>
-                  </a:lnTo>
-                  <a:lnTo>
-                    <a:pt x="4727086" y="2666060"/>
-                  </a:lnTo>
-                  <a:lnTo>
-                    <a:pt x="4655464" y="2670896"/>
-                  </a:lnTo>
-                  <a:lnTo>
-                    <a:pt x="4583841" y="2675705"/>
-                  </a:lnTo>
-                  <a:lnTo>
-                    <a:pt x="4512219" y="2680484"/>
-                  </a:lnTo>
-                  <a:lnTo>
-                    <a:pt x="4440596" y="2685236"/>
-                  </a:lnTo>
-                  <a:lnTo>
-                    <a:pt x="4368974" y="2689959"/>
-                  </a:lnTo>
-                  <a:lnTo>
-                    <a:pt x="4297351" y="2694655"/>
-                  </a:lnTo>
-                  <a:lnTo>
-                    <a:pt x="4225729" y="2699322"/>
-                  </a:lnTo>
-                  <a:lnTo>
-                    <a:pt x="4154106" y="2703962"/>
-                  </a:lnTo>
-                  <a:lnTo>
-                    <a:pt x="4082483" y="2708575"/>
-                  </a:lnTo>
-                  <a:lnTo>
-                    <a:pt x="4010861" y="2713160"/>
-                  </a:lnTo>
-                  <a:lnTo>
-                    <a:pt x="3939238" y="2717719"/>
-                  </a:lnTo>
-                  <a:lnTo>
-                    <a:pt x="3867616" y="2722250"/>
-                  </a:lnTo>
-                  <a:lnTo>
-                    <a:pt x="3795993" y="2726754"/>
-                  </a:lnTo>
-                  <a:lnTo>
-                    <a:pt x="3724371" y="2731232"/>
-                  </a:lnTo>
-                  <a:lnTo>
-                    <a:pt x="3652748" y="2735683"/>
-                  </a:lnTo>
-                  <a:lnTo>
-                    <a:pt x="3581126" y="2740108"/>
-                  </a:lnTo>
-                  <a:lnTo>
-                    <a:pt x="3509503" y="2744507"/>
-                  </a:lnTo>
-                  <a:lnTo>
-                    <a:pt x="3437881" y="2748880"/>
-                  </a:lnTo>
-                  <a:lnTo>
-                    <a:pt x="3366258" y="2753227"/>
-                  </a:lnTo>
-                  <a:lnTo>
-                    <a:pt x="3294636" y="2757548"/>
-                  </a:lnTo>
-                  <a:lnTo>
-                    <a:pt x="3223013" y="2761844"/>
-                  </a:lnTo>
-                  <a:lnTo>
-                    <a:pt x="3151391" y="2766114"/>
-                  </a:lnTo>
-                  <a:lnTo>
-                    <a:pt x="3079768" y="2770359"/>
-                  </a:lnTo>
-                  <a:lnTo>
-                    <a:pt x="3008146" y="2774579"/>
-                  </a:lnTo>
-                  <a:lnTo>
-                    <a:pt x="2936523" y="2778774"/>
-                  </a:lnTo>
-                  <a:lnTo>
-                    <a:pt x="2864901" y="2782944"/>
-                  </a:lnTo>
-                  <a:lnTo>
-                    <a:pt x="2793278" y="2787089"/>
-                  </a:lnTo>
-                  <a:lnTo>
-                    <a:pt x="2721655" y="2791210"/>
-                  </a:lnTo>
-                  <a:lnTo>
-                    <a:pt x="2650033" y="2795307"/>
-                  </a:lnTo>
-                  <a:lnTo>
-                    <a:pt x="2578410" y="2799379"/>
-                  </a:lnTo>
-                  <a:lnTo>
-                    <a:pt x="2506788" y="2803427"/>
-                  </a:lnTo>
-                  <a:lnTo>
-                    <a:pt x="2435165" y="2807451"/>
-                  </a:lnTo>
-                  <a:lnTo>
-                    <a:pt x="2363543" y="2811452"/>
-                  </a:lnTo>
-                  <a:lnTo>
-                    <a:pt x="2291920" y="2815429"/>
-                  </a:lnTo>
-                  <a:lnTo>
-                    <a:pt x="2220298" y="2819382"/>
-                  </a:lnTo>
-                  <a:lnTo>
-                    <a:pt x="2148675" y="2823312"/>
-                  </a:lnTo>
-                  <a:lnTo>
-                    <a:pt x="2077053" y="2827218"/>
-                  </a:lnTo>
-                  <a:lnTo>
-                    <a:pt x="2005430" y="2831102"/>
-                  </a:lnTo>
-                  <a:lnTo>
-                    <a:pt x="1933808" y="2834962"/>
-                  </a:lnTo>
-                  <a:lnTo>
-                    <a:pt x="1862185" y="2838800"/>
-                  </a:lnTo>
-                  <a:lnTo>
-                    <a:pt x="1790563" y="2842615"/>
-                  </a:lnTo>
-                  <a:lnTo>
-                    <a:pt x="1718940" y="2846408"/>
-                  </a:lnTo>
-                  <a:lnTo>
-                    <a:pt x="1647318" y="2850178"/>
-                  </a:lnTo>
-                  <a:lnTo>
-                    <a:pt x="1575695" y="2853925"/>
-                  </a:lnTo>
-                  <a:lnTo>
-                    <a:pt x="1504073" y="2857651"/>
-                  </a:lnTo>
-                  <a:lnTo>
-                    <a:pt x="1432450" y="2861354"/>
-                  </a:lnTo>
-                  <a:lnTo>
-                    <a:pt x="1360827" y="2865036"/>
-                  </a:lnTo>
-                  <a:lnTo>
-                    <a:pt x="1289205" y="2868696"/>
-                  </a:lnTo>
-                  <a:lnTo>
-                    <a:pt x="1217582" y="2872334"/>
-                  </a:lnTo>
-                  <a:lnTo>
-                    <a:pt x="1145960" y="2875951"/>
-                  </a:lnTo>
-                  <a:lnTo>
-                    <a:pt x="1074337" y="2879546"/>
-                  </a:lnTo>
-                  <a:lnTo>
-                    <a:pt x="1002715" y="2883120"/>
-                  </a:lnTo>
-                  <a:lnTo>
-                    <a:pt x="931092" y="2886673"/>
-                  </a:lnTo>
-                  <a:lnTo>
-                    <a:pt x="859470" y="2890205"/>
-                  </a:lnTo>
-                  <a:lnTo>
-                    <a:pt x="787847" y="2893716"/>
-                  </a:lnTo>
-                  <a:lnTo>
-                    <a:pt x="716225" y="2897206"/>
-                  </a:lnTo>
-                  <a:lnTo>
-                    <a:pt x="644602" y="2900675"/>
-                  </a:lnTo>
-                  <a:lnTo>
-                    <a:pt x="572980" y="2904124"/>
-                  </a:lnTo>
-                  <a:lnTo>
-                    <a:pt x="501357" y="2907553"/>
-                  </a:lnTo>
-                  <a:lnTo>
-                    <a:pt x="429735" y="2910961"/>
-                  </a:lnTo>
-                  <a:lnTo>
-                    <a:pt x="358112" y="2914349"/>
-                  </a:lnTo>
-                  <a:lnTo>
-                    <a:pt x="286490" y="2917718"/>
-                  </a:lnTo>
-                  <a:lnTo>
-                    <a:pt x="214867" y="2921066"/>
-                  </a:lnTo>
-                  <a:lnTo>
-                    <a:pt x="143245" y="2924394"/>
-                  </a:lnTo>
-                  <a:lnTo>
-                    <a:pt x="71622" y="2927703"/>
-                  </a:lnTo>
-                  <a:lnTo>
-                    <a:pt x="0" y="2930992"/>
+                    <a:pt x="3437881" y="17362"/>
+                  </a:lnTo>
+                  <a:lnTo>
+                    <a:pt x="3509503" y="251928"/>
+                  </a:lnTo>
+                  <a:lnTo>
+                    <a:pt x="3581126" y="470621"/>
+                  </a:lnTo>
+                  <a:lnTo>
+                    <a:pt x="3652748" y="674515"/>
+                  </a:lnTo>
+                  <a:lnTo>
+                    <a:pt x="3724371" y="864612"/>
+                  </a:lnTo>
+                  <a:lnTo>
+                    <a:pt x="3795993" y="1041846"/>
+                  </a:lnTo>
+                  <a:lnTo>
+                    <a:pt x="3867616" y="1207086"/>
+                  </a:lnTo>
+                  <a:lnTo>
+                    <a:pt x="3939238" y="1361145"/>
+                  </a:lnTo>
+                  <a:lnTo>
+                    <a:pt x="4010861" y="1504779"/>
+                  </a:lnTo>
+                  <a:lnTo>
+                    <a:pt x="4082483" y="1638693"/>
+                  </a:lnTo>
+                  <a:lnTo>
+                    <a:pt x="4154106" y="1763545"/>
+                  </a:lnTo>
+                  <a:lnTo>
+                    <a:pt x="4225729" y="1879949"/>
+                  </a:lnTo>
+                  <a:lnTo>
+                    <a:pt x="4297351" y="1988476"/>
+                  </a:lnTo>
+                  <a:lnTo>
+                    <a:pt x="4368974" y="2089659"/>
+                  </a:lnTo>
+                  <a:lnTo>
+                    <a:pt x="4440596" y="2183995"/>
+                  </a:lnTo>
+                  <a:lnTo>
+                    <a:pt x="4512219" y="2271948"/>
+                  </a:lnTo>
+                  <a:lnTo>
+                    <a:pt x="4583841" y="2353949"/>
+                  </a:lnTo>
+                  <a:lnTo>
+                    <a:pt x="4655464" y="2430401"/>
+                  </a:lnTo>
+                  <a:lnTo>
+                    <a:pt x="4727086" y="2501679"/>
+                  </a:lnTo>
+                  <a:lnTo>
+                    <a:pt x="4798709" y="2568135"/>
+                  </a:lnTo>
+                  <a:lnTo>
+                    <a:pt x="4870331" y="2630093"/>
+                  </a:lnTo>
+                  <a:lnTo>
+                    <a:pt x="4941954" y="2650096"/>
+                  </a:lnTo>
+                  <a:lnTo>
+                    <a:pt x="5013576" y="2642947"/>
+                  </a:lnTo>
+                  <a:lnTo>
+                    <a:pt x="5085199" y="2635737"/>
+                  </a:lnTo>
+                  <a:lnTo>
+                    <a:pt x="5156821" y="2628465"/>
+                  </a:lnTo>
+                  <a:lnTo>
+                    <a:pt x="5228444" y="2621131"/>
+                  </a:lnTo>
+                  <a:lnTo>
+                    <a:pt x="5300066" y="2613735"/>
+                  </a:lnTo>
+                  <a:lnTo>
+                    <a:pt x="5371689" y="2606274"/>
+                  </a:lnTo>
+                  <a:lnTo>
+                    <a:pt x="5443311" y="2598750"/>
+                  </a:lnTo>
+                  <a:lnTo>
+                    <a:pt x="5514934" y="2591161"/>
+                  </a:lnTo>
+                  <a:lnTo>
+                    <a:pt x="5586557" y="2583507"/>
+                  </a:lnTo>
+                  <a:lnTo>
+                    <a:pt x="5658179" y="2575787"/>
+                  </a:lnTo>
+                  <a:lnTo>
+                    <a:pt x="5729802" y="2568002"/>
+                  </a:lnTo>
+                  <a:lnTo>
+                    <a:pt x="5801424" y="2560149"/>
+                  </a:lnTo>
+                  <a:lnTo>
+                    <a:pt x="5873047" y="2552229"/>
+                  </a:lnTo>
+                  <a:lnTo>
+                    <a:pt x="5944669" y="2544242"/>
+                  </a:lnTo>
+                  <a:lnTo>
+                    <a:pt x="6016292" y="2536185"/>
+                  </a:lnTo>
+                  <a:lnTo>
+                    <a:pt x="6087914" y="2528060"/>
+                  </a:lnTo>
+                  <a:lnTo>
+                    <a:pt x="6159537" y="2519865"/>
+                  </a:lnTo>
+                  <a:lnTo>
+                    <a:pt x="6231159" y="2511600"/>
+                  </a:lnTo>
+                  <a:lnTo>
+                    <a:pt x="6302782" y="2503263"/>
+                  </a:lnTo>
+                  <a:lnTo>
+                    <a:pt x="6374404" y="2494856"/>
+                  </a:lnTo>
+                  <a:lnTo>
+                    <a:pt x="6446027" y="2486376"/>
+                  </a:lnTo>
+                  <a:lnTo>
+                    <a:pt x="6517649" y="2477823"/>
+                  </a:lnTo>
+                  <a:lnTo>
+                    <a:pt x="6589272" y="2469198"/>
+                  </a:lnTo>
+                  <a:lnTo>
+                    <a:pt x="6660894" y="2460498"/>
+                  </a:lnTo>
+                  <a:lnTo>
+                    <a:pt x="6732517" y="2451724"/>
+                  </a:lnTo>
+                  <a:lnTo>
+                    <a:pt x="6804139" y="2442874"/>
+                  </a:lnTo>
+                  <a:lnTo>
+                    <a:pt x="6875762" y="2433948"/>
+                  </a:lnTo>
+                  <a:lnTo>
+                    <a:pt x="6947385" y="2424946"/>
+                  </a:lnTo>
+                  <a:lnTo>
+                    <a:pt x="7019007" y="2415867"/>
+                  </a:lnTo>
+                  <a:lnTo>
+                    <a:pt x="7090630" y="2406710"/>
+                  </a:lnTo>
+                  <a:lnTo>
+                    <a:pt x="7090630" y="3386481"/>
+                  </a:lnTo>
+                  <a:lnTo>
+                    <a:pt x="7019007" y="3379421"/>
+                  </a:lnTo>
+                  <a:lnTo>
+                    <a:pt x="6947385" y="3371849"/>
+                  </a:lnTo>
+                  <a:lnTo>
+                    <a:pt x="6875762" y="3363728"/>
+                  </a:lnTo>
+                  <a:lnTo>
+                    <a:pt x="6804139" y="3355017"/>
+                  </a:lnTo>
+                  <a:lnTo>
+                    <a:pt x="6732517" y="3345674"/>
+                  </a:lnTo>
+                  <a:lnTo>
+                    <a:pt x="6660894" y="3335652"/>
+                  </a:lnTo>
+                  <a:lnTo>
+                    <a:pt x="6589272" y="3324904"/>
+                  </a:lnTo>
+                  <a:lnTo>
+                    <a:pt x="6517649" y="3313375"/>
+                  </a:lnTo>
+                  <a:lnTo>
+                    <a:pt x="6446027" y="3301009"/>
+                  </a:lnTo>
+                  <a:lnTo>
+                    <a:pt x="6374404" y="3287746"/>
+                  </a:lnTo>
+                  <a:lnTo>
+                    <a:pt x="6302782" y="3273520"/>
+                  </a:lnTo>
+                  <a:lnTo>
+                    <a:pt x="6231159" y="3258262"/>
+                  </a:lnTo>
+                  <a:lnTo>
+                    <a:pt x="6159537" y="3241896"/>
+                  </a:lnTo>
+                  <a:lnTo>
+                    <a:pt x="6087914" y="3224343"/>
+                  </a:lnTo>
+                  <a:lnTo>
+                    <a:pt x="6016292" y="3205515"/>
+                  </a:lnTo>
+                  <a:lnTo>
+                    <a:pt x="5944669" y="3185321"/>
+                  </a:lnTo>
+                  <a:lnTo>
+                    <a:pt x="5873047" y="3163662"/>
+                  </a:lnTo>
+                  <a:lnTo>
+                    <a:pt x="5801424" y="3140430"/>
+                  </a:lnTo>
+                  <a:lnTo>
+                    <a:pt x="5729802" y="3115512"/>
+                  </a:lnTo>
+                  <a:lnTo>
+                    <a:pt x="5658179" y="3088785"/>
+                  </a:lnTo>
+                  <a:lnTo>
+                    <a:pt x="5586557" y="3060119"/>
+                  </a:lnTo>
+                  <a:lnTo>
+                    <a:pt x="5514934" y="3029372"/>
+                  </a:lnTo>
+                  <a:lnTo>
+                    <a:pt x="5443311" y="2996394"/>
+                  </a:lnTo>
+                  <a:lnTo>
+                    <a:pt x="5371689" y="2961021"/>
+                  </a:lnTo>
+                  <a:lnTo>
+                    <a:pt x="5300066" y="2923082"/>
+                  </a:lnTo>
+                  <a:lnTo>
+                    <a:pt x="5228444" y="2882389"/>
+                  </a:lnTo>
+                  <a:lnTo>
+                    <a:pt x="5156821" y="2838742"/>
+                  </a:lnTo>
+                  <a:lnTo>
+                    <a:pt x="5085199" y="2791928"/>
+                  </a:lnTo>
+                  <a:lnTo>
+                    <a:pt x="5013576" y="2741715"/>
+                  </a:lnTo>
+                  <a:lnTo>
+                    <a:pt x="4941954" y="2687859"/>
+                  </a:lnTo>
+                  <a:lnTo>
+                    <a:pt x="4870331" y="2657183"/>
+                  </a:lnTo>
+                  <a:lnTo>
+                    <a:pt x="4798709" y="2664211"/>
+                  </a:lnTo>
+                  <a:lnTo>
+                    <a:pt x="4727086" y="2671179"/>
+                  </a:lnTo>
+                  <a:lnTo>
+                    <a:pt x="4655464" y="2678087"/>
+                  </a:lnTo>
+                  <a:lnTo>
+                    <a:pt x="4583841" y="2684937"/>
+                  </a:lnTo>
+                  <a:lnTo>
+                    <a:pt x="4512219" y="2691729"/>
+                  </a:lnTo>
+                  <a:lnTo>
+                    <a:pt x="4440596" y="2698462"/>
+                  </a:lnTo>
+                  <a:lnTo>
+                    <a:pt x="4368974" y="2705139"/>
+                  </a:lnTo>
+                  <a:lnTo>
+                    <a:pt x="4297351" y="2711759"/>
+                  </a:lnTo>
+                  <a:lnTo>
+                    <a:pt x="4225729" y="2718322"/>
+                  </a:lnTo>
+                  <a:lnTo>
+                    <a:pt x="4154106" y="2724830"/>
+                  </a:lnTo>
+                  <a:lnTo>
+                    <a:pt x="4082483" y="2731282"/>
+                  </a:lnTo>
+                  <a:lnTo>
+                    <a:pt x="4010861" y="2737680"/>
+                  </a:lnTo>
+                  <a:lnTo>
+                    <a:pt x="3939238" y="2744023"/>
+                  </a:lnTo>
+                  <a:lnTo>
+                    <a:pt x="3867616" y="2750312"/>
+                  </a:lnTo>
+                  <a:lnTo>
+                    <a:pt x="3795993" y="2756548"/>
+                  </a:lnTo>
+                  <a:lnTo>
+                    <a:pt x="3724371" y="2762731"/>
+                  </a:lnTo>
+                  <a:lnTo>
+                    <a:pt x="3652748" y="2768861"/>
+                  </a:lnTo>
+                  <a:lnTo>
+                    <a:pt x="3581126" y="2774939"/>
+                  </a:lnTo>
+                  <a:lnTo>
+                    <a:pt x="3509503" y="2780965"/>
+                  </a:lnTo>
+                  <a:lnTo>
+                    <a:pt x="3437881" y="2786940"/>
+                  </a:lnTo>
+                  <a:lnTo>
+                    <a:pt x="3366258" y="2792865"/>
+                  </a:lnTo>
+                  <a:lnTo>
+                    <a:pt x="3294636" y="2798739"/>
+                  </a:lnTo>
+                  <a:lnTo>
+                    <a:pt x="3223013" y="2804563"/>
+                  </a:lnTo>
+                  <a:lnTo>
+                    <a:pt x="3151391" y="2810337"/>
+                  </a:lnTo>
+                  <a:lnTo>
+                    <a:pt x="3079768" y="2816063"/>
+                  </a:lnTo>
+                  <a:lnTo>
+                    <a:pt x="3008146" y="2821739"/>
+                  </a:lnTo>
+                  <a:lnTo>
+                    <a:pt x="2936523" y="2827368"/>
+                  </a:lnTo>
+                  <a:lnTo>
+                    <a:pt x="2864901" y="2832948"/>
+                  </a:lnTo>
+                  <a:lnTo>
+                    <a:pt x="2793278" y="2838482"/>
+                  </a:lnTo>
+                  <a:lnTo>
+                    <a:pt x="2721655" y="2843968"/>
+                  </a:lnTo>
+                  <a:lnTo>
+                    <a:pt x="2650033" y="2849407"/>
+                  </a:lnTo>
+                  <a:lnTo>
+                    <a:pt x="2578410" y="2854800"/>
+                  </a:lnTo>
+                  <a:lnTo>
+                    <a:pt x="2506788" y="2860148"/>
+                  </a:lnTo>
+                  <a:lnTo>
+                    <a:pt x="2435165" y="2865450"/>
+                  </a:lnTo>
+                  <a:lnTo>
+                    <a:pt x="2363543" y="2870707"/>
+                  </a:lnTo>
+                  <a:lnTo>
+                    <a:pt x="2291920" y="2875919"/>
+                  </a:lnTo>
+                  <a:lnTo>
+                    <a:pt x="2220298" y="2881086"/>
+                  </a:lnTo>
+                  <a:lnTo>
+                    <a:pt x="2148675" y="2886210"/>
+                  </a:lnTo>
+                  <a:lnTo>
+                    <a:pt x="2077053" y="2891291"/>
+                  </a:lnTo>
+                  <a:lnTo>
+                    <a:pt x="2005430" y="2896328"/>
+                  </a:lnTo>
+                  <a:lnTo>
+                    <a:pt x="1933808" y="2901322"/>
+                  </a:lnTo>
+                  <a:lnTo>
+                    <a:pt x="1862185" y="2906274"/>
+                  </a:lnTo>
+                  <a:lnTo>
+                    <a:pt x="1790563" y="2911184"/>
+                  </a:lnTo>
+                  <a:lnTo>
+                    <a:pt x="1718940" y="2916052"/>
+                  </a:lnTo>
+                  <a:lnTo>
+                    <a:pt x="1647318" y="2920878"/>
+                  </a:lnTo>
+                  <a:lnTo>
+                    <a:pt x="1575695" y="2925664"/>
+                  </a:lnTo>
+                  <a:lnTo>
+                    <a:pt x="1504073" y="2930409"/>
+                  </a:lnTo>
+                  <a:lnTo>
+                    <a:pt x="1432450" y="2935113"/>
+                  </a:lnTo>
+                  <a:lnTo>
+                    <a:pt x="1360827" y="2939778"/>
+                  </a:lnTo>
+                  <a:lnTo>
+                    <a:pt x="1289205" y="2944403"/>
+                  </a:lnTo>
+                  <a:lnTo>
+                    <a:pt x="1217582" y="2948988"/>
+                  </a:lnTo>
+                  <a:lnTo>
+                    <a:pt x="1145960" y="2953535"/>
+                  </a:lnTo>
+                  <a:lnTo>
+                    <a:pt x="1074337" y="2958043"/>
+                  </a:lnTo>
+                  <a:lnTo>
+                    <a:pt x="1002715" y="2962512"/>
+                  </a:lnTo>
+                  <a:lnTo>
+                    <a:pt x="931092" y="2966944"/>
+                  </a:lnTo>
+                  <a:lnTo>
+                    <a:pt x="859470" y="2971338"/>
+                  </a:lnTo>
+                  <a:lnTo>
+                    <a:pt x="787847" y="2975694"/>
+                  </a:lnTo>
+                  <a:lnTo>
+                    <a:pt x="716225" y="2980014"/>
+                  </a:lnTo>
+                  <a:lnTo>
+                    <a:pt x="644602" y="2984297"/>
+                  </a:lnTo>
+                  <a:lnTo>
+                    <a:pt x="572980" y="2988543"/>
+                  </a:lnTo>
+                  <a:lnTo>
+                    <a:pt x="501357" y="2992753"/>
+                  </a:lnTo>
+                  <a:lnTo>
+                    <a:pt x="429735" y="2996928"/>
+                  </a:lnTo>
+                  <a:lnTo>
+                    <a:pt x="358112" y="3001067"/>
+                  </a:lnTo>
+                  <a:lnTo>
+                    <a:pt x="286490" y="3005171"/>
+                  </a:lnTo>
+                  <a:lnTo>
+                    <a:pt x="214867" y="3009239"/>
+                  </a:lnTo>
+                  <a:lnTo>
+                    <a:pt x="143245" y="3013274"/>
+                  </a:lnTo>
+                  <a:lnTo>
+                    <a:pt x="71622" y="3017274"/>
+                  </a:lnTo>
+                  <a:lnTo>
+                    <a:pt x="0" y="3021240"/>
                   </a:lnTo>
                   <a:lnTo>
                     <a:pt x="0" y="0"/>
@@ -3501,177 +3495,171 @@
           </p:nvSpPr>
           <p:spPr>
             <a:xfrm>
-              <a:off x="4450463" y="2073503"/>
-              <a:ext cx="3812216" cy="2651376"/>
+              <a:off x="4604987" y="2073503"/>
+              <a:ext cx="3657691" cy="2650096"/>
             </a:xfrm>
             <a:custGeom>
               <a:avLst/>
               <a:pathLst>
-                <a:path w="3812216" h="2651376">
+                <a:path w="3657691" h="2650096">
                   <a:moveTo>
                     <a:pt x="0" y="0"/>
                   </a:moveTo>
                   <a:lnTo>
-                    <a:pt x="16222" y="50876"/>
-                  </a:lnTo>
-                  <a:lnTo>
-                    <a:pt x="87845" y="261701"/>
-                  </a:lnTo>
-                  <a:lnTo>
-                    <a:pt x="159467" y="459579"/>
-                  </a:lnTo>
-                  <a:lnTo>
-                    <a:pt x="231090" y="645304"/>
-                  </a:lnTo>
-                  <a:lnTo>
-                    <a:pt x="302712" y="819623"/>
-                  </a:lnTo>
-                  <a:lnTo>
-                    <a:pt x="374335" y="983237"/>
-                  </a:lnTo>
-                  <a:lnTo>
-                    <a:pt x="445957" y="1136802"/>
-                  </a:lnTo>
-                  <a:lnTo>
-                    <a:pt x="517580" y="1280937"/>
-                  </a:lnTo>
-                  <a:lnTo>
-                    <a:pt x="589202" y="1416220"/>
-                  </a:lnTo>
-                  <a:lnTo>
-                    <a:pt x="660825" y="1543194"/>
-                  </a:lnTo>
-                  <a:lnTo>
-                    <a:pt x="732447" y="1662370"/>
-                  </a:lnTo>
-                  <a:lnTo>
-                    <a:pt x="804070" y="1774228"/>
-                  </a:lnTo>
-                  <a:lnTo>
-                    <a:pt x="875692" y="1879216"/>
-                  </a:lnTo>
-                  <a:lnTo>
-                    <a:pt x="947315" y="1977756"/>
-                  </a:lnTo>
-                  <a:lnTo>
-                    <a:pt x="1018937" y="2070244"/>
-                  </a:lnTo>
-                  <a:lnTo>
-                    <a:pt x="1090560" y="2157053"/>
-                  </a:lnTo>
-                  <a:lnTo>
-                    <a:pt x="1162182" y="2238530"/>
-                  </a:lnTo>
-                  <a:lnTo>
-                    <a:pt x="1233805" y="2315003"/>
-                  </a:lnTo>
-                  <a:lnTo>
-                    <a:pt x="1305428" y="2386780"/>
-                  </a:lnTo>
-                  <a:lnTo>
-                    <a:pt x="1377050" y="2454149"/>
-                  </a:lnTo>
-                  <a:lnTo>
-                    <a:pt x="1448673" y="2517380"/>
-                  </a:lnTo>
-                  <a:lnTo>
-                    <a:pt x="1520295" y="2576728"/>
-                  </a:lnTo>
-                  <a:lnTo>
-                    <a:pt x="1591918" y="2632432"/>
-                  </a:lnTo>
-                  <a:lnTo>
-                    <a:pt x="1663540" y="2651376"/>
-                  </a:lnTo>
-                  <a:lnTo>
-                    <a:pt x="1735163" y="2646423"/>
-                  </a:lnTo>
-                  <a:lnTo>
-                    <a:pt x="1806785" y="2641440"/>
-                  </a:lnTo>
-                  <a:lnTo>
-                    <a:pt x="1878408" y="2636428"/>
-                  </a:lnTo>
-                  <a:lnTo>
-                    <a:pt x="1950030" y="2631386"/>
-                  </a:lnTo>
-                  <a:lnTo>
-                    <a:pt x="2021653" y="2626314"/>
-                  </a:lnTo>
-                  <a:lnTo>
-                    <a:pt x="2093275" y="2621212"/>
-                  </a:lnTo>
-                  <a:lnTo>
-                    <a:pt x="2164898" y="2616080"/>
-                  </a:lnTo>
-                  <a:lnTo>
-                    <a:pt x="2236520" y="2610917"/>
-                  </a:lnTo>
-                  <a:lnTo>
-                    <a:pt x="2308143" y="2605723"/>
-                  </a:lnTo>
-                  <a:lnTo>
-                    <a:pt x="2379765" y="2600498"/>
-                  </a:lnTo>
-                  <a:lnTo>
-                    <a:pt x="2451388" y="2595243"/>
-                  </a:lnTo>
-                  <a:lnTo>
-                    <a:pt x="2523010" y="2589956"/>
-                  </a:lnTo>
-                  <a:lnTo>
-                    <a:pt x="2594633" y="2584637"/>
-                  </a:lnTo>
-                  <a:lnTo>
-                    <a:pt x="2666256" y="2579287"/>
-                  </a:lnTo>
-                  <a:lnTo>
-                    <a:pt x="2737878" y="2573905"/>
-                  </a:lnTo>
-                  <a:lnTo>
-                    <a:pt x="2809501" y="2568491"/>
-                  </a:lnTo>
-                  <a:lnTo>
-                    <a:pt x="2881123" y="2563045"/>
-                  </a:lnTo>
-                  <a:lnTo>
-                    <a:pt x="2952746" y="2557566"/>
-                  </a:lnTo>
-                  <a:lnTo>
-                    <a:pt x="3024368" y="2552055"/>
-                  </a:lnTo>
-                  <a:lnTo>
-                    <a:pt x="3095991" y="2546511"/>
-                  </a:lnTo>
-                  <a:lnTo>
-                    <a:pt x="3167613" y="2540934"/>
-                  </a:lnTo>
-                  <a:lnTo>
-                    <a:pt x="3239236" y="2535324"/>
-                  </a:lnTo>
-                  <a:lnTo>
-                    <a:pt x="3310858" y="2529681"/>
-                  </a:lnTo>
-                  <a:lnTo>
-                    <a:pt x="3382481" y="2524003"/>
-                  </a:lnTo>
-                  <a:lnTo>
-                    <a:pt x="3454103" y="2518293"/>
-                  </a:lnTo>
-                  <a:lnTo>
-                    <a:pt x="3525726" y="2512548"/>
-                  </a:lnTo>
-                  <a:lnTo>
-                    <a:pt x="3597348" y="2506769"/>
-                  </a:lnTo>
-                  <a:lnTo>
-                    <a:pt x="3668971" y="2500955"/>
-                  </a:lnTo>
-                  <a:lnTo>
-                    <a:pt x="3740593" y="2495107"/>
-                  </a:lnTo>
-                  <a:lnTo>
-                    <a:pt x="3812216" y="2489224"/>
+                    <a:pt x="4942" y="17362"/>
+                  </a:lnTo>
+                  <a:lnTo>
+                    <a:pt x="76565" y="251928"/>
+                  </a:lnTo>
+                  <a:lnTo>
+                    <a:pt x="148187" y="470621"/>
+                  </a:lnTo>
+                  <a:lnTo>
+                    <a:pt x="219810" y="674515"/>
+                  </a:lnTo>
+                  <a:lnTo>
+                    <a:pt x="291432" y="864612"/>
+                  </a:lnTo>
+                  <a:lnTo>
+                    <a:pt x="363055" y="1041846"/>
+                  </a:lnTo>
+                  <a:lnTo>
+                    <a:pt x="434677" y="1207086"/>
+                  </a:lnTo>
+                  <a:lnTo>
+                    <a:pt x="506300" y="1361145"/>
+                  </a:lnTo>
+                  <a:lnTo>
+                    <a:pt x="577922" y="1504779"/>
+                  </a:lnTo>
+                  <a:lnTo>
+                    <a:pt x="649545" y="1638693"/>
+                  </a:lnTo>
+                  <a:lnTo>
+                    <a:pt x="721167" y="1763545"/>
+                  </a:lnTo>
+                  <a:lnTo>
+                    <a:pt x="792790" y="1879949"/>
+                  </a:lnTo>
+                  <a:lnTo>
+                    <a:pt x="864412" y="1988476"/>
+                  </a:lnTo>
+                  <a:lnTo>
+                    <a:pt x="936035" y="2089659"/>
+                  </a:lnTo>
+                  <a:lnTo>
+                    <a:pt x="1007658" y="2183995"/>
+                  </a:lnTo>
+                  <a:lnTo>
+                    <a:pt x="1079280" y="2271948"/>
+                  </a:lnTo>
+                  <a:lnTo>
+                    <a:pt x="1150903" y="2353949"/>
+                  </a:lnTo>
+                  <a:lnTo>
+                    <a:pt x="1222525" y="2430401"/>
+                  </a:lnTo>
+                  <a:lnTo>
+                    <a:pt x="1294148" y="2501679"/>
+                  </a:lnTo>
+                  <a:lnTo>
+                    <a:pt x="1365770" y="2568135"/>
+                  </a:lnTo>
+                  <a:lnTo>
+                    <a:pt x="1437393" y="2630093"/>
+                  </a:lnTo>
+                  <a:lnTo>
+                    <a:pt x="1509015" y="2650096"/>
+                  </a:lnTo>
+                  <a:lnTo>
+                    <a:pt x="1580638" y="2642947"/>
+                  </a:lnTo>
+                  <a:lnTo>
+                    <a:pt x="1652260" y="2635737"/>
+                  </a:lnTo>
+                  <a:lnTo>
+                    <a:pt x="1723883" y="2628465"/>
+                  </a:lnTo>
+                  <a:lnTo>
+                    <a:pt x="1795505" y="2621131"/>
+                  </a:lnTo>
+                  <a:lnTo>
+                    <a:pt x="1867128" y="2613735"/>
+                  </a:lnTo>
+                  <a:lnTo>
+                    <a:pt x="1938750" y="2606274"/>
+                  </a:lnTo>
+                  <a:lnTo>
+                    <a:pt x="2010373" y="2598750"/>
+                  </a:lnTo>
+                  <a:lnTo>
+                    <a:pt x="2081995" y="2591161"/>
+                  </a:lnTo>
+                  <a:lnTo>
+                    <a:pt x="2153618" y="2583507"/>
+                  </a:lnTo>
+                  <a:lnTo>
+                    <a:pt x="2225240" y="2575787"/>
+                  </a:lnTo>
+                  <a:lnTo>
+                    <a:pt x="2296863" y="2568002"/>
+                  </a:lnTo>
+                  <a:lnTo>
+                    <a:pt x="2368486" y="2560149"/>
+                  </a:lnTo>
+                  <a:lnTo>
+                    <a:pt x="2440108" y="2552229"/>
+                  </a:lnTo>
+                  <a:lnTo>
+                    <a:pt x="2511731" y="2544242"/>
+                  </a:lnTo>
+                  <a:lnTo>
+                    <a:pt x="2583353" y="2536185"/>
+                  </a:lnTo>
+                  <a:lnTo>
+                    <a:pt x="2654976" y="2528060"/>
+                  </a:lnTo>
+                  <a:lnTo>
+                    <a:pt x="2726598" y="2519865"/>
+                  </a:lnTo>
+                  <a:lnTo>
+                    <a:pt x="2798221" y="2511600"/>
+                  </a:lnTo>
+                  <a:lnTo>
+                    <a:pt x="2869843" y="2503263"/>
+                  </a:lnTo>
+                  <a:lnTo>
+                    <a:pt x="2941466" y="2494856"/>
+                  </a:lnTo>
+                  <a:lnTo>
+                    <a:pt x="3013088" y="2486376"/>
+                  </a:lnTo>
+                  <a:lnTo>
+                    <a:pt x="3084711" y="2477823"/>
+                  </a:lnTo>
+                  <a:lnTo>
+                    <a:pt x="3156333" y="2469198"/>
+                  </a:lnTo>
+                  <a:lnTo>
+                    <a:pt x="3227956" y="2460498"/>
+                  </a:lnTo>
+                  <a:lnTo>
+                    <a:pt x="3299578" y="2451724"/>
+                  </a:lnTo>
+                  <a:lnTo>
+                    <a:pt x="3371201" y="2442874"/>
+                  </a:lnTo>
+                  <a:lnTo>
+                    <a:pt x="3442823" y="2433948"/>
+                  </a:lnTo>
+                  <a:lnTo>
+                    <a:pt x="3514446" y="2424946"/>
+                  </a:lnTo>
+                  <a:lnTo>
+                    <a:pt x="3586068" y="2415867"/>
+                  </a:lnTo>
+                  <a:lnTo>
+                    <a:pt x="3657691" y="2406710"/>
                   </a:lnTo>
                 </a:path>
               </a:pathLst>
@@ -3691,312 +3679,312 @@
           </p:nvSpPr>
           <p:spPr>
             <a:xfrm>
-              <a:off x="1172049" y="4729802"/>
-              <a:ext cx="7090630" cy="708105"/>
+              <a:off x="1172049" y="4730686"/>
+              <a:ext cx="7090630" cy="729297"/>
             </a:xfrm>
             <a:custGeom>
               <a:avLst/>
               <a:pathLst>
-                <a:path w="7090630" h="708105">
+                <a:path w="7090630" h="729297">
                   <a:moveTo>
-                    <a:pt x="7090630" y="708105"/>
+                    <a:pt x="7090630" y="729297"/>
                   </a:moveTo>
                   <a:lnTo>
-                    <a:pt x="7019007" y="700296"/>
-                  </a:lnTo>
-                  <a:lnTo>
-                    <a:pt x="6947385" y="691977"/>
-                  </a:lnTo>
-                  <a:lnTo>
-                    <a:pt x="6875762" y="683113"/>
-                  </a:lnTo>
-                  <a:lnTo>
-                    <a:pt x="6804139" y="673669"/>
-                  </a:lnTo>
-                  <a:lnTo>
-                    <a:pt x="6732517" y="663607"/>
-                  </a:lnTo>
-                  <a:lnTo>
-                    <a:pt x="6660894" y="652886"/>
-                  </a:lnTo>
-                  <a:lnTo>
-                    <a:pt x="6589272" y="641464"/>
-                  </a:lnTo>
-                  <a:lnTo>
-                    <a:pt x="6517649" y="629295"/>
-                  </a:lnTo>
-                  <a:lnTo>
-                    <a:pt x="6446027" y="616330"/>
-                  </a:lnTo>
-                  <a:lnTo>
-                    <a:pt x="6374404" y="602516"/>
-                  </a:lnTo>
-                  <a:lnTo>
-                    <a:pt x="6302782" y="587798"/>
-                  </a:lnTo>
-                  <a:lnTo>
-                    <a:pt x="6231159" y="572117"/>
-                  </a:lnTo>
-                  <a:lnTo>
-                    <a:pt x="6159537" y="555411"/>
-                  </a:lnTo>
-                  <a:lnTo>
-                    <a:pt x="6087914" y="537611"/>
-                  </a:lnTo>
-                  <a:lnTo>
-                    <a:pt x="6016292" y="518646"/>
-                  </a:lnTo>
-                  <a:lnTo>
-                    <a:pt x="5944669" y="498441"/>
-                  </a:lnTo>
-                  <a:lnTo>
-                    <a:pt x="5873047" y="476913"/>
-                  </a:lnTo>
-                  <a:lnTo>
-                    <a:pt x="5801424" y="453977"/>
-                  </a:lnTo>
-                  <a:lnTo>
-                    <a:pt x="5729802" y="429540"/>
-                  </a:lnTo>
-                  <a:lnTo>
-                    <a:pt x="5658179" y="403504"/>
-                  </a:lnTo>
-                  <a:lnTo>
-                    <a:pt x="5586557" y="375765"/>
-                  </a:lnTo>
-                  <a:lnTo>
-                    <a:pt x="5514934" y="346210"/>
-                  </a:lnTo>
-                  <a:lnTo>
-                    <a:pt x="5443311" y="314722"/>
-                  </a:lnTo>
-                  <a:lnTo>
-                    <a:pt x="5371689" y="281174"/>
-                  </a:lnTo>
-                  <a:lnTo>
-                    <a:pt x="5300066" y="245430"/>
-                  </a:lnTo>
-                  <a:lnTo>
-                    <a:pt x="5228444" y="207347"/>
-                  </a:lnTo>
-                  <a:lnTo>
-                    <a:pt x="5156821" y="166773"/>
-                  </a:lnTo>
-                  <a:lnTo>
-                    <a:pt x="5085199" y="123543"/>
-                  </a:lnTo>
-                  <a:lnTo>
-                    <a:pt x="5013576" y="77486"/>
-                  </a:lnTo>
-                  <a:lnTo>
-                    <a:pt x="4941954" y="28414"/>
+                    <a:pt x="7019007" y="722237"/>
+                  </a:lnTo>
+                  <a:lnTo>
+                    <a:pt x="6947385" y="714665"/>
+                  </a:lnTo>
+                  <a:lnTo>
+                    <a:pt x="6875762" y="706544"/>
+                  </a:lnTo>
+                  <a:lnTo>
+                    <a:pt x="6804139" y="697833"/>
+                  </a:lnTo>
+                  <a:lnTo>
+                    <a:pt x="6732517" y="688490"/>
+                  </a:lnTo>
+                  <a:lnTo>
+                    <a:pt x="6660894" y="678468"/>
+                  </a:lnTo>
+                  <a:lnTo>
+                    <a:pt x="6589272" y="667720"/>
+                  </a:lnTo>
+                  <a:lnTo>
+                    <a:pt x="6517649" y="656191"/>
+                  </a:lnTo>
+                  <a:lnTo>
+                    <a:pt x="6446027" y="643825"/>
+                  </a:lnTo>
+                  <a:lnTo>
+                    <a:pt x="6374404" y="630562"/>
+                  </a:lnTo>
+                  <a:lnTo>
+                    <a:pt x="6302782" y="616336"/>
+                  </a:lnTo>
+                  <a:lnTo>
+                    <a:pt x="6231159" y="601078"/>
+                  </a:lnTo>
+                  <a:lnTo>
+                    <a:pt x="6159537" y="584713"/>
+                  </a:lnTo>
+                  <a:lnTo>
+                    <a:pt x="6087914" y="567159"/>
+                  </a:lnTo>
+                  <a:lnTo>
+                    <a:pt x="6016292" y="548332"/>
+                  </a:lnTo>
+                  <a:lnTo>
+                    <a:pt x="5944669" y="528137"/>
+                  </a:lnTo>
+                  <a:lnTo>
+                    <a:pt x="5873047" y="506478"/>
+                  </a:lnTo>
+                  <a:lnTo>
+                    <a:pt x="5801424" y="483246"/>
+                  </a:lnTo>
+                  <a:lnTo>
+                    <a:pt x="5729802" y="458328"/>
+                  </a:lnTo>
+                  <a:lnTo>
+                    <a:pt x="5658179" y="431601"/>
+                  </a:lnTo>
+                  <a:lnTo>
+                    <a:pt x="5586557" y="402935"/>
+                  </a:lnTo>
+                  <a:lnTo>
+                    <a:pt x="5514934" y="372188"/>
+                  </a:lnTo>
+                  <a:lnTo>
+                    <a:pt x="5443311" y="339210"/>
+                  </a:lnTo>
+                  <a:lnTo>
+                    <a:pt x="5371689" y="303837"/>
+                  </a:lnTo>
+                  <a:lnTo>
+                    <a:pt x="5300066" y="265898"/>
+                  </a:lnTo>
+                  <a:lnTo>
+                    <a:pt x="5228444" y="225205"/>
+                  </a:lnTo>
+                  <a:lnTo>
+                    <a:pt x="5156821" y="181558"/>
+                  </a:lnTo>
+                  <a:lnTo>
+                    <a:pt x="5085199" y="134744"/>
+                  </a:lnTo>
+                  <a:lnTo>
+                    <a:pt x="5013576" y="84531"/>
+                  </a:lnTo>
+                  <a:lnTo>
+                    <a:pt x="4941954" y="30675"/>
                   </a:lnTo>
                   <a:lnTo>
                     <a:pt x="4870331" y="0"/>
                   </a:lnTo>
                   <a:lnTo>
-                    <a:pt x="4798709" y="4894"/>
-                  </a:lnTo>
-                  <a:lnTo>
-                    <a:pt x="4727086" y="9760"/>
-                  </a:lnTo>
-                  <a:lnTo>
-                    <a:pt x="4655464" y="14596"/>
-                  </a:lnTo>
-                  <a:lnTo>
-                    <a:pt x="4583841" y="19405"/>
-                  </a:lnTo>
-                  <a:lnTo>
-                    <a:pt x="4512219" y="24184"/>
-                  </a:lnTo>
-                  <a:lnTo>
-                    <a:pt x="4440596" y="28936"/>
-                  </a:lnTo>
-                  <a:lnTo>
-                    <a:pt x="4368974" y="33659"/>
-                  </a:lnTo>
-                  <a:lnTo>
-                    <a:pt x="4297351" y="38355"/>
-                  </a:lnTo>
-                  <a:lnTo>
-                    <a:pt x="4225729" y="43022"/>
-                  </a:lnTo>
-                  <a:lnTo>
-                    <a:pt x="4154106" y="47663"/>
-                  </a:lnTo>
-                  <a:lnTo>
-                    <a:pt x="4082483" y="52275"/>
-                  </a:lnTo>
-                  <a:lnTo>
-                    <a:pt x="4010861" y="56860"/>
-                  </a:lnTo>
-                  <a:lnTo>
-                    <a:pt x="3939238" y="61419"/>
-                  </a:lnTo>
-                  <a:lnTo>
-                    <a:pt x="3867616" y="65950"/>
-                  </a:lnTo>
-                  <a:lnTo>
-                    <a:pt x="3795993" y="70454"/>
-                  </a:lnTo>
-                  <a:lnTo>
-                    <a:pt x="3724371" y="74932"/>
-                  </a:lnTo>
-                  <a:lnTo>
-                    <a:pt x="3652748" y="79384"/>
-                  </a:lnTo>
-                  <a:lnTo>
-                    <a:pt x="3581126" y="83808"/>
-                  </a:lnTo>
-                  <a:lnTo>
-                    <a:pt x="3509503" y="88207"/>
-                  </a:lnTo>
-                  <a:lnTo>
-                    <a:pt x="3437881" y="92580"/>
-                  </a:lnTo>
-                  <a:lnTo>
-                    <a:pt x="3366258" y="96927"/>
-                  </a:lnTo>
-                  <a:lnTo>
-                    <a:pt x="3294636" y="101248"/>
-                  </a:lnTo>
-                  <a:lnTo>
-                    <a:pt x="3223013" y="105544"/>
-                  </a:lnTo>
-                  <a:lnTo>
-                    <a:pt x="3151391" y="109814"/>
-                  </a:lnTo>
-                  <a:lnTo>
-                    <a:pt x="3079768" y="114059"/>
-                  </a:lnTo>
-                  <a:lnTo>
-                    <a:pt x="3008146" y="118279"/>
-                  </a:lnTo>
-                  <a:lnTo>
-                    <a:pt x="2936523" y="122474"/>
-                  </a:lnTo>
-                  <a:lnTo>
-                    <a:pt x="2864901" y="126644"/>
-                  </a:lnTo>
-                  <a:lnTo>
-                    <a:pt x="2793278" y="130789"/>
-                  </a:lnTo>
-                  <a:lnTo>
-                    <a:pt x="2721655" y="134910"/>
-                  </a:lnTo>
-                  <a:lnTo>
-                    <a:pt x="2650033" y="139007"/>
-                  </a:lnTo>
-                  <a:lnTo>
-                    <a:pt x="2578410" y="143079"/>
-                  </a:lnTo>
-                  <a:lnTo>
-                    <a:pt x="2506788" y="147127"/>
-                  </a:lnTo>
-                  <a:lnTo>
-                    <a:pt x="2435165" y="151152"/>
-                  </a:lnTo>
-                  <a:lnTo>
-                    <a:pt x="2363543" y="155152"/>
-                  </a:lnTo>
-                  <a:lnTo>
-                    <a:pt x="2291920" y="159129"/>
-                  </a:lnTo>
-                  <a:lnTo>
-                    <a:pt x="2220298" y="163082"/>
-                  </a:lnTo>
-                  <a:lnTo>
-                    <a:pt x="2148675" y="167012"/>
-                  </a:lnTo>
-                  <a:lnTo>
-                    <a:pt x="2077053" y="170919"/>
-                  </a:lnTo>
-                  <a:lnTo>
-                    <a:pt x="2005430" y="174802"/>
-                  </a:lnTo>
-                  <a:lnTo>
-                    <a:pt x="1933808" y="178663"/>
-                  </a:lnTo>
-                  <a:lnTo>
-                    <a:pt x="1862185" y="182500"/>
-                  </a:lnTo>
-                  <a:lnTo>
-                    <a:pt x="1790563" y="186315"/>
-                  </a:lnTo>
-                  <a:lnTo>
-                    <a:pt x="1718940" y="190108"/>
-                  </a:lnTo>
-                  <a:lnTo>
-                    <a:pt x="1647318" y="193878"/>
-                  </a:lnTo>
-                  <a:lnTo>
-                    <a:pt x="1575695" y="197626"/>
-                  </a:lnTo>
-                  <a:lnTo>
-                    <a:pt x="1504073" y="201351"/>
-                  </a:lnTo>
-                  <a:lnTo>
-                    <a:pt x="1432450" y="205055"/>
-                  </a:lnTo>
-                  <a:lnTo>
-                    <a:pt x="1360827" y="208736"/>
-                  </a:lnTo>
-                  <a:lnTo>
-                    <a:pt x="1289205" y="212396"/>
-                  </a:lnTo>
-                  <a:lnTo>
-                    <a:pt x="1217582" y="216034"/>
-                  </a:lnTo>
-                  <a:lnTo>
-                    <a:pt x="1145960" y="219651"/>
-                  </a:lnTo>
-                  <a:lnTo>
-                    <a:pt x="1074337" y="223246"/>
-                  </a:lnTo>
-                  <a:lnTo>
-                    <a:pt x="1002715" y="226820"/>
-                  </a:lnTo>
-                  <a:lnTo>
-                    <a:pt x="931092" y="230373"/>
-                  </a:lnTo>
-                  <a:lnTo>
-                    <a:pt x="859470" y="233905"/>
-                  </a:lnTo>
-                  <a:lnTo>
-                    <a:pt x="787847" y="237416"/>
-                  </a:lnTo>
-                  <a:lnTo>
-                    <a:pt x="716225" y="240906"/>
-                  </a:lnTo>
-                  <a:lnTo>
-                    <a:pt x="644602" y="244376"/>
-                  </a:lnTo>
-                  <a:lnTo>
-                    <a:pt x="572980" y="247825"/>
-                  </a:lnTo>
-                  <a:lnTo>
-                    <a:pt x="501357" y="251253"/>
-                  </a:lnTo>
-                  <a:lnTo>
-                    <a:pt x="429735" y="254661"/>
-                  </a:lnTo>
-                  <a:lnTo>
-                    <a:pt x="358112" y="258050"/>
-                  </a:lnTo>
-                  <a:lnTo>
-                    <a:pt x="286490" y="261418"/>
-                  </a:lnTo>
-                  <a:lnTo>
-                    <a:pt x="214867" y="264766"/>
-                  </a:lnTo>
-                  <a:lnTo>
-                    <a:pt x="143245" y="268094"/>
-                  </a:lnTo>
-                  <a:lnTo>
-                    <a:pt x="71622" y="271403"/>
-                  </a:lnTo>
-                  <a:lnTo>
-                    <a:pt x="0" y="274692"/>
+                    <a:pt x="4798709" y="7027"/>
+                  </a:lnTo>
+                  <a:lnTo>
+                    <a:pt x="4727086" y="13995"/>
+                  </a:lnTo>
+                  <a:lnTo>
+                    <a:pt x="4655464" y="20903"/>
+                  </a:lnTo>
+                  <a:lnTo>
+                    <a:pt x="4583841" y="27753"/>
+                  </a:lnTo>
+                  <a:lnTo>
+                    <a:pt x="4512219" y="34545"/>
+                  </a:lnTo>
+                  <a:lnTo>
+                    <a:pt x="4440596" y="41279"/>
+                  </a:lnTo>
+                  <a:lnTo>
+                    <a:pt x="4368974" y="47955"/>
+                  </a:lnTo>
+                  <a:lnTo>
+                    <a:pt x="4297351" y="54575"/>
+                  </a:lnTo>
+                  <a:lnTo>
+                    <a:pt x="4225729" y="61138"/>
+                  </a:lnTo>
+                  <a:lnTo>
+                    <a:pt x="4154106" y="67646"/>
+                  </a:lnTo>
+                  <a:lnTo>
+                    <a:pt x="4082483" y="74099"/>
+                  </a:lnTo>
+                  <a:lnTo>
+                    <a:pt x="4010861" y="80496"/>
+                  </a:lnTo>
+                  <a:lnTo>
+                    <a:pt x="3939238" y="86839"/>
+                  </a:lnTo>
+                  <a:lnTo>
+                    <a:pt x="3867616" y="93128"/>
+                  </a:lnTo>
+                  <a:lnTo>
+                    <a:pt x="3795993" y="99364"/>
+                  </a:lnTo>
+                  <a:lnTo>
+                    <a:pt x="3724371" y="105547"/>
+                  </a:lnTo>
+                  <a:lnTo>
+                    <a:pt x="3652748" y="111677"/>
+                  </a:lnTo>
+                  <a:lnTo>
+                    <a:pt x="3581126" y="117755"/>
+                  </a:lnTo>
+                  <a:lnTo>
+                    <a:pt x="3509503" y="123781"/>
+                  </a:lnTo>
+                  <a:lnTo>
+                    <a:pt x="3437881" y="129757"/>
+                  </a:lnTo>
+                  <a:lnTo>
+                    <a:pt x="3366258" y="135681"/>
+                  </a:lnTo>
+                  <a:lnTo>
+                    <a:pt x="3294636" y="141555"/>
+                  </a:lnTo>
+                  <a:lnTo>
+                    <a:pt x="3223013" y="147379"/>
+                  </a:lnTo>
+                  <a:lnTo>
+                    <a:pt x="3151391" y="153153"/>
+                  </a:lnTo>
+                  <a:lnTo>
+                    <a:pt x="3079768" y="158879"/>
+                  </a:lnTo>
+                  <a:lnTo>
+                    <a:pt x="3008146" y="164555"/>
+                  </a:lnTo>
+                  <a:lnTo>
+                    <a:pt x="2936523" y="170184"/>
+                  </a:lnTo>
+                  <a:lnTo>
+                    <a:pt x="2864901" y="175765"/>
+                  </a:lnTo>
+                  <a:lnTo>
+                    <a:pt x="2793278" y="181298"/>
+                  </a:lnTo>
+                  <a:lnTo>
+                    <a:pt x="2721655" y="186784"/>
+                  </a:lnTo>
+                  <a:lnTo>
+                    <a:pt x="2650033" y="192223"/>
+                  </a:lnTo>
+                  <a:lnTo>
+                    <a:pt x="2578410" y="197616"/>
+                  </a:lnTo>
+                  <a:lnTo>
+                    <a:pt x="2506788" y="202964"/>
+                  </a:lnTo>
+                  <a:lnTo>
+                    <a:pt x="2435165" y="208266"/>
+                  </a:lnTo>
+                  <a:lnTo>
+                    <a:pt x="2363543" y="213523"/>
+                  </a:lnTo>
+                  <a:lnTo>
+                    <a:pt x="2291920" y="218735"/>
+                  </a:lnTo>
+                  <a:lnTo>
+                    <a:pt x="2220298" y="223903"/>
+                  </a:lnTo>
+                  <a:lnTo>
+                    <a:pt x="2148675" y="229026"/>
+                  </a:lnTo>
+                  <a:lnTo>
+                    <a:pt x="2077053" y="234107"/>
+                  </a:lnTo>
+                  <a:lnTo>
+                    <a:pt x="2005430" y="239144"/>
+                  </a:lnTo>
+                  <a:lnTo>
+                    <a:pt x="1933808" y="244138"/>
+                  </a:lnTo>
+                  <a:lnTo>
+                    <a:pt x="1862185" y="249090"/>
+                  </a:lnTo>
+                  <a:lnTo>
+                    <a:pt x="1790563" y="254000"/>
+                  </a:lnTo>
+                  <a:lnTo>
+                    <a:pt x="1718940" y="258868"/>
+                  </a:lnTo>
+                  <a:lnTo>
+                    <a:pt x="1647318" y="263694"/>
+                  </a:lnTo>
+                  <a:lnTo>
+                    <a:pt x="1575695" y="268480"/>
+                  </a:lnTo>
+                  <a:lnTo>
+                    <a:pt x="1504073" y="273225"/>
+                  </a:lnTo>
+                  <a:lnTo>
+                    <a:pt x="1432450" y="277929"/>
+                  </a:lnTo>
+                  <a:lnTo>
+                    <a:pt x="1360827" y="282594"/>
+                  </a:lnTo>
+                  <a:lnTo>
+                    <a:pt x="1289205" y="287219"/>
+                  </a:lnTo>
+                  <a:lnTo>
+                    <a:pt x="1217582" y="291804"/>
+                  </a:lnTo>
+                  <a:lnTo>
+                    <a:pt x="1145960" y="296351"/>
+                  </a:lnTo>
+                  <a:lnTo>
+                    <a:pt x="1074337" y="300859"/>
+                  </a:lnTo>
+                  <a:lnTo>
+                    <a:pt x="1002715" y="305328"/>
+                  </a:lnTo>
+                  <a:lnTo>
+                    <a:pt x="931092" y="309760"/>
+                  </a:lnTo>
+                  <a:lnTo>
+                    <a:pt x="859470" y="314154"/>
+                  </a:lnTo>
+                  <a:lnTo>
+                    <a:pt x="787847" y="318510"/>
+                  </a:lnTo>
+                  <a:lnTo>
+                    <a:pt x="716225" y="322830"/>
+                  </a:lnTo>
+                  <a:lnTo>
+                    <a:pt x="644602" y="327113"/>
+                  </a:lnTo>
+                  <a:lnTo>
+                    <a:pt x="572980" y="331359"/>
+                  </a:lnTo>
+                  <a:lnTo>
+                    <a:pt x="501357" y="335569"/>
+                  </a:lnTo>
+                  <a:lnTo>
+                    <a:pt x="429735" y="339744"/>
+                  </a:lnTo>
+                  <a:lnTo>
+                    <a:pt x="358112" y="343883"/>
+                  </a:lnTo>
+                  <a:lnTo>
+                    <a:pt x="286490" y="347987"/>
+                  </a:lnTo>
+                  <a:lnTo>
+                    <a:pt x="214867" y="352056"/>
+                  </a:lnTo>
+                  <a:lnTo>
+                    <a:pt x="143245" y="356090"/>
+                  </a:lnTo>
+                  <a:lnTo>
+                    <a:pt x="71622" y="360090"/>
+                  </a:lnTo>
+                  <a:lnTo>
+                    <a:pt x="0" y="364056"/>
                   </a:lnTo>
                 </a:path>
               </a:pathLst>
@@ -4016,258 +4004,249 @@
           </p:nvSpPr>
           <p:spPr>
             <a:xfrm>
-              <a:off x="2493652" y="2073503"/>
-              <a:ext cx="5769026" cy="3139236"/>
+              <a:off x="2730939" y="2073503"/>
+              <a:ext cx="5531740" cy="3160082"/>
             </a:xfrm>
             <a:custGeom>
               <a:avLst/>
               <a:pathLst>
-                <a:path w="5769026" h="3139236">
+                <a:path w="5531740" h="3160082">
                   <a:moveTo>
                     <a:pt x="0" y="0"/>
                   </a:moveTo>
                   <a:lnTo>
-                    <a:pt x="39224" y="54723"/>
-                  </a:lnTo>
-                  <a:lnTo>
-                    <a:pt x="110847" y="151817"/>
-                  </a:lnTo>
-                  <a:lnTo>
-                    <a:pt x="182469" y="246161"/>
-                  </a:lnTo>
-                  <a:lnTo>
-                    <a:pt x="254092" y="337834"/>
-                  </a:lnTo>
-                  <a:lnTo>
-                    <a:pt x="325714" y="426911"/>
-                  </a:lnTo>
-                  <a:lnTo>
-                    <a:pt x="397337" y="513466"/>
-                  </a:lnTo>
-                  <a:lnTo>
-                    <a:pt x="468959" y="597570"/>
-                  </a:lnTo>
-                  <a:lnTo>
-                    <a:pt x="540582" y="679293"/>
-                  </a:lnTo>
-                  <a:lnTo>
-                    <a:pt x="612204" y="758701"/>
-                  </a:lnTo>
-                  <a:lnTo>
-                    <a:pt x="683827" y="835862"/>
-                  </a:lnTo>
-                  <a:lnTo>
-                    <a:pt x="755449" y="910837"/>
-                  </a:lnTo>
-                  <a:lnTo>
-                    <a:pt x="827072" y="983690"/>
-                  </a:lnTo>
-                  <a:lnTo>
-                    <a:pt x="898695" y="1054479"/>
-                  </a:lnTo>
-                  <a:lnTo>
-                    <a:pt x="970317" y="1123264"/>
-                  </a:lnTo>
-                  <a:lnTo>
-                    <a:pt x="1041940" y="1190102"/>
-                  </a:lnTo>
-                  <a:lnTo>
-                    <a:pt x="1113562" y="1255047"/>
-                  </a:lnTo>
-                  <a:lnTo>
-                    <a:pt x="1185185" y="1318153"/>
-                  </a:lnTo>
-                  <a:lnTo>
-                    <a:pt x="1256807" y="1379472"/>
-                  </a:lnTo>
-                  <a:lnTo>
-                    <a:pt x="1328430" y="1439055"/>
-                  </a:lnTo>
-                  <a:lnTo>
-                    <a:pt x="1400052" y="1496951"/>
-                  </a:lnTo>
-                  <a:lnTo>
-                    <a:pt x="1471675" y="1553208"/>
-                  </a:lnTo>
-                  <a:lnTo>
-                    <a:pt x="1543297" y="1607871"/>
-                  </a:lnTo>
-                  <a:lnTo>
-                    <a:pt x="1614920" y="1660987"/>
-                  </a:lnTo>
-                  <a:lnTo>
-                    <a:pt x="1686542" y="1712599"/>
-                  </a:lnTo>
-                  <a:lnTo>
-                    <a:pt x="1758165" y="1762749"/>
-                  </a:lnTo>
-                  <a:lnTo>
-                    <a:pt x="1829787" y="1811480"/>
-                  </a:lnTo>
-                  <a:lnTo>
-                    <a:pt x="1901410" y="1858830"/>
-                  </a:lnTo>
-                  <a:lnTo>
-                    <a:pt x="1973032" y="1904840"/>
-                  </a:lnTo>
-                  <a:lnTo>
-                    <a:pt x="2044655" y="1949547"/>
-                  </a:lnTo>
-                  <a:lnTo>
-                    <a:pt x="2116277" y="1992988"/>
-                  </a:lnTo>
-                  <a:lnTo>
-                    <a:pt x="2187900" y="2035200"/>
-                  </a:lnTo>
-                  <a:lnTo>
-                    <a:pt x="2259523" y="2076215"/>
-                  </a:lnTo>
-                  <a:lnTo>
-                    <a:pt x="2331145" y="2116070"/>
-                  </a:lnTo>
-                  <a:lnTo>
-                    <a:pt x="2402768" y="2154796"/>
-                  </a:lnTo>
-                  <a:lnTo>
-                    <a:pt x="2474390" y="2192426"/>
-                  </a:lnTo>
-                  <a:lnTo>
-                    <a:pt x="2546013" y="2228990"/>
-                  </a:lnTo>
-                  <a:lnTo>
-                    <a:pt x="2617635" y="2264518"/>
-                  </a:lnTo>
-                  <a:lnTo>
-                    <a:pt x="2689258" y="2299041"/>
-                  </a:lnTo>
-                  <a:lnTo>
-                    <a:pt x="2760880" y="2332586"/>
-                  </a:lnTo>
-                  <a:lnTo>
-                    <a:pt x="2832503" y="2365182"/>
-                  </a:lnTo>
-                  <a:lnTo>
-                    <a:pt x="2904125" y="2396854"/>
-                  </a:lnTo>
-                  <a:lnTo>
-                    <a:pt x="2975748" y="2427630"/>
-                  </a:lnTo>
-                  <a:lnTo>
-                    <a:pt x="3047370" y="2457534"/>
-                  </a:lnTo>
-                  <a:lnTo>
-                    <a:pt x="3118993" y="2486591"/>
-                  </a:lnTo>
-                  <a:lnTo>
-                    <a:pt x="3190615" y="2514826"/>
-                  </a:lnTo>
-                  <a:lnTo>
-                    <a:pt x="3262238" y="2542261"/>
-                  </a:lnTo>
-                  <a:lnTo>
-                    <a:pt x="3333860" y="2568919"/>
-                  </a:lnTo>
-                  <a:lnTo>
-                    <a:pt x="3405483" y="2594823"/>
-                  </a:lnTo>
-                  <a:lnTo>
-                    <a:pt x="3477105" y="2619993"/>
-                  </a:lnTo>
-                  <a:lnTo>
-                    <a:pt x="3548728" y="2644450"/>
-                  </a:lnTo>
-                  <a:lnTo>
-                    <a:pt x="3620351" y="2668215"/>
-                  </a:lnTo>
-                  <a:lnTo>
-                    <a:pt x="3691973" y="2691307"/>
-                  </a:lnTo>
-                  <a:lnTo>
-                    <a:pt x="3763596" y="2713745"/>
-                  </a:lnTo>
-                  <a:lnTo>
-                    <a:pt x="3835218" y="2735548"/>
-                  </a:lnTo>
-                  <a:lnTo>
-                    <a:pt x="3906841" y="2756733"/>
-                  </a:lnTo>
-                  <a:lnTo>
-                    <a:pt x="3978463" y="2777319"/>
-                  </a:lnTo>
-                  <a:lnTo>
-                    <a:pt x="4050086" y="2797321"/>
-                  </a:lnTo>
-                  <a:lnTo>
-                    <a:pt x="4121708" y="2816758"/>
-                  </a:lnTo>
-                  <a:lnTo>
-                    <a:pt x="4193331" y="2835644"/>
-                  </a:lnTo>
-                  <a:lnTo>
-                    <a:pt x="4264953" y="2853995"/>
-                  </a:lnTo>
-                  <a:lnTo>
-                    <a:pt x="4336576" y="2871826"/>
-                  </a:lnTo>
-                  <a:lnTo>
-                    <a:pt x="4408198" y="2889153"/>
-                  </a:lnTo>
-                  <a:lnTo>
-                    <a:pt x="4479821" y="2905989"/>
-                  </a:lnTo>
-                  <a:lnTo>
-                    <a:pt x="4551443" y="2922348"/>
-                  </a:lnTo>
-                  <a:lnTo>
-                    <a:pt x="4623066" y="2938245"/>
-                  </a:lnTo>
-                  <a:lnTo>
-                    <a:pt x="4694688" y="2953691"/>
-                  </a:lnTo>
-                  <a:lnTo>
-                    <a:pt x="4766311" y="2968699"/>
-                  </a:lnTo>
-                  <a:lnTo>
-                    <a:pt x="4837933" y="2983283"/>
-                  </a:lnTo>
-                  <a:lnTo>
-                    <a:pt x="4909556" y="2997454"/>
-                  </a:lnTo>
-                  <a:lnTo>
-                    <a:pt x="4981178" y="3011223"/>
-                  </a:lnTo>
-                  <a:lnTo>
-                    <a:pt x="5052801" y="3024603"/>
-                  </a:lnTo>
-                  <a:lnTo>
-                    <a:pt x="5124424" y="3037603"/>
-                  </a:lnTo>
-                  <a:lnTo>
-                    <a:pt x="5196046" y="3050236"/>
-                  </a:lnTo>
-                  <a:lnTo>
-                    <a:pt x="5267669" y="3062511"/>
-                  </a:lnTo>
-                  <a:lnTo>
-                    <a:pt x="5339291" y="3074438"/>
-                  </a:lnTo>
-                  <a:lnTo>
-                    <a:pt x="5410914" y="3086028"/>
-                  </a:lnTo>
-                  <a:lnTo>
-                    <a:pt x="5482536" y="3097289"/>
-                  </a:lnTo>
-                  <a:lnTo>
-                    <a:pt x="5554159" y="3108232"/>
-                  </a:lnTo>
-                  <a:lnTo>
-                    <a:pt x="5625781" y="3118865"/>
-                  </a:lnTo>
-                  <a:lnTo>
-                    <a:pt x="5697404" y="3129197"/>
-                  </a:lnTo>
-                  <a:lnTo>
-                    <a:pt x="5769026" y="3139236"/>
+                    <a:pt x="16805" y="25352"/>
+                  </a:lnTo>
+                  <a:lnTo>
+                    <a:pt x="88428" y="130128"/>
+                  </a:lnTo>
+                  <a:lnTo>
+                    <a:pt x="160050" y="231729"/>
+                  </a:lnTo>
+                  <a:lnTo>
+                    <a:pt x="231673" y="330252"/>
+                  </a:lnTo>
+                  <a:lnTo>
+                    <a:pt x="303295" y="425790"/>
+                  </a:lnTo>
+                  <a:lnTo>
+                    <a:pt x="374918" y="518433"/>
+                  </a:lnTo>
+                  <a:lnTo>
+                    <a:pt x="446540" y="608270"/>
+                  </a:lnTo>
+                  <a:lnTo>
+                    <a:pt x="518163" y="695385"/>
+                  </a:lnTo>
+                  <a:lnTo>
+                    <a:pt x="589786" y="779861"/>
+                  </a:lnTo>
+                  <a:lnTo>
+                    <a:pt x="661408" y="861778"/>
+                  </a:lnTo>
+                  <a:lnTo>
+                    <a:pt x="733031" y="941213"/>
+                  </a:lnTo>
+                  <a:lnTo>
+                    <a:pt x="804653" y="1018241"/>
+                  </a:lnTo>
+                  <a:lnTo>
+                    <a:pt x="876276" y="1092936"/>
+                  </a:lnTo>
+                  <a:lnTo>
+                    <a:pt x="947898" y="1165368"/>
+                  </a:lnTo>
+                  <a:lnTo>
+                    <a:pt x="1019521" y="1235605"/>
+                  </a:lnTo>
+                  <a:lnTo>
+                    <a:pt x="1091143" y="1303715"/>
+                  </a:lnTo>
+                  <a:lnTo>
+                    <a:pt x="1162766" y="1369761"/>
+                  </a:lnTo>
+                  <a:lnTo>
+                    <a:pt x="1234388" y="1433806"/>
+                  </a:lnTo>
+                  <a:lnTo>
+                    <a:pt x="1306011" y="1495911"/>
+                  </a:lnTo>
+                  <a:lnTo>
+                    <a:pt x="1377633" y="1556134"/>
+                  </a:lnTo>
+                  <a:lnTo>
+                    <a:pt x="1449256" y="1614533"/>
+                  </a:lnTo>
+                  <a:lnTo>
+                    <a:pt x="1520878" y="1671162"/>
+                  </a:lnTo>
+                  <a:lnTo>
+                    <a:pt x="1592501" y="1726076"/>
+                  </a:lnTo>
+                  <a:lnTo>
+                    <a:pt x="1664123" y="1779326"/>
+                  </a:lnTo>
+                  <a:lnTo>
+                    <a:pt x="1735746" y="1830963"/>
+                  </a:lnTo>
+                  <a:lnTo>
+                    <a:pt x="1807368" y="1881036"/>
+                  </a:lnTo>
+                  <a:lnTo>
+                    <a:pt x="1878991" y="1929592"/>
+                  </a:lnTo>
+                  <a:lnTo>
+                    <a:pt x="1950614" y="1976676"/>
+                  </a:lnTo>
+                  <a:lnTo>
+                    <a:pt x="2022236" y="2022334"/>
+                  </a:lnTo>
+                  <a:lnTo>
+                    <a:pt x="2093859" y="2066609"/>
+                  </a:lnTo>
+                  <a:lnTo>
+                    <a:pt x="2165481" y="2109542"/>
+                  </a:lnTo>
+                  <a:lnTo>
+                    <a:pt x="2237104" y="2151175"/>
+                  </a:lnTo>
+                  <a:lnTo>
+                    <a:pt x="2308726" y="2191547"/>
+                  </a:lnTo>
+                  <a:lnTo>
+                    <a:pt x="2380349" y="2230695"/>
+                  </a:lnTo>
+                  <a:lnTo>
+                    <a:pt x="2451971" y="2268657"/>
+                  </a:lnTo>
+                  <a:lnTo>
+                    <a:pt x="2523594" y="2305470"/>
+                  </a:lnTo>
+                  <a:lnTo>
+                    <a:pt x="2595216" y="2341167"/>
+                  </a:lnTo>
+                  <a:lnTo>
+                    <a:pt x="2666839" y="2375782"/>
+                  </a:lnTo>
+                  <a:lnTo>
+                    <a:pt x="2738461" y="2409349"/>
+                  </a:lnTo>
+                  <a:lnTo>
+                    <a:pt x="2810084" y="2441899"/>
+                  </a:lnTo>
+                  <a:lnTo>
+                    <a:pt x="2881706" y="2473462"/>
+                  </a:lnTo>
+                  <a:lnTo>
+                    <a:pt x="2953329" y="2504070"/>
+                  </a:lnTo>
+                  <a:lnTo>
+                    <a:pt x="3024951" y="2533750"/>
+                  </a:lnTo>
+                  <a:lnTo>
+                    <a:pt x="3096574" y="2562531"/>
+                  </a:lnTo>
+                  <a:lnTo>
+                    <a:pt x="3168196" y="2590440"/>
+                  </a:lnTo>
+                  <a:lnTo>
+                    <a:pt x="3239819" y="2617504"/>
+                  </a:lnTo>
+                  <a:lnTo>
+                    <a:pt x="3311442" y="2643747"/>
+                  </a:lnTo>
+                  <a:lnTo>
+                    <a:pt x="3383064" y="2669196"/>
+                  </a:lnTo>
+                  <a:lnTo>
+                    <a:pt x="3454687" y="2693873"/>
+                  </a:lnTo>
+                  <a:lnTo>
+                    <a:pt x="3526309" y="2717803"/>
+                  </a:lnTo>
+                  <a:lnTo>
+                    <a:pt x="3597932" y="2741008"/>
+                  </a:lnTo>
+                  <a:lnTo>
+                    <a:pt x="3669554" y="2763510"/>
+                  </a:lnTo>
+                  <a:lnTo>
+                    <a:pt x="3741177" y="2785330"/>
+                  </a:lnTo>
+                  <a:lnTo>
+                    <a:pt x="3812799" y="2806490"/>
+                  </a:lnTo>
+                  <a:lnTo>
+                    <a:pt x="3884422" y="2827008"/>
+                  </a:lnTo>
+                  <a:lnTo>
+                    <a:pt x="3956044" y="2846904"/>
+                  </a:lnTo>
+                  <a:lnTo>
+                    <a:pt x="4027667" y="2866198"/>
+                  </a:lnTo>
+                  <a:lnTo>
+                    <a:pt x="4099289" y="2884907"/>
+                  </a:lnTo>
+                  <a:lnTo>
+                    <a:pt x="4170912" y="2903050"/>
+                  </a:lnTo>
+                  <a:lnTo>
+                    <a:pt x="4242534" y="2920642"/>
+                  </a:lnTo>
+                  <a:lnTo>
+                    <a:pt x="4314157" y="2937702"/>
+                  </a:lnTo>
+                  <a:lnTo>
+                    <a:pt x="4385779" y="2954245"/>
+                  </a:lnTo>
+                  <a:lnTo>
+                    <a:pt x="4457402" y="2970287"/>
+                  </a:lnTo>
+                  <a:lnTo>
+                    <a:pt x="4529024" y="2985842"/>
+                  </a:lnTo>
+                  <a:lnTo>
+                    <a:pt x="4600647" y="3000927"/>
+                  </a:lnTo>
+                  <a:lnTo>
+                    <a:pt x="4672270" y="3015554"/>
+                  </a:lnTo>
+                  <a:lnTo>
+                    <a:pt x="4743892" y="3029739"/>
+                  </a:lnTo>
+                  <a:lnTo>
+                    <a:pt x="4815515" y="3043493"/>
+                  </a:lnTo>
+                  <a:lnTo>
+                    <a:pt x="4887137" y="3056831"/>
+                  </a:lnTo>
+                  <a:lnTo>
+                    <a:pt x="4958760" y="3069765"/>
+                  </a:lnTo>
+                  <a:lnTo>
+                    <a:pt x="5030382" y="3082307"/>
+                  </a:lnTo>
+                  <a:lnTo>
+                    <a:pt x="5102005" y="3094469"/>
+                  </a:lnTo>
+                  <a:lnTo>
+                    <a:pt x="5173627" y="3106262"/>
+                  </a:lnTo>
+                  <a:lnTo>
+                    <a:pt x="5245250" y="3117699"/>
+                  </a:lnTo>
+                  <a:lnTo>
+                    <a:pt x="5316872" y="3128788"/>
+                  </a:lnTo>
+                  <a:lnTo>
+                    <a:pt x="5388495" y="3139542"/>
+                  </a:lnTo>
+                  <a:lnTo>
+                    <a:pt x="5460117" y="3149970"/>
+                  </a:lnTo>
+                  <a:lnTo>
+                    <a:pt x="5531740" y="3160082"/>
                   </a:lnTo>
                 </a:path>
               </a:pathLst>
@@ -5007,7 +4986,7 @@
                   <a:latin typeface="Helvetica"/>
                   <a:cs typeface="Helvetica"/>
                 </a:rPr>
-                <a:t>subHR per 1 mL/min: 0.96 (0.92-1.01)  |  per IQR (Δ = 18.2): 0.51 (0.23-1.15)  |  IQR: [-11.5, 6.7]</a:t>
+                <a:t>subHR per 1 mL/min: 0.96 (0.91-1.01)  |  per IQR (Δ = 18.2): 0.49 (0.19-1.22)  |  IQR: [-11.5, 6.7]</a:t>
               </a:r>
             </a:p>
           </p:txBody>

--- a/docs/plots/carbo/jx_carbo_linsubhr_egfrdisc_throm2.pptx
+++ b/docs/plots/carbo/jx_carbo_linsubhr_egfrdisc_throm2.pptx
@@ -3013,7 +3013,7 @@
                     <a:pt x="3432938" y="0"/>
                   </a:moveTo>
                   <a:lnTo>
-                    <a:pt x="3437881" y="17362"/>
+                    <a:pt x="3437881" y="17363"/>
                   </a:lnTo>
                   <a:lnTo>
                     <a:pt x="3509503" y="251928"/>
@@ -3022,16 +3022,16 @@
                     <a:pt x="3581126" y="470621"/>
                   </a:lnTo>
                   <a:lnTo>
-                    <a:pt x="3652748" y="674515"/>
-                  </a:lnTo>
-                  <a:lnTo>
-                    <a:pt x="3724371" y="864612"/>
+                    <a:pt x="3652748" y="674516"/>
+                  </a:lnTo>
+                  <a:lnTo>
+                    <a:pt x="3724371" y="864613"/>
                   </a:lnTo>
                   <a:lnTo>
                     <a:pt x="3795993" y="1041846"/>
                   </a:lnTo>
                   <a:lnTo>
-                    <a:pt x="3867616" y="1207086"/>
+                    <a:pt x="3867616" y="1207087"/>
                   </a:lnTo>
                   <a:lnTo>
                     <a:pt x="3939238" y="1361145"/>
@@ -3043,7 +3043,7 @@
                     <a:pt x="4082483" y="1638693"/>
                   </a:lnTo>
                   <a:lnTo>
-                    <a:pt x="4154106" y="1763545"/>
+                    <a:pt x="4154106" y="1763546"/>
                   </a:lnTo>
                   <a:lnTo>
                     <a:pt x="4225729" y="1879949"/>
@@ -3055,7 +3055,7 @@
                     <a:pt x="4368974" y="2089659"/>
                   </a:lnTo>
                   <a:lnTo>
-                    <a:pt x="4440596" y="2183995"/>
+                    <a:pt x="4440596" y="2183996"/>
                   </a:lnTo>
                   <a:lnTo>
                     <a:pt x="4512219" y="2271948"/>
@@ -3091,7 +3091,7 @@
                     <a:pt x="5228444" y="2621131"/>
                   </a:lnTo>
                   <a:lnTo>
-                    <a:pt x="5300066" y="2613735"/>
+                    <a:pt x="5300066" y="2613734"/>
                   </a:lnTo>
                   <a:lnTo>
                     <a:pt x="5371689" y="2606274"/>
@@ -3109,7 +3109,7 @@
                     <a:pt x="5658179" y="2575787"/>
                   </a:lnTo>
                   <a:lnTo>
-                    <a:pt x="5729802" y="2568002"/>
+                    <a:pt x="5729802" y="2568001"/>
                   </a:lnTo>
                   <a:lnTo>
                     <a:pt x="5801424" y="2560149"/>
@@ -3118,7 +3118,7 @@
                     <a:pt x="5873047" y="2552229"/>
                   </a:lnTo>
                   <a:lnTo>
-                    <a:pt x="5944669" y="2544242"/>
+                    <a:pt x="5944669" y="2544241"/>
                   </a:lnTo>
                   <a:lnTo>
                     <a:pt x="6016292" y="2536185"/>
@@ -3130,13 +3130,13 @@
                     <a:pt x="6159537" y="2519865"/>
                   </a:lnTo>
                   <a:lnTo>
-                    <a:pt x="6231159" y="2511600"/>
+                    <a:pt x="6231159" y="2511599"/>
                   </a:lnTo>
                   <a:lnTo>
                     <a:pt x="6302782" y="2503263"/>
                   </a:lnTo>
                   <a:lnTo>
-                    <a:pt x="6374404" y="2494856"/>
+                    <a:pt x="6374404" y="2494855"/>
                   </a:lnTo>
                   <a:lnTo>
                     <a:pt x="6446027" y="2486376"/>
@@ -3145,16 +3145,16 @@
                     <a:pt x="6517649" y="2477823"/>
                   </a:lnTo>
                   <a:lnTo>
-                    <a:pt x="6589272" y="2469198"/>
-                  </a:lnTo>
-                  <a:lnTo>
-                    <a:pt x="6660894" y="2460498"/>
-                  </a:lnTo>
-                  <a:lnTo>
-                    <a:pt x="6732517" y="2451724"/>
-                  </a:lnTo>
-                  <a:lnTo>
-                    <a:pt x="6804139" y="2442874"/>
+                    <a:pt x="6589272" y="2469197"/>
+                  </a:lnTo>
+                  <a:lnTo>
+                    <a:pt x="6660894" y="2460497"/>
+                  </a:lnTo>
+                  <a:lnTo>
+                    <a:pt x="6732517" y="2451723"/>
+                  </a:lnTo>
+                  <a:lnTo>
+                    <a:pt x="6804139" y="2442873"/>
                   </a:lnTo>
                   <a:lnTo>
                     <a:pt x="6875762" y="2433948"/>
@@ -3166,7 +3166,7 @@
                     <a:pt x="7019007" y="2415867"/>
                   </a:lnTo>
                   <a:lnTo>
-                    <a:pt x="7090630" y="2406710"/>
+                    <a:pt x="7090630" y="2406709"/>
                   </a:lnTo>
                   <a:lnTo>
                     <a:pt x="7090630" y="3386481"/>
@@ -3238,7 +3238,7 @@
                     <a:pt x="5514934" y="3029372"/>
                   </a:lnTo>
                   <a:lnTo>
-                    <a:pt x="5443311" y="2996394"/>
+                    <a:pt x="5443311" y="2996393"/>
                   </a:lnTo>
                   <a:lnTo>
                     <a:pt x="5371689" y="2961021"/>
@@ -3280,7 +3280,7 @@
                     <a:pt x="4512219" y="2691729"/>
                   </a:lnTo>
                   <a:lnTo>
-                    <a:pt x="4440596" y="2698462"/>
+                    <a:pt x="4440596" y="2698463"/>
                   </a:lnTo>
                   <a:lnTo>
                     <a:pt x="4368974" y="2705139"/>
@@ -3289,13 +3289,13 @@
                     <a:pt x="4297351" y="2711759"/>
                   </a:lnTo>
                   <a:lnTo>
-                    <a:pt x="4225729" y="2718322"/>
+                    <a:pt x="4225729" y="2718323"/>
                   </a:lnTo>
                   <a:lnTo>
                     <a:pt x="4154106" y="2724830"/>
                   </a:lnTo>
                   <a:lnTo>
-                    <a:pt x="4082483" y="2731282"/>
+                    <a:pt x="4082483" y="2731283"/>
                   </a:lnTo>
                   <a:lnTo>
                     <a:pt x="4010861" y="2737680"/>
@@ -3304,7 +3304,7 @@
                     <a:pt x="3939238" y="2744023"/>
                   </a:lnTo>
                   <a:lnTo>
-                    <a:pt x="3867616" y="2750312"/>
+                    <a:pt x="3867616" y="2750313"/>
                   </a:lnTo>
                   <a:lnTo>
                     <a:pt x="3795993" y="2756548"/>
@@ -3319,10 +3319,10 @@
                     <a:pt x="3581126" y="2774939"/>
                   </a:lnTo>
                   <a:lnTo>
-                    <a:pt x="3509503" y="2780965"/>
-                  </a:lnTo>
-                  <a:lnTo>
-                    <a:pt x="3437881" y="2786940"/>
+                    <a:pt x="3509503" y="2780966"/>
+                  </a:lnTo>
+                  <a:lnTo>
+                    <a:pt x="3437881" y="2786941"/>
                   </a:lnTo>
                   <a:lnTo>
                     <a:pt x="3366258" y="2792865"/>
@@ -3334,19 +3334,19 @@
                     <a:pt x="3223013" y="2804563"/>
                   </a:lnTo>
                   <a:lnTo>
-                    <a:pt x="3151391" y="2810337"/>
+                    <a:pt x="3151391" y="2810338"/>
                   </a:lnTo>
                   <a:lnTo>
                     <a:pt x="3079768" y="2816063"/>
                   </a:lnTo>
                   <a:lnTo>
-                    <a:pt x="3008146" y="2821739"/>
+                    <a:pt x="3008146" y="2821740"/>
                   </a:lnTo>
                   <a:lnTo>
                     <a:pt x="2936523" y="2827368"/>
                   </a:lnTo>
                   <a:lnTo>
-                    <a:pt x="2864901" y="2832948"/>
+                    <a:pt x="2864901" y="2832949"/>
                   </a:lnTo>
                   <a:lnTo>
                     <a:pt x="2793278" y="2838482"/>
@@ -3355,10 +3355,10 @@
                     <a:pt x="2721655" y="2843968"/>
                   </a:lnTo>
                   <a:lnTo>
-                    <a:pt x="2650033" y="2849407"/>
-                  </a:lnTo>
-                  <a:lnTo>
-                    <a:pt x="2578410" y="2854800"/>
+                    <a:pt x="2650033" y="2849408"/>
+                  </a:lnTo>
+                  <a:lnTo>
+                    <a:pt x="2578410" y="2854801"/>
                   </a:lnTo>
                   <a:lnTo>
                     <a:pt x="2506788" y="2860148"/>
@@ -3373,10 +3373,10 @@
                     <a:pt x="2291920" y="2875919"/>
                   </a:lnTo>
                   <a:lnTo>
-                    <a:pt x="2220298" y="2881086"/>
-                  </a:lnTo>
-                  <a:lnTo>
-                    <a:pt x="2148675" y="2886210"/>
+                    <a:pt x="2220298" y="2881087"/>
+                  </a:lnTo>
+                  <a:lnTo>
+                    <a:pt x="2148675" y="2886211"/>
                   </a:lnTo>
                   <a:lnTo>
                     <a:pt x="2077053" y="2891291"/>
@@ -3385,7 +3385,7 @@
                     <a:pt x="2005430" y="2896328"/>
                   </a:lnTo>
                   <a:lnTo>
-                    <a:pt x="1933808" y="2901322"/>
+                    <a:pt x="1933808" y="2901323"/>
                   </a:lnTo>
                   <a:lnTo>
                     <a:pt x="1862185" y="2906274"/>
@@ -3397,7 +3397,7 @@
                     <a:pt x="1718940" y="2916052"/>
                   </a:lnTo>
                   <a:lnTo>
-                    <a:pt x="1647318" y="2920878"/>
+                    <a:pt x="1647318" y="2920879"/>
                   </a:lnTo>
                   <a:lnTo>
                     <a:pt x="1575695" y="2925664"/>
@@ -3406,7 +3406,7 @@
                     <a:pt x="1504073" y="2930409"/>
                   </a:lnTo>
                   <a:lnTo>
-                    <a:pt x="1432450" y="2935113"/>
+                    <a:pt x="1432450" y="2935114"/>
                   </a:lnTo>
                   <a:lnTo>
                     <a:pt x="1360827" y="2939778"/>
@@ -3415,7 +3415,7 @@
                     <a:pt x="1289205" y="2944403"/>
                   </a:lnTo>
                   <a:lnTo>
-                    <a:pt x="1217582" y="2948988"/>
+                    <a:pt x="1217582" y="2948989"/>
                   </a:lnTo>
                   <a:lnTo>
                     <a:pt x="1145960" y="2953535"/>
@@ -3424,7 +3424,7 @@
                     <a:pt x="1074337" y="2958043"/>
                   </a:lnTo>
                   <a:lnTo>
-                    <a:pt x="1002715" y="2962512"/>
+                    <a:pt x="1002715" y="2962513"/>
                   </a:lnTo>
                   <a:lnTo>
                     <a:pt x="931092" y="2966944"/>
@@ -3433,7 +3433,7 @@
                     <a:pt x="859470" y="2971338"/>
                   </a:lnTo>
                   <a:lnTo>
-                    <a:pt x="787847" y="2975694"/>
+                    <a:pt x="787847" y="2975695"/>
                   </a:lnTo>
                   <a:lnTo>
                     <a:pt x="716225" y="2980014"/>
@@ -3442,10 +3442,10 @@
                     <a:pt x="644602" y="2984297"/>
                   </a:lnTo>
                   <a:lnTo>
-                    <a:pt x="572980" y="2988543"/>
-                  </a:lnTo>
-                  <a:lnTo>
-                    <a:pt x="501357" y="2992753"/>
+                    <a:pt x="572980" y="2988544"/>
+                  </a:lnTo>
+                  <a:lnTo>
+                    <a:pt x="501357" y="2992754"/>
                   </a:lnTo>
                   <a:lnTo>
                     <a:pt x="429735" y="2996928"/>
@@ -3457,7 +3457,7 @@
                     <a:pt x="286490" y="3005171"/>
                   </a:lnTo>
                   <a:lnTo>
-                    <a:pt x="214867" y="3009239"/>
+                    <a:pt x="214867" y="3009240"/>
                   </a:lnTo>
                   <a:lnTo>
                     <a:pt x="143245" y="3013274"/>
@@ -3506,7 +3506,7 @@
                     <a:pt x="0" y="0"/>
                   </a:moveTo>
                   <a:lnTo>
-                    <a:pt x="4942" y="17362"/>
+                    <a:pt x="4942" y="17363"/>
                   </a:lnTo>
                   <a:lnTo>
                     <a:pt x="76565" y="251928"/>
@@ -3515,40 +3515,40 @@
                     <a:pt x="148187" y="470621"/>
                   </a:lnTo>
                   <a:lnTo>
-                    <a:pt x="219810" y="674515"/>
-                  </a:lnTo>
-                  <a:lnTo>
-                    <a:pt x="291432" y="864612"/>
+                    <a:pt x="219810" y="674516"/>
+                  </a:lnTo>
+                  <a:lnTo>
+                    <a:pt x="291433" y="864613"/>
                   </a:lnTo>
                   <a:lnTo>
                     <a:pt x="363055" y="1041846"/>
                   </a:lnTo>
                   <a:lnTo>
-                    <a:pt x="434677" y="1207086"/>
+                    <a:pt x="434678" y="1207087"/>
                   </a:lnTo>
                   <a:lnTo>
                     <a:pt x="506300" y="1361145"/>
                   </a:lnTo>
                   <a:lnTo>
-                    <a:pt x="577922" y="1504779"/>
+                    <a:pt x="577923" y="1504779"/>
                   </a:lnTo>
                   <a:lnTo>
                     <a:pt x="649545" y="1638693"/>
                   </a:lnTo>
                   <a:lnTo>
-                    <a:pt x="721167" y="1763545"/>
+                    <a:pt x="721168" y="1763546"/>
                   </a:lnTo>
                   <a:lnTo>
                     <a:pt x="792790" y="1879949"/>
                   </a:lnTo>
                   <a:lnTo>
-                    <a:pt x="864412" y="1988476"/>
+                    <a:pt x="864413" y="1988476"/>
                   </a:lnTo>
                   <a:lnTo>
                     <a:pt x="936035" y="2089659"/>
                   </a:lnTo>
                   <a:lnTo>
-                    <a:pt x="1007658" y="2183995"/>
+                    <a:pt x="1007658" y="2183996"/>
                   </a:lnTo>
                   <a:lnTo>
                     <a:pt x="1079280" y="2271948"/>
@@ -3575,34 +3575,34 @@
                     <a:pt x="1580638" y="2642947"/>
                   </a:lnTo>
                   <a:lnTo>
-                    <a:pt x="1652260" y="2635737"/>
+                    <a:pt x="1652261" y="2635737"/>
                   </a:lnTo>
                   <a:lnTo>
                     <a:pt x="1723883" y="2628465"/>
                   </a:lnTo>
                   <a:lnTo>
-                    <a:pt x="1795505" y="2621131"/>
-                  </a:lnTo>
-                  <a:lnTo>
-                    <a:pt x="1867128" y="2613735"/>
-                  </a:lnTo>
-                  <a:lnTo>
-                    <a:pt x="1938750" y="2606274"/>
+                    <a:pt x="1795506" y="2621131"/>
+                  </a:lnTo>
+                  <a:lnTo>
+                    <a:pt x="1867128" y="2613734"/>
+                  </a:lnTo>
+                  <a:lnTo>
+                    <a:pt x="1938751" y="2606274"/>
                   </a:lnTo>
                   <a:lnTo>
                     <a:pt x="2010373" y="2598750"/>
                   </a:lnTo>
                   <a:lnTo>
-                    <a:pt x="2081995" y="2591161"/>
+                    <a:pt x="2081996" y="2591161"/>
                   </a:lnTo>
                   <a:lnTo>
                     <a:pt x="2153618" y="2583507"/>
                   </a:lnTo>
                   <a:lnTo>
-                    <a:pt x="2225240" y="2575787"/>
-                  </a:lnTo>
-                  <a:lnTo>
-                    <a:pt x="2296863" y="2568002"/>
+                    <a:pt x="2225241" y="2575787"/>
+                  </a:lnTo>
+                  <a:lnTo>
+                    <a:pt x="2296863" y="2568001"/>
                   </a:lnTo>
                   <a:lnTo>
                     <a:pt x="2368486" y="2560149"/>
@@ -3611,7 +3611,7 @@
                     <a:pt x="2440108" y="2552229"/>
                   </a:lnTo>
                   <a:lnTo>
-                    <a:pt x="2511731" y="2544242"/>
+                    <a:pt x="2511731" y="2544241"/>
                   </a:lnTo>
                   <a:lnTo>
                     <a:pt x="2583353" y="2536185"/>
@@ -3623,13 +3623,13 @@
                     <a:pt x="2726598" y="2519865"/>
                   </a:lnTo>
                   <a:lnTo>
-                    <a:pt x="2798221" y="2511600"/>
+                    <a:pt x="2798221" y="2511599"/>
                   </a:lnTo>
                   <a:lnTo>
                     <a:pt x="2869843" y="2503263"/>
                   </a:lnTo>
                   <a:lnTo>
-                    <a:pt x="2941466" y="2494856"/>
+                    <a:pt x="2941466" y="2494855"/>
                   </a:lnTo>
                   <a:lnTo>
                     <a:pt x="3013088" y="2486376"/>
@@ -3638,28 +3638,28 @@
                     <a:pt x="3084711" y="2477823"/>
                   </a:lnTo>
                   <a:lnTo>
-                    <a:pt x="3156333" y="2469198"/>
-                  </a:lnTo>
-                  <a:lnTo>
-                    <a:pt x="3227956" y="2460498"/>
-                  </a:lnTo>
-                  <a:lnTo>
-                    <a:pt x="3299578" y="2451724"/>
-                  </a:lnTo>
-                  <a:lnTo>
-                    <a:pt x="3371201" y="2442874"/>
-                  </a:lnTo>
-                  <a:lnTo>
-                    <a:pt x="3442823" y="2433948"/>
+                    <a:pt x="3156334" y="2469197"/>
+                  </a:lnTo>
+                  <a:lnTo>
+                    <a:pt x="3227956" y="2460497"/>
+                  </a:lnTo>
+                  <a:lnTo>
+                    <a:pt x="3299579" y="2451723"/>
+                  </a:lnTo>
+                  <a:lnTo>
+                    <a:pt x="3371201" y="2442873"/>
+                  </a:lnTo>
+                  <a:lnTo>
+                    <a:pt x="3442824" y="2433948"/>
                   </a:lnTo>
                   <a:lnTo>
                     <a:pt x="3514446" y="2424946"/>
                   </a:lnTo>
                   <a:lnTo>
-                    <a:pt x="3586068" y="2415867"/>
-                  </a:lnTo>
-                  <a:lnTo>
-                    <a:pt x="3657691" y="2406710"/>
+                    <a:pt x="3586069" y="2415867"/>
+                  </a:lnTo>
+                  <a:lnTo>
+                    <a:pt x="3657691" y="2406709"/>
                   </a:lnTo>
                 </a:path>
               </a:pathLst>
@@ -3726,13 +3726,13 @@
                     <a:pt x="6231159" y="601078"/>
                   </a:lnTo>
                   <a:lnTo>
-                    <a:pt x="6159537" y="584713"/>
+                    <a:pt x="6159537" y="584712"/>
                   </a:lnTo>
                   <a:lnTo>
                     <a:pt x="6087914" y="567159"/>
                   </a:lnTo>
                   <a:lnTo>
-                    <a:pt x="6016292" y="548332"/>
+                    <a:pt x="6016292" y="548331"/>
                   </a:lnTo>
                   <a:lnTo>
                     <a:pt x="5944669" y="528137"/>
@@ -3807,7 +3807,7 @@
                     <a:pt x="4297351" y="54575"/>
                   </a:lnTo>
                   <a:lnTo>
-                    <a:pt x="4225729" y="61138"/>
+                    <a:pt x="4225729" y="61139"/>
                   </a:lnTo>
                   <a:lnTo>
                     <a:pt x="4154106" y="67646"/>
@@ -3822,7 +3822,7 @@
                     <a:pt x="3939238" y="86839"/>
                   </a:lnTo>
                   <a:lnTo>
-                    <a:pt x="3867616" y="93128"/>
+                    <a:pt x="3867616" y="93129"/>
                   </a:lnTo>
                   <a:lnTo>
                     <a:pt x="3795993" y="99364"/>
@@ -3837,7 +3837,7 @@
                     <a:pt x="3581126" y="117755"/>
                   </a:lnTo>
                   <a:lnTo>
-                    <a:pt x="3509503" y="123781"/>
+                    <a:pt x="3509503" y="123782"/>
                   </a:lnTo>
                   <a:lnTo>
                     <a:pt x="3437881" y="129757"/>
@@ -3852,13 +3852,13 @@
                     <a:pt x="3223013" y="147379"/>
                   </a:lnTo>
                   <a:lnTo>
-                    <a:pt x="3151391" y="153153"/>
+                    <a:pt x="3151391" y="153154"/>
                   </a:lnTo>
                   <a:lnTo>
                     <a:pt x="3079768" y="158879"/>
                   </a:lnTo>
                   <a:lnTo>
-                    <a:pt x="3008146" y="164555"/>
+                    <a:pt x="3008146" y="164556"/>
                   </a:lnTo>
                   <a:lnTo>
                     <a:pt x="2936523" y="170184"/>
@@ -3873,10 +3873,10 @@
                     <a:pt x="2721655" y="186784"/>
                   </a:lnTo>
                   <a:lnTo>
-                    <a:pt x="2650033" y="192223"/>
-                  </a:lnTo>
-                  <a:lnTo>
-                    <a:pt x="2578410" y="197616"/>
+                    <a:pt x="2650033" y="192224"/>
+                  </a:lnTo>
+                  <a:lnTo>
+                    <a:pt x="2578410" y="197617"/>
                   </a:lnTo>
                   <a:lnTo>
                     <a:pt x="2506788" y="202964"/>
@@ -3894,7 +3894,7 @@
                     <a:pt x="2220298" y="223903"/>
                   </a:lnTo>
                   <a:lnTo>
-                    <a:pt x="2148675" y="229026"/>
+                    <a:pt x="2148675" y="229027"/>
                   </a:lnTo>
                   <a:lnTo>
                     <a:pt x="2077053" y="234107"/>
@@ -3903,7 +3903,7 @@
                     <a:pt x="2005430" y="239144"/>
                   </a:lnTo>
                   <a:lnTo>
-                    <a:pt x="1933808" y="244138"/>
+                    <a:pt x="1933808" y="244139"/>
                   </a:lnTo>
                   <a:lnTo>
                     <a:pt x="1862185" y="249090"/>
@@ -3915,7 +3915,7 @@
                     <a:pt x="1718940" y="258868"/>
                   </a:lnTo>
                   <a:lnTo>
-                    <a:pt x="1647318" y="263694"/>
+                    <a:pt x="1647318" y="263695"/>
                   </a:lnTo>
                   <a:lnTo>
                     <a:pt x="1575695" y="268480"/>
@@ -3924,7 +3924,7 @@
                     <a:pt x="1504073" y="273225"/>
                   </a:lnTo>
                   <a:lnTo>
-                    <a:pt x="1432450" y="277929"/>
+                    <a:pt x="1432450" y="277930"/>
                   </a:lnTo>
                   <a:lnTo>
                     <a:pt x="1360827" y="282594"/>
@@ -3933,7 +3933,7 @@
                     <a:pt x="1289205" y="287219"/>
                   </a:lnTo>
                   <a:lnTo>
-                    <a:pt x="1217582" y="291804"/>
+                    <a:pt x="1217582" y="291805"/>
                   </a:lnTo>
                   <a:lnTo>
                     <a:pt x="1145960" y="296351"/>
@@ -3942,28 +3942,28 @@
                     <a:pt x="1074337" y="300859"/>
                   </a:lnTo>
                   <a:lnTo>
-                    <a:pt x="1002715" y="305328"/>
-                  </a:lnTo>
-                  <a:lnTo>
-                    <a:pt x="931092" y="309760"/>
+                    <a:pt x="1002715" y="305329"/>
+                  </a:lnTo>
+                  <a:lnTo>
+                    <a:pt x="931092" y="309761"/>
                   </a:lnTo>
                   <a:lnTo>
                     <a:pt x="859470" y="314154"/>
                   </a:lnTo>
                   <a:lnTo>
-                    <a:pt x="787847" y="318510"/>
-                  </a:lnTo>
-                  <a:lnTo>
-                    <a:pt x="716225" y="322830"/>
+                    <a:pt x="787847" y="318511"/>
+                  </a:lnTo>
+                  <a:lnTo>
+                    <a:pt x="716225" y="322831"/>
                   </a:lnTo>
                   <a:lnTo>
                     <a:pt x="644602" y="327113"/>
                   </a:lnTo>
                   <a:lnTo>
-                    <a:pt x="572980" y="331359"/>
-                  </a:lnTo>
-                  <a:lnTo>
-                    <a:pt x="501357" y="335569"/>
+                    <a:pt x="572980" y="331360"/>
+                  </a:lnTo>
+                  <a:lnTo>
+                    <a:pt x="501357" y="335570"/>
                   </a:lnTo>
                   <a:lnTo>
                     <a:pt x="429735" y="339744"/>
@@ -3978,13 +3978,13 @@
                     <a:pt x="214867" y="352056"/>
                   </a:lnTo>
                   <a:lnTo>
-                    <a:pt x="143245" y="356090"/>
-                  </a:lnTo>
-                  <a:lnTo>
-                    <a:pt x="71622" y="360090"/>
-                  </a:lnTo>
-                  <a:lnTo>
-                    <a:pt x="0" y="364056"/>
+                    <a:pt x="143245" y="356091"/>
+                  </a:lnTo>
+                  <a:lnTo>
+                    <a:pt x="71622" y="360091"/>
+                  </a:lnTo>
+                  <a:lnTo>
+                    <a:pt x="0" y="364057"/>
                   </a:lnTo>
                 </a:path>
               </a:pathLst>
@@ -4004,249 +4004,249 @@
           </p:nvSpPr>
           <p:spPr>
             <a:xfrm>
-              <a:off x="2730939" y="2073503"/>
-              <a:ext cx="5531740" cy="3160082"/>
+              <a:off x="2730937" y="2073503"/>
+              <a:ext cx="5531742" cy="3160082"/>
             </a:xfrm>
             <a:custGeom>
               <a:avLst/>
               <a:pathLst>
-                <a:path w="5531740" h="3160082">
+                <a:path w="5531742" h="3160082">
                   <a:moveTo>
                     <a:pt x="0" y="0"/>
                   </a:moveTo>
                   <a:lnTo>
-                    <a:pt x="16805" y="25352"/>
-                  </a:lnTo>
-                  <a:lnTo>
-                    <a:pt x="88428" y="130128"/>
-                  </a:lnTo>
-                  <a:lnTo>
-                    <a:pt x="160050" y="231729"/>
-                  </a:lnTo>
-                  <a:lnTo>
-                    <a:pt x="231673" y="330252"/>
-                  </a:lnTo>
-                  <a:lnTo>
-                    <a:pt x="303295" y="425790"/>
-                  </a:lnTo>
-                  <a:lnTo>
-                    <a:pt x="374918" y="518433"/>
-                  </a:lnTo>
-                  <a:lnTo>
-                    <a:pt x="446540" y="608270"/>
-                  </a:lnTo>
-                  <a:lnTo>
-                    <a:pt x="518163" y="695385"/>
-                  </a:lnTo>
-                  <a:lnTo>
-                    <a:pt x="589786" y="779861"/>
-                  </a:lnTo>
-                  <a:lnTo>
-                    <a:pt x="661408" y="861778"/>
-                  </a:lnTo>
-                  <a:lnTo>
-                    <a:pt x="733031" y="941213"/>
-                  </a:lnTo>
-                  <a:lnTo>
-                    <a:pt x="804653" y="1018241"/>
-                  </a:lnTo>
-                  <a:lnTo>
-                    <a:pt x="876276" y="1092936"/>
-                  </a:lnTo>
-                  <a:lnTo>
-                    <a:pt x="947898" y="1165368"/>
-                  </a:lnTo>
-                  <a:lnTo>
-                    <a:pt x="1019521" y="1235605"/>
-                  </a:lnTo>
-                  <a:lnTo>
-                    <a:pt x="1091143" y="1303715"/>
-                  </a:lnTo>
-                  <a:lnTo>
-                    <a:pt x="1162766" y="1369761"/>
-                  </a:lnTo>
-                  <a:lnTo>
-                    <a:pt x="1234388" y="1433806"/>
-                  </a:lnTo>
-                  <a:lnTo>
-                    <a:pt x="1306011" y="1495911"/>
-                  </a:lnTo>
-                  <a:lnTo>
-                    <a:pt x="1377633" y="1556134"/>
-                  </a:lnTo>
-                  <a:lnTo>
-                    <a:pt x="1449256" y="1614533"/>
-                  </a:lnTo>
-                  <a:lnTo>
-                    <a:pt x="1520878" y="1671162"/>
-                  </a:lnTo>
-                  <a:lnTo>
-                    <a:pt x="1592501" y="1726076"/>
-                  </a:lnTo>
-                  <a:lnTo>
-                    <a:pt x="1664123" y="1779326"/>
-                  </a:lnTo>
-                  <a:lnTo>
-                    <a:pt x="1735746" y="1830963"/>
-                  </a:lnTo>
-                  <a:lnTo>
-                    <a:pt x="1807368" y="1881036"/>
-                  </a:lnTo>
-                  <a:lnTo>
-                    <a:pt x="1878991" y="1929592"/>
-                  </a:lnTo>
-                  <a:lnTo>
-                    <a:pt x="1950614" y="1976676"/>
-                  </a:lnTo>
-                  <a:lnTo>
-                    <a:pt x="2022236" y="2022334"/>
-                  </a:lnTo>
-                  <a:lnTo>
-                    <a:pt x="2093859" y="2066609"/>
-                  </a:lnTo>
-                  <a:lnTo>
-                    <a:pt x="2165481" y="2109542"/>
-                  </a:lnTo>
-                  <a:lnTo>
-                    <a:pt x="2237104" y="2151175"/>
-                  </a:lnTo>
-                  <a:lnTo>
-                    <a:pt x="2308726" y="2191547"/>
-                  </a:lnTo>
-                  <a:lnTo>
-                    <a:pt x="2380349" y="2230695"/>
-                  </a:lnTo>
-                  <a:lnTo>
-                    <a:pt x="2451971" y="2268657"/>
-                  </a:lnTo>
-                  <a:lnTo>
-                    <a:pt x="2523594" y="2305470"/>
-                  </a:lnTo>
-                  <a:lnTo>
-                    <a:pt x="2595216" y="2341167"/>
-                  </a:lnTo>
-                  <a:lnTo>
-                    <a:pt x="2666839" y="2375782"/>
-                  </a:lnTo>
-                  <a:lnTo>
-                    <a:pt x="2738461" y="2409349"/>
-                  </a:lnTo>
-                  <a:lnTo>
-                    <a:pt x="2810084" y="2441899"/>
-                  </a:lnTo>
-                  <a:lnTo>
-                    <a:pt x="2881706" y="2473462"/>
-                  </a:lnTo>
-                  <a:lnTo>
-                    <a:pt x="2953329" y="2504070"/>
-                  </a:lnTo>
-                  <a:lnTo>
-                    <a:pt x="3024951" y="2533750"/>
-                  </a:lnTo>
-                  <a:lnTo>
-                    <a:pt x="3096574" y="2562531"/>
-                  </a:lnTo>
-                  <a:lnTo>
-                    <a:pt x="3168196" y="2590440"/>
-                  </a:lnTo>
-                  <a:lnTo>
-                    <a:pt x="3239819" y="2617504"/>
-                  </a:lnTo>
-                  <a:lnTo>
-                    <a:pt x="3311442" y="2643747"/>
-                  </a:lnTo>
-                  <a:lnTo>
-                    <a:pt x="3383064" y="2669196"/>
-                  </a:lnTo>
-                  <a:lnTo>
-                    <a:pt x="3454687" y="2693873"/>
-                  </a:lnTo>
-                  <a:lnTo>
-                    <a:pt x="3526309" y="2717803"/>
-                  </a:lnTo>
-                  <a:lnTo>
-                    <a:pt x="3597932" y="2741008"/>
-                  </a:lnTo>
-                  <a:lnTo>
-                    <a:pt x="3669554" y="2763510"/>
-                  </a:lnTo>
-                  <a:lnTo>
-                    <a:pt x="3741177" y="2785330"/>
-                  </a:lnTo>
-                  <a:lnTo>
-                    <a:pt x="3812799" y="2806490"/>
-                  </a:lnTo>
-                  <a:lnTo>
-                    <a:pt x="3884422" y="2827008"/>
-                  </a:lnTo>
-                  <a:lnTo>
-                    <a:pt x="3956044" y="2846904"/>
-                  </a:lnTo>
-                  <a:lnTo>
-                    <a:pt x="4027667" y="2866198"/>
-                  </a:lnTo>
-                  <a:lnTo>
-                    <a:pt x="4099289" y="2884907"/>
-                  </a:lnTo>
-                  <a:lnTo>
-                    <a:pt x="4170912" y="2903050"/>
-                  </a:lnTo>
-                  <a:lnTo>
-                    <a:pt x="4242534" y="2920642"/>
-                  </a:lnTo>
-                  <a:lnTo>
-                    <a:pt x="4314157" y="2937702"/>
-                  </a:lnTo>
-                  <a:lnTo>
-                    <a:pt x="4385779" y="2954245"/>
-                  </a:lnTo>
-                  <a:lnTo>
-                    <a:pt x="4457402" y="2970287"/>
-                  </a:lnTo>
-                  <a:lnTo>
-                    <a:pt x="4529024" y="2985842"/>
-                  </a:lnTo>
-                  <a:lnTo>
-                    <a:pt x="4600647" y="3000927"/>
-                  </a:lnTo>
-                  <a:lnTo>
-                    <a:pt x="4672270" y="3015554"/>
-                  </a:lnTo>
-                  <a:lnTo>
-                    <a:pt x="4743892" y="3029739"/>
-                  </a:lnTo>
-                  <a:lnTo>
-                    <a:pt x="4815515" y="3043493"/>
-                  </a:lnTo>
-                  <a:lnTo>
-                    <a:pt x="4887137" y="3056831"/>
-                  </a:lnTo>
-                  <a:lnTo>
-                    <a:pt x="4958760" y="3069765"/>
-                  </a:lnTo>
-                  <a:lnTo>
-                    <a:pt x="5030382" y="3082307"/>
-                  </a:lnTo>
-                  <a:lnTo>
-                    <a:pt x="5102005" y="3094469"/>
-                  </a:lnTo>
-                  <a:lnTo>
-                    <a:pt x="5173627" y="3106262"/>
-                  </a:lnTo>
-                  <a:lnTo>
-                    <a:pt x="5245250" y="3117699"/>
-                  </a:lnTo>
-                  <a:lnTo>
-                    <a:pt x="5316872" y="3128788"/>
-                  </a:lnTo>
-                  <a:lnTo>
-                    <a:pt x="5388495" y="3139542"/>
-                  </a:lnTo>
-                  <a:lnTo>
-                    <a:pt x="5460117" y="3149970"/>
-                  </a:lnTo>
-                  <a:lnTo>
-                    <a:pt x="5531740" y="3160082"/>
+                    <a:pt x="16807" y="25355"/>
+                  </a:lnTo>
+                  <a:lnTo>
+                    <a:pt x="88430" y="130130"/>
+                  </a:lnTo>
+                  <a:lnTo>
+                    <a:pt x="160052" y="231731"/>
+                  </a:lnTo>
+                  <a:lnTo>
+                    <a:pt x="231675" y="330254"/>
+                  </a:lnTo>
+                  <a:lnTo>
+                    <a:pt x="303297" y="425792"/>
+                  </a:lnTo>
+                  <a:lnTo>
+                    <a:pt x="374920" y="518435"/>
+                  </a:lnTo>
+                  <a:lnTo>
+                    <a:pt x="446542" y="608272"/>
+                  </a:lnTo>
+                  <a:lnTo>
+                    <a:pt x="518165" y="695387"/>
+                  </a:lnTo>
+                  <a:lnTo>
+                    <a:pt x="589787" y="779863"/>
+                  </a:lnTo>
+                  <a:lnTo>
+                    <a:pt x="661410" y="861779"/>
+                  </a:lnTo>
+                  <a:lnTo>
+                    <a:pt x="733032" y="941214"/>
+                  </a:lnTo>
+                  <a:lnTo>
+                    <a:pt x="804655" y="1018243"/>
+                  </a:lnTo>
+                  <a:lnTo>
+                    <a:pt x="876277" y="1092937"/>
+                  </a:lnTo>
+                  <a:lnTo>
+                    <a:pt x="947900" y="1165369"/>
+                  </a:lnTo>
+                  <a:lnTo>
+                    <a:pt x="1019522" y="1235606"/>
+                  </a:lnTo>
+                  <a:lnTo>
+                    <a:pt x="1091145" y="1303716"/>
+                  </a:lnTo>
+                  <a:lnTo>
+                    <a:pt x="1162767" y="1369762"/>
+                  </a:lnTo>
+                  <a:lnTo>
+                    <a:pt x="1234390" y="1433807"/>
+                  </a:lnTo>
+                  <a:lnTo>
+                    <a:pt x="1306013" y="1495912"/>
+                  </a:lnTo>
+                  <a:lnTo>
+                    <a:pt x="1377635" y="1556135"/>
+                  </a:lnTo>
+                  <a:lnTo>
+                    <a:pt x="1449258" y="1614534"/>
+                  </a:lnTo>
+                  <a:lnTo>
+                    <a:pt x="1520880" y="1671163"/>
+                  </a:lnTo>
+                  <a:lnTo>
+                    <a:pt x="1592503" y="1726077"/>
+                  </a:lnTo>
+                  <a:lnTo>
+                    <a:pt x="1664125" y="1779327"/>
+                  </a:lnTo>
+                  <a:lnTo>
+                    <a:pt x="1735748" y="1830964"/>
+                  </a:lnTo>
+                  <a:lnTo>
+                    <a:pt x="1807370" y="1881037"/>
+                  </a:lnTo>
+                  <a:lnTo>
+                    <a:pt x="1878993" y="1929592"/>
+                  </a:lnTo>
+                  <a:lnTo>
+                    <a:pt x="1950615" y="1976677"/>
+                  </a:lnTo>
+                  <a:lnTo>
+                    <a:pt x="2022238" y="2022335"/>
+                  </a:lnTo>
+                  <a:lnTo>
+                    <a:pt x="2093860" y="2066609"/>
+                  </a:lnTo>
+                  <a:lnTo>
+                    <a:pt x="2165483" y="2109543"/>
+                  </a:lnTo>
+                  <a:lnTo>
+                    <a:pt x="2237105" y="2151176"/>
+                  </a:lnTo>
+                  <a:lnTo>
+                    <a:pt x="2308728" y="2191547"/>
+                  </a:lnTo>
+                  <a:lnTo>
+                    <a:pt x="2380350" y="2230695"/>
+                  </a:lnTo>
+                  <a:lnTo>
+                    <a:pt x="2451973" y="2268658"/>
+                  </a:lnTo>
+                  <a:lnTo>
+                    <a:pt x="2523595" y="2305470"/>
+                  </a:lnTo>
+                  <a:lnTo>
+                    <a:pt x="2595218" y="2341167"/>
+                  </a:lnTo>
+                  <a:lnTo>
+                    <a:pt x="2666841" y="2375782"/>
+                  </a:lnTo>
+                  <a:lnTo>
+                    <a:pt x="2738463" y="2409349"/>
+                  </a:lnTo>
+                  <a:lnTo>
+                    <a:pt x="2810086" y="2441899"/>
+                  </a:lnTo>
+                  <a:lnTo>
+                    <a:pt x="2881708" y="2473463"/>
+                  </a:lnTo>
+                  <a:lnTo>
+                    <a:pt x="2953331" y="2504070"/>
+                  </a:lnTo>
+                  <a:lnTo>
+                    <a:pt x="3024953" y="2533750"/>
+                  </a:lnTo>
+                  <a:lnTo>
+                    <a:pt x="3096576" y="2562531"/>
+                  </a:lnTo>
+                  <a:lnTo>
+                    <a:pt x="3168198" y="2590440"/>
+                  </a:lnTo>
+                  <a:lnTo>
+                    <a:pt x="3239821" y="2617504"/>
+                  </a:lnTo>
+                  <a:lnTo>
+                    <a:pt x="3311443" y="2643747"/>
+                  </a:lnTo>
+                  <a:lnTo>
+                    <a:pt x="3383066" y="2669196"/>
+                  </a:lnTo>
+                  <a:lnTo>
+                    <a:pt x="3454688" y="2693873"/>
+                  </a:lnTo>
+                  <a:lnTo>
+                    <a:pt x="3526311" y="2717803"/>
+                  </a:lnTo>
+                  <a:lnTo>
+                    <a:pt x="3597933" y="2741008"/>
+                  </a:lnTo>
+                  <a:lnTo>
+                    <a:pt x="3669556" y="2763510"/>
+                  </a:lnTo>
+                  <a:lnTo>
+                    <a:pt x="3741178" y="2785330"/>
+                  </a:lnTo>
+                  <a:lnTo>
+                    <a:pt x="3812801" y="2806490"/>
+                  </a:lnTo>
+                  <a:lnTo>
+                    <a:pt x="3884423" y="2827008"/>
+                  </a:lnTo>
+                  <a:lnTo>
+                    <a:pt x="3956046" y="2846904"/>
+                  </a:lnTo>
+                  <a:lnTo>
+                    <a:pt x="4027669" y="2866198"/>
+                  </a:lnTo>
+                  <a:lnTo>
+                    <a:pt x="4099291" y="2884907"/>
+                  </a:lnTo>
+                  <a:lnTo>
+                    <a:pt x="4170914" y="2903049"/>
+                  </a:lnTo>
+                  <a:lnTo>
+                    <a:pt x="4242536" y="2920642"/>
+                  </a:lnTo>
+                  <a:lnTo>
+                    <a:pt x="4314159" y="2937702"/>
+                  </a:lnTo>
+                  <a:lnTo>
+                    <a:pt x="4385781" y="2954245"/>
+                  </a:lnTo>
+                  <a:lnTo>
+                    <a:pt x="4457404" y="2970287"/>
+                  </a:lnTo>
+                  <a:lnTo>
+                    <a:pt x="4529026" y="2985842"/>
+                  </a:lnTo>
+                  <a:lnTo>
+                    <a:pt x="4600649" y="3000927"/>
+                  </a:lnTo>
+                  <a:lnTo>
+                    <a:pt x="4672271" y="3015554"/>
+                  </a:lnTo>
+                  <a:lnTo>
+                    <a:pt x="4743894" y="3029739"/>
+                  </a:lnTo>
+                  <a:lnTo>
+                    <a:pt x="4815516" y="3043493"/>
+                  </a:lnTo>
+                  <a:lnTo>
+                    <a:pt x="4887139" y="3056831"/>
+                  </a:lnTo>
+                  <a:lnTo>
+                    <a:pt x="4958761" y="3069765"/>
+                  </a:lnTo>
+                  <a:lnTo>
+                    <a:pt x="5030384" y="3082307"/>
+                  </a:lnTo>
+                  <a:lnTo>
+                    <a:pt x="5102006" y="3094469"/>
+                  </a:lnTo>
+                  <a:lnTo>
+                    <a:pt x="5173629" y="3106262"/>
+                  </a:lnTo>
+                  <a:lnTo>
+                    <a:pt x="5245251" y="3117698"/>
+                  </a:lnTo>
+                  <a:lnTo>
+                    <a:pt x="5316874" y="3128788"/>
+                  </a:lnTo>
+                  <a:lnTo>
+                    <a:pt x="5388497" y="3139542"/>
+                  </a:lnTo>
+                  <a:lnTo>
+                    <a:pt x="5460119" y="3149970"/>
+                  </a:lnTo>
+                  <a:lnTo>
+                    <a:pt x="5531742" y="3160082"/>
                   </a:lnTo>
                 </a:path>
               </a:pathLst>

--- a/docs/plots/carbo/jx_carbo_linsubhr_egfrdisc_throm2.pptx
+++ b/docs/plots/carbo/jx_carbo_linsubhr_egfrdisc_throm2.pptx
@@ -4954,7 +4954,7 @@
           <p:spPr>
             <a:xfrm>
               <a:off x="817517" y="1896563"/>
-              <a:ext cx="4869911" cy="82021"/>
+              <a:ext cx="5413065" cy="82021"/>
             </a:xfrm>
             <a:prstGeom prst="rect">
               <a:avLst/>
@@ -4986,7 +4986,7 @@
                   <a:latin typeface="Helvetica"/>
                   <a:cs typeface="Helvetica"/>
                 </a:rPr>
-                <a:t>subHR per 1 mL/min: 0.96 (0.91-1.01)  |  per IQR (Δ = 18.2): 0.49 (0.19-1.22)  |  IQR: [-11.5, 6.7]</a:t>
+                <a:t>subHR per 1 mL/min: 0.96 (0.91-1.01), p = 0.125  |  per IQR (Δ = 18.2): 0.49 (0.19-1.22)  |  IQR: [-11.5, 6.7]</a:t>
               </a:r>
             </a:p>
           </p:txBody>

--- a/docs/plots/carbo/jx_carbo_linsubhr_egfrdisc_throm2.pptx
+++ b/docs/plots/carbo/jx_carbo_linsubhr_egfrdisc_throm2.pptx
@@ -2271,26 +2271,26 @@
           </p:nvSpPr>
           <p:spPr>
             <a:xfrm>
-              <a:off x="817517" y="5142518"/>
-              <a:ext cx="7799693" cy="0"/>
+              <a:off x="915645" y="5071743"/>
+              <a:ext cx="7682587" cy="0"/>
             </a:xfrm>
             <a:custGeom>
               <a:avLst/>
               <a:pathLst>
-                <a:path w="7799693" h="0">
+                <a:path w="7682587" h="0">
                   <a:moveTo>
                     <a:pt x="0" y="0"/>
                   </a:moveTo>
                   <a:lnTo>
-                    <a:pt x="7799693" y="0"/>
-                  </a:lnTo>
-                  <a:lnTo>
-                    <a:pt x="7799693" y="0"/>
+                    <a:pt x="7682587" y="0"/>
+                  </a:lnTo>
+                  <a:lnTo>
+                    <a:pt x="7682587" y="0"/>
                   </a:lnTo>
                 </a:path>
               </a:pathLst>
             </a:custGeom>
-            <a:ln w="6775" cap="flat">
+            <a:ln w="8623" cap="flat">
               <a:solidFill>
                 <a:srgbClr val="EBEBEB">
                   <a:alpha val="100000"/>
@@ -2314,26 +2314,26 @@
           </p:nvSpPr>
           <p:spPr>
             <a:xfrm>
-              <a:off x="817517" y="4313054"/>
-              <a:ext cx="7799693" cy="0"/>
+              <a:off x="915645" y="4298074"/>
+              <a:ext cx="7682587" cy="0"/>
             </a:xfrm>
             <a:custGeom>
               <a:avLst/>
               <a:pathLst>
-                <a:path w="7799693" h="0">
+                <a:path w="7682587" h="0">
                   <a:moveTo>
                     <a:pt x="0" y="0"/>
                   </a:moveTo>
                   <a:lnTo>
-                    <a:pt x="7799693" y="0"/>
-                  </a:lnTo>
-                  <a:lnTo>
-                    <a:pt x="7799693" y="0"/>
+                    <a:pt x="7682587" y="0"/>
+                  </a:lnTo>
+                  <a:lnTo>
+                    <a:pt x="7682587" y="0"/>
                   </a:lnTo>
                 </a:path>
               </a:pathLst>
             </a:custGeom>
-            <a:ln w="6775" cap="flat">
+            <a:ln w="8623" cap="flat">
               <a:solidFill>
                 <a:srgbClr val="EBEBEB">
                   <a:alpha val="100000"/>
@@ -2357,26 +2357,26 @@
           </p:nvSpPr>
           <p:spPr>
             <a:xfrm>
-              <a:off x="817517" y="3483591"/>
-              <a:ext cx="7799693" cy="0"/>
+              <a:off x="915645" y="3524405"/>
+              <a:ext cx="7682587" cy="0"/>
             </a:xfrm>
             <a:custGeom>
               <a:avLst/>
               <a:pathLst>
-                <a:path w="7799693" h="0">
+                <a:path w="7682587" h="0">
                   <a:moveTo>
                     <a:pt x="0" y="0"/>
                   </a:moveTo>
                   <a:lnTo>
-                    <a:pt x="7799693" y="0"/>
-                  </a:lnTo>
-                  <a:lnTo>
-                    <a:pt x="7799693" y="0"/>
+                    <a:pt x="7682587" y="0"/>
+                  </a:lnTo>
+                  <a:lnTo>
+                    <a:pt x="7682587" y="0"/>
                   </a:lnTo>
                 </a:path>
               </a:pathLst>
             </a:custGeom>
-            <a:ln w="6775" cap="flat">
+            <a:ln w="8623" cap="flat">
               <a:solidFill>
                 <a:srgbClr val="EBEBEB">
                   <a:alpha val="100000"/>
@@ -2400,26 +2400,26 @@
           </p:nvSpPr>
           <p:spPr>
             <a:xfrm>
-              <a:off x="817517" y="2654127"/>
-              <a:ext cx="7799693" cy="0"/>
+              <a:off x="915645" y="2750737"/>
+              <a:ext cx="7682587" cy="0"/>
             </a:xfrm>
             <a:custGeom>
               <a:avLst/>
               <a:pathLst>
-                <a:path w="7799693" h="0">
+                <a:path w="7682587" h="0">
                   <a:moveTo>
                     <a:pt x="0" y="0"/>
                   </a:moveTo>
                   <a:lnTo>
-                    <a:pt x="7799693" y="0"/>
-                  </a:lnTo>
-                  <a:lnTo>
-                    <a:pt x="7799693" y="0"/>
+                    <a:pt x="7682587" y="0"/>
+                  </a:lnTo>
+                  <a:lnTo>
+                    <a:pt x="7682587" y="0"/>
                   </a:lnTo>
                 </a:path>
               </a:pathLst>
             </a:custGeom>
-            <a:ln w="6775" cap="flat">
+            <a:ln w="8623" cap="flat">
               <a:solidFill>
                 <a:srgbClr val="EBEBEB">
                   <a:alpha val="100000"/>
@@ -2443,15 +2443,15 @@
           </p:nvSpPr>
           <p:spPr>
             <a:xfrm>
-              <a:off x="1487487" y="2073503"/>
-              <a:ext cx="0" cy="3649639"/>
+              <a:off x="1575555" y="2209169"/>
+              <a:ext cx="0" cy="3404141"/>
             </a:xfrm>
             <a:custGeom>
               <a:avLst/>
               <a:pathLst>
-                <a:path w="0" h="3649639">
+                <a:path w="0" h="3404141">
                   <a:moveTo>
-                    <a:pt x="0" y="3649639"/>
+                    <a:pt x="0" y="3404141"/>
                   </a:moveTo>
                   <a:lnTo>
                     <a:pt x="0" y="0"/>
@@ -2462,7 +2462,7 @@
                 </a:path>
               </a:pathLst>
             </a:custGeom>
-            <a:ln w="6775" cap="flat">
+            <a:ln w="8623" cap="flat">
               <a:solidFill>
                 <a:srgbClr val="EBEBEB">
                   <a:alpha val="100000"/>
@@ -2486,15 +2486,15 @@
           </p:nvSpPr>
           <p:spPr>
             <a:xfrm>
-              <a:off x="3337360" y="2073503"/>
-              <a:ext cx="0" cy="3649639"/>
+              <a:off x="3397654" y="2209169"/>
+              <a:ext cx="0" cy="3404141"/>
             </a:xfrm>
             <a:custGeom>
               <a:avLst/>
               <a:pathLst>
-                <a:path w="0" h="3649639">
+                <a:path w="0" h="3404141">
                   <a:moveTo>
-                    <a:pt x="0" y="3649639"/>
+                    <a:pt x="0" y="3404141"/>
                   </a:moveTo>
                   <a:lnTo>
                     <a:pt x="0" y="0"/>
@@ -2505,7 +2505,7 @@
                 </a:path>
               </a:pathLst>
             </a:custGeom>
-            <a:ln w="6775" cap="flat">
+            <a:ln w="8623" cap="flat">
               <a:solidFill>
                 <a:srgbClr val="EBEBEB">
                   <a:alpha val="100000"/>
@@ -2529,15 +2529,15 @@
           </p:nvSpPr>
           <p:spPr>
             <a:xfrm>
-              <a:off x="5187233" y="2073503"/>
-              <a:ext cx="0" cy="3649639"/>
+              <a:off x="5219752" y="2209169"/>
+              <a:ext cx="0" cy="3404141"/>
             </a:xfrm>
             <a:custGeom>
               <a:avLst/>
               <a:pathLst>
-                <a:path w="0" h="3649639">
+                <a:path w="0" h="3404141">
                   <a:moveTo>
-                    <a:pt x="0" y="3649639"/>
+                    <a:pt x="0" y="3404141"/>
                   </a:moveTo>
                   <a:lnTo>
                     <a:pt x="0" y="0"/>
@@ -2548,7 +2548,7 @@
                 </a:path>
               </a:pathLst>
             </a:custGeom>
-            <a:ln w="6775" cap="flat">
+            <a:ln w="8623" cap="flat">
               <a:solidFill>
                 <a:srgbClr val="EBEBEB">
                   <a:alpha val="100000"/>
@@ -2572,15 +2572,15 @@
           </p:nvSpPr>
           <p:spPr>
             <a:xfrm>
-              <a:off x="7037106" y="2073503"/>
-              <a:ext cx="0" cy="3649639"/>
+              <a:off x="7041851" y="2209169"/>
+              <a:ext cx="0" cy="3404141"/>
             </a:xfrm>
             <a:custGeom>
               <a:avLst/>
               <a:pathLst>
-                <a:path w="0" h="3649639">
+                <a:path w="0" h="3404141">
                   <a:moveTo>
-                    <a:pt x="0" y="3649639"/>
+                    <a:pt x="0" y="3404141"/>
                   </a:moveTo>
                   <a:lnTo>
                     <a:pt x="0" y="0"/>
@@ -2591,7 +2591,7 @@
                 </a:path>
               </a:pathLst>
             </a:custGeom>
-            <a:ln w="6775" cap="flat">
+            <a:ln w="8623" cap="flat">
               <a:solidFill>
                 <a:srgbClr val="EBEBEB">
                   <a:alpha val="100000"/>
@@ -2615,26 +2615,26 @@
           </p:nvSpPr>
           <p:spPr>
             <a:xfrm>
-              <a:off x="817517" y="5557249"/>
-              <a:ext cx="7799693" cy="0"/>
+              <a:off x="915645" y="5458577"/>
+              <a:ext cx="7682587" cy="0"/>
             </a:xfrm>
             <a:custGeom>
               <a:avLst/>
               <a:pathLst>
-                <a:path w="7799693" h="0">
+                <a:path w="7682587" h="0">
                   <a:moveTo>
                     <a:pt x="0" y="0"/>
                   </a:moveTo>
                   <a:lnTo>
-                    <a:pt x="7799693" y="0"/>
-                  </a:lnTo>
-                  <a:lnTo>
-                    <a:pt x="7799693" y="0"/>
+                    <a:pt x="7682587" y="0"/>
+                  </a:lnTo>
+                  <a:lnTo>
+                    <a:pt x="7682587" y="0"/>
                   </a:lnTo>
                 </a:path>
               </a:pathLst>
             </a:custGeom>
-            <a:ln w="13550" cap="flat">
+            <a:ln w="17246" cap="flat">
               <a:solidFill>
                 <a:srgbClr val="EBEBEB">
                   <a:alpha val="100000"/>
@@ -2658,26 +2658,26 @@
           </p:nvSpPr>
           <p:spPr>
             <a:xfrm>
-              <a:off x="817517" y="4727786"/>
-              <a:ext cx="7799693" cy="0"/>
+              <a:off x="915645" y="4684908"/>
+              <a:ext cx="7682587" cy="0"/>
             </a:xfrm>
             <a:custGeom>
               <a:avLst/>
               <a:pathLst>
-                <a:path w="7799693" h="0">
+                <a:path w="7682587" h="0">
                   <a:moveTo>
                     <a:pt x="0" y="0"/>
                   </a:moveTo>
                   <a:lnTo>
-                    <a:pt x="7799693" y="0"/>
-                  </a:lnTo>
-                  <a:lnTo>
-                    <a:pt x="7799693" y="0"/>
+                    <a:pt x="7682587" y="0"/>
+                  </a:lnTo>
+                  <a:lnTo>
+                    <a:pt x="7682587" y="0"/>
                   </a:lnTo>
                 </a:path>
               </a:pathLst>
             </a:custGeom>
-            <a:ln w="13550" cap="flat">
+            <a:ln w="17246" cap="flat">
               <a:solidFill>
                 <a:srgbClr val="EBEBEB">
                   <a:alpha val="100000"/>
@@ -2701,26 +2701,26 @@
           </p:nvSpPr>
           <p:spPr>
             <a:xfrm>
-              <a:off x="817517" y="3898322"/>
-              <a:ext cx="7799693" cy="0"/>
+              <a:off x="915645" y="3911240"/>
+              <a:ext cx="7682587" cy="0"/>
             </a:xfrm>
             <a:custGeom>
               <a:avLst/>
               <a:pathLst>
-                <a:path w="7799693" h="0">
+                <a:path w="7682587" h="0">
                   <a:moveTo>
                     <a:pt x="0" y="0"/>
                   </a:moveTo>
                   <a:lnTo>
-                    <a:pt x="7799693" y="0"/>
-                  </a:lnTo>
-                  <a:lnTo>
-                    <a:pt x="7799693" y="0"/>
+                    <a:pt x="7682587" y="0"/>
+                  </a:lnTo>
+                  <a:lnTo>
+                    <a:pt x="7682587" y="0"/>
                   </a:lnTo>
                 </a:path>
               </a:pathLst>
             </a:custGeom>
-            <a:ln w="13550" cap="flat">
+            <a:ln w="17246" cap="flat">
               <a:solidFill>
                 <a:srgbClr val="EBEBEB">
                   <a:alpha val="100000"/>
@@ -2744,26 +2744,26 @@
           </p:nvSpPr>
           <p:spPr>
             <a:xfrm>
-              <a:off x="817517" y="3068859"/>
-              <a:ext cx="7799693" cy="0"/>
+              <a:off x="915645" y="3137571"/>
+              <a:ext cx="7682587" cy="0"/>
             </a:xfrm>
             <a:custGeom>
               <a:avLst/>
               <a:pathLst>
-                <a:path w="7799693" h="0">
+                <a:path w="7682587" h="0">
                   <a:moveTo>
                     <a:pt x="0" y="0"/>
                   </a:moveTo>
                   <a:lnTo>
-                    <a:pt x="7799693" y="0"/>
-                  </a:lnTo>
-                  <a:lnTo>
-                    <a:pt x="7799693" y="0"/>
+                    <a:pt x="7682587" y="0"/>
+                  </a:lnTo>
+                  <a:lnTo>
+                    <a:pt x="7682587" y="0"/>
                   </a:lnTo>
                 </a:path>
               </a:pathLst>
             </a:custGeom>
-            <a:ln w="13550" cap="flat">
+            <a:ln w="17246" cap="flat">
               <a:solidFill>
                 <a:srgbClr val="EBEBEB">
                   <a:alpha val="100000"/>
@@ -2787,26 +2787,26 @@
           </p:nvSpPr>
           <p:spPr>
             <a:xfrm>
-              <a:off x="817517" y="2239395"/>
-              <a:ext cx="7799693" cy="0"/>
+              <a:off x="915645" y="2363903"/>
+              <a:ext cx="7682587" cy="0"/>
             </a:xfrm>
             <a:custGeom>
               <a:avLst/>
               <a:pathLst>
-                <a:path w="7799693" h="0">
+                <a:path w="7682587" h="0">
                   <a:moveTo>
                     <a:pt x="0" y="0"/>
                   </a:moveTo>
                   <a:lnTo>
-                    <a:pt x="7799693" y="0"/>
-                  </a:lnTo>
-                  <a:lnTo>
-                    <a:pt x="7799693" y="0"/>
+                    <a:pt x="7682587" y="0"/>
+                  </a:lnTo>
+                  <a:lnTo>
+                    <a:pt x="7682587" y="0"/>
                   </a:lnTo>
                 </a:path>
               </a:pathLst>
             </a:custGeom>
-            <a:ln w="13550" cap="flat">
+            <a:ln w="17246" cap="flat">
               <a:solidFill>
                 <a:srgbClr val="EBEBEB">
                   <a:alpha val="100000"/>
@@ -2830,15 +2830,15 @@
           </p:nvSpPr>
           <p:spPr>
             <a:xfrm>
-              <a:off x="2412424" y="2073503"/>
-              <a:ext cx="0" cy="3649639"/>
+              <a:off x="2486605" y="2209169"/>
+              <a:ext cx="0" cy="3404141"/>
             </a:xfrm>
             <a:custGeom>
               <a:avLst/>
               <a:pathLst>
-                <a:path w="0" h="3649639">
+                <a:path w="0" h="3404141">
                   <a:moveTo>
-                    <a:pt x="0" y="3649639"/>
+                    <a:pt x="0" y="3404141"/>
                   </a:moveTo>
                   <a:lnTo>
                     <a:pt x="0" y="0"/>
@@ -2849,7 +2849,7 @@
                 </a:path>
               </a:pathLst>
             </a:custGeom>
-            <a:ln w="13550" cap="flat">
+            <a:ln w="17246" cap="flat">
               <a:solidFill>
                 <a:srgbClr val="EBEBEB">
                   <a:alpha val="100000"/>
@@ -2873,15 +2873,15 @@
           </p:nvSpPr>
           <p:spPr>
             <a:xfrm>
-              <a:off x="4262297" y="2073503"/>
-              <a:ext cx="0" cy="3649639"/>
+              <a:off x="4308703" y="2209169"/>
+              <a:ext cx="0" cy="3404141"/>
             </a:xfrm>
             <a:custGeom>
               <a:avLst/>
               <a:pathLst>
-                <a:path w="0" h="3649639">
+                <a:path w="0" h="3404141">
                   <a:moveTo>
-                    <a:pt x="0" y="3649639"/>
+                    <a:pt x="0" y="3404141"/>
                   </a:moveTo>
                   <a:lnTo>
                     <a:pt x="0" y="0"/>
@@ -2892,7 +2892,7 @@
                 </a:path>
               </a:pathLst>
             </a:custGeom>
-            <a:ln w="13550" cap="flat">
+            <a:ln w="17246" cap="flat">
               <a:solidFill>
                 <a:srgbClr val="EBEBEB">
                   <a:alpha val="100000"/>
@@ -2916,15 +2916,15 @@
           </p:nvSpPr>
           <p:spPr>
             <a:xfrm>
-              <a:off x="6112169" y="2073503"/>
-              <a:ext cx="0" cy="3649639"/>
+              <a:off x="6130802" y="2209169"/>
+              <a:ext cx="0" cy="3404141"/>
             </a:xfrm>
             <a:custGeom>
               <a:avLst/>
               <a:pathLst>
-                <a:path w="0" h="3649639">
+                <a:path w="0" h="3404141">
                   <a:moveTo>
-                    <a:pt x="0" y="3649639"/>
+                    <a:pt x="0" y="3404141"/>
                   </a:moveTo>
                   <a:lnTo>
                     <a:pt x="0" y="0"/>
@@ -2935,7 +2935,7 @@
                 </a:path>
               </a:pathLst>
             </a:custGeom>
-            <a:ln w="13550" cap="flat">
+            <a:ln w="17246" cap="flat">
               <a:solidFill>
                 <a:srgbClr val="EBEBEB">
                   <a:alpha val="100000"/>
@@ -2959,15 +2959,15 @@
           </p:nvSpPr>
           <p:spPr>
             <a:xfrm>
-              <a:off x="7962042" y="2073503"/>
-              <a:ext cx="0" cy="3649639"/>
+              <a:off x="7952900" y="2209169"/>
+              <a:ext cx="0" cy="3404141"/>
             </a:xfrm>
             <a:custGeom>
               <a:avLst/>
               <a:pathLst>
-                <a:path w="0" h="3649639">
+                <a:path w="0" h="3404141">
                   <a:moveTo>
-                    <a:pt x="0" y="3649639"/>
+                    <a:pt x="0" y="3404141"/>
                   </a:moveTo>
                   <a:lnTo>
                     <a:pt x="0" y="0"/>
@@ -2978,7 +2978,7 @@
                 </a:path>
               </a:pathLst>
             </a:custGeom>
-            <a:ln w="13550" cap="flat">
+            <a:ln w="17246" cap="flat">
               <a:solidFill>
                 <a:srgbClr val="EBEBEB">
                   <a:alpha val="100000"/>
@@ -3002,471 +3002,471 @@
           </p:nvSpPr>
           <p:spPr>
             <a:xfrm>
-              <a:off x="1172049" y="2073503"/>
-              <a:ext cx="7090630" cy="3386481"/>
+              <a:off x="1264853" y="2209169"/>
+              <a:ext cx="6984170" cy="3158685"/>
             </a:xfrm>
             <a:custGeom>
               <a:avLst/>
               <a:pathLst>
-                <a:path w="7090630" h="3386481">
+                <a:path w="6984170" h="3158685">
                   <a:moveTo>
-                    <a:pt x="3432938" y="0"/>
+                    <a:pt x="3381395" y="0"/>
                   </a:moveTo>
                   <a:lnTo>
-                    <a:pt x="3437881" y="17363"/>
-                  </a:lnTo>
-                  <a:lnTo>
-                    <a:pt x="3509503" y="251928"/>
-                  </a:lnTo>
-                  <a:lnTo>
-                    <a:pt x="3581126" y="470621"/>
-                  </a:lnTo>
-                  <a:lnTo>
-                    <a:pt x="3652748" y="674516"/>
-                  </a:lnTo>
-                  <a:lnTo>
-                    <a:pt x="3724371" y="864613"/>
-                  </a:lnTo>
-                  <a:lnTo>
-                    <a:pt x="3795993" y="1041846"/>
-                  </a:lnTo>
-                  <a:lnTo>
-                    <a:pt x="3867616" y="1207087"/>
-                  </a:lnTo>
-                  <a:lnTo>
-                    <a:pt x="3939238" y="1361145"/>
-                  </a:lnTo>
-                  <a:lnTo>
-                    <a:pt x="4010861" y="1504779"/>
-                  </a:lnTo>
-                  <a:lnTo>
-                    <a:pt x="4082483" y="1638693"/>
-                  </a:lnTo>
-                  <a:lnTo>
-                    <a:pt x="4154106" y="1763546"/>
-                  </a:lnTo>
-                  <a:lnTo>
-                    <a:pt x="4225729" y="1879949"/>
-                  </a:lnTo>
-                  <a:lnTo>
-                    <a:pt x="4297351" y="1988476"/>
-                  </a:lnTo>
-                  <a:lnTo>
-                    <a:pt x="4368974" y="2089659"/>
-                  </a:lnTo>
-                  <a:lnTo>
-                    <a:pt x="4440596" y="2183996"/>
-                  </a:lnTo>
-                  <a:lnTo>
-                    <a:pt x="4512219" y="2271948"/>
-                  </a:lnTo>
-                  <a:lnTo>
-                    <a:pt x="4583841" y="2353949"/>
-                  </a:lnTo>
-                  <a:lnTo>
-                    <a:pt x="4655464" y="2430401"/>
-                  </a:lnTo>
-                  <a:lnTo>
-                    <a:pt x="4727086" y="2501679"/>
-                  </a:lnTo>
-                  <a:lnTo>
-                    <a:pt x="4798709" y="2568135"/>
-                  </a:lnTo>
-                  <a:lnTo>
-                    <a:pt x="4870331" y="2630093"/>
-                  </a:lnTo>
-                  <a:lnTo>
-                    <a:pt x="4941954" y="2650096"/>
-                  </a:lnTo>
-                  <a:lnTo>
-                    <a:pt x="5013576" y="2642947"/>
-                  </a:lnTo>
-                  <a:lnTo>
-                    <a:pt x="5085199" y="2635737"/>
-                  </a:lnTo>
-                  <a:lnTo>
-                    <a:pt x="5156821" y="2628465"/>
-                  </a:lnTo>
-                  <a:lnTo>
-                    <a:pt x="5228444" y="2621131"/>
-                  </a:lnTo>
-                  <a:lnTo>
-                    <a:pt x="5300066" y="2613734"/>
-                  </a:lnTo>
-                  <a:lnTo>
-                    <a:pt x="5371689" y="2606274"/>
-                  </a:lnTo>
-                  <a:lnTo>
-                    <a:pt x="5443311" y="2598750"/>
-                  </a:lnTo>
-                  <a:lnTo>
-                    <a:pt x="5514934" y="2591161"/>
-                  </a:lnTo>
-                  <a:lnTo>
-                    <a:pt x="5586557" y="2583507"/>
-                  </a:lnTo>
-                  <a:lnTo>
-                    <a:pt x="5658179" y="2575787"/>
-                  </a:lnTo>
-                  <a:lnTo>
-                    <a:pt x="5729802" y="2568001"/>
-                  </a:lnTo>
-                  <a:lnTo>
-                    <a:pt x="5801424" y="2560149"/>
-                  </a:lnTo>
-                  <a:lnTo>
-                    <a:pt x="5873047" y="2552229"/>
-                  </a:lnTo>
-                  <a:lnTo>
-                    <a:pt x="5944669" y="2544241"/>
-                  </a:lnTo>
-                  <a:lnTo>
-                    <a:pt x="6016292" y="2536185"/>
-                  </a:lnTo>
-                  <a:lnTo>
-                    <a:pt x="6087914" y="2528060"/>
-                  </a:lnTo>
-                  <a:lnTo>
-                    <a:pt x="6159537" y="2519865"/>
-                  </a:lnTo>
-                  <a:lnTo>
-                    <a:pt x="6231159" y="2511599"/>
-                  </a:lnTo>
-                  <a:lnTo>
-                    <a:pt x="6302782" y="2503263"/>
-                  </a:lnTo>
-                  <a:lnTo>
-                    <a:pt x="6374404" y="2494855"/>
-                  </a:lnTo>
-                  <a:lnTo>
-                    <a:pt x="6446027" y="2486376"/>
-                  </a:lnTo>
-                  <a:lnTo>
-                    <a:pt x="6517649" y="2477823"/>
-                  </a:lnTo>
-                  <a:lnTo>
-                    <a:pt x="6589272" y="2469197"/>
-                  </a:lnTo>
-                  <a:lnTo>
-                    <a:pt x="6660894" y="2460497"/>
-                  </a:lnTo>
-                  <a:lnTo>
-                    <a:pt x="6732517" y="2451723"/>
-                  </a:lnTo>
-                  <a:lnTo>
-                    <a:pt x="6804139" y="2442873"/>
-                  </a:lnTo>
-                  <a:lnTo>
-                    <a:pt x="6875762" y="2433948"/>
-                  </a:lnTo>
-                  <a:lnTo>
-                    <a:pt x="6947385" y="2424946"/>
-                  </a:lnTo>
-                  <a:lnTo>
-                    <a:pt x="7019007" y="2415867"/>
-                  </a:lnTo>
-                  <a:lnTo>
-                    <a:pt x="7090630" y="2406709"/>
-                  </a:lnTo>
-                  <a:lnTo>
-                    <a:pt x="7090630" y="3386481"/>
-                  </a:lnTo>
-                  <a:lnTo>
-                    <a:pt x="7019007" y="3379421"/>
-                  </a:lnTo>
-                  <a:lnTo>
-                    <a:pt x="6947385" y="3371849"/>
-                  </a:lnTo>
-                  <a:lnTo>
-                    <a:pt x="6875762" y="3363728"/>
-                  </a:lnTo>
-                  <a:lnTo>
-                    <a:pt x="6804139" y="3355017"/>
-                  </a:lnTo>
-                  <a:lnTo>
-                    <a:pt x="6732517" y="3345674"/>
-                  </a:lnTo>
-                  <a:lnTo>
-                    <a:pt x="6660894" y="3335652"/>
-                  </a:lnTo>
-                  <a:lnTo>
-                    <a:pt x="6589272" y="3324904"/>
-                  </a:lnTo>
-                  <a:lnTo>
-                    <a:pt x="6517649" y="3313375"/>
-                  </a:lnTo>
-                  <a:lnTo>
-                    <a:pt x="6446027" y="3301009"/>
-                  </a:lnTo>
-                  <a:lnTo>
-                    <a:pt x="6374404" y="3287746"/>
-                  </a:lnTo>
-                  <a:lnTo>
-                    <a:pt x="6302782" y="3273520"/>
-                  </a:lnTo>
-                  <a:lnTo>
-                    <a:pt x="6231159" y="3258262"/>
-                  </a:lnTo>
-                  <a:lnTo>
-                    <a:pt x="6159537" y="3241896"/>
-                  </a:lnTo>
-                  <a:lnTo>
-                    <a:pt x="6087914" y="3224343"/>
-                  </a:lnTo>
-                  <a:lnTo>
-                    <a:pt x="6016292" y="3205515"/>
-                  </a:lnTo>
-                  <a:lnTo>
-                    <a:pt x="5944669" y="3185321"/>
-                  </a:lnTo>
-                  <a:lnTo>
-                    <a:pt x="5873047" y="3163662"/>
-                  </a:lnTo>
-                  <a:lnTo>
-                    <a:pt x="5801424" y="3140430"/>
-                  </a:lnTo>
-                  <a:lnTo>
-                    <a:pt x="5729802" y="3115512"/>
-                  </a:lnTo>
-                  <a:lnTo>
-                    <a:pt x="5658179" y="3088785"/>
-                  </a:lnTo>
-                  <a:lnTo>
-                    <a:pt x="5586557" y="3060119"/>
-                  </a:lnTo>
-                  <a:lnTo>
-                    <a:pt x="5514934" y="3029372"/>
-                  </a:lnTo>
-                  <a:lnTo>
-                    <a:pt x="5443311" y="2996393"/>
-                  </a:lnTo>
-                  <a:lnTo>
-                    <a:pt x="5371689" y="2961021"/>
-                  </a:lnTo>
-                  <a:lnTo>
-                    <a:pt x="5300066" y="2923082"/>
-                  </a:lnTo>
-                  <a:lnTo>
-                    <a:pt x="5228444" y="2882389"/>
-                  </a:lnTo>
-                  <a:lnTo>
-                    <a:pt x="5156821" y="2838742"/>
-                  </a:lnTo>
-                  <a:lnTo>
-                    <a:pt x="5085199" y="2791928"/>
-                  </a:lnTo>
-                  <a:lnTo>
-                    <a:pt x="5013576" y="2741715"/>
-                  </a:lnTo>
-                  <a:lnTo>
-                    <a:pt x="4941954" y="2687859"/>
-                  </a:lnTo>
-                  <a:lnTo>
-                    <a:pt x="4870331" y="2657183"/>
-                  </a:lnTo>
-                  <a:lnTo>
-                    <a:pt x="4798709" y="2664211"/>
-                  </a:lnTo>
-                  <a:lnTo>
-                    <a:pt x="4727086" y="2671179"/>
-                  </a:lnTo>
-                  <a:lnTo>
-                    <a:pt x="4655464" y="2678087"/>
-                  </a:lnTo>
-                  <a:lnTo>
-                    <a:pt x="4583841" y="2684937"/>
-                  </a:lnTo>
-                  <a:lnTo>
-                    <a:pt x="4512219" y="2691729"/>
-                  </a:lnTo>
-                  <a:lnTo>
-                    <a:pt x="4440596" y="2698463"/>
-                  </a:lnTo>
-                  <a:lnTo>
-                    <a:pt x="4368974" y="2705139"/>
-                  </a:lnTo>
-                  <a:lnTo>
-                    <a:pt x="4297351" y="2711759"/>
-                  </a:lnTo>
-                  <a:lnTo>
-                    <a:pt x="4225729" y="2718323"/>
-                  </a:lnTo>
-                  <a:lnTo>
-                    <a:pt x="4154106" y="2724830"/>
-                  </a:lnTo>
-                  <a:lnTo>
-                    <a:pt x="4082483" y="2731283"/>
-                  </a:lnTo>
-                  <a:lnTo>
-                    <a:pt x="4010861" y="2737680"/>
-                  </a:lnTo>
-                  <a:lnTo>
-                    <a:pt x="3939238" y="2744023"/>
-                  </a:lnTo>
-                  <a:lnTo>
-                    <a:pt x="3867616" y="2750313"/>
-                  </a:lnTo>
-                  <a:lnTo>
-                    <a:pt x="3795993" y="2756548"/>
-                  </a:lnTo>
-                  <a:lnTo>
-                    <a:pt x="3724371" y="2762731"/>
-                  </a:lnTo>
-                  <a:lnTo>
-                    <a:pt x="3652748" y="2768861"/>
-                  </a:lnTo>
-                  <a:lnTo>
-                    <a:pt x="3581126" y="2774939"/>
-                  </a:lnTo>
-                  <a:lnTo>
-                    <a:pt x="3509503" y="2780966"/>
-                  </a:lnTo>
-                  <a:lnTo>
-                    <a:pt x="3437881" y="2786941"/>
-                  </a:lnTo>
-                  <a:lnTo>
-                    <a:pt x="3366258" y="2792865"/>
-                  </a:lnTo>
-                  <a:lnTo>
-                    <a:pt x="3294636" y="2798739"/>
-                  </a:lnTo>
-                  <a:lnTo>
-                    <a:pt x="3223013" y="2804563"/>
-                  </a:lnTo>
-                  <a:lnTo>
-                    <a:pt x="3151391" y="2810338"/>
-                  </a:lnTo>
-                  <a:lnTo>
-                    <a:pt x="3079768" y="2816063"/>
-                  </a:lnTo>
-                  <a:lnTo>
-                    <a:pt x="3008146" y="2821740"/>
-                  </a:lnTo>
-                  <a:lnTo>
-                    <a:pt x="2936523" y="2827368"/>
-                  </a:lnTo>
-                  <a:lnTo>
-                    <a:pt x="2864901" y="2832949"/>
-                  </a:lnTo>
-                  <a:lnTo>
-                    <a:pt x="2793278" y="2838482"/>
-                  </a:lnTo>
-                  <a:lnTo>
-                    <a:pt x="2721655" y="2843968"/>
-                  </a:lnTo>
-                  <a:lnTo>
-                    <a:pt x="2650033" y="2849408"/>
-                  </a:lnTo>
-                  <a:lnTo>
-                    <a:pt x="2578410" y="2854801"/>
-                  </a:lnTo>
-                  <a:lnTo>
-                    <a:pt x="2506788" y="2860148"/>
-                  </a:lnTo>
-                  <a:lnTo>
-                    <a:pt x="2435165" y="2865450"/>
-                  </a:lnTo>
-                  <a:lnTo>
-                    <a:pt x="2363543" y="2870707"/>
-                  </a:lnTo>
-                  <a:lnTo>
-                    <a:pt x="2291920" y="2875919"/>
-                  </a:lnTo>
-                  <a:lnTo>
-                    <a:pt x="2220298" y="2881087"/>
-                  </a:lnTo>
-                  <a:lnTo>
-                    <a:pt x="2148675" y="2886211"/>
-                  </a:lnTo>
-                  <a:lnTo>
-                    <a:pt x="2077053" y="2891291"/>
-                  </a:lnTo>
-                  <a:lnTo>
-                    <a:pt x="2005430" y="2896328"/>
-                  </a:lnTo>
-                  <a:lnTo>
-                    <a:pt x="1933808" y="2901323"/>
-                  </a:lnTo>
-                  <a:lnTo>
-                    <a:pt x="1862185" y="2906274"/>
-                  </a:lnTo>
-                  <a:lnTo>
-                    <a:pt x="1790563" y="2911184"/>
-                  </a:lnTo>
-                  <a:lnTo>
-                    <a:pt x="1718940" y="2916052"/>
-                  </a:lnTo>
-                  <a:lnTo>
-                    <a:pt x="1647318" y="2920879"/>
-                  </a:lnTo>
-                  <a:lnTo>
-                    <a:pt x="1575695" y="2925664"/>
-                  </a:lnTo>
-                  <a:lnTo>
-                    <a:pt x="1504073" y="2930409"/>
-                  </a:lnTo>
-                  <a:lnTo>
-                    <a:pt x="1432450" y="2935114"/>
-                  </a:lnTo>
-                  <a:lnTo>
-                    <a:pt x="1360827" y="2939778"/>
-                  </a:lnTo>
-                  <a:lnTo>
-                    <a:pt x="1289205" y="2944403"/>
-                  </a:lnTo>
-                  <a:lnTo>
-                    <a:pt x="1217582" y="2948989"/>
-                  </a:lnTo>
-                  <a:lnTo>
-                    <a:pt x="1145960" y="2953535"/>
-                  </a:lnTo>
-                  <a:lnTo>
-                    <a:pt x="1074337" y="2958043"/>
-                  </a:lnTo>
-                  <a:lnTo>
-                    <a:pt x="1002715" y="2962513"/>
-                  </a:lnTo>
-                  <a:lnTo>
-                    <a:pt x="931092" y="2966944"/>
-                  </a:lnTo>
-                  <a:lnTo>
-                    <a:pt x="859470" y="2971338"/>
-                  </a:lnTo>
-                  <a:lnTo>
-                    <a:pt x="787847" y="2975695"/>
-                  </a:lnTo>
-                  <a:lnTo>
-                    <a:pt x="716225" y="2980014"/>
-                  </a:lnTo>
-                  <a:lnTo>
-                    <a:pt x="644602" y="2984297"/>
-                  </a:lnTo>
-                  <a:lnTo>
-                    <a:pt x="572980" y="2988544"/>
-                  </a:lnTo>
-                  <a:lnTo>
-                    <a:pt x="501357" y="2992754"/>
-                  </a:lnTo>
-                  <a:lnTo>
-                    <a:pt x="429735" y="2996928"/>
-                  </a:lnTo>
-                  <a:lnTo>
-                    <a:pt x="358112" y="3001067"/>
-                  </a:lnTo>
-                  <a:lnTo>
-                    <a:pt x="286490" y="3005171"/>
-                  </a:lnTo>
-                  <a:lnTo>
-                    <a:pt x="214867" y="3009240"/>
-                  </a:lnTo>
-                  <a:lnTo>
-                    <a:pt x="143245" y="3013274"/>
-                  </a:lnTo>
-                  <a:lnTo>
-                    <a:pt x="71622" y="3017274"/>
-                  </a:lnTo>
-                  <a:lnTo>
-                    <a:pt x="0" y="3021240"/>
+                    <a:pt x="3386264" y="16195"/>
+                  </a:lnTo>
+                  <a:lnTo>
+                    <a:pt x="3456811" y="234982"/>
+                  </a:lnTo>
+                  <a:lnTo>
+                    <a:pt x="3527358" y="438964"/>
+                  </a:lnTo>
+                  <a:lnTo>
+                    <a:pt x="3597905" y="629144"/>
+                  </a:lnTo>
+                  <a:lnTo>
+                    <a:pt x="3668452" y="806453"/>
+                  </a:lnTo>
+                  <a:lnTo>
+                    <a:pt x="3739000" y="971765"/>
+                  </a:lnTo>
+                  <a:lnTo>
+                    <a:pt x="3809547" y="1125890"/>
+                  </a:lnTo>
+                  <a:lnTo>
+                    <a:pt x="3880094" y="1269586"/>
+                  </a:lnTo>
+                  <a:lnTo>
+                    <a:pt x="3950641" y="1403558"/>
+                  </a:lnTo>
+                  <a:lnTo>
+                    <a:pt x="4021188" y="1528464"/>
+                  </a:lnTo>
+                  <a:lnTo>
+                    <a:pt x="4091736" y="1644918"/>
+                  </a:lnTo>
+                  <a:lnTo>
+                    <a:pt x="4162283" y="1753492"/>
+                  </a:lnTo>
+                  <a:lnTo>
+                    <a:pt x="4232830" y="1854719"/>
+                  </a:lnTo>
+                  <a:lnTo>
+                    <a:pt x="4303377" y="1949096"/>
+                  </a:lnTo>
+                  <a:lnTo>
+                    <a:pt x="4373924" y="2037086"/>
+                  </a:lnTo>
+                  <a:lnTo>
+                    <a:pt x="4444471" y="2119122"/>
+                  </a:lnTo>
+                  <a:lnTo>
+                    <a:pt x="4515019" y="2195607"/>
+                  </a:lnTo>
+                  <a:lnTo>
+                    <a:pt x="4585566" y="2266917"/>
+                  </a:lnTo>
+                  <a:lnTo>
+                    <a:pt x="4656113" y="2333401"/>
+                  </a:lnTo>
+                  <a:lnTo>
+                    <a:pt x="4726660" y="2395386"/>
+                  </a:lnTo>
+                  <a:lnTo>
+                    <a:pt x="4797207" y="2453176"/>
+                  </a:lnTo>
+                  <a:lnTo>
+                    <a:pt x="4867754" y="2471833"/>
+                  </a:lnTo>
+                  <a:lnTo>
+                    <a:pt x="4938302" y="2465166"/>
+                  </a:lnTo>
+                  <a:lnTo>
+                    <a:pt x="5008849" y="2458441"/>
+                  </a:lnTo>
+                  <a:lnTo>
+                    <a:pt x="5079396" y="2451658"/>
+                  </a:lnTo>
+                  <a:lnTo>
+                    <a:pt x="5149943" y="2444817"/>
+                  </a:lnTo>
+                  <a:lnTo>
+                    <a:pt x="5220490" y="2437918"/>
+                  </a:lnTo>
+                  <a:lnTo>
+                    <a:pt x="5291037" y="2430960"/>
+                  </a:lnTo>
+                  <a:lnTo>
+                    <a:pt x="5361585" y="2423941"/>
+                  </a:lnTo>
+                  <a:lnTo>
+                    <a:pt x="5432132" y="2416863"/>
+                  </a:lnTo>
+                  <a:lnTo>
+                    <a:pt x="5502679" y="2409724"/>
+                  </a:lnTo>
+                  <a:lnTo>
+                    <a:pt x="5573226" y="2402523"/>
+                  </a:lnTo>
+                  <a:lnTo>
+                    <a:pt x="5643773" y="2395261"/>
+                  </a:lnTo>
+                  <a:lnTo>
+                    <a:pt x="5714320" y="2387937"/>
+                  </a:lnTo>
+                  <a:lnTo>
+                    <a:pt x="5784868" y="2380550"/>
+                  </a:lnTo>
+                  <a:lnTo>
+                    <a:pt x="5855415" y="2373099"/>
+                  </a:lnTo>
+                  <a:lnTo>
+                    <a:pt x="5925962" y="2365585"/>
+                  </a:lnTo>
+                  <a:lnTo>
+                    <a:pt x="5996509" y="2358006"/>
+                  </a:lnTo>
+                  <a:lnTo>
+                    <a:pt x="6067056" y="2350362"/>
+                  </a:lnTo>
+                  <a:lnTo>
+                    <a:pt x="6137604" y="2342653"/>
+                  </a:lnTo>
+                  <a:lnTo>
+                    <a:pt x="6208151" y="2334878"/>
+                  </a:lnTo>
+                  <a:lnTo>
+                    <a:pt x="6278698" y="2327036"/>
+                  </a:lnTo>
+                  <a:lnTo>
+                    <a:pt x="6349245" y="2319126"/>
+                  </a:lnTo>
+                  <a:lnTo>
+                    <a:pt x="6419792" y="2311149"/>
+                  </a:lnTo>
+                  <a:lnTo>
+                    <a:pt x="6490339" y="2303103"/>
+                  </a:lnTo>
+                  <a:lnTo>
+                    <a:pt x="6560887" y="2294989"/>
+                  </a:lnTo>
+                  <a:lnTo>
+                    <a:pt x="6631434" y="2286805"/>
+                  </a:lnTo>
+                  <a:lnTo>
+                    <a:pt x="6701981" y="2278550"/>
+                  </a:lnTo>
+                  <a:lnTo>
+                    <a:pt x="6772528" y="2270225"/>
+                  </a:lnTo>
+                  <a:lnTo>
+                    <a:pt x="6843075" y="2261829"/>
+                  </a:lnTo>
+                  <a:lnTo>
+                    <a:pt x="6913622" y="2253360"/>
+                  </a:lnTo>
+                  <a:lnTo>
+                    <a:pt x="6984170" y="2244819"/>
+                  </a:lnTo>
+                  <a:lnTo>
+                    <a:pt x="6984170" y="3158685"/>
+                  </a:lnTo>
+                  <a:lnTo>
+                    <a:pt x="6913622" y="3152100"/>
+                  </a:lnTo>
+                  <a:lnTo>
+                    <a:pt x="6843075" y="3145037"/>
+                  </a:lnTo>
+                  <a:lnTo>
+                    <a:pt x="6772528" y="3137462"/>
+                  </a:lnTo>
+                  <a:lnTo>
+                    <a:pt x="6701981" y="3129337"/>
+                  </a:lnTo>
+                  <a:lnTo>
+                    <a:pt x="6631434" y="3120622"/>
+                  </a:lnTo>
+                  <a:lnTo>
+                    <a:pt x="6560887" y="3111275"/>
+                  </a:lnTo>
+                  <a:lnTo>
+                    <a:pt x="6490339" y="3101250"/>
+                  </a:lnTo>
+                  <a:lnTo>
+                    <a:pt x="6419792" y="3090496"/>
+                  </a:lnTo>
+                  <a:lnTo>
+                    <a:pt x="6349245" y="3078962"/>
+                  </a:lnTo>
+                  <a:lnTo>
+                    <a:pt x="6278698" y="3066591"/>
+                  </a:lnTo>
+                  <a:lnTo>
+                    <a:pt x="6208151" y="3053323"/>
+                  </a:lnTo>
+                  <a:lnTo>
+                    <a:pt x="6137604" y="3039091"/>
+                  </a:lnTo>
+                  <a:lnTo>
+                    <a:pt x="6067056" y="3023826"/>
+                  </a:lnTo>
+                  <a:lnTo>
+                    <a:pt x="5996509" y="3007453"/>
+                  </a:lnTo>
+                  <a:lnTo>
+                    <a:pt x="5925962" y="2989892"/>
+                  </a:lnTo>
+                  <a:lnTo>
+                    <a:pt x="5855415" y="2971056"/>
+                  </a:lnTo>
+                  <a:lnTo>
+                    <a:pt x="5784868" y="2950854"/>
+                  </a:lnTo>
+                  <a:lnTo>
+                    <a:pt x="5714320" y="2929185"/>
+                  </a:lnTo>
+                  <a:lnTo>
+                    <a:pt x="5643773" y="2905943"/>
+                  </a:lnTo>
+                  <a:lnTo>
+                    <a:pt x="5573226" y="2881014"/>
+                  </a:lnTo>
+                  <a:lnTo>
+                    <a:pt x="5502679" y="2854276"/>
+                  </a:lnTo>
+                  <a:lnTo>
+                    <a:pt x="5432132" y="2825597"/>
+                  </a:lnTo>
+                  <a:lnTo>
+                    <a:pt x="5361585" y="2794837"/>
+                  </a:lnTo>
+                  <a:lnTo>
+                    <a:pt x="5291037" y="2761844"/>
+                  </a:lnTo>
+                  <a:lnTo>
+                    <a:pt x="5220490" y="2726457"/>
+                  </a:lnTo>
+                  <a:lnTo>
+                    <a:pt x="5149943" y="2688501"/>
+                  </a:lnTo>
+                  <a:lnTo>
+                    <a:pt x="5079396" y="2647790"/>
+                  </a:lnTo>
+                  <a:lnTo>
+                    <a:pt x="5008849" y="2604125"/>
+                  </a:lnTo>
+                  <a:lnTo>
+                    <a:pt x="4938302" y="2557290"/>
+                  </a:lnTo>
+                  <a:lnTo>
+                    <a:pt x="4867754" y="2507056"/>
+                  </a:lnTo>
+                  <a:lnTo>
+                    <a:pt x="4797207" y="2478444"/>
+                  </a:lnTo>
+                  <a:lnTo>
+                    <a:pt x="4726660" y="2484999"/>
+                  </a:lnTo>
+                  <a:lnTo>
+                    <a:pt x="4656113" y="2491498"/>
+                  </a:lnTo>
+                  <a:lnTo>
+                    <a:pt x="4585566" y="2497942"/>
+                  </a:lnTo>
+                  <a:lnTo>
+                    <a:pt x="4515019" y="2504331"/>
+                  </a:lnTo>
+                  <a:lnTo>
+                    <a:pt x="4444471" y="2510666"/>
+                  </a:lnTo>
+                  <a:lnTo>
+                    <a:pt x="4373924" y="2516947"/>
+                  </a:lnTo>
+                  <a:lnTo>
+                    <a:pt x="4303377" y="2523174"/>
+                  </a:lnTo>
+                  <a:lnTo>
+                    <a:pt x="4232830" y="2529349"/>
+                  </a:lnTo>
+                  <a:lnTo>
+                    <a:pt x="4162283" y="2535471"/>
+                  </a:lnTo>
+                  <a:lnTo>
+                    <a:pt x="4091736" y="2541541"/>
+                  </a:lnTo>
+                  <a:lnTo>
+                    <a:pt x="4021188" y="2547559"/>
+                  </a:lnTo>
+                  <a:lnTo>
+                    <a:pt x="3950641" y="2553526"/>
+                  </a:lnTo>
+                  <a:lnTo>
+                    <a:pt x="3880094" y="2559443"/>
+                  </a:lnTo>
+                  <a:lnTo>
+                    <a:pt x="3809547" y="2565309"/>
+                  </a:lnTo>
+                  <a:lnTo>
+                    <a:pt x="3739000" y="2571125"/>
+                  </a:lnTo>
+                  <a:lnTo>
+                    <a:pt x="3668452" y="2576892"/>
+                  </a:lnTo>
+                  <a:lnTo>
+                    <a:pt x="3597905" y="2582610"/>
+                  </a:lnTo>
+                  <a:lnTo>
+                    <a:pt x="3527358" y="2588279"/>
+                  </a:lnTo>
+                  <a:lnTo>
+                    <a:pt x="3456811" y="2593900"/>
+                  </a:lnTo>
+                  <a:lnTo>
+                    <a:pt x="3386264" y="2599473"/>
+                  </a:lnTo>
+                  <a:lnTo>
+                    <a:pt x="3315717" y="2604999"/>
+                  </a:lnTo>
+                  <a:lnTo>
+                    <a:pt x="3245169" y="2610478"/>
+                  </a:lnTo>
+                  <a:lnTo>
+                    <a:pt x="3174622" y="2615910"/>
+                  </a:lnTo>
+                  <a:lnTo>
+                    <a:pt x="3104075" y="2621296"/>
+                  </a:lnTo>
+                  <a:lnTo>
+                    <a:pt x="3033528" y="2626637"/>
+                  </a:lnTo>
+                  <a:lnTo>
+                    <a:pt x="2962981" y="2631932"/>
+                  </a:lnTo>
+                  <a:lnTo>
+                    <a:pt x="2892434" y="2637182"/>
+                  </a:lnTo>
+                  <a:lnTo>
+                    <a:pt x="2821886" y="2642387"/>
+                  </a:lnTo>
+                  <a:lnTo>
+                    <a:pt x="2751339" y="2647548"/>
+                  </a:lnTo>
+                  <a:lnTo>
+                    <a:pt x="2680792" y="2652665"/>
+                  </a:lnTo>
+                  <a:lnTo>
+                    <a:pt x="2610245" y="2657738"/>
+                  </a:lnTo>
+                  <a:lnTo>
+                    <a:pt x="2539698" y="2662769"/>
+                  </a:lnTo>
+                  <a:lnTo>
+                    <a:pt x="2469151" y="2667757"/>
+                  </a:lnTo>
+                  <a:lnTo>
+                    <a:pt x="2398603" y="2672702"/>
+                  </a:lnTo>
+                  <a:lnTo>
+                    <a:pt x="2328056" y="2677605"/>
+                  </a:lnTo>
+                  <a:lnTo>
+                    <a:pt x="2257509" y="2682467"/>
+                  </a:lnTo>
+                  <a:lnTo>
+                    <a:pt x="2186962" y="2687287"/>
+                  </a:lnTo>
+                  <a:lnTo>
+                    <a:pt x="2116415" y="2692066"/>
+                  </a:lnTo>
+                  <a:lnTo>
+                    <a:pt x="2045868" y="2696805"/>
+                  </a:lnTo>
+                  <a:lnTo>
+                    <a:pt x="1975320" y="2701503"/>
+                  </a:lnTo>
+                  <a:lnTo>
+                    <a:pt x="1904773" y="2706161"/>
+                  </a:lnTo>
+                  <a:lnTo>
+                    <a:pt x="1834226" y="2710780"/>
+                  </a:lnTo>
+                  <a:lnTo>
+                    <a:pt x="1763679" y="2715359"/>
+                  </a:lnTo>
+                  <a:lnTo>
+                    <a:pt x="1693132" y="2719900"/>
+                  </a:lnTo>
+                  <a:lnTo>
+                    <a:pt x="1622584" y="2724402"/>
+                  </a:lnTo>
+                  <a:lnTo>
+                    <a:pt x="1552037" y="2728866"/>
+                  </a:lnTo>
+                  <a:lnTo>
+                    <a:pt x="1481490" y="2733291"/>
+                  </a:lnTo>
+                  <a:lnTo>
+                    <a:pt x="1410943" y="2737679"/>
+                  </a:lnTo>
+                  <a:lnTo>
+                    <a:pt x="1340396" y="2742030"/>
+                  </a:lnTo>
+                  <a:lnTo>
+                    <a:pt x="1269849" y="2746344"/>
+                  </a:lnTo>
+                  <a:lnTo>
+                    <a:pt x="1199301" y="2750621"/>
+                  </a:lnTo>
+                  <a:lnTo>
+                    <a:pt x="1128754" y="2754862"/>
+                  </a:lnTo>
+                  <a:lnTo>
+                    <a:pt x="1058207" y="2759067"/>
+                  </a:lnTo>
+                  <a:lnTo>
+                    <a:pt x="987660" y="2763236"/>
+                  </a:lnTo>
+                  <a:lnTo>
+                    <a:pt x="917113" y="2767369"/>
+                  </a:lnTo>
+                  <a:lnTo>
+                    <a:pt x="846566" y="2771467"/>
+                  </a:lnTo>
+                  <a:lnTo>
+                    <a:pt x="776018" y="2775531"/>
+                  </a:lnTo>
+                  <a:lnTo>
+                    <a:pt x="705471" y="2779560"/>
+                  </a:lnTo>
+                  <a:lnTo>
+                    <a:pt x="634924" y="2783555"/>
+                  </a:lnTo>
+                  <a:lnTo>
+                    <a:pt x="564377" y="2787515"/>
+                  </a:lnTo>
+                  <a:lnTo>
+                    <a:pt x="493830" y="2791442"/>
+                  </a:lnTo>
+                  <a:lnTo>
+                    <a:pt x="423283" y="2795336"/>
+                  </a:lnTo>
+                  <a:lnTo>
+                    <a:pt x="352735" y="2799197"/>
+                  </a:lnTo>
+                  <a:lnTo>
+                    <a:pt x="282188" y="2803024"/>
+                  </a:lnTo>
+                  <a:lnTo>
+                    <a:pt x="211641" y="2806820"/>
+                  </a:lnTo>
+                  <a:lnTo>
+                    <a:pt x="141094" y="2810583"/>
+                  </a:lnTo>
+                  <a:lnTo>
+                    <a:pt x="70547" y="2814313"/>
+                  </a:lnTo>
+                  <a:lnTo>
+                    <a:pt x="0" y="2818013"/>
                   </a:lnTo>
                   <a:lnTo>
                     <a:pt x="0" y="0"/>
@@ -3495,171 +3495,171 @@
           </p:nvSpPr>
           <p:spPr>
             <a:xfrm>
-              <a:off x="4604987" y="2073503"/>
-              <a:ext cx="3657691" cy="2650096"/>
+              <a:off x="4646249" y="2209169"/>
+              <a:ext cx="3602774" cy="2471833"/>
             </a:xfrm>
             <a:custGeom>
               <a:avLst/>
               <a:pathLst>
-                <a:path w="3657691" h="2650096">
+                <a:path w="3602774" h="2471833">
                   <a:moveTo>
                     <a:pt x="0" y="0"/>
                   </a:moveTo>
                   <a:lnTo>
-                    <a:pt x="4942" y="17363"/>
-                  </a:lnTo>
-                  <a:lnTo>
-                    <a:pt x="76565" y="251928"/>
-                  </a:lnTo>
-                  <a:lnTo>
-                    <a:pt x="148187" y="470621"/>
-                  </a:lnTo>
-                  <a:lnTo>
-                    <a:pt x="219810" y="674516"/>
-                  </a:lnTo>
-                  <a:lnTo>
-                    <a:pt x="291433" y="864613"/>
-                  </a:lnTo>
-                  <a:lnTo>
-                    <a:pt x="363055" y="1041846"/>
-                  </a:lnTo>
-                  <a:lnTo>
-                    <a:pt x="434678" y="1207087"/>
-                  </a:lnTo>
-                  <a:lnTo>
-                    <a:pt x="506300" y="1361145"/>
-                  </a:lnTo>
-                  <a:lnTo>
-                    <a:pt x="577923" y="1504779"/>
-                  </a:lnTo>
-                  <a:lnTo>
-                    <a:pt x="649545" y="1638693"/>
-                  </a:lnTo>
-                  <a:lnTo>
-                    <a:pt x="721168" y="1763546"/>
-                  </a:lnTo>
-                  <a:lnTo>
-                    <a:pt x="792790" y="1879949"/>
-                  </a:lnTo>
-                  <a:lnTo>
-                    <a:pt x="864413" y="1988476"/>
-                  </a:lnTo>
-                  <a:lnTo>
-                    <a:pt x="936035" y="2089659"/>
-                  </a:lnTo>
-                  <a:lnTo>
-                    <a:pt x="1007658" y="2183996"/>
-                  </a:lnTo>
-                  <a:lnTo>
-                    <a:pt x="1079280" y="2271948"/>
-                  </a:lnTo>
-                  <a:lnTo>
-                    <a:pt x="1150903" y="2353949"/>
-                  </a:lnTo>
-                  <a:lnTo>
-                    <a:pt x="1222525" y="2430401"/>
-                  </a:lnTo>
-                  <a:lnTo>
-                    <a:pt x="1294148" y="2501679"/>
-                  </a:lnTo>
-                  <a:lnTo>
-                    <a:pt x="1365770" y="2568135"/>
-                  </a:lnTo>
-                  <a:lnTo>
-                    <a:pt x="1437393" y="2630093"/>
-                  </a:lnTo>
-                  <a:lnTo>
-                    <a:pt x="1509015" y="2650096"/>
-                  </a:lnTo>
-                  <a:lnTo>
-                    <a:pt x="1580638" y="2642947"/>
-                  </a:lnTo>
-                  <a:lnTo>
-                    <a:pt x="1652261" y="2635737"/>
-                  </a:lnTo>
-                  <a:lnTo>
-                    <a:pt x="1723883" y="2628465"/>
-                  </a:lnTo>
-                  <a:lnTo>
-                    <a:pt x="1795506" y="2621131"/>
-                  </a:lnTo>
-                  <a:lnTo>
-                    <a:pt x="1867128" y="2613734"/>
-                  </a:lnTo>
-                  <a:lnTo>
-                    <a:pt x="1938751" y="2606274"/>
-                  </a:lnTo>
-                  <a:lnTo>
-                    <a:pt x="2010373" y="2598750"/>
-                  </a:lnTo>
-                  <a:lnTo>
-                    <a:pt x="2081996" y="2591161"/>
-                  </a:lnTo>
-                  <a:lnTo>
-                    <a:pt x="2153618" y="2583507"/>
-                  </a:lnTo>
-                  <a:lnTo>
-                    <a:pt x="2225241" y="2575787"/>
-                  </a:lnTo>
-                  <a:lnTo>
-                    <a:pt x="2296863" y="2568001"/>
-                  </a:lnTo>
-                  <a:lnTo>
-                    <a:pt x="2368486" y="2560149"/>
-                  </a:lnTo>
-                  <a:lnTo>
-                    <a:pt x="2440108" y="2552229"/>
-                  </a:lnTo>
-                  <a:lnTo>
-                    <a:pt x="2511731" y="2544241"/>
-                  </a:lnTo>
-                  <a:lnTo>
-                    <a:pt x="2583353" y="2536185"/>
-                  </a:lnTo>
-                  <a:lnTo>
-                    <a:pt x="2654976" y="2528060"/>
-                  </a:lnTo>
-                  <a:lnTo>
-                    <a:pt x="2726598" y="2519865"/>
-                  </a:lnTo>
-                  <a:lnTo>
-                    <a:pt x="2798221" y="2511599"/>
-                  </a:lnTo>
-                  <a:lnTo>
-                    <a:pt x="2869843" y="2503263"/>
-                  </a:lnTo>
-                  <a:lnTo>
-                    <a:pt x="2941466" y="2494855"/>
-                  </a:lnTo>
-                  <a:lnTo>
-                    <a:pt x="3013088" y="2486376"/>
-                  </a:lnTo>
-                  <a:lnTo>
-                    <a:pt x="3084711" y="2477823"/>
-                  </a:lnTo>
-                  <a:lnTo>
-                    <a:pt x="3156334" y="2469197"/>
-                  </a:lnTo>
-                  <a:lnTo>
-                    <a:pt x="3227956" y="2460497"/>
-                  </a:lnTo>
-                  <a:lnTo>
-                    <a:pt x="3299579" y="2451723"/>
-                  </a:lnTo>
-                  <a:lnTo>
-                    <a:pt x="3371201" y="2442873"/>
-                  </a:lnTo>
-                  <a:lnTo>
-                    <a:pt x="3442824" y="2433948"/>
-                  </a:lnTo>
-                  <a:lnTo>
-                    <a:pt x="3514446" y="2424946"/>
-                  </a:lnTo>
-                  <a:lnTo>
-                    <a:pt x="3586069" y="2415867"/>
-                  </a:lnTo>
-                  <a:lnTo>
-                    <a:pt x="3657691" y="2406709"/>
+                    <a:pt x="4868" y="16195"/>
+                  </a:lnTo>
+                  <a:lnTo>
+                    <a:pt x="75415" y="234982"/>
+                  </a:lnTo>
+                  <a:lnTo>
+                    <a:pt x="145963" y="438964"/>
+                  </a:lnTo>
+                  <a:lnTo>
+                    <a:pt x="216510" y="629144"/>
+                  </a:lnTo>
+                  <a:lnTo>
+                    <a:pt x="287057" y="806453"/>
+                  </a:lnTo>
+                  <a:lnTo>
+                    <a:pt x="357604" y="971765"/>
+                  </a:lnTo>
+                  <a:lnTo>
+                    <a:pt x="428151" y="1125890"/>
+                  </a:lnTo>
+                  <a:lnTo>
+                    <a:pt x="498698" y="1269586"/>
+                  </a:lnTo>
+                  <a:lnTo>
+                    <a:pt x="569246" y="1403558"/>
+                  </a:lnTo>
+                  <a:lnTo>
+                    <a:pt x="639793" y="1528464"/>
+                  </a:lnTo>
+                  <a:lnTo>
+                    <a:pt x="710340" y="1644918"/>
+                  </a:lnTo>
+                  <a:lnTo>
+                    <a:pt x="780887" y="1753492"/>
+                  </a:lnTo>
+                  <a:lnTo>
+                    <a:pt x="851434" y="1854719"/>
+                  </a:lnTo>
+                  <a:lnTo>
+                    <a:pt x="921981" y="1949096"/>
+                  </a:lnTo>
+                  <a:lnTo>
+                    <a:pt x="992529" y="2037086"/>
+                  </a:lnTo>
+                  <a:lnTo>
+                    <a:pt x="1063076" y="2119122"/>
+                  </a:lnTo>
+                  <a:lnTo>
+                    <a:pt x="1133623" y="2195607"/>
+                  </a:lnTo>
+                  <a:lnTo>
+                    <a:pt x="1204170" y="2266917"/>
+                  </a:lnTo>
+                  <a:lnTo>
+                    <a:pt x="1274717" y="2333401"/>
+                  </a:lnTo>
+                  <a:lnTo>
+                    <a:pt x="1345264" y="2395386"/>
+                  </a:lnTo>
+                  <a:lnTo>
+                    <a:pt x="1415812" y="2453176"/>
+                  </a:lnTo>
+                  <a:lnTo>
+                    <a:pt x="1486359" y="2471833"/>
+                  </a:lnTo>
+                  <a:lnTo>
+                    <a:pt x="1556906" y="2465166"/>
+                  </a:lnTo>
+                  <a:lnTo>
+                    <a:pt x="1627453" y="2458441"/>
+                  </a:lnTo>
+                  <a:lnTo>
+                    <a:pt x="1698000" y="2451658"/>
+                  </a:lnTo>
+                  <a:lnTo>
+                    <a:pt x="1768547" y="2444817"/>
+                  </a:lnTo>
+                  <a:lnTo>
+                    <a:pt x="1839095" y="2437918"/>
+                  </a:lnTo>
+                  <a:lnTo>
+                    <a:pt x="1909642" y="2430960"/>
+                  </a:lnTo>
+                  <a:lnTo>
+                    <a:pt x="1980189" y="2423941"/>
+                  </a:lnTo>
+                  <a:lnTo>
+                    <a:pt x="2050736" y="2416863"/>
+                  </a:lnTo>
+                  <a:lnTo>
+                    <a:pt x="2121283" y="2409724"/>
+                  </a:lnTo>
+                  <a:lnTo>
+                    <a:pt x="2191831" y="2402523"/>
+                  </a:lnTo>
+                  <a:lnTo>
+                    <a:pt x="2262378" y="2395261"/>
+                  </a:lnTo>
+                  <a:lnTo>
+                    <a:pt x="2332925" y="2387937"/>
+                  </a:lnTo>
+                  <a:lnTo>
+                    <a:pt x="2403472" y="2380550"/>
+                  </a:lnTo>
+                  <a:lnTo>
+                    <a:pt x="2474019" y="2373099"/>
+                  </a:lnTo>
+                  <a:lnTo>
+                    <a:pt x="2544566" y="2365585"/>
+                  </a:lnTo>
+                  <a:lnTo>
+                    <a:pt x="2615114" y="2358006"/>
+                  </a:lnTo>
+                  <a:lnTo>
+                    <a:pt x="2685661" y="2350362"/>
+                  </a:lnTo>
+                  <a:lnTo>
+                    <a:pt x="2756208" y="2342653"/>
+                  </a:lnTo>
+                  <a:lnTo>
+                    <a:pt x="2826755" y="2334878"/>
+                  </a:lnTo>
+                  <a:lnTo>
+                    <a:pt x="2897302" y="2327036"/>
+                  </a:lnTo>
+                  <a:lnTo>
+                    <a:pt x="2967849" y="2319126"/>
+                  </a:lnTo>
+                  <a:lnTo>
+                    <a:pt x="3038397" y="2311149"/>
+                  </a:lnTo>
+                  <a:lnTo>
+                    <a:pt x="3108944" y="2303103"/>
+                  </a:lnTo>
+                  <a:lnTo>
+                    <a:pt x="3179491" y="2294989"/>
+                  </a:lnTo>
+                  <a:lnTo>
+                    <a:pt x="3250038" y="2286805"/>
+                  </a:lnTo>
+                  <a:lnTo>
+                    <a:pt x="3320585" y="2278550"/>
+                  </a:lnTo>
+                  <a:lnTo>
+                    <a:pt x="3391132" y="2270225"/>
+                  </a:lnTo>
+                  <a:lnTo>
+                    <a:pt x="3461680" y="2261829"/>
+                  </a:lnTo>
+                  <a:lnTo>
+                    <a:pt x="3532227" y="2253360"/>
+                  </a:lnTo>
+                  <a:lnTo>
+                    <a:pt x="3602774" y="2244819"/>
                   </a:lnTo>
                 </a:path>
               </a:pathLst>
@@ -3679,312 +3679,312 @@
           </p:nvSpPr>
           <p:spPr>
             <a:xfrm>
-              <a:off x="1172049" y="4730686"/>
-              <a:ext cx="7090630" cy="729297"/>
+              <a:off x="1264853" y="4687614"/>
+              <a:ext cx="6984170" cy="680240"/>
             </a:xfrm>
             <a:custGeom>
               <a:avLst/>
               <a:pathLst>
-                <a:path w="7090630" h="729297">
+                <a:path w="6984170" h="680240">
                   <a:moveTo>
-                    <a:pt x="7090630" y="729297"/>
+                    <a:pt x="6984170" y="680240"/>
                   </a:moveTo>
                   <a:lnTo>
-                    <a:pt x="7019007" y="722237"/>
-                  </a:lnTo>
-                  <a:lnTo>
-                    <a:pt x="6947385" y="714665"/>
-                  </a:lnTo>
-                  <a:lnTo>
-                    <a:pt x="6875762" y="706544"/>
-                  </a:lnTo>
-                  <a:lnTo>
-                    <a:pt x="6804139" y="697833"/>
-                  </a:lnTo>
-                  <a:lnTo>
-                    <a:pt x="6732517" y="688490"/>
-                  </a:lnTo>
-                  <a:lnTo>
-                    <a:pt x="6660894" y="678468"/>
-                  </a:lnTo>
-                  <a:lnTo>
-                    <a:pt x="6589272" y="667720"/>
-                  </a:lnTo>
-                  <a:lnTo>
-                    <a:pt x="6517649" y="656191"/>
-                  </a:lnTo>
-                  <a:lnTo>
-                    <a:pt x="6446027" y="643825"/>
-                  </a:lnTo>
-                  <a:lnTo>
-                    <a:pt x="6374404" y="630562"/>
-                  </a:lnTo>
-                  <a:lnTo>
-                    <a:pt x="6302782" y="616336"/>
-                  </a:lnTo>
-                  <a:lnTo>
-                    <a:pt x="6231159" y="601078"/>
-                  </a:lnTo>
-                  <a:lnTo>
-                    <a:pt x="6159537" y="584712"/>
-                  </a:lnTo>
-                  <a:lnTo>
-                    <a:pt x="6087914" y="567159"/>
-                  </a:lnTo>
-                  <a:lnTo>
-                    <a:pt x="6016292" y="548331"/>
-                  </a:lnTo>
-                  <a:lnTo>
-                    <a:pt x="5944669" y="528137"/>
-                  </a:lnTo>
-                  <a:lnTo>
-                    <a:pt x="5873047" y="506478"/>
-                  </a:lnTo>
-                  <a:lnTo>
-                    <a:pt x="5801424" y="483246"/>
-                  </a:lnTo>
-                  <a:lnTo>
-                    <a:pt x="5729802" y="458328"/>
-                  </a:lnTo>
-                  <a:lnTo>
-                    <a:pt x="5658179" y="431601"/>
-                  </a:lnTo>
-                  <a:lnTo>
-                    <a:pt x="5586557" y="402935"/>
-                  </a:lnTo>
-                  <a:lnTo>
-                    <a:pt x="5514934" y="372188"/>
-                  </a:lnTo>
-                  <a:lnTo>
-                    <a:pt x="5443311" y="339210"/>
-                  </a:lnTo>
-                  <a:lnTo>
-                    <a:pt x="5371689" y="303837"/>
-                  </a:lnTo>
-                  <a:lnTo>
-                    <a:pt x="5300066" y="265898"/>
-                  </a:lnTo>
-                  <a:lnTo>
-                    <a:pt x="5228444" y="225205"/>
-                  </a:lnTo>
-                  <a:lnTo>
-                    <a:pt x="5156821" y="181558"/>
-                  </a:lnTo>
-                  <a:lnTo>
-                    <a:pt x="5085199" y="134744"/>
-                  </a:lnTo>
-                  <a:lnTo>
-                    <a:pt x="5013576" y="84531"/>
-                  </a:lnTo>
-                  <a:lnTo>
-                    <a:pt x="4941954" y="30675"/>
-                  </a:lnTo>
-                  <a:lnTo>
-                    <a:pt x="4870331" y="0"/>
-                  </a:lnTo>
-                  <a:lnTo>
-                    <a:pt x="4798709" y="7027"/>
-                  </a:lnTo>
-                  <a:lnTo>
-                    <a:pt x="4727086" y="13995"/>
-                  </a:lnTo>
-                  <a:lnTo>
-                    <a:pt x="4655464" y="20903"/>
-                  </a:lnTo>
-                  <a:lnTo>
-                    <a:pt x="4583841" y="27753"/>
-                  </a:lnTo>
-                  <a:lnTo>
-                    <a:pt x="4512219" y="34545"/>
-                  </a:lnTo>
-                  <a:lnTo>
-                    <a:pt x="4440596" y="41279"/>
-                  </a:lnTo>
-                  <a:lnTo>
-                    <a:pt x="4368974" y="47955"/>
-                  </a:lnTo>
-                  <a:lnTo>
-                    <a:pt x="4297351" y="54575"/>
-                  </a:lnTo>
-                  <a:lnTo>
-                    <a:pt x="4225729" y="61139"/>
-                  </a:lnTo>
-                  <a:lnTo>
-                    <a:pt x="4154106" y="67646"/>
-                  </a:lnTo>
-                  <a:lnTo>
-                    <a:pt x="4082483" y="74099"/>
-                  </a:lnTo>
-                  <a:lnTo>
-                    <a:pt x="4010861" y="80496"/>
-                  </a:lnTo>
-                  <a:lnTo>
-                    <a:pt x="3939238" y="86839"/>
-                  </a:lnTo>
-                  <a:lnTo>
-                    <a:pt x="3867616" y="93129"/>
-                  </a:lnTo>
-                  <a:lnTo>
-                    <a:pt x="3795993" y="99364"/>
-                  </a:lnTo>
-                  <a:lnTo>
-                    <a:pt x="3724371" y="105547"/>
-                  </a:lnTo>
-                  <a:lnTo>
-                    <a:pt x="3652748" y="111677"/>
-                  </a:lnTo>
-                  <a:lnTo>
-                    <a:pt x="3581126" y="117755"/>
-                  </a:lnTo>
-                  <a:lnTo>
-                    <a:pt x="3509503" y="123782"/>
-                  </a:lnTo>
-                  <a:lnTo>
-                    <a:pt x="3437881" y="129757"/>
-                  </a:lnTo>
-                  <a:lnTo>
-                    <a:pt x="3366258" y="135681"/>
-                  </a:lnTo>
-                  <a:lnTo>
-                    <a:pt x="3294636" y="141555"/>
-                  </a:lnTo>
-                  <a:lnTo>
-                    <a:pt x="3223013" y="147379"/>
-                  </a:lnTo>
-                  <a:lnTo>
-                    <a:pt x="3151391" y="153154"/>
-                  </a:lnTo>
-                  <a:lnTo>
-                    <a:pt x="3079768" y="158879"/>
-                  </a:lnTo>
-                  <a:lnTo>
-                    <a:pt x="3008146" y="164556"/>
-                  </a:lnTo>
-                  <a:lnTo>
-                    <a:pt x="2936523" y="170184"/>
-                  </a:lnTo>
-                  <a:lnTo>
-                    <a:pt x="2864901" y="175765"/>
-                  </a:lnTo>
-                  <a:lnTo>
-                    <a:pt x="2793278" y="181298"/>
-                  </a:lnTo>
-                  <a:lnTo>
-                    <a:pt x="2721655" y="186784"/>
-                  </a:lnTo>
-                  <a:lnTo>
-                    <a:pt x="2650033" y="192224"/>
-                  </a:lnTo>
-                  <a:lnTo>
-                    <a:pt x="2578410" y="197617"/>
-                  </a:lnTo>
-                  <a:lnTo>
-                    <a:pt x="2506788" y="202964"/>
-                  </a:lnTo>
-                  <a:lnTo>
-                    <a:pt x="2435165" y="208266"/>
-                  </a:lnTo>
-                  <a:lnTo>
-                    <a:pt x="2363543" y="213523"/>
-                  </a:lnTo>
-                  <a:lnTo>
-                    <a:pt x="2291920" y="218735"/>
-                  </a:lnTo>
-                  <a:lnTo>
-                    <a:pt x="2220298" y="223903"/>
-                  </a:lnTo>
-                  <a:lnTo>
-                    <a:pt x="2148675" y="229027"/>
-                  </a:lnTo>
-                  <a:lnTo>
-                    <a:pt x="2077053" y="234107"/>
-                  </a:lnTo>
-                  <a:lnTo>
-                    <a:pt x="2005430" y="239144"/>
-                  </a:lnTo>
-                  <a:lnTo>
-                    <a:pt x="1933808" y="244139"/>
-                  </a:lnTo>
-                  <a:lnTo>
-                    <a:pt x="1862185" y="249090"/>
-                  </a:lnTo>
-                  <a:lnTo>
-                    <a:pt x="1790563" y="254000"/>
-                  </a:lnTo>
-                  <a:lnTo>
-                    <a:pt x="1718940" y="258868"/>
-                  </a:lnTo>
-                  <a:lnTo>
-                    <a:pt x="1647318" y="263695"/>
-                  </a:lnTo>
-                  <a:lnTo>
-                    <a:pt x="1575695" y="268480"/>
-                  </a:lnTo>
-                  <a:lnTo>
-                    <a:pt x="1504073" y="273225"/>
-                  </a:lnTo>
-                  <a:lnTo>
-                    <a:pt x="1432450" y="277930"/>
-                  </a:lnTo>
-                  <a:lnTo>
-                    <a:pt x="1360827" y="282594"/>
-                  </a:lnTo>
-                  <a:lnTo>
-                    <a:pt x="1289205" y="287219"/>
-                  </a:lnTo>
-                  <a:lnTo>
-                    <a:pt x="1217582" y="291805"/>
-                  </a:lnTo>
-                  <a:lnTo>
-                    <a:pt x="1145960" y="296351"/>
-                  </a:lnTo>
-                  <a:lnTo>
-                    <a:pt x="1074337" y="300859"/>
-                  </a:lnTo>
-                  <a:lnTo>
-                    <a:pt x="1002715" y="305329"/>
-                  </a:lnTo>
-                  <a:lnTo>
-                    <a:pt x="931092" y="309761"/>
-                  </a:lnTo>
-                  <a:lnTo>
-                    <a:pt x="859470" y="314154"/>
-                  </a:lnTo>
-                  <a:lnTo>
-                    <a:pt x="787847" y="318511"/>
-                  </a:lnTo>
-                  <a:lnTo>
-                    <a:pt x="716225" y="322831"/>
-                  </a:lnTo>
-                  <a:lnTo>
-                    <a:pt x="644602" y="327113"/>
-                  </a:lnTo>
-                  <a:lnTo>
-                    <a:pt x="572980" y="331360"/>
-                  </a:lnTo>
-                  <a:lnTo>
-                    <a:pt x="501357" y="335570"/>
-                  </a:lnTo>
-                  <a:lnTo>
-                    <a:pt x="429735" y="339744"/>
-                  </a:lnTo>
-                  <a:lnTo>
-                    <a:pt x="358112" y="343883"/>
-                  </a:lnTo>
-                  <a:lnTo>
-                    <a:pt x="286490" y="347987"/>
-                  </a:lnTo>
-                  <a:lnTo>
-                    <a:pt x="214867" y="352056"/>
-                  </a:lnTo>
-                  <a:lnTo>
-                    <a:pt x="143245" y="356091"/>
-                  </a:lnTo>
-                  <a:lnTo>
-                    <a:pt x="71622" y="360091"/>
-                  </a:lnTo>
-                  <a:lnTo>
-                    <a:pt x="0" y="364057"/>
+                    <a:pt x="6913622" y="673655"/>
+                  </a:lnTo>
+                  <a:lnTo>
+                    <a:pt x="6843075" y="666592"/>
+                  </a:lnTo>
+                  <a:lnTo>
+                    <a:pt x="6772528" y="659017"/>
+                  </a:lnTo>
+                  <a:lnTo>
+                    <a:pt x="6701981" y="650892"/>
+                  </a:lnTo>
+                  <a:lnTo>
+                    <a:pt x="6631434" y="642177"/>
+                  </a:lnTo>
+                  <a:lnTo>
+                    <a:pt x="6560887" y="632830"/>
+                  </a:lnTo>
+                  <a:lnTo>
+                    <a:pt x="6490339" y="622805"/>
+                  </a:lnTo>
+                  <a:lnTo>
+                    <a:pt x="6419792" y="612051"/>
+                  </a:lnTo>
+                  <a:lnTo>
+                    <a:pt x="6349245" y="600517"/>
+                  </a:lnTo>
+                  <a:lnTo>
+                    <a:pt x="6278698" y="588147"/>
+                  </a:lnTo>
+                  <a:lnTo>
+                    <a:pt x="6208151" y="574878"/>
+                  </a:lnTo>
+                  <a:lnTo>
+                    <a:pt x="6137604" y="560646"/>
+                  </a:lnTo>
+                  <a:lnTo>
+                    <a:pt x="6067056" y="545381"/>
+                  </a:lnTo>
+                  <a:lnTo>
+                    <a:pt x="5996509" y="529008"/>
+                  </a:lnTo>
+                  <a:lnTo>
+                    <a:pt x="5925962" y="511447"/>
+                  </a:lnTo>
+                  <a:lnTo>
+                    <a:pt x="5855415" y="492611"/>
+                  </a:lnTo>
+                  <a:lnTo>
+                    <a:pt x="5784868" y="472409"/>
+                  </a:lnTo>
+                  <a:lnTo>
+                    <a:pt x="5714320" y="450740"/>
+                  </a:lnTo>
+                  <a:lnTo>
+                    <a:pt x="5643773" y="427498"/>
+                  </a:lnTo>
+                  <a:lnTo>
+                    <a:pt x="5573226" y="402569"/>
+                  </a:lnTo>
+                  <a:lnTo>
+                    <a:pt x="5502679" y="375831"/>
+                  </a:lnTo>
+                  <a:lnTo>
+                    <a:pt x="5432132" y="347152"/>
+                  </a:lnTo>
+                  <a:lnTo>
+                    <a:pt x="5361585" y="316392"/>
+                  </a:lnTo>
+                  <a:lnTo>
+                    <a:pt x="5291037" y="283399"/>
+                  </a:lnTo>
+                  <a:lnTo>
+                    <a:pt x="5220490" y="248012"/>
+                  </a:lnTo>
+                  <a:lnTo>
+                    <a:pt x="5149943" y="210056"/>
+                  </a:lnTo>
+                  <a:lnTo>
+                    <a:pt x="5079396" y="169345"/>
+                  </a:lnTo>
+                  <a:lnTo>
+                    <a:pt x="5008849" y="125680"/>
+                  </a:lnTo>
+                  <a:lnTo>
+                    <a:pt x="4938302" y="78845"/>
+                  </a:lnTo>
+                  <a:lnTo>
+                    <a:pt x="4867754" y="28611"/>
+                  </a:lnTo>
+                  <a:lnTo>
+                    <a:pt x="4797207" y="0"/>
+                  </a:lnTo>
+                  <a:lnTo>
+                    <a:pt x="4726660" y="6554"/>
+                  </a:lnTo>
+                  <a:lnTo>
+                    <a:pt x="4656113" y="13053"/>
+                  </a:lnTo>
+                  <a:lnTo>
+                    <a:pt x="4585566" y="19497"/>
+                  </a:lnTo>
+                  <a:lnTo>
+                    <a:pt x="4515019" y="25886"/>
+                  </a:lnTo>
+                  <a:lnTo>
+                    <a:pt x="4444471" y="32221"/>
+                  </a:lnTo>
+                  <a:lnTo>
+                    <a:pt x="4373924" y="38502"/>
+                  </a:lnTo>
+                  <a:lnTo>
+                    <a:pt x="4303377" y="44729"/>
+                  </a:lnTo>
+                  <a:lnTo>
+                    <a:pt x="4232830" y="50904"/>
+                  </a:lnTo>
+                  <a:lnTo>
+                    <a:pt x="4162283" y="57026"/>
+                  </a:lnTo>
+                  <a:lnTo>
+                    <a:pt x="4091736" y="63096"/>
+                  </a:lnTo>
+                  <a:lnTo>
+                    <a:pt x="4021188" y="69114"/>
+                  </a:lnTo>
+                  <a:lnTo>
+                    <a:pt x="3950641" y="75082"/>
+                  </a:lnTo>
+                  <a:lnTo>
+                    <a:pt x="3880094" y="80998"/>
+                  </a:lnTo>
+                  <a:lnTo>
+                    <a:pt x="3809547" y="86864"/>
+                  </a:lnTo>
+                  <a:lnTo>
+                    <a:pt x="3739000" y="92680"/>
+                  </a:lnTo>
+                  <a:lnTo>
+                    <a:pt x="3668452" y="98447"/>
+                  </a:lnTo>
+                  <a:lnTo>
+                    <a:pt x="3597905" y="104165"/>
+                  </a:lnTo>
+                  <a:lnTo>
+                    <a:pt x="3527358" y="109834"/>
+                  </a:lnTo>
+                  <a:lnTo>
+                    <a:pt x="3456811" y="115455"/>
+                  </a:lnTo>
+                  <a:lnTo>
+                    <a:pt x="3386264" y="121029"/>
+                  </a:lnTo>
+                  <a:lnTo>
+                    <a:pt x="3315717" y="126554"/>
+                  </a:lnTo>
+                  <a:lnTo>
+                    <a:pt x="3245169" y="132033"/>
+                  </a:lnTo>
+                  <a:lnTo>
+                    <a:pt x="3174622" y="137465"/>
+                  </a:lnTo>
+                  <a:lnTo>
+                    <a:pt x="3104075" y="142852"/>
+                  </a:lnTo>
+                  <a:lnTo>
+                    <a:pt x="3033528" y="148192"/>
+                  </a:lnTo>
+                  <a:lnTo>
+                    <a:pt x="2962981" y="153487"/>
+                  </a:lnTo>
+                  <a:lnTo>
+                    <a:pt x="2892434" y="158737"/>
+                  </a:lnTo>
+                  <a:lnTo>
+                    <a:pt x="2821886" y="163942"/>
+                  </a:lnTo>
+                  <a:lnTo>
+                    <a:pt x="2751339" y="169103"/>
+                  </a:lnTo>
+                  <a:lnTo>
+                    <a:pt x="2680792" y="174220"/>
+                  </a:lnTo>
+                  <a:lnTo>
+                    <a:pt x="2610245" y="179293"/>
+                  </a:lnTo>
+                  <a:lnTo>
+                    <a:pt x="2539698" y="184324"/>
+                  </a:lnTo>
+                  <a:lnTo>
+                    <a:pt x="2469151" y="189312"/>
+                  </a:lnTo>
+                  <a:lnTo>
+                    <a:pt x="2398603" y="194257"/>
+                  </a:lnTo>
+                  <a:lnTo>
+                    <a:pt x="2328056" y="199160"/>
+                  </a:lnTo>
+                  <a:lnTo>
+                    <a:pt x="2257509" y="204022"/>
+                  </a:lnTo>
+                  <a:lnTo>
+                    <a:pt x="2186962" y="208842"/>
+                  </a:lnTo>
+                  <a:lnTo>
+                    <a:pt x="2116415" y="213621"/>
+                  </a:lnTo>
+                  <a:lnTo>
+                    <a:pt x="2045868" y="218360"/>
+                  </a:lnTo>
+                  <a:lnTo>
+                    <a:pt x="1975320" y="223058"/>
+                  </a:lnTo>
+                  <a:lnTo>
+                    <a:pt x="1904773" y="227716"/>
+                  </a:lnTo>
+                  <a:lnTo>
+                    <a:pt x="1834226" y="232335"/>
+                  </a:lnTo>
+                  <a:lnTo>
+                    <a:pt x="1763679" y="236915"/>
+                  </a:lnTo>
+                  <a:lnTo>
+                    <a:pt x="1693132" y="241455"/>
+                  </a:lnTo>
+                  <a:lnTo>
+                    <a:pt x="1622584" y="245957"/>
+                  </a:lnTo>
+                  <a:lnTo>
+                    <a:pt x="1552037" y="250421"/>
+                  </a:lnTo>
+                  <a:lnTo>
+                    <a:pt x="1481490" y="254846"/>
+                  </a:lnTo>
+                  <a:lnTo>
+                    <a:pt x="1410943" y="259235"/>
+                  </a:lnTo>
+                  <a:lnTo>
+                    <a:pt x="1340396" y="263585"/>
+                  </a:lnTo>
+                  <a:lnTo>
+                    <a:pt x="1269849" y="267899"/>
+                  </a:lnTo>
+                  <a:lnTo>
+                    <a:pt x="1199301" y="272176"/>
+                  </a:lnTo>
+                  <a:lnTo>
+                    <a:pt x="1128754" y="276417"/>
+                  </a:lnTo>
+                  <a:lnTo>
+                    <a:pt x="1058207" y="280622"/>
+                  </a:lnTo>
+                  <a:lnTo>
+                    <a:pt x="987660" y="284791"/>
+                  </a:lnTo>
+                  <a:lnTo>
+                    <a:pt x="917113" y="288924"/>
+                  </a:lnTo>
+                  <a:lnTo>
+                    <a:pt x="846566" y="293022"/>
+                  </a:lnTo>
+                  <a:lnTo>
+                    <a:pt x="776018" y="297086"/>
+                  </a:lnTo>
+                  <a:lnTo>
+                    <a:pt x="705471" y="301115"/>
+                  </a:lnTo>
+                  <a:lnTo>
+                    <a:pt x="634924" y="305110"/>
+                  </a:lnTo>
+                  <a:lnTo>
+                    <a:pt x="564377" y="309070"/>
+                  </a:lnTo>
+                  <a:lnTo>
+                    <a:pt x="493830" y="312997"/>
+                  </a:lnTo>
+                  <a:lnTo>
+                    <a:pt x="423283" y="316891"/>
+                  </a:lnTo>
+                  <a:lnTo>
+                    <a:pt x="352735" y="320752"/>
+                  </a:lnTo>
+                  <a:lnTo>
+                    <a:pt x="282188" y="324579"/>
+                  </a:lnTo>
+                  <a:lnTo>
+                    <a:pt x="211641" y="328375"/>
+                  </a:lnTo>
+                  <a:lnTo>
+                    <a:pt x="141094" y="332138"/>
+                  </a:lnTo>
+                  <a:lnTo>
+                    <a:pt x="70547" y="335869"/>
+                  </a:lnTo>
+                  <a:lnTo>
+                    <a:pt x="0" y="339568"/>
                   </a:lnTo>
                 </a:path>
               </a:pathLst>
@@ -4004,249 +4004,249 @@
           </p:nvSpPr>
           <p:spPr>
             <a:xfrm>
-              <a:off x="2730937" y="2073503"/>
-              <a:ext cx="5531742" cy="3160082"/>
+              <a:off x="2800336" y="2209169"/>
+              <a:ext cx="5448687" cy="2947515"/>
             </a:xfrm>
             <a:custGeom>
               <a:avLst/>
               <a:pathLst>
-                <a:path w="5531742" h="3160082">
+                <a:path w="5448687" h="2947515">
                   <a:moveTo>
                     <a:pt x="0" y="0"/>
                   </a:moveTo>
                   <a:lnTo>
-                    <a:pt x="16807" y="25355"/>
-                  </a:lnTo>
-                  <a:lnTo>
-                    <a:pt x="88430" y="130130"/>
-                  </a:lnTo>
-                  <a:lnTo>
-                    <a:pt x="160052" y="231731"/>
-                  </a:lnTo>
-                  <a:lnTo>
-                    <a:pt x="231675" y="330254"/>
-                  </a:lnTo>
-                  <a:lnTo>
-                    <a:pt x="303297" y="425792"/>
-                  </a:lnTo>
-                  <a:lnTo>
-                    <a:pt x="374920" y="518435"/>
-                  </a:lnTo>
-                  <a:lnTo>
-                    <a:pt x="446542" y="608272"/>
-                  </a:lnTo>
-                  <a:lnTo>
-                    <a:pt x="518165" y="695387"/>
-                  </a:lnTo>
-                  <a:lnTo>
-                    <a:pt x="589787" y="779863"/>
-                  </a:lnTo>
-                  <a:lnTo>
-                    <a:pt x="661410" y="861779"/>
-                  </a:lnTo>
-                  <a:lnTo>
-                    <a:pt x="733032" y="941214"/>
-                  </a:lnTo>
-                  <a:lnTo>
-                    <a:pt x="804655" y="1018243"/>
-                  </a:lnTo>
-                  <a:lnTo>
-                    <a:pt x="876277" y="1092937"/>
-                  </a:lnTo>
-                  <a:lnTo>
-                    <a:pt x="947900" y="1165369"/>
-                  </a:lnTo>
-                  <a:lnTo>
-                    <a:pt x="1019522" y="1235606"/>
-                  </a:lnTo>
-                  <a:lnTo>
-                    <a:pt x="1091145" y="1303716"/>
-                  </a:lnTo>
-                  <a:lnTo>
-                    <a:pt x="1162767" y="1369762"/>
-                  </a:lnTo>
-                  <a:lnTo>
-                    <a:pt x="1234390" y="1433807"/>
-                  </a:lnTo>
-                  <a:lnTo>
-                    <a:pt x="1306013" y="1495912"/>
-                  </a:lnTo>
-                  <a:lnTo>
-                    <a:pt x="1377635" y="1556135"/>
-                  </a:lnTo>
-                  <a:lnTo>
-                    <a:pt x="1449258" y="1614534"/>
-                  </a:lnTo>
-                  <a:lnTo>
-                    <a:pt x="1520880" y="1671163"/>
-                  </a:lnTo>
-                  <a:lnTo>
-                    <a:pt x="1592503" y="1726077"/>
-                  </a:lnTo>
-                  <a:lnTo>
-                    <a:pt x="1664125" y="1779327"/>
-                  </a:lnTo>
-                  <a:lnTo>
-                    <a:pt x="1735748" y="1830964"/>
-                  </a:lnTo>
-                  <a:lnTo>
-                    <a:pt x="1807370" y="1881037"/>
-                  </a:lnTo>
-                  <a:lnTo>
-                    <a:pt x="1878993" y="1929592"/>
-                  </a:lnTo>
-                  <a:lnTo>
-                    <a:pt x="1950615" y="1976677"/>
-                  </a:lnTo>
-                  <a:lnTo>
-                    <a:pt x="2022238" y="2022335"/>
-                  </a:lnTo>
-                  <a:lnTo>
-                    <a:pt x="2093860" y="2066609"/>
-                  </a:lnTo>
-                  <a:lnTo>
-                    <a:pt x="2165483" y="2109543"/>
-                  </a:lnTo>
-                  <a:lnTo>
-                    <a:pt x="2237105" y="2151176"/>
-                  </a:lnTo>
-                  <a:lnTo>
-                    <a:pt x="2308728" y="2191547"/>
-                  </a:lnTo>
-                  <a:lnTo>
-                    <a:pt x="2380350" y="2230695"/>
-                  </a:lnTo>
-                  <a:lnTo>
-                    <a:pt x="2451973" y="2268658"/>
-                  </a:lnTo>
-                  <a:lnTo>
-                    <a:pt x="2523595" y="2305470"/>
-                  </a:lnTo>
-                  <a:lnTo>
-                    <a:pt x="2595218" y="2341167"/>
-                  </a:lnTo>
-                  <a:lnTo>
-                    <a:pt x="2666841" y="2375782"/>
-                  </a:lnTo>
-                  <a:lnTo>
-                    <a:pt x="2738463" y="2409349"/>
-                  </a:lnTo>
-                  <a:lnTo>
-                    <a:pt x="2810086" y="2441899"/>
-                  </a:lnTo>
-                  <a:lnTo>
-                    <a:pt x="2881708" y="2473463"/>
-                  </a:lnTo>
-                  <a:lnTo>
-                    <a:pt x="2953331" y="2504070"/>
-                  </a:lnTo>
-                  <a:lnTo>
-                    <a:pt x="3024953" y="2533750"/>
-                  </a:lnTo>
-                  <a:lnTo>
-                    <a:pt x="3096576" y="2562531"/>
-                  </a:lnTo>
-                  <a:lnTo>
-                    <a:pt x="3168198" y="2590440"/>
-                  </a:lnTo>
-                  <a:lnTo>
-                    <a:pt x="3239821" y="2617504"/>
-                  </a:lnTo>
-                  <a:lnTo>
-                    <a:pt x="3311443" y="2643747"/>
-                  </a:lnTo>
-                  <a:lnTo>
-                    <a:pt x="3383066" y="2669196"/>
-                  </a:lnTo>
-                  <a:lnTo>
-                    <a:pt x="3454688" y="2693873"/>
-                  </a:lnTo>
-                  <a:lnTo>
-                    <a:pt x="3526311" y="2717803"/>
-                  </a:lnTo>
-                  <a:lnTo>
-                    <a:pt x="3597933" y="2741008"/>
-                  </a:lnTo>
-                  <a:lnTo>
-                    <a:pt x="3669556" y="2763510"/>
-                  </a:lnTo>
-                  <a:lnTo>
-                    <a:pt x="3741178" y="2785330"/>
-                  </a:lnTo>
-                  <a:lnTo>
-                    <a:pt x="3812801" y="2806490"/>
-                  </a:lnTo>
-                  <a:lnTo>
-                    <a:pt x="3884423" y="2827008"/>
-                  </a:lnTo>
-                  <a:lnTo>
-                    <a:pt x="3956046" y="2846904"/>
-                  </a:lnTo>
-                  <a:lnTo>
-                    <a:pt x="4027669" y="2866198"/>
-                  </a:lnTo>
-                  <a:lnTo>
-                    <a:pt x="4099291" y="2884907"/>
-                  </a:lnTo>
-                  <a:lnTo>
-                    <a:pt x="4170914" y="2903049"/>
-                  </a:lnTo>
-                  <a:lnTo>
-                    <a:pt x="4242536" y="2920642"/>
-                  </a:lnTo>
-                  <a:lnTo>
-                    <a:pt x="4314159" y="2937702"/>
-                  </a:lnTo>
-                  <a:lnTo>
-                    <a:pt x="4385781" y="2954245"/>
-                  </a:lnTo>
-                  <a:lnTo>
-                    <a:pt x="4457404" y="2970287"/>
-                  </a:lnTo>
-                  <a:lnTo>
-                    <a:pt x="4529026" y="2985842"/>
-                  </a:lnTo>
-                  <a:lnTo>
-                    <a:pt x="4600649" y="3000927"/>
-                  </a:lnTo>
-                  <a:lnTo>
-                    <a:pt x="4672271" y="3015554"/>
-                  </a:lnTo>
-                  <a:lnTo>
-                    <a:pt x="4743894" y="3029739"/>
-                  </a:lnTo>
-                  <a:lnTo>
-                    <a:pt x="4815516" y="3043493"/>
-                  </a:lnTo>
-                  <a:lnTo>
-                    <a:pt x="4887139" y="3056831"/>
-                  </a:lnTo>
-                  <a:lnTo>
-                    <a:pt x="4958761" y="3069765"/>
-                  </a:lnTo>
-                  <a:lnTo>
-                    <a:pt x="5030384" y="3082307"/>
-                  </a:lnTo>
-                  <a:lnTo>
-                    <a:pt x="5102006" y="3094469"/>
-                  </a:lnTo>
-                  <a:lnTo>
-                    <a:pt x="5173629" y="3106262"/>
-                  </a:lnTo>
-                  <a:lnTo>
-                    <a:pt x="5245251" y="3117698"/>
-                  </a:lnTo>
-                  <a:lnTo>
-                    <a:pt x="5316874" y="3128788"/>
-                  </a:lnTo>
-                  <a:lnTo>
-                    <a:pt x="5388497" y="3139542"/>
-                  </a:lnTo>
-                  <a:lnTo>
-                    <a:pt x="5460119" y="3149970"/>
-                  </a:lnTo>
-                  <a:lnTo>
-                    <a:pt x="5531742" y="3160082"/>
+                    <a:pt x="16555" y="23650"/>
+                  </a:lnTo>
+                  <a:lnTo>
+                    <a:pt x="87102" y="121377"/>
+                  </a:lnTo>
+                  <a:lnTo>
+                    <a:pt x="157649" y="216143"/>
+                  </a:lnTo>
+                  <a:lnTo>
+                    <a:pt x="228196" y="308039"/>
+                  </a:lnTo>
+                  <a:lnTo>
+                    <a:pt x="298743" y="397150"/>
+                  </a:lnTo>
+                  <a:lnTo>
+                    <a:pt x="369291" y="483562"/>
+                  </a:lnTo>
+                  <a:lnTo>
+                    <a:pt x="439838" y="567356"/>
+                  </a:lnTo>
+                  <a:lnTo>
+                    <a:pt x="510385" y="648611"/>
+                  </a:lnTo>
+                  <a:lnTo>
+                    <a:pt x="580932" y="727404"/>
+                  </a:lnTo>
+                  <a:lnTo>
+                    <a:pt x="651479" y="803811"/>
+                  </a:lnTo>
+                  <a:lnTo>
+                    <a:pt x="722026" y="877902"/>
+                  </a:lnTo>
+                  <a:lnTo>
+                    <a:pt x="792574" y="949749"/>
+                  </a:lnTo>
+                  <a:lnTo>
+                    <a:pt x="863121" y="1019419"/>
+                  </a:lnTo>
+                  <a:lnTo>
+                    <a:pt x="933668" y="1086979"/>
+                  </a:lnTo>
+                  <a:lnTo>
+                    <a:pt x="1004215" y="1152492"/>
+                  </a:lnTo>
+                  <a:lnTo>
+                    <a:pt x="1074762" y="1216020"/>
+                  </a:lnTo>
+                  <a:lnTo>
+                    <a:pt x="1145309" y="1277623"/>
+                  </a:lnTo>
+                  <a:lnTo>
+                    <a:pt x="1215857" y="1337360"/>
+                  </a:lnTo>
+                  <a:lnTo>
+                    <a:pt x="1286404" y="1395287"/>
+                  </a:lnTo>
+                  <a:lnTo>
+                    <a:pt x="1356951" y="1451459"/>
+                  </a:lnTo>
+                  <a:lnTo>
+                    <a:pt x="1427498" y="1505930"/>
+                  </a:lnTo>
+                  <a:lnTo>
+                    <a:pt x="1498045" y="1558750"/>
+                  </a:lnTo>
+                  <a:lnTo>
+                    <a:pt x="1568593" y="1609970"/>
+                  </a:lnTo>
+                  <a:lnTo>
+                    <a:pt x="1639140" y="1659638"/>
+                  </a:lnTo>
+                  <a:lnTo>
+                    <a:pt x="1709687" y="1707802"/>
+                  </a:lnTo>
+                  <a:lnTo>
+                    <a:pt x="1780234" y="1754506"/>
+                  </a:lnTo>
+                  <a:lnTo>
+                    <a:pt x="1850781" y="1799795"/>
+                  </a:lnTo>
+                  <a:lnTo>
+                    <a:pt x="1921328" y="1843713"/>
+                  </a:lnTo>
+                  <a:lnTo>
+                    <a:pt x="1991876" y="1886300"/>
+                  </a:lnTo>
+                  <a:lnTo>
+                    <a:pt x="2062423" y="1927596"/>
+                  </a:lnTo>
+                  <a:lnTo>
+                    <a:pt x="2132970" y="1967642"/>
+                  </a:lnTo>
+                  <a:lnTo>
+                    <a:pt x="2203517" y="2006474"/>
+                  </a:lnTo>
+                  <a:lnTo>
+                    <a:pt x="2274064" y="2044130"/>
+                  </a:lnTo>
+                  <a:lnTo>
+                    <a:pt x="2344611" y="2080645"/>
+                  </a:lnTo>
+                  <a:lnTo>
+                    <a:pt x="2415159" y="2116053"/>
+                  </a:lnTo>
+                  <a:lnTo>
+                    <a:pt x="2485706" y="2150389"/>
+                  </a:lnTo>
+                  <a:lnTo>
+                    <a:pt x="2556253" y="2183685"/>
+                  </a:lnTo>
+                  <a:lnTo>
+                    <a:pt x="2626800" y="2215972"/>
+                  </a:lnTo>
+                  <a:lnTo>
+                    <a:pt x="2697347" y="2247281"/>
+                  </a:lnTo>
+                  <a:lnTo>
+                    <a:pt x="2767894" y="2277641"/>
+                  </a:lnTo>
+                  <a:lnTo>
+                    <a:pt x="2838442" y="2307082"/>
+                  </a:lnTo>
+                  <a:lnTo>
+                    <a:pt x="2908989" y="2335630"/>
+                  </a:lnTo>
+                  <a:lnTo>
+                    <a:pt x="2979536" y="2363314"/>
+                  </a:lnTo>
+                  <a:lnTo>
+                    <a:pt x="3050083" y="2390159"/>
+                  </a:lnTo>
+                  <a:lnTo>
+                    <a:pt x="3120630" y="2416191"/>
+                  </a:lnTo>
+                  <a:lnTo>
+                    <a:pt x="3191177" y="2441434"/>
+                  </a:lnTo>
+                  <a:lnTo>
+                    <a:pt x="3261725" y="2465912"/>
+                  </a:lnTo>
+                  <a:lnTo>
+                    <a:pt x="3332272" y="2489649"/>
+                  </a:lnTo>
+                  <a:lnTo>
+                    <a:pt x="3402819" y="2512666"/>
+                  </a:lnTo>
+                  <a:lnTo>
+                    <a:pt x="3473366" y="2534987"/>
+                  </a:lnTo>
+                  <a:lnTo>
+                    <a:pt x="3543913" y="2556631"/>
+                  </a:lnTo>
+                  <a:lnTo>
+                    <a:pt x="3614461" y="2577619"/>
+                  </a:lnTo>
+                  <a:lnTo>
+                    <a:pt x="3685008" y="2597971"/>
+                  </a:lnTo>
+                  <a:lnTo>
+                    <a:pt x="3755555" y="2617707"/>
+                  </a:lnTo>
+                  <a:lnTo>
+                    <a:pt x="3826102" y="2636845"/>
+                  </a:lnTo>
+                  <a:lnTo>
+                    <a:pt x="3896649" y="2655403"/>
+                  </a:lnTo>
+                  <a:lnTo>
+                    <a:pt x="3967196" y="2673399"/>
+                  </a:lnTo>
+                  <a:lnTo>
+                    <a:pt x="4037744" y="2690850"/>
+                  </a:lnTo>
+                  <a:lnTo>
+                    <a:pt x="4108291" y="2707772"/>
+                  </a:lnTo>
+                  <a:lnTo>
+                    <a:pt x="4178838" y="2724181"/>
+                  </a:lnTo>
+                  <a:lnTo>
+                    <a:pt x="4249385" y="2740093"/>
+                  </a:lnTo>
+                  <a:lnTo>
+                    <a:pt x="4319932" y="2755524"/>
+                  </a:lnTo>
+                  <a:lnTo>
+                    <a:pt x="4390479" y="2770486"/>
+                  </a:lnTo>
+                  <a:lnTo>
+                    <a:pt x="4461027" y="2784996"/>
+                  </a:lnTo>
+                  <a:lnTo>
+                    <a:pt x="4531574" y="2799065"/>
+                  </a:lnTo>
+                  <a:lnTo>
+                    <a:pt x="4602121" y="2812709"/>
+                  </a:lnTo>
+                  <a:lnTo>
+                    <a:pt x="4672668" y="2825939"/>
+                  </a:lnTo>
+                  <a:lnTo>
+                    <a:pt x="4743215" y="2838768"/>
+                  </a:lnTo>
+                  <a:lnTo>
+                    <a:pt x="4813762" y="2851209"/>
+                  </a:lnTo>
+                  <a:lnTo>
+                    <a:pt x="4884310" y="2863273"/>
+                  </a:lnTo>
+                  <a:lnTo>
+                    <a:pt x="4954857" y="2874971"/>
+                  </a:lnTo>
+                  <a:lnTo>
+                    <a:pt x="5025404" y="2886315"/>
+                  </a:lnTo>
+                  <a:lnTo>
+                    <a:pt x="5095951" y="2897315"/>
+                  </a:lnTo>
+                  <a:lnTo>
+                    <a:pt x="5166498" y="2907982"/>
+                  </a:lnTo>
+                  <a:lnTo>
+                    <a:pt x="5237045" y="2918326"/>
+                  </a:lnTo>
+                  <a:lnTo>
+                    <a:pt x="5307593" y="2928356"/>
+                  </a:lnTo>
+                  <a:lnTo>
+                    <a:pt x="5378140" y="2938083"/>
+                  </a:lnTo>
+                  <a:lnTo>
+                    <a:pt x="5448687" y="2947515"/>
                   </a:lnTo>
                 </a:path>
               </a:pathLst>
@@ -4275,21 +4275,21 @@
           </p:nvSpPr>
           <p:spPr>
             <a:xfrm>
-              <a:off x="817517" y="4727786"/>
-              <a:ext cx="7799693" cy="0"/>
+              <a:off x="915645" y="4684908"/>
+              <a:ext cx="7682587" cy="0"/>
             </a:xfrm>
             <a:custGeom>
               <a:avLst/>
               <a:pathLst>
-                <a:path w="7799693" h="0">
+                <a:path w="7682587" h="0">
                   <a:moveTo>
                     <a:pt x="0" y="0"/>
                   </a:moveTo>
                   <a:lnTo>
-                    <a:pt x="7799693" y="0"/>
-                  </a:lnTo>
-                  <a:lnTo>
-                    <a:pt x="7799693" y="0"/>
+                    <a:pt x="7682587" y="0"/>
+                  </a:lnTo>
+                  <a:lnTo>
+                    <a:pt x="7682587" y="0"/>
                   </a:lnTo>
                 </a:path>
               </a:pathLst>
@@ -4318,15 +4318,15 @@
           </p:nvSpPr>
           <p:spPr>
             <a:xfrm>
-              <a:off x="6071765" y="2073503"/>
-              <a:ext cx="0" cy="3649639"/>
+              <a:off x="6091004" y="2209169"/>
+              <a:ext cx="0" cy="3404141"/>
             </a:xfrm>
             <a:custGeom>
               <a:avLst/>
               <a:pathLst>
-                <a:path w="0" h="3649639">
+                <a:path w="0" h="3404141">
                   <a:moveTo>
-                    <a:pt x="0" y="3649639"/>
+                    <a:pt x="0" y="3404141"/>
                   </a:moveTo>
                   <a:lnTo>
                     <a:pt x="0" y="0"/>
@@ -4361,15 +4361,15 @@
           </p:nvSpPr>
           <p:spPr>
             <a:xfrm>
-              <a:off x="5051213" y="2073503"/>
-              <a:ext cx="0" cy="3649639"/>
+              <a:off x="5085775" y="2209169"/>
+              <a:ext cx="0" cy="3404141"/>
             </a:xfrm>
             <a:custGeom>
               <a:avLst/>
               <a:pathLst>
-                <a:path w="0" h="3649639">
+                <a:path w="0" h="3404141">
                   <a:moveTo>
-                    <a:pt x="0" y="3649639"/>
+                    <a:pt x="0" y="3404141"/>
                   </a:moveTo>
                   <a:lnTo>
                     <a:pt x="0" y="0"/>
@@ -4404,15 +4404,15 @@
           </p:nvSpPr>
           <p:spPr>
             <a:xfrm>
-              <a:off x="6733531" y="2073503"/>
-              <a:ext cx="0" cy="3649639"/>
+              <a:off x="6742834" y="2209169"/>
+              <a:ext cx="0" cy="3404141"/>
             </a:xfrm>
             <a:custGeom>
               <a:avLst/>
               <a:pathLst>
-                <a:path w="0" h="3649639">
+                <a:path w="0" h="3404141">
                   <a:moveTo>
-                    <a:pt x="0" y="3649639"/>
+                    <a:pt x="0" y="3404141"/>
                   </a:moveTo>
                   <a:lnTo>
                     <a:pt x="0" y="0"/>
@@ -4447,8 +4447,8 @@
           </p:nvSpPr>
           <p:spPr>
             <a:xfrm>
-              <a:off x="692708" y="5517199"/>
-              <a:ext cx="62179" cy="80101"/>
+              <a:off x="756929" y="5407599"/>
+              <a:ext cx="79004" cy="101955"/>
             </a:xfrm>
             <a:prstGeom prst="rect">
               <a:avLst/>
@@ -4461,7 +4461,7 @@
             <a:p>
               <a:pPr algn="l" marL="0" marR="0" indent="0">
                 <a:lnSpc>
-                  <a:spcPts val="880"/>
+                  <a:spcPts val="1120"/>
                 </a:lnSpc>
                 <a:spcBef>
                   <a:spcPts val="0"/>
@@ -4471,7 +4471,7 @@
                 </a:spcAft>
               </a:pPr>
               <a:r>
-                <a:rPr sz="880">
+                <a:rPr sz="1120">
                   <a:solidFill>
                     <a:srgbClr val="4D4D4D">
                       <a:alpha val="100000"/>
@@ -4493,8 +4493,8 @@
           </p:nvSpPr>
           <p:spPr>
             <a:xfrm>
-              <a:off x="692708" y="4687735"/>
-              <a:ext cx="62179" cy="80101"/>
+              <a:off x="756929" y="4633931"/>
+              <a:ext cx="79004" cy="101955"/>
             </a:xfrm>
             <a:prstGeom prst="rect">
               <a:avLst/>
@@ -4507,7 +4507,7 @@
             <a:p>
               <a:pPr algn="l" marL="0" marR="0" indent="0">
                 <a:lnSpc>
-                  <a:spcPts val="880"/>
+                  <a:spcPts val="1120"/>
                 </a:lnSpc>
                 <a:spcBef>
                   <a:spcPts val="0"/>
@@ -4517,7 +4517,7 @@
                 </a:spcAft>
               </a:pPr>
               <a:r>
-                <a:rPr sz="880">
+                <a:rPr sz="1120">
                   <a:solidFill>
                     <a:srgbClr val="4D4D4D">
                       <a:alpha val="100000"/>
@@ -4539,8 +4539,8 @@
           </p:nvSpPr>
           <p:spPr>
             <a:xfrm>
-              <a:off x="692708" y="3858272"/>
-              <a:ext cx="62179" cy="80101"/>
+              <a:off x="756929" y="3860262"/>
+              <a:ext cx="79004" cy="101955"/>
             </a:xfrm>
             <a:prstGeom prst="rect">
               <a:avLst/>
@@ -4553,7 +4553,7 @@
             <a:p>
               <a:pPr algn="l" marL="0" marR="0" indent="0">
                 <a:lnSpc>
-                  <a:spcPts val="880"/>
+                  <a:spcPts val="1120"/>
                 </a:lnSpc>
                 <a:spcBef>
                   <a:spcPts val="0"/>
@@ -4563,7 +4563,7 @@
                 </a:spcAft>
               </a:pPr>
               <a:r>
-                <a:rPr sz="880">
+                <a:rPr sz="1120">
                   <a:solidFill>
                     <a:srgbClr val="4D4D4D">
                       <a:alpha val="100000"/>
@@ -4585,8 +4585,8 @@
           </p:nvSpPr>
           <p:spPr>
             <a:xfrm>
-              <a:off x="692708" y="3028808"/>
-              <a:ext cx="62179" cy="80101"/>
+              <a:off x="756929" y="3086593"/>
+              <a:ext cx="79004" cy="101955"/>
             </a:xfrm>
             <a:prstGeom prst="rect">
               <a:avLst/>
@@ -4599,7 +4599,7 @@
             <a:p>
               <a:pPr algn="l" marL="0" marR="0" indent="0">
                 <a:lnSpc>
-                  <a:spcPts val="880"/>
+                  <a:spcPts val="1120"/>
                 </a:lnSpc>
                 <a:spcBef>
                   <a:spcPts val="0"/>
@@ -4609,7 +4609,7 @@
                 </a:spcAft>
               </a:pPr>
               <a:r>
-                <a:rPr sz="880">
+                <a:rPr sz="1120">
                   <a:solidFill>
                     <a:srgbClr val="4D4D4D">
                       <a:alpha val="100000"/>
@@ -4631,8 +4631,8 @@
           </p:nvSpPr>
           <p:spPr>
             <a:xfrm>
-              <a:off x="692708" y="2199345"/>
-              <a:ext cx="62179" cy="80101"/>
+              <a:off x="756929" y="2312925"/>
+              <a:ext cx="79004" cy="101955"/>
             </a:xfrm>
             <a:prstGeom prst="rect">
               <a:avLst/>
@@ -4645,7 +4645,7 @@
             <a:p>
               <a:pPr algn="l" marL="0" marR="0" indent="0">
                 <a:lnSpc>
-                  <a:spcPts val="880"/>
+                  <a:spcPts val="1120"/>
                 </a:lnSpc>
                 <a:spcBef>
                   <a:spcPts val="0"/>
@@ -4655,7 +4655,7 @@
                 </a:spcAft>
               </a:pPr>
               <a:r>
-                <a:rPr sz="880">
+                <a:rPr sz="1120">
                   <a:solidFill>
                     <a:srgbClr val="4D4D4D">
                       <a:alpha val="100000"/>
@@ -4677,8 +4677,8 @@
           </p:nvSpPr>
           <p:spPr>
             <a:xfrm>
-              <a:off x="2331636" y="5785772"/>
-              <a:ext cx="161574" cy="80101"/>
+              <a:off x="2383963" y="5693022"/>
+              <a:ext cx="205282" cy="101955"/>
             </a:xfrm>
             <a:prstGeom prst="rect">
               <a:avLst/>
@@ -4691,7 +4691,7 @@
             <a:p>
               <a:pPr algn="l" marL="0" marR="0" indent="0">
                 <a:lnSpc>
-                  <a:spcPts val="880"/>
+                  <a:spcPts val="1120"/>
                 </a:lnSpc>
                 <a:spcBef>
                   <a:spcPts val="0"/>
@@ -4701,7 +4701,7 @@
                 </a:spcAft>
               </a:pPr>
               <a:r>
-                <a:rPr sz="880">
+                <a:rPr sz="1120">
                   <a:solidFill>
                     <a:srgbClr val="4D4D4D">
                       <a:alpha val="100000"/>
@@ -4723,8 +4723,8 @@
           </p:nvSpPr>
           <p:spPr>
             <a:xfrm>
-              <a:off x="4181509" y="5785772"/>
-              <a:ext cx="161574" cy="80101"/>
+              <a:off x="4206062" y="5693022"/>
+              <a:ext cx="205282" cy="101955"/>
             </a:xfrm>
             <a:prstGeom prst="rect">
               <a:avLst/>
@@ -4737,7 +4737,7 @@
             <a:p>
               <a:pPr algn="l" marL="0" marR="0" indent="0">
                 <a:lnSpc>
-                  <a:spcPts val="880"/>
+                  <a:spcPts val="1120"/>
                 </a:lnSpc>
                 <a:spcBef>
                   <a:spcPts val="0"/>
@@ -4747,7 +4747,7 @@
                 </a:spcAft>
               </a:pPr>
               <a:r>
-                <a:rPr sz="880">
+                <a:rPr sz="1120">
                   <a:solidFill>
                     <a:srgbClr val="4D4D4D">
                       <a:alpha val="100000"/>
@@ -4769,8 +4769,8 @@
           </p:nvSpPr>
           <p:spPr>
             <a:xfrm>
-              <a:off x="6081080" y="5785772"/>
-              <a:ext cx="62179" cy="80101"/>
+              <a:off x="6091300" y="5693022"/>
+              <a:ext cx="79004" cy="101955"/>
             </a:xfrm>
             <a:prstGeom prst="rect">
               <a:avLst/>
@@ -4783,7 +4783,7 @@
             <a:p>
               <a:pPr algn="l" marL="0" marR="0" indent="0">
                 <a:lnSpc>
-                  <a:spcPts val="880"/>
+                  <a:spcPts val="1120"/>
                 </a:lnSpc>
                 <a:spcBef>
                   <a:spcPts val="0"/>
@@ -4793,7 +4793,7 @@
                 </a:spcAft>
               </a:pPr>
               <a:r>
-                <a:rPr sz="880">
+                <a:rPr sz="1120">
                   <a:solidFill>
                     <a:srgbClr val="4D4D4D">
                       <a:alpha val="100000"/>
@@ -4815,8 +4815,8 @@
           </p:nvSpPr>
           <p:spPr>
             <a:xfrm>
-              <a:off x="7899863" y="5785772"/>
-              <a:ext cx="124358" cy="80101"/>
+              <a:off x="7873896" y="5693022"/>
+              <a:ext cx="158008" cy="101955"/>
             </a:xfrm>
             <a:prstGeom prst="rect">
               <a:avLst/>
@@ -4829,7 +4829,7 @@
             <a:p>
               <a:pPr algn="l" marL="0" marR="0" indent="0">
                 <a:lnSpc>
-                  <a:spcPts val="880"/>
+                  <a:spcPts val="1120"/>
                 </a:lnSpc>
                 <a:spcBef>
                   <a:spcPts val="0"/>
@@ -4839,7 +4839,7 @@
                 </a:spcAft>
               </a:pPr>
               <a:r>
-                <a:rPr sz="880">
+                <a:rPr sz="1120">
                   <a:solidFill>
                     <a:srgbClr val="4D4D4D">
                       <a:alpha val="100000"/>
@@ -4861,8 +4861,8 @@
           </p:nvSpPr>
           <p:spPr>
             <a:xfrm>
-              <a:off x="3832408" y="5925448"/>
-              <a:ext cx="1769912" cy="100218"/>
+              <a:off x="3630809" y="5870717"/>
+              <a:ext cx="2252258" cy="127558"/>
             </a:xfrm>
             <a:prstGeom prst="rect">
               <a:avLst/>
@@ -4875,7 +4875,7 @@
             <a:p>
               <a:pPr algn="l" marL="0" marR="0" indent="0">
                 <a:lnSpc>
-                  <a:spcPts val="1100"/>
+                  <a:spcPts val="1400"/>
                 </a:lnSpc>
                 <a:spcBef>
                   <a:spcPts val="0"/>
@@ -4885,7 +4885,7 @@
                 </a:spcAft>
               </a:pPr>
               <a:r>
-                <a:rPr sz="1100">
+                <a:rPr sz="1400">
                   <a:solidFill>
                     <a:srgbClr val="000000">
                       <a:alpha val="100000"/>
@@ -4907,8 +4907,8 @@
           </p:nvSpPr>
           <p:spPr>
             <a:xfrm rot="-5400000">
-              <a:off x="68446" y="3848213"/>
-              <a:ext cx="1016904" cy="100218"/>
+              <a:off x="-37527" y="3847460"/>
+              <a:ext cx="1294150" cy="127558"/>
             </a:xfrm>
             <a:prstGeom prst="rect">
               <a:avLst/>
@@ -4921,7 +4921,7 @@
             <a:p>
               <a:pPr algn="l" marL="0" marR="0" indent="0">
                 <a:lnSpc>
-                  <a:spcPts val="1100"/>
+                  <a:spcPts val="1400"/>
                 </a:lnSpc>
                 <a:spcBef>
                   <a:spcPts val="0"/>
@@ -4931,7 +4931,7 @@
                 </a:spcAft>
               </a:pPr>
               <a:r>
-                <a:rPr sz="1100">
+                <a:rPr sz="1400">
                   <a:solidFill>
                     <a:srgbClr val="000000">
                       <a:alpha val="100000"/>
@@ -4953,8 +4953,8 @@
           </p:nvSpPr>
           <p:spPr>
             <a:xfrm>
-              <a:off x="817517" y="1896563"/>
-              <a:ext cx="5413065" cy="82021"/>
+              <a:off x="915645" y="1977589"/>
+              <a:ext cx="7220102" cy="109362"/>
             </a:xfrm>
             <a:prstGeom prst="rect">
               <a:avLst/>
@@ -4967,7 +4967,7 @@
             <a:p>
               <a:pPr algn="l" marL="0" marR="0" indent="0">
                 <a:lnSpc>
-                  <a:spcPts val="900"/>
+                  <a:spcPts val="1200"/>
                 </a:lnSpc>
                 <a:spcBef>
                   <a:spcPts val="0"/>
@@ -4977,7 +4977,7 @@
                 </a:spcAft>
               </a:pPr>
               <a:r>
-                <a:rPr sz="900">
+                <a:rPr sz="1200">
                   <a:solidFill>
                     <a:srgbClr val="404040">
                       <a:alpha val="100000"/>
@@ -4999,8 +4999,8 @@
           </p:nvSpPr>
           <p:spPr>
             <a:xfrm>
-              <a:off x="817517" y="1669789"/>
-              <a:ext cx="3054278" cy="120152"/>
+              <a:off x="915645" y="1688767"/>
+              <a:ext cx="3888211" cy="153070"/>
             </a:xfrm>
             <a:prstGeom prst="rect">
               <a:avLst/>
@@ -5013,7 +5013,7 @@
             <a:p>
               <a:pPr algn="l" marL="0" marR="0" indent="0">
                 <a:lnSpc>
-                  <a:spcPts val="1320"/>
+                  <a:spcPts val="1680"/>
                 </a:lnSpc>
                 <a:spcBef>
                   <a:spcPts val="0"/>
@@ -5023,7 +5023,7 @@
                 </a:spcAft>
               </a:pPr>
               <a:r>
-                <a:rPr sz="1320">
+                <a:rPr sz="1680">
                   <a:solidFill>
                     <a:srgbClr val="000000">
                       <a:alpha val="100000"/>
